--- a/LC UNIX/vi editor 1.pptx
+++ b/LC UNIX/vi editor 1.pptx
@@ -15,12 +15,12 @@
     <p:sldId id="293" r:id="rId3"/>
     <p:sldId id="269" r:id="rId4"/>
     <p:sldId id="268" r:id="rId5"/>
-    <p:sldId id="273" r:id="rId6"/>
-    <p:sldId id="274" r:id="rId7"/>
-    <p:sldId id="276" r:id="rId8"/>
-    <p:sldId id="277" r:id="rId9"/>
-    <p:sldId id="278" r:id="rId10"/>
-    <p:sldId id="294" r:id="rId11"/>
+    <p:sldId id="274" r:id="rId6"/>
+    <p:sldId id="276" r:id="rId7"/>
+    <p:sldId id="277" r:id="rId8"/>
+    <p:sldId id="278" r:id="rId9"/>
+    <p:sldId id="294" r:id="rId10"/>
+    <p:sldId id="261" r:id="rId11"/>
     <p:sldId id="258" r:id="rId12"/>
     <p:sldId id="270" r:id="rId13"/>
     <p:sldId id="257" r:id="rId14"/>
@@ -29,12 +29,12 @@
     <p:sldId id="262" r:id="rId17"/>
     <p:sldId id="291" r:id="rId18"/>
     <p:sldId id="292" r:id="rId19"/>
-    <p:sldId id="261" r:id="rId20"/>
-    <p:sldId id="267" r:id="rId21"/>
-    <p:sldId id="264" r:id="rId22"/>
-    <p:sldId id="265" r:id="rId23"/>
-    <p:sldId id="296" r:id="rId24"/>
-    <p:sldId id="266" r:id="rId25"/>
+    <p:sldId id="267" r:id="rId20"/>
+    <p:sldId id="264" r:id="rId21"/>
+    <p:sldId id="265" r:id="rId22"/>
+    <p:sldId id="296" r:id="rId23"/>
+    <p:sldId id="266" r:id="rId24"/>
+    <p:sldId id="297" r:id="rId25"/>
     <p:sldId id="280" r:id="rId26"/>
     <p:sldId id="290" r:id="rId27"/>
     <p:sldId id="283" r:id="rId28"/>
@@ -191,8 +191,8 @@
 <file path=ppt/revisionInfo.xml><?xml version="1.0" encoding="utf-8"?>
 <p1510:revInfo xmlns:a="http://schemas.openxmlformats.org/drawingml/2006/main" xmlns:r="http://schemas.openxmlformats.org/officeDocument/2006/relationships" xmlns:p1510="http://schemas.microsoft.com/office/powerpoint/2015/10/main">
   <p1510:revLst>
-    <p1510:client id="{951AF841-9EB4-E246-836A-D10BF9D8F629}" v="11" dt="2025-03-27T08:40:11.264"/>
-    <p1510:client id="{B3230A4C-E67D-93E7-7297-4E73754A2E72}" v="3" dt="2025-03-28T07:36:45.856"/>
+    <p1510:client id="{1E715230-2C55-6AF0-E29A-390918D4ABC6}" v="658" dt="2026-03-07T10:50:57.628"/>
+    <p1510:client id="{293AF15C-C131-0646-95E8-1DDF1B9B519C}" v="1" dt="2026-03-06T11:58:50.970"/>
   </p1510:revLst>
 </p1510:revInfo>
 </file>
@@ -200,101 +200,336 @@
 <file path=ppt/changesInfos/changesInfo1.xml><?xml version="1.0" encoding="utf-8"?>
 <pc:chgInfo xmlns:a="http://schemas.openxmlformats.org/drawingml/2006/main" xmlns:r="http://schemas.openxmlformats.org/officeDocument/2006/relationships" xmlns:ac="http://schemas.microsoft.com/office/drawing/2013/main/command" xmlns:pc="http://schemas.microsoft.com/office/powerpoint/2013/main/command">
   <pc:docChgLst>
-    <pc:chgData name="Baráth, Július" userId="S::julius.barath@aos.sk::aebde9b9-dccc-4475-a9ac-c05e78323d7a" providerId="AD" clId="Web-{B3230A4C-E67D-93E7-7297-4E73754A2E72}"/>
+    <pc:chgData name="Baráth, Július" userId="aebde9b9-dccc-4475-a9ac-c05e78323d7a" providerId="ADAL" clId="{4A0811C8-ED2F-505E-B787-C8270CED5046}"/>
     <pc:docChg chg="modSld">
-      <pc:chgData name="Baráth, Július" userId="S::julius.barath@aos.sk::aebde9b9-dccc-4475-a9ac-c05e78323d7a" providerId="AD" clId="Web-{B3230A4C-E67D-93E7-7297-4E73754A2E72}" dt="2025-03-28T07:36:44.809" v="0" actId="20577"/>
+      <pc:chgData name="Baráth, Július" userId="aebde9b9-dccc-4475-a9ac-c05e78323d7a" providerId="ADAL" clId="{4A0811C8-ED2F-505E-B787-C8270CED5046}" dt="2026-03-06T12:00:47.649" v="19" actId="113"/>
       <pc:docMkLst>
         <pc:docMk/>
       </pc:docMkLst>
-      <pc:sldChg chg="modSp">
-        <pc:chgData name="Baráth, Július" userId="S::julius.barath@aos.sk::aebde9b9-dccc-4475-a9ac-c05e78323d7a" providerId="AD" clId="Web-{B3230A4C-E67D-93E7-7297-4E73754A2E72}" dt="2025-03-28T07:36:44.809" v="0" actId="20577"/>
+      <pc:sldChg chg="modSp mod">
+        <pc:chgData name="Baráth, Július" userId="aebde9b9-dccc-4475-a9ac-c05e78323d7a" providerId="ADAL" clId="{4A0811C8-ED2F-505E-B787-C8270CED5046}" dt="2026-03-06T12:00:47.649" v="19" actId="113"/>
         <pc:sldMkLst>
           <pc:docMk/>
-          <pc:sldMk cId="0" sldId="263"/>
+          <pc:sldMk cId="0" sldId="269"/>
         </pc:sldMkLst>
         <pc:spChg chg="mod">
-          <ac:chgData name="Baráth, Július" userId="S::julius.barath@aos.sk::aebde9b9-dccc-4475-a9ac-c05e78323d7a" providerId="AD" clId="Web-{B3230A4C-E67D-93E7-7297-4E73754A2E72}" dt="2025-03-28T07:36:44.809" v="0" actId="20577"/>
+          <ac:chgData name="Baráth, Július" userId="aebde9b9-dccc-4475-a9ac-c05e78323d7a" providerId="ADAL" clId="{4A0811C8-ED2F-505E-B787-C8270CED5046}" dt="2026-03-06T12:00:47.649" v="19" actId="113"/>
           <ac:spMkLst>
             <pc:docMk/>
-            <pc:sldMk cId="0" sldId="263"/>
-            <ac:spMk id="6" creationId="{2729AE58-6BC0-3F7C-9F99-2FEC44FF0DA6}"/>
+            <pc:sldMk cId="0" sldId="269"/>
+            <ac:spMk id="8195" creationId="{98A75C92-C73C-4D07-8942-BFF36F7CA576}"/>
           </ac:spMkLst>
         </pc:spChg>
       </pc:sldChg>
     </pc:docChg>
   </pc:docChgLst>
   <pc:docChgLst>
-    <pc:chgData name="Baráth, Július" userId="aebde9b9-dccc-4475-a9ac-c05e78323d7a" providerId="ADAL" clId="{951AF841-9EB4-E246-836A-D10BF9D8F629}"/>
-    <pc:docChg chg="custSel modSld">
-      <pc:chgData name="Baráth, Július" userId="aebde9b9-dccc-4475-a9ac-c05e78323d7a" providerId="ADAL" clId="{951AF841-9EB4-E246-836A-D10BF9D8F629}" dt="2025-03-27T08:40:11.264" v="191" actId="1076"/>
+    <pc:chgData name="Baráth, Július" userId="S::julius.barath@aos.sk::aebde9b9-dccc-4475-a9ac-c05e78323d7a" providerId="AD" clId="Web-{1E715230-2C55-6AF0-E29A-390918D4ABC6}"/>
+    <pc:docChg chg="addSld delSld modSld sldOrd">
+      <pc:chgData name="Baráth, Július" userId="S::julius.barath@aos.sk::aebde9b9-dccc-4475-a9ac-c05e78323d7a" providerId="AD" clId="Web-{1E715230-2C55-6AF0-E29A-390918D4ABC6}" dt="2026-03-07T10:50:57.628" v="585"/>
       <pc:docMkLst>
         <pc:docMk/>
       </pc:docMkLst>
-      <pc:sldChg chg="modSp mod">
-        <pc:chgData name="Baráth, Július" userId="aebde9b9-dccc-4475-a9ac-c05e78323d7a" providerId="ADAL" clId="{951AF841-9EB4-E246-836A-D10BF9D8F629}" dt="2025-03-27T08:22:56.430" v="88" actId="403"/>
+      <pc:sldChg chg="modSp">
+        <pc:chgData name="Baráth, Július" userId="S::julius.barath@aos.sk::aebde9b9-dccc-4475-a9ac-c05e78323d7a" providerId="AD" clId="Web-{1E715230-2C55-6AF0-E29A-390918D4ABC6}" dt="2026-03-07T09:17:15.086" v="0" actId="20577"/>
         <pc:sldMkLst>
           <pc:docMk/>
-          <pc:sldMk cId="0" sldId="258"/>
+          <pc:sldMk cId="0" sldId="256"/>
         </pc:sldMkLst>
         <pc:spChg chg="mod">
-          <ac:chgData name="Baráth, Július" userId="aebde9b9-dccc-4475-a9ac-c05e78323d7a" providerId="ADAL" clId="{951AF841-9EB4-E246-836A-D10BF9D8F629}" dt="2025-03-27T08:22:56.430" v="88" actId="403"/>
+          <ac:chgData name="Baráth, Július" userId="S::julius.barath@aos.sk::aebde9b9-dccc-4475-a9ac-c05e78323d7a" providerId="AD" clId="Web-{1E715230-2C55-6AF0-E29A-390918D4ABC6}" dt="2026-03-07T09:17:15.086" v="0" actId="20577"/>
           <ac:spMkLst>
             <pc:docMk/>
-            <pc:sldMk cId="0" sldId="258"/>
-            <ac:spMk id="19476" creationId="{3D66C857-F72C-4B85-B110-7EF70ABF93B9}"/>
+            <pc:sldMk cId="0" sldId="256"/>
+            <ac:spMk id="4098" creationId="{B82414CC-9F59-4477-A221-A8C7F5D7467C}"/>
           </ac:spMkLst>
         </pc:spChg>
-        <pc:graphicFrameChg chg="mod modGraphic">
-          <ac:chgData name="Baráth, Július" userId="aebde9b9-dccc-4475-a9ac-c05e78323d7a" providerId="ADAL" clId="{951AF841-9EB4-E246-836A-D10BF9D8F629}" dt="2025-03-27T08:22:45.197" v="82" actId="20577"/>
-          <ac:graphicFrameMkLst>
+      </pc:sldChg>
+      <pc:sldChg chg="modSp">
+        <pc:chgData name="Baráth, Július" userId="S::julius.barath@aos.sk::aebde9b9-dccc-4475-a9ac-c05e78323d7a" providerId="AD" clId="Web-{1E715230-2C55-6AF0-E29A-390918D4ABC6}" dt="2026-03-07T09:26:11.149" v="64" actId="20577"/>
+        <pc:sldMkLst>
+          <pc:docMk/>
+          <pc:sldMk cId="0" sldId="257"/>
+        </pc:sldMkLst>
+        <pc:spChg chg="mod">
+          <ac:chgData name="Baráth, Július" userId="S::julius.barath@aos.sk::aebde9b9-dccc-4475-a9ac-c05e78323d7a" providerId="AD" clId="Web-{1E715230-2C55-6AF0-E29A-390918D4ABC6}" dt="2026-03-07T09:26:11.149" v="64" actId="20577"/>
+          <ac:spMkLst>
             <pc:docMk/>
-            <pc:sldMk cId="0" sldId="258"/>
-            <ac:graphicFrameMk id="5165" creationId="{74AB3743-7B3A-4AD2-918B-04DF1ECA9429}"/>
-          </ac:graphicFrameMkLst>
-        </pc:graphicFrameChg>
+            <pc:sldMk cId="0" sldId="257"/>
+            <ac:spMk id="22530" creationId="{32118DB1-4F51-44DC-841C-D6F57E3FAB5B}"/>
+          </ac:spMkLst>
+        </pc:spChg>
       </pc:sldChg>
-      <pc:sldChg chg="modSp mod">
-        <pc:chgData name="Baráth, Július" userId="aebde9b9-dccc-4475-a9ac-c05e78323d7a" providerId="ADAL" clId="{951AF841-9EB4-E246-836A-D10BF9D8F629}" dt="2025-03-27T08:34:15.204" v="109" actId="5793"/>
+      <pc:sldChg chg="ord">
+        <pc:chgData name="Baráth, Július" userId="S::julius.barath@aos.sk::aebde9b9-dccc-4475-a9ac-c05e78323d7a" providerId="AD" clId="Web-{1E715230-2C55-6AF0-E29A-390918D4ABC6}" dt="2026-03-07T10:50:57.628" v="585"/>
         <pc:sldMkLst>
           <pc:docMk/>
           <pc:sldMk cId="0" sldId="261"/>
         </pc:sldMkLst>
-        <pc:graphicFrameChg chg="modGraphic">
-          <ac:chgData name="Baráth, Július" userId="aebde9b9-dccc-4475-a9ac-c05e78323d7a" providerId="ADAL" clId="{951AF841-9EB4-E246-836A-D10BF9D8F629}" dt="2025-03-27T08:34:15.204" v="109" actId="5793"/>
+      </pc:sldChg>
+      <pc:sldChg chg="addSp modSp">
+        <pc:chgData name="Baráth, Július" userId="S::julius.barath@aos.sk::aebde9b9-dccc-4475-a9ac-c05e78323d7a" providerId="AD" clId="Web-{1E715230-2C55-6AF0-E29A-390918D4ABC6}" dt="2026-03-07T09:53:37.519" v="173" actId="20577"/>
+        <pc:sldMkLst>
+          <pc:docMk/>
+          <pc:sldMk cId="0" sldId="264"/>
+        </pc:sldMkLst>
+        <pc:spChg chg="add mod">
+          <ac:chgData name="Baráth, Július" userId="S::julius.barath@aos.sk::aebde9b9-dccc-4475-a9ac-c05e78323d7a" providerId="AD" clId="Web-{1E715230-2C55-6AF0-E29A-390918D4ABC6}" dt="2026-03-07T09:53:37.519" v="173" actId="20577"/>
+          <ac:spMkLst>
+            <pc:docMk/>
+            <pc:sldMk cId="0" sldId="264"/>
+            <ac:spMk id="2" creationId="{B1FCB07E-3F55-BB70-B41D-F4DBCA516523}"/>
+          </ac:spMkLst>
+        </pc:spChg>
+      </pc:sldChg>
+      <pc:sldChg chg="modSp">
+        <pc:chgData name="Baráth, Július" userId="S::julius.barath@aos.sk::aebde9b9-dccc-4475-a9ac-c05e78323d7a" providerId="AD" clId="Web-{1E715230-2C55-6AF0-E29A-390918D4ABC6}" dt="2026-03-07T10:44:46.378" v="575"/>
+        <pc:sldMkLst>
+          <pc:docMk/>
+          <pc:sldMk cId="0" sldId="266"/>
+        </pc:sldMkLst>
+        <pc:graphicFrameChg chg="mod modGraphic">
+          <ac:chgData name="Baráth, Július" userId="S::julius.barath@aos.sk::aebde9b9-dccc-4475-a9ac-c05e78323d7a" providerId="AD" clId="Web-{1E715230-2C55-6AF0-E29A-390918D4ABC6}" dt="2026-03-07T10:44:46.378" v="575"/>
           <ac:graphicFrameMkLst>
             <pc:docMk/>
-            <pc:sldMk cId="0" sldId="261"/>
-            <ac:graphicFrameMk id="10282" creationId="{7177DBCB-29AC-442A-8060-454ADC800A30}"/>
+            <pc:sldMk cId="0" sldId="266"/>
+            <ac:graphicFrameMk id="15363" creationId="{5F309344-A6FD-466A-9483-A9C74DBCEF3E}"/>
           </ac:graphicFrameMkLst>
         </pc:graphicFrameChg>
       </pc:sldChg>
-      <pc:sldChg chg="modSp mod">
-        <pc:chgData name="Baráth, Július" userId="aebde9b9-dccc-4475-a9ac-c05e78323d7a" providerId="ADAL" clId="{951AF841-9EB4-E246-836A-D10BF9D8F629}" dt="2025-03-27T08:40:11.264" v="191" actId="1076"/>
-        <pc:sldMkLst>
-          <pc:docMk/>
-          <pc:sldMk cId="0" sldId="265"/>
-        </pc:sldMkLst>
-        <pc:spChg chg="mod">
-          <ac:chgData name="Baráth, Július" userId="aebde9b9-dccc-4475-a9ac-c05e78323d7a" providerId="ADAL" clId="{951AF841-9EB4-E246-836A-D10BF9D8F629}" dt="2025-03-27T08:40:11.264" v="191" actId="1076"/>
-          <ac:spMkLst>
-            <pc:docMk/>
-            <pc:sldMk cId="0" sldId="265"/>
-            <ac:spMk id="32785" creationId="{6275F730-24C7-4FEB-B328-01AD0E1A86E1}"/>
-          </ac:spMkLst>
-        </pc:spChg>
-      </pc:sldChg>
-      <pc:sldChg chg="addSp modSp mod">
-        <pc:chgData name="Baráth, Július" userId="aebde9b9-dccc-4475-a9ac-c05e78323d7a" providerId="ADAL" clId="{951AF841-9EB4-E246-836A-D10BF9D8F629}" dt="2025-03-27T08:03:36.284" v="42" actId="1035"/>
+      <pc:sldChg chg="modSp">
+        <pc:chgData name="Baráth, Július" userId="S::julius.barath@aos.sk::aebde9b9-dccc-4475-a9ac-c05e78323d7a" providerId="AD" clId="Web-{1E715230-2C55-6AF0-E29A-390918D4ABC6}" dt="2026-03-07T09:31:16.493" v="95"/>
         <pc:sldMkLst>
           <pc:docMk/>
           <pc:sldMk cId="0" sldId="267"/>
         </pc:sldMkLst>
-        <pc:spChg chg="add mod">
-          <ac:chgData name="Baráth, Július" userId="aebde9b9-dccc-4475-a9ac-c05e78323d7a" providerId="ADAL" clId="{951AF841-9EB4-E246-836A-D10BF9D8F629}" dt="2025-03-27T08:03:36.284" v="42" actId="1035"/>
+        <pc:spChg chg="mod">
+          <ac:chgData name="Baráth, Július" userId="S::julius.barath@aos.sk::aebde9b9-dccc-4475-a9ac-c05e78323d7a" providerId="AD" clId="Web-{1E715230-2C55-6AF0-E29A-390918D4ABC6}" dt="2026-03-07T09:31:06.664" v="91" actId="20577"/>
           <ac:spMkLst>
             <pc:docMk/>
             <pc:sldMk cId="0" sldId="267"/>
             <ac:spMk id="2" creationId="{CDC35E62-FA66-7656-3909-EC3EE4BC1C86}"/>
+          </ac:spMkLst>
+        </pc:spChg>
+        <pc:graphicFrameChg chg="mod modGraphic">
+          <ac:chgData name="Baráth, Július" userId="S::julius.barath@aos.sk::aebde9b9-dccc-4475-a9ac-c05e78323d7a" providerId="AD" clId="Web-{1E715230-2C55-6AF0-E29A-390918D4ABC6}" dt="2026-03-07T09:31:16.493" v="95"/>
+          <ac:graphicFrameMkLst>
+            <pc:docMk/>
+            <pc:sldMk cId="0" sldId="267"/>
+            <ac:graphicFrameMk id="16415" creationId="{22E86009-E85E-4D6E-A8D5-EF498A0870B7}"/>
+          </ac:graphicFrameMkLst>
+        </pc:graphicFrameChg>
+      </pc:sldChg>
+      <pc:sldChg chg="modSp">
+        <pc:chgData name="Baráth, Július" userId="S::julius.barath@aos.sk::aebde9b9-dccc-4475-a9ac-c05e78323d7a" providerId="AD" clId="Web-{1E715230-2C55-6AF0-E29A-390918D4ABC6}" dt="2026-03-07T09:22:48.129" v="51" actId="20577"/>
+        <pc:sldMkLst>
+          <pc:docMk/>
+          <pc:sldMk cId="0" sldId="269"/>
+        </pc:sldMkLst>
+        <pc:spChg chg="mod">
+          <ac:chgData name="Baráth, Július" userId="S::julius.barath@aos.sk::aebde9b9-dccc-4475-a9ac-c05e78323d7a" providerId="AD" clId="Web-{1E715230-2C55-6AF0-E29A-390918D4ABC6}" dt="2026-03-07T09:18:07.323" v="1" actId="20577"/>
+          <ac:spMkLst>
+            <pc:docMk/>
+            <pc:sldMk cId="0" sldId="269"/>
+            <ac:spMk id="8194" creationId="{C72C7D7D-0C6E-4797-9BC9-FF0E069DA438}"/>
+          </ac:spMkLst>
+        </pc:spChg>
+        <pc:spChg chg="mod">
+          <ac:chgData name="Baráth, Július" userId="S::julius.barath@aos.sk::aebde9b9-dccc-4475-a9ac-c05e78323d7a" providerId="AD" clId="Web-{1E715230-2C55-6AF0-E29A-390918D4ABC6}" dt="2026-03-07T09:22:48.129" v="51" actId="20577"/>
+          <ac:spMkLst>
+            <pc:docMk/>
+            <pc:sldMk cId="0" sldId="269"/>
+            <ac:spMk id="8195" creationId="{98A75C92-C73C-4D07-8942-BFF36F7CA576}"/>
+          </ac:spMkLst>
+        </pc:spChg>
+      </pc:sldChg>
+      <pc:sldChg chg="modSp">
+        <pc:chgData name="Baráth, Július" userId="S::julius.barath@aos.sk::aebde9b9-dccc-4475-a9ac-c05e78323d7a" providerId="AD" clId="Web-{1E715230-2C55-6AF0-E29A-390918D4ABC6}" dt="2026-03-07T09:25:51.680" v="61" actId="20577"/>
+        <pc:sldMkLst>
+          <pc:docMk/>
+          <pc:sldMk cId="0" sldId="270"/>
+        </pc:sldMkLst>
+        <pc:spChg chg="mod">
+          <ac:chgData name="Baráth, Július" userId="S::julius.barath@aos.sk::aebde9b9-dccc-4475-a9ac-c05e78323d7a" providerId="AD" clId="Web-{1E715230-2C55-6AF0-E29A-390918D4ABC6}" dt="2026-03-07T09:25:41.336" v="60" actId="20577"/>
+          <ac:spMkLst>
+            <pc:docMk/>
+            <pc:sldMk cId="0" sldId="270"/>
+            <ac:spMk id="21506" creationId="{0BB664CE-344C-4944-9E40-A414E618CA8B}"/>
+          </ac:spMkLst>
+        </pc:spChg>
+        <pc:spChg chg="mod">
+          <ac:chgData name="Baráth, Július" userId="S::julius.barath@aos.sk::aebde9b9-dccc-4475-a9ac-c05e78323d7a" providerId="AD" clId="Web-{1E715230-2C55-6AF0-E29A-390918D4ABC6}" dt="2026-03-07T09:25:51.680" v="61" actId="20577"/>
+          <ac:spMkLst>
+            <pc:docMk/>
+            <pc:sldMk cId="0" sldId="270"/>
+            <ac:spMk id="21507" creationId="{0A592D96-181C-4090-8F45-322B70029C0B}"/>
+          </ac:spMkLst>
+        </pc:spChg>
+      </pc:sldChg>
+      <pc:sldChg chg="del">
+        <pc:chgData name="Baráth, Július" userId="S::julius.barath@aos.sk::aebde9b9-dccc-4475-a9ac-c05e78323d7a" providerId="AD" clId="Web-{1E715230-2C55-6AF0-E29A-390918D4ABC6}" dt="2026-03-07T10:46:25.200" v="576"/>
+        <pc:sldMkLst>
+          <pc:docMk/>
+          <pc:sldMk cId="0" sldId="273"/>
+        </pc:sldMkLst>
+      </pc:sldChg>
+      <pc:sldChg chg="modSp">
+        <pc:chgData name="Baráth, Július" userId="S::julius.barath@aos.sk::aebde9b9-dccc-4475-a9ac-c05e78323d7a" providerId="AD" clId="Web-{1E715230-2C55-6AF0-E29A-390918D4ABC6}" dt="2026-03-07T10:46:47.669" v="580" actId="20577"/>
+        <pc:sldMkLst>
+          <pc:docMk/>
+          <pc:sldMk cId="0" sldId="274"/>
+        </pc:sldMkLst>
+        <pc:spChg chg="mod">
+          <ac:chgData name="Baráth, Július" userId="S::julius.barath@aos.sk::aebde9b9-dccc-4475-a9ac-c05e78323d7a" providerId="AD" clId="Web-{1E715230-2C55-6AF0-E29A-390918D4ABC6}" dt="2026-03-07T10:46:47.669" v="580" actId="20577"/>
+          <ac:spMkLst>
+            <pc:docMk/>
+            <pc:sldMk cId="0" sldId="274"/>
+            <ac:spMk id="11266" creationId="{22B2381D-EE5B-4855-A437-7353A2692FD3}"/>
+          </ac:spMkLst>
+        </pc:spChg>
+      </pc:sldChg>
+      <pc:sldChg chg="delSp modSp">
+        <pc:chgData name="Baráth, Július" userId="S::julius.barath@aos.sk::aebde9b9-dccc-4475-a9ac-c05e78323d7a" providerId="AD" clId="Web-{1E715230-2C55-6AF0-E29A-390918D4ABC6}" dt="2026-03-07T09:23:32.365" v="52"/>
+        <pc:sldMkLst>
+          <pc:docMk/>
+          <pc:sldMk cId="0" sldId="276"/>
+        </pc:sldMkLst>
+        <pc:spChg chg="del mod">
+          <ac:chgData name="Baráth, Július" userId="S::julius.barath@aos.sk::aebde9b9-dccc-4475-a9ac-c05e78323d7a" providerId="AD" clId="Web-{1E715230-2C55-6AF0-E29A-390918D4ABC6}" dt="2026-03-07T09:23:32.365" v="52"/>
+          <ac:spMkLst>
+            <pc:docMk/>
+            <pc:sldMk cId="0" sldId="276"/>
+            <ac:spMk id="2" creationId="{73F8E0F3-D8CE-9B98-82F8-D25AF7DB4599}"/>
+          </ac:spMkLst>
+        </pc:spChg>
+      </pc:sldChg>
+      <pc:sldChg chg="delSp modSp">
+        <pc:chgData name="Baráth, Július" userId="S::julius.barath@aos.sk::aebde9b9-dccc-4475-a9ac-c05e78323d7a" providerId="AD" clId="Web-{1E715230-2C55-6AF0-E29A-390918D4ABC6}" dt="2026-03-07T10:03:34.954" v="188"/>
+        <pc:sldMkLst>
+          <pc:docMk/>
+          <pc:sldMk cId="0" sldId="280"/>
+        </pc:sldMkLst>
+        <pc:spChg chg="mod">
+          <ac:chgData name="Baráth, Július" userId="S::julius.barath@aos.sk::aebde9b9-dccc-4475-a9ac-c05e78323d7a" providerId="AD" clId="Web-{1E715230-2C55-6AF0-E29A-390918D4ABC6}" dt="2026-03-07T10:03:03.626" v="187" actId="14100"/>
+          <ac:spMkLst>
+            <pc:docMk/>
+            <pc:sldMk cId="0" sldId="280"/>
+            <ac:spMk id="34819" creationId="{8234723D-B56A-4AD0-ADE9-EB9FA903878C}"/>
+          </ac:spMkLst>
+        </pc:spChg>
+        <pc:picChg chg="del">
+          <ac:chgData name="Baráth, Július" userId="S::julius.barath@aos.sk::aebde9b9-dccc-4475-a9ac-c05e78323d7a" providerId="AD" clId="Web-{1E715230-2C55-6AF0-E29A-390918D4ABC6}" dt="2026-03-07T10:03:34.954" v="188"/>
+          <ac:picMkLst>
+            <pc:docMk/>
+            <pc:sldMk cId="0" sldId="280"/>
+            <ac:picMk id="34820" creationId="{29914A81-2D67-4F57-A266-D107CCB17331}"/>
+          </ac:picMkLst>
+        </pc:picChg>
+      </pc:sldChg>
+      <pc:sldChg chg="modSp">
+        <pc:chgData name="Baráth, Július" userId="S::julius.barath@aos.sk::aebde9b9-dccc-4475-a9ac-c05e78323d7a" providerId="AD" clId="Web-{1E715230-2C55-6AF0-E29A-390918D4ABC6}" dt="2026-03-07T10:24:26.432" v="372" actId="1076"/>
+        <pc:sldMkLst>
+          <pc:docMk/>
+          <pc:sldMk cId="0" sldId="290"/>
+        </pc:sldMkLst>
+        <pc:spChg chg="mod">
+          <ac:chgData name="Baráth, Július" userId="S::julius.barath@aos.sk::aebde9b9-dccc-4475-a9ac-c05e78323d7a" providerId="AD" clId="Web-{1E715230-2C55-6AF0-E29A-390918D4ABC6}" dt="2026-03-07T10:24:26.432" v="372" actId="1076"/>
+          <ac:spMkLst>
+            <pc:docMk/>
+            <pc:sldMk cId="0" sldId="290"/>
+            <ac:spMk id="35842" creationId="{F51E0F34-60B3-49F3-A290-BC1C4BE9F355}"/>
+          </ac:spMkLst>
+        </pc:spChg>
+        <pc:spChg chg="mod">
+          <ac:chgData name="Baráth, Július" userId="S::julius.barath@aos.sk::aebde9b9-dccc-4475-a9ac-c05e78323d7a" providerId="AD" clId="Web-{1E715230-2C55-6AF0-E29A-390918D4ABC6}" dt="2026-03-07T10:24:23.603" v="371" actId="14100"/>
+          <ac:spMkLst>
+            <pc:docMk/>
+            <pc:sldMk cId="0" sldId="290"/>
+            <ac:spMk id="35843" creationId="{B0854728-2C19-4EAB-BB97-4DB204DA8499}"/>
+          </ac:spMkLst>
+        </pc:spChg>
+      </pc:sldChg>
+      <pc:sldChg chg="modSp">
+        <pc:chgData name="Baráth, Július" userId="S::julius.barath@aos.sk::aebde9b9-dccc-4475-a9ac-c05e78323d7a" providerId="AD" clId="Web-{1E715230-2C55-6AF0-E29A-390918D4ABC6}" dt="2026-03-07T10:47:10.748" v="583" actId="20577"/>
+        <pc:sldMkLst>
+          <pc:docMk/>
+          <pc:sldMk cId="0" sldId="294"/>
+        </pc:sldMkLst>
+        <pc:spChg chg="mod">
+          <ac:chgData name="Baráth, Július" userId="S::julius.barath@aos.sk::aebde9b9-dccc-4475-a9ac-c05e78323d7a" providerId="AD" clId="Web-{1E715230-2C55-6AF0-E29A-390918D4ABC6}" dt="2026-03-07T10:47:10.748" v="583" actId="20577"/>
+          <ac:spMkLst>
+            <pc:docMk/>
+            <pc:sldMk cId="0" sldId="294"/>
+            <ac:spMk id="18434" creationId="{2DA0F755-5088-4D7B-809A-959596252F72}"/>
+          </ac:spMkLst>
+        </pc:spChg>
+        <pc:spChg chg="mod">
+          <ac:chgData name="Baráth, Július" userId="S::julius.barath@aos.sk::aebde9b9-dccc-4475-a9ac-c05e78323d7a" providerId="AD" clId="Web-{1E715230-2C55-6AF0-E29A-390918D4ABC6}" dt="2026-03-07T09:25:22.898" v="59" actId="20577"/>
+          <ac:spMkLst>
+            <pc:docMk/>
+            <pc:sldMk cId="0" sldId="294"/>
+            <ac:spMk id="18435" creationId="{D26642D8-AE63-44B1-A0FE-18D1576C3CFE}"/>
+          </ac:spMkLst>
+        </pc:spChg>
+      </pc:sldChg>
+      <pc:sldChg chg="modSp">
+        <pc:chgData name="Baráth, Július" userId="S::julius.barath@aos.sk::aebde9b9-dccc-4475-a9ac-c05e78323d7a" providerId="AD" clId="Web-{1E715230-2C55-6AF0-E29A-390918D4ABC6}" dt="2026-03-07T10:16:55.594" v="298" actId="20577"/>
+        <pc:sldMkLst>
+          <pc:docMk/>
+          <pc:sldMk cId="0" sldId="295"/>
+        </pc:sldMkLst>
+        <pc:spChg chg="mod">
+          <ac:chgData name="Baráth, Július" userId="S::julius.barath@aos.sk::aebde9b9-dccc-4475-a9ac-c05e78323d7a" providerId="AD" clId="Web-{1E715230-2C55-6AF0-E29A-390918D4ABC6}" dt="2026-03-07T10:16:55.594" v="298" actId="20577"/>
+          <ac:spMkLst>
+            <pc:docMk/>
+            <pc:sldMk cId="0" sldId="295"/>
+            <ac:spMk id="36867" creationId="{7CA9632D-1167-4A0C-9D27-299AB24DA8D9}"/>
+          </ac:spMkLst>
+        </pc:spChg>
+      </pc:sldChg>
+      <pc:sldChg chg="addSp modSp">
+        <pc:chgData name="Baráth, Július" userId="S::julius.barath@aos.sk::aebde9b9-dccc-4475-a9ac-c05e78323d7a" providerId="AD" clId="Web-{1E715230-2C55-6AF0-E29A-390918D4ABC6}" dt="2026-03-07T09:45:36.107" v="136" actId="20577"/>
+        <pc:sldMkLst>
+          <pc:docMk/>
+          <pc:sldMk cId="4192739254" sldId="296"/>
+        </pc:sldMkLst>
+        <pc:spChg chg="mod">
+          <ac:chgData name="Baráth, Július" userId="S::julius.barath@aos.sk::aebde9b9-dccc-4475-a9ac-c05e78323d7a" providerId="AD" clId="Web-{1E715230-2C55-6AF0-E29A-390918D4ABC6}" dt="2026-03-07T09:40:45.649" v="103" actId="14100"/>
+          <ac:spMkLst>
+            <pc:docMk/>
+            <pc:sldMk cId="4192739254" sldId="296"/>
+            <ac:spMk id="3" creationId="{488CFDE2-83D8-424B-772A-660EE3309D46}"/>
+          </ac:spMkLst>
+        </pc:spChg>
+        <pc:spChg chg="add mod">
+          <ac:chgData name="Baráth, Július" userId="S::julius.barath@aos.sk::aebde9b9-dccc-4475-a9ac-c05e78323d7a" providerId="AD" clId="Web-{1E715230-2C55-6AF0-E29A-390918D4ABC6}" dt="2026-03-07T09:45:36.107" v="136" actId="20577"/>
+          <ac:spMkLst>
+            <pc:docMk/>
+            <pc:sldMk cId="4192739254" sldId="296"/>
+            <ac:spMk id="5" creationId="{A756D8D8-A21D-56E5-9A94-10934E175B29}"/>
+          </ac:spMkLst>
+        </pc:spChg>
+      </pc:sldChg>
+      <pc:sldChg chg="modSp new">
+        <pc:chgData name="Baráth, Július" userId="S::julius.barath@aos.sk::aebde9b9-dccc-4475-a9ac-c05e78323d7a" providerId="AD" clId="Web-{1E715230-2C55-6AF0-E29A-390918D4ABC6}" dt="2026-03-07T10:36:26.970" v="468" actId="20577"/>
+        <pc:sldMkLst>
+          <pc:docMk/>
+          <pc:sldMk cId="2266220088" sldId="297"/>
+        </pc:sldMkLst>
+        <pc:spChg chg="mod">
+          <ac:chgData name="Baráth, Július" userId="S::julius.barath@aos.sk::aebde9b9-dccc-4475-a9ac-c05e78323d7a" providerId="AD" clId="Web-{1E715230-2C55-6AF0-E29A-390918D4ABC6}" dt="2026-03-07T10:04:44.321" v="191" actId="20577"/>
+          <ac:spMkLst>
+            <pc:docMk/>
+            <pc:sldMk cId="2266220088" sldId="297"/>
+            <ac:spMk id="2" creationId="{43E2B02F-F6E1-DFED-11C4-6862294155AE}"/>
+          </ac:spMkLst>
+        </pc:spChg>
+        <pc:spChg chg="mod">
+          <ac:chgData name="Baráth, Július" userId="S::julius.barath@aos.sk::aebde9b9-dccc-4475-a9ac-c05e78323d7a" providerId="AD" clId="Web-{1E715230-2C55-6AF0-E29A-390918D4ABC6}" dt="2026-03-07T10:36:26.970" v="468" actId="20577"/>
+          <ac:spMkLst>
+            <pc:docMk/>
+            <pc:sldMk cId="2266220088" sldId="297"/>
+            <ac:spMk id="3" creationId="{DFD5F4D5-A3A2-9562-FAE7-1C98B612286B}"/>
           </ac:spMkLst>
         </pc:spChg>
       </pc:sldChg>
@@ -413,7 +648,7 @@
               <a:pPr>
                 <a:defRPr/>
               </a:pPr>
-              <a:t>3/28/2025</a:t>
+              <a:t>3/7/2026</a:t>
             </a:fld>
             <a:endParaRPr lang="en-US"/>
           </a:p>
@@ -628,7 +863,7 @@
               <a:pPr>
                 <a:defRPr/>
               </a:pPr>
-              <a:t>3/28/2025</a:t>
+              <a:t>3/7/2026</a:t>
             </a:fld>
             <a:endParaRPr lang="en-US"/>
           </a:p>
@@ -4970,7 +5205,7 @@
             <a:pPr eaLnBrk="1" hangingPunct="1"/>
             <a:r>
               <a:rPr lang="en-US" altLang="sk-SK"/>
-              <a:t>Unix vi Editor</a:t>
+              <a:t>Unix vim Editor</a:t>
             </a:r>
           </a:p>
         </p:txBody>
@@ -5031,10 +5266,10 @@
       </p:grpSpPr>
       <p:sp>
         <p:nvSpPr>
-          <p:cNvPr id="18434" name="Title 1">
+          <p:cNvPr id="28674" name="Rectangle 2">
             <a:extLst>
               <a:ext uri="{FF2B5EF4-FFF2-40B4-BE49-F238E27FC236}">
-                <a16:creationId xmlns:a16="http://schemas.microsoft.com/office/drawing/2014/main" id="{2DA0F755-5088-4D7B-809A-959596252F72}"/>
+                <a16:creationId xmlns:a16="http://schemas.microsoft.com/office/drawing/2014/main" id="{E7C9BE1B-41F6-4414-BBB4-E96F2DD719C1}"/>
               </a:ext>
             </a:extLst>
           </p:cNvPr>
@@ -5050,119 +5285,1623 @@
           <a:bodyPr/>
           <a:lstStyle/>
           <a:p>
-            <a:r>
-              <a:rPr lang="en-US" altLang="sk-SK" dirty="0"/>
-              <a:t>vi Modes</a:t>
+            <a:pPr eaLnBrk="1" hangingPunct="1"/>
+            <a:r>
+              <a:rPr lang="en-US" altLang="sk-SK"/>
+              <a:t>Navigation Commands</a:t>
             </a:r>
           </a:p>
         </p:txBody>
       </p:sp>
-      <p:sp>
-        <p:nvSpPr>
-          <p:cNvPr id="18435" name="Content Placeholder 2">
+      <p:graphicFrame>
+        <p:nvGraphicFramePr>
+          <p:cNvPr id="10282" name="Group 42">
             <a:extLst>
               <a:ext uri="{FF2B5EF4-FFF2-40B4-BE49-F238E27FC236}">
-                <a16:creationId xmlns:a16="http://schemas.microsoft.com/office/drawing/2014/main" id="{D26642D8-AE63-44B1-A0FE-18D1576C3CFE}"/>
+                <a16:creationId xmlns:a16="http://schemas.microsoft.com/office/drawing/2014/main" id="{7177DBCB-29AC-442A-8060-454ADC800A30}"/>
               </a:ext>
             </a:extLst>
           </p:cNvPr>
-          <p:cNvSpPr>
-            <a:spLocks noGrp="1" noChangeArrowheads="1"/>
+          <p:cNvGraphicFramePr>
+            <a:graphicFrameLocks noGrp="1"/>
+          </p:cNvGraphicFramePr>
+          <p:nvPr>
+            <p:ph type="tbl" idx="1"/>
+            <p:extLst>
+              <p:ext uri="{D42A27DB-BD31-4B8C-83A1-F6EECF244321}">
+                <p14:modId xmlns:p14="http://schemas.microsoft.com/office/powerpoint/2010/main" val="1605009762"/>
+              </p:ext>
+            </p:extLst>
+          </p:nvPr>
+        </p:nvGraphicFramePr>
+        <p:xfrm>
+          <a:off x="457200" y="1905000"/>
+          <a:ext cx="8229600" cy="3957638"/>
+        </p:xfrm>
+        <a:graphic>
+          <a:graphicData uri="http://schemas.openxmlformats.org/drawingml/2006/table">
+            <a:tbl>
+              <a:tblPr/>
+              <a:tblGrid>
+                <a:gridCol w="2057400">
+                  <a:extLst>
+                    <a:ext uri="{9D8B030D-6E8A-4147-A177-3AD203B41FA5}">
+                      <a16:colId xmlns:a16="http://schemas.microsoft.com/office/drawing/2014/main" val="20000"/>
+                    </a:ext>
+                  </a:extLst>
+                </a:gridCol>
+                <a:gridCol w="6172200">
+                  <a:extLst>
+                    <a:ext uri="{9D8B030D-6E8A-4147-A177-3AD203B41FA5}">
+                      <a16:colId xmlns:a16="http://schemas.microsoft.com/office/drawing/2014/main" val="20001"/>
+                    </a:ext>
+                  </a:extLst>
+                </a:gridCol>
+              </a:tblGrid>
+              <a:tr h="452438">
+                <a:tc>
+                  <a:txBody>
+                    <a:bodyPr/>
+                    <a:lstStyle/>
+                    <a:p>
+                      <a:pPr marL="0" marR="0" lvl="0" indent="0" algn="l" defTabSz="914400" rtl="0" eaLnBrk="1" fontAlgn="base" latinLnBrk="0" hangingPunct="1">
+                        <a:lnSpc>
+                          <a:spcPct val="100000"/>
+                        </a:lnSpc>
+                        <a:spcBef>
+                          <a:spcPct val="20000"/>
+                        </a:spcBef>
+                        <a:spcAft>
+                          <a:spcPct val="0"/>
+                        </a:spcAft>
+                        <a:buClrTx/>
+                        <a:buSzTx/>
+                        <a:buFontTx/>
+                        <a:buNone/>
+                        <a:tabLst/>
+                      </a:pPr>
+                      <a:r>
+                        <a:rPr kumimoji="0" lang="en-US" sz="2000" b="1" i="0" u="none" strike="noStrike" cap="none" normalizeH="0" baseline="0" dirty="0" err="1">
+                          <a:ln>
+                            <a:noFill/>
+                          </a:ln>
+                          <a:solidFill>
+                            <a:schemeClr val="tx1"/>
+                          </a:solidFill>
+                          <a:effectLst/>
+                          <a:latin typeface="Arial" charset="0"/>
+                        </a:rPr>
+                        <a:t>h</a:t>
+                      </a:r>
+                      <a:r>
+                        <a:rPr kumimoji="0" lang="en-US" sz="2000" b="0" i="0" u="none" strike="noStrike" cap="none" normalizeH="0" baseline="0" dirty="0" err="1">
+                          <a:ln>
+                            <a:noFill/>
+                          </a:ln>
+                          <a:solidFill>
+                            <a:schemeClr val="tx1"/>
+                          </a:solidFill>
+                          <a:effectLst/>
+                          <a:latin typeface="Arial" charset="0"/>
+                        </a:rPr>
+                        <a:t>,</a:t>
+                      </a:r>
+                      <a:r>
+                        <a:rPr kumimoji="0" lang="en-US" sz="2000" b="1" i="0" u="none" strike="noStrike" cap="none" normalizeH="0" baseline="0" dirty="0" err="1">
+                          <a:ln>
+                            <a:noFill/>
+                          </a:ln>
+                          <a:solidFill>
+                            <a:schemeClr val="tx1"/>
+                          </a:solidFill>
+                          <a:effectLst/>
+                          <a:latin typeface="Arial" charset="0"/>
+                        </a:rPr>
+                        <a:t>j</a:t>
+                      </a:r>
+                      <a:r>
+                        <a:rPr kumimoji="0" lang="en-US" sz="2000" b="0" i="0" u="none" strike="noStrike" kern="1200" cap="none" normalizeH="0" baseline="0" dirty="0" err="1">
+                          <a:ln>
+                            <a:noFill/>
+                          </a:ln>
+                          <a:solidFill>
+                            <a:schemeClr val="tx1"/>
+                          </a:solidFill>
+                          <a:effectLst/>
+                          <a:latin typeface="Arial" charset="0"/>
+                          <a:ea typeface="+mn-ea"/>
+                          <a:cs typeface="+mn-cs"/>
+                        </a:rPr>
+                        <a:t>,</a:t>
+                      </a:r>
+                      <a:r>
+                        <a:rPr kumimoji="0" lang="en-US" sz="2000" b="1" i="0" u="none" strike="noStrike" cap="none" normalizeH="0" baseline="0" dirty="0" err="1">
+                          <a:ln>
+                            <a:noFill/>
+                          </a:ln>
+                          <a:solidFill>
+                            <a:schemeClr val="tx1"/>
+                          </a:solidFill>
+                          <a:effectLst/>
+                          <a:latin typeface="Arial" charset="0"/>
+                        </a:rPr>
+                        <a:t>k</a:t>
+                      </a:r>
+                      <a:r>
+                        <a:rPr kumimoji="0" lang="en-US" sz="2000" b="0" i="0" u="none" strike="noStrike" kern="1200" cap="none" normalizeH="0" baseline="0" dirty="0" err="1">
+                          <a:ln>
+                            <a:noFill/>
+                          </a:ln>
+                          <a:solidFill>
+                            <a:schemeClr val="tx1"/>
+                          </a:solidFill>
+                          <a:effectLst/>
+                          <a:latin typeface="Arial" charset="0"/>
+                          <a:ea typeface="+mn-ea"/>
+                          <a:cs typeface="+mn-cs"/>
+                        </a:rPr>
+                        <a:t>,</a:t>
+                      </a:r>
+                      <a:r>
+                        <a:rPr kumimoji="0" lang="en-US" sz="2000" b="1" i="0" u="none" strike="noStrike" cap="none" normalizeH="0" baseline="0" dirty="0" err="1">
+                          <a:ln>
+                            <a:noFill/>
+                          </a:ln>
+                          <a:solidFill>
+                            <a:schemeClr val="tx1"/>
+                          </a:solidFill>
+                          <a:effectLst/>
+                          <a:latin typeface="Arial" charset="0"/>
+                        </a:rPr>
+                        <a:t>l</a:t>
+                      </a:r>
+                      <a:endParaRPr kumimoji="0" lang="en-US" sz="2000" b="1" i="0" u="none" strike="noStrike" cap="none" normalizeH="0" baseline="0" dirty="0">
+                        <a:ln>
+                          <a:noFill/>
+                        </a:ln>
+                        <a:solidFill>
+                          <a:schemeClr val="tx1"/>
+                        </a:solidFill>
+                        <a:effectLst/>
+                        <a:latin typeface="Arial" charset="0"/>
+                      </a:endParaRPr>
+                    </a:p>
+                  </a:txBody>
+                  <a:tcPr horzOverflow="overflow">
+                    <a:lnL w="28575" cap="flat" cmpd="sng" algn="ctr">
+                      <a:solidFill>
+                        <a:schemeClr val="tx1"/>
+                      </a:solidFill>
+                      <a:prstDash val="solid"/>
+                      <a:round/>
+                      <a:headEnd type="none" w="med" len="med"/>
+                      <a:tailEnd type="none" w="med" len="med"/>
+                    </a:lnL>
+                    <a:lnR w="12700" cap="flat" cmpd="sng" algn="ctr">
+                      <a:solidFill>
+                        <a:schemeClr val="tx1"/>
+                      </a:solidFill>
+                      <a:prstDash val="solid"/>
+                      <a:round/>
+                      <a:headEnd type="none" w="med" len="med"/>
+                      <a:tailEnd type="none" w="med" len="med"/>
+                    </a:lnR>
+                    <a:lnT w="28575" cap="flat" cmpd="sng" algn="ctr">
+                      <a:solidFill>
+                        <a:schemeClr val="tx1"/>
+                      </a:solidFill>
+                      <a:prstDash val="solid"/>
+                      <a:round/>
+                      <a:headEnd type="none" w="med" len="med"/>
+                      <a:tailEnd type="none" w="med" len="med"/>
+                    </a:lnT>
+                    <a:lnB w="12700" cap="flat" cmpd="sng" algn="ctr">
+                      <a:solidFill>
+                        <a:schemeClr val="tx1"/>
+                      </a:solidFill>
+                      <a:prstDash val="solid"/>
+                      <a:round/>
+                      <a:headEnd type="none" w="med" len="med"/>
+                      <a:tailEnd type="none" w="med" len="med"/>
+                    </a:lnB>
+                    <a:lnTlToBr>
+                      <a:noFill/>
+                    </a:lnTlToBr>
+                    <a:lnBlToTr>
+                      <a:noFill/>
+                    </a:lnBlToTr>
+                    <a:noFill/>
+                  </a:tcPr>
+                </a:tc>
+                <a:tc>
+                  <a:txBody>
+                    <a:bodyPr/>
+                    <a:lstStyle/>
+                    <a:p>
+                      <a:pPr marL="0" marR="0" lvl="0" indent="0" algn="l" defTabSz="914400" rtl="0" eaLnBrk="1" fontAlgn="base" latinLnBrk="0" hangingPunct="1">
+                        <a:lnSpc>
+                          <a:spcPct val="100000"/>
+                        </a:lnSpc>
+                        <a:spcBef>
+                          <a:spcPct val="20000"/>
+                        </a:spcBef>
+                        <a:spcAft>
+                          <a:spcPct val="0"/>
+                        </a:spcAft>
+                        <a:buClrTx/>
+                        <a:buSzTx/>
+                        <a:buFontTx/>
+                        <a:buNone/>
+                        <a:tabLst/>
+                      </a:pPr>
+                      <a:r>
+                        <a:rPr kumimoji="0" lang="en-US" sz="2000" b="0" i="0" u="none" strike="noStrike" cap="none" normalizeH="0" baseline="0">
+                          <a:ln>
+                            <a:noFill/>
+                          </a:ln>
+                          <a:solidFill>
+                            <a:schemeClr val="tx1"/>
+                          </a:solidFill>
+                          <a:effectLst/>
+                          <a:latin typeface="Arial" charset="0"/>
+                        </a:rPr>
+                        <a:t>Move cursor left, down, up, or right characters</a:t>
+                      </a:r>
+                    </a:p>
+                  </a:txBody>
+                  <a:tcPr horzOverflow="overflow">
+                    <a:lnL w="12700" cap="flat" cmpd="sng" algn="ctr">
+                      <a:solidFill>
+                        <a:schemeClr val="tx1"/>
+                      </a:solidFill>
+                      <a:prstDash val="solid"/>
+                      <a:round/>
+                      <a:headEnd type="none" w="med" len="med"/>
+                      <a:tailEnd type="none" w="med" len="med"/>
+                    </a:lnL>
+                    <a:lnR w="28575" cap="flat" cmpd="sng" algn="ctr">
+                      <a:solidFill>
+                        <a:schemeClr val="tx1"/>
+                      </a:solidFill>
+                      <a:prstDash val="solid"/>
+                      <a:round/>
+                      <a:headEnd type="none" w="med" len="med"/>
+                      <a:tailEnd type="none" w="med" len="med"/>
+                    </a:lnR>
+                    <a:lnT w="28575" cap="flat" cmpd="sng" algn="ctr">
+                      <a:solidFill>
+                        <a:schemeClr val="tx1"/>
+                      </a:solidFill>
+                      <a:prstDash val="solid"/>
+                      <a:round/>
+                      <a:headEnd type="none" w="med" len="med"/>
+                      <a:tailEnd type="none" w="med" len="med"/>
+                    </a:lnT>
+                    <a:lnB w="12700" cap="flat" cmpd="sng" algn="ctr">
+                      <a:solidFill>
+                        <a:schemeClr val="tx1"/>
+                      </a:solidFill>
+                      <a:prstDash val="solid"/>
+                      <a:round/>
+                      <a:headEnd type="none" w="med" len="med"/>
+                      <a:tailEnd type="none" w="med" len="med"/>
+                    </a:lnB>
+                    <a:lnTlToBr>
+                      <a:noFill/>
+                    </a:lnTlToBr>
+                    <a:lnBlToTr>
+                      <a:noFill/>
+                    </a:lnBlToTr>
+                    <a:noFill/>
+                  </a:tcPr>
+                </a:tc>
+                <a:extLst>
+                  <a:ext uri="{0D108BD9-81ED-4DB2-BD59-A6C34878D82A}">
+                    <a16:rowId xmlns:a16="http://schemas.microsoft.com/office/drawing/2014/main" val="10000"/>
+                  </a:ext>
+                </a:extLst>
+              </a:tr>
+              <a:tr h="452438">
+                <a:tc>
+                  <a:txBody>
+                    <a:bodyPr/>
+                    <a:lstStyle/>
+                    <a:p>
+                      <a:pPr marL="0" marR="0" lvl="0" indent="0" algn="l" defTabSz="914400" rtl="0" eaLnBrk="1" fontAlgn="base" latinLnBrk="0" hangingPunct="1">
+                        <a:lnSpc>
+                          <a:spcPct val="100000"/>
+                        </a:lnSpc>
+                        <a:spcBef>
+                          <a:spcPct val="20000"/>
+                        </a:spcBef>
+                        <a:spcAft>
+                          <a:spcPct val="0"/>
+                        </a:spcAft>
+                        <a:buClrTx/>
+                        <a:buSzTx/>
+                        <a:buFontTx/>
+                        <a:buNone/>
+                        <a:tabLst/>
+                      </a:pPr>
+                      <a:r>
+                        <a:rPr kumimoji="0" lang="en-US" sz="2000" b="1" i="0" u="none" strike="noStrike" cap="none" normalizeH="0" baseline="0" dirty="0" err="1">
+                          <a:ln>
+                            <a:noFill/>
+                          </a:ln>
+                          <a:solidFill>
+                            <a:schemeClr val="tx1"/>
+                          </a:solidFill>
+                          <a:effectLst/>
+                          <a:latin typeface="Arial" charset="0"/>
+                        </a:rPr>
+                        <a:t>w</a:t>
+                      </a:r>
+                      <a:r>
+                        <a:rPr kumimoji="0" lang="en-US" sz="2000" b="0" i="0" u="none" strike="noStrike" kern="1200" cap="none" normalizeH="0" baseline="0" dirty="0" err="1">
+                          <a:ln>
+                            <a:noFill/>
+                          </a:ln>
+                          <a:solidFill>
+                            <a:schemeClr val="tx1"/>
+                          </a:solidFill>
+                          <a:effectLst/>
+                          <a:latin typeface="Arial" charset="0"/>
+                          <a:ea typeface="+mn-ea"/>
+                          <a:cs typeface="+mn-cs"/>
+                        </a:rPr>
+                        <a:t>,</a:t>
+                      </a:r>
+                      <a:r>
+                        <a:rPr kumimoji="0" lang="en-US" sz="2000" b="1" i="0" u="none" strike="noStrike" cap="none" normalizeH="0" baseline="0" dirty="0" err="1">
+                          <a:ln>
+                            <a:noFill/>
+                          </a:ln>
+                          <a:solidFill>
+                            <a:schemeClr val="tx1"/>
+                          </a:solidFill>
+                          <a:effectLst/>
+                          <a:latin typeface="Arial" charset="0"/>
+                        </a:rPr>
+                        <a:t>W</a:t>
+                      </a:r>
+                      <a:endParaRPr kumimoji="0" lang="en-US" sz="2000" b="1" i="0" u="none" strike="noStrike" cap="none" normalizeH="0" baseline="0" dirty="0">
+                        <a:ln>
+                          <a:noFill/>
+                        </a:ln>
+                        <a:solidFill>
+                          <a:schemeClr val="tx1"/>
+                        </a:solidFill>
+                        <a:effectLst/>
+                        <a:latin typeface="Arial" charset="0"/>
+                      </a:endParaRPr>
+                    </a:p>
+                  </a:txBody>
+                  <a:tcPr horzOverflow="overflow">
+                    <a:lnL w="28575" cap="flat" cmpd="sng" algn="ctr">
+                      <a:solidFill>
+                        <a:schemeClr val="tx1"/>
+                      </a:solidFill>
+                      <a:prstDash val="solid"/>
+                      <a:round/>
+                      <a:headEnd type="none" w="med" len="med"/>
+                      <a:tailEnd type="none" w="med" len="med"/>
+                    </a:lnL>
+                    <a:lnR w="12700" cap="flat" cmpd="sng" algn="ctr">
+                      <a:solidFill>
+                        <a:schemeClr val="tx1"/>
+                      </a:solidFill>
+                      <a:prstDash val="solid"/>
+                      <a:round/>
+                      <a:headEnd type="none" w="med" len="med"/>
+                      <a:tailEnd type="none" w="med" len="med"/>
+                    </a:lnR>
+                    <a:lnT w="12700" cap="flat" cmpd="sng" algn="ctr">
+                      <a:solidFill>
+                        <a:schemeClr val="tx1"/>
+                      </a:solidFill>
+                      <a:prstDash val="solid"/>
+                      <a:round/>
+                      <a:headEnd type="none" w="med" len="med"/>
+                      <a:tailEnd type="none" w="med" len="med"/>
+                    </a:lnT>
+                    <a:lnB w="12700" cap="flat" cmpd="sng" algn="ctr">
+                      <a:solidFill>
+                        <a:schemeClr val="tx1"/>
+                      </a:solidFill>
+                      <a:prstDash val="solid"/>
+                      <a:round/>
+                      <a:headEnd type="none" w="med" len="med"/>
+                      <a:tailEnd type="none" w="med" len="med"/>
+                    </a:lnB>
+                    <a:lnTlToBr>
+                      <a:noFill/>
+                    </a:lnTlToBr>
+                    <a:lnBlToTr>
+                      <a:noFill/>
+                    </a:lnBlToTr>
+                    <a:noFill/>
+                  </a:tcPr>
+                </a:tc>
+                <a:tc>
+                  <a:txBody>
+                    <a:bodyPr/>
+                    <a:lstStyle/>
+                    <a:p>
+                      <a:pPr marL="0" marR="0" lvl="0" indent="0" algn="l" defTabSz="914400" rtl="0" eaLnBrk="1" fontAlgn="base" latinLnBrk="0" hangingPunct="1">
+                        <a:lnSpc>
+                          <a:spcPct val="100000"/>
+                        </a:lnSpc>
+                        <a:spcBef>
+                          <a:spcPct val="20000"/>
+                        </a:spcBef>
+                        <a:spcAft>
+                          <a:spcPct val="0"/>
+                        </a:spcAft>
+                        <a:buClrTx/>
+                        <a:buSzTx/>
+                        <a:buFontTx/>
+                        <a:buNone/>
+                        <a:tabLst/>
+                      </a:pPr>
+                      <a:r>
+                        <a:rPr kumimoji="0" lang="en-US" sz="2000" b="0" i="0" u="none" strike="noStrike" cap="none" normalizeH="0" baseline="0">
+                          <a:ln>
+                            <a:noFill/>
+                          </a:ln>
+                          <a:solidFill>
+                            <a:schemeClr val="tx1"/>
+                          </a:solidFill>
+                          <a:effectLst/>
+                          <a:latin typeface="Arial" charset="0"/>
+                        </a:rPr>
+                        <a:t>Move to beginning of special character delimited word, whitespace delimited word.</a:t>
+                      </a:r>
+                    </a:p>
+                  </a:txBody>
+                  <a:tcPr horzOverflow="overflow">
+                    <a:lnL w="12700" cap="flat" cmpd="sng" algn="ctr">
+                      <a:solidFill>
+                        <a:schemeClr val="tx1"/>
+                      </a:solidFill>
+                      <a:prstDash val="solid"/>
+                      <a:round/>
+                      <a:headEnd type="none" w="med" len="med"/>
+                      <a:tailEnd type="none" w="med" len="med"/>
+                    </a:lnL>
+                    <a:lnR w="28575" cap="flat" cmpd="sng" algn="ctr">
+                      <a:solidFill>
+                        <a:schemeClr val="tx1"/>
+                      </a:solidFill>
+                      <a:prstDash val="solid"/>
+                      <a:round/>
+                      <a:headEnd type="none" w="med" len="med"/>
+                      <a:tailEnd type="none" w="med" len="med"/>
+                    </a:lnR>
+                    <a:lnT w="12700" cap="flat" cmpd="sng" algn="ctr">
+                      <a:solidFill>
+                        <a:schemeClr val="tx1"/>
+                      </a:solidFill>
+                      <a:prstDash val="solid"/>
+                      <a:round/>
+                      <a:headEnd type="none" w="med" len="med"/>
+                      <a:tailEnd type="none" w="med" len="med"/>
+                    </a:lnT>
+                    <a:lnB w="12700" cap="flat" cmpd="sng" algn="ctr">
+                      <a:solidFill>
+                        <a:schemeClr val="tx1"/>
+                      </a:solidFill>
+                      <a:prstDash val="solid"/>
+                      <a:round/>
+                      <a:headEnd type="none" w="med" len="med"/>
+                      <a:tailEnd type="none" w="med" len="med"/>
+                    </a:lnB>
+                    <a:lnTlToBr>
+                      <a:noFill/>
+                    </a:lnTlToBr>
+                    <a:lnBlToTr>
+                      <a:noFill/>
+                    </a:lnBlToTr>
+                    <a:noFill/>
+                  </a:tcPr>
+                </a:tc>
+                <a:extLst>
+                  <a:ext uri="{0D108BD9-81ED-4DB2-BD59-A6C34878D82A}">
+                    <a16:rowId xmlns:a16="http://schemas.microsoft.com/office/drawing/2014/main" val="10001"/>
+                  </a:ext>
+                </a:extLst>
+              </a:tr>
+              <a:tr h="452438">
+                <a:tc>
+                  <a:txBody>
+                    <a:bodyPr/>
+                    <a:lstStyle/>
+                    <a:p>
+                      <a:pPr marL="0" marR="0" lvl="0" indent="0" algn="l" defTabSz="914400" rtl="0" eaLnBrk="1" fontAlgn="base" latinLnBrk="0" hangingPunct="1">
+                        <a:lnSpc>
+                          <a:spcPct val="100000"/>
+                        </a:lnSpc>
+                        <a:spcBef>
+                          <a:spcPct val="20000"/>
+                        </a:spcBef>
+                        <a:spcAft>
+                          <a:spcPct val="0"/>
+                        </a:spcAft>
+                        <a:buClrTx/>
+                        <a:buSzTx/>
+                        <a:buFontTx/>
+                        <a:buNone/>
+                        <a:tabLst/>
+                      </a:pPr>
+                      <a:r>
+                        <a:rPr kumimoji="0" lang="en-US" sz="2000" b="1" i="0" u="none" strike="noStrike" kern="1200" cap="none" normalizeH="0" baseline="0" dirty="0" err="1">
+                          <a:ln>
+                            <a:noFill/>
+                          </a:ln>
+                          <a:solidFill>
+                            <a:schemeClr val="tx1"/>
+                          </a:solidFill>
+                          <a:effectLst/>
+                          <a:latin typeface="Arial" charset="0"/>
+                          <a:ea typeface="+mn-ea"/>
+                          <a:cs typeface="+mn-cs"/>
+                        </a:rPr>
+                        <a:t>e</a:t>
+                      </a:r>
+                      <a:r>
+                        <a:rPr kumimoji="0" lang="en-US" sz="2000" b="0" i="0" u="none" strike="noStrike" kern="1200" cap="none" normalizeH="0" baseline="0" dirty="0" err="1">
+                          <a:ln>
+                            <a:noFill/>
+                          </a:ln>
+                          <a:solidFill>
+                            <a:schemeClr val="tx1"/>
+                          </a:solidFill>
+                          <a:effectLst/>
+                          <a:latin typeface="Arial" charset="0"/>
+                          <a:ea typeface="+mn-ea"/>
+                          <a:cs typeface="+mn-cs"/>
+                        </a:rPr>
+                        <a:t>,</a:t>
+                      </a:r>
+                      <a:r>
+                        <a:rPr kumimoji="0" lang="en-US" sz="2000" b="1" i="0" u="none" strike="noStrike" kern="1200" cap="none" normalizeH="0" baseline="0" dirty="0" err="1">
+                          <a:ln>
+                            <a:noFill/>
+                          </a:ln>
+                          <a:solidFill>
+                            <a:schemeClr val="tx1"/>
+                          </a:solidFill>
+                          <a:effectLst/>
+                          <a:latin typeface="Arial" charset="0"/>
+                          <a:ea typeface="+mn-ea"/>
+                          <a:cs typeface="+mn-cs"/>
+                        </a:rPr>
+                        <a:t>E</a:t>
+                      </a:r>
+                      <a:endParaRPr kumimoji="0" lang="en-US" sz="2000" b="1" i="0" u="none" strike="noStrike" kern="1200" cap="none" normalizeH="0" baseline="0" dirty="0">
+                        <a:ln>
+                          <a:noFill/>
+                        </a:ln>
+                        <a:solidFill>
+                          <a:schemeClr val="tx1"/>
+                        </a:solidFill>
+                        <a:effectLst/>
+                        <a:latin typeface="Arial" charset="0"/>
+                        <a:ea typeface="+mn-ea"/>
+                        <a:cs typeface="+mn-cs"/>
+                      </a:endParaRPr>
+                    </a:p>
+                  </a:txBody>
+                  <a:tcPr horzOverflow="overflow">
+                    <a:lnL w="28575" cap="flat" cmpd="sng" algn="ctr">
+                      <a:solidFill>
+                        <a:schemeClr val="tx1"/>
+                      </a:solidFill>
+                      <a:prstDash val="solid"/>
+                      <a:round/>
+                      <a:headEnd type="none" w="med" len="med"/>
+                      <a:tailEnd type="none" w="med" len="med"/>
+                    </a:lnL>
+                    <a:lnR w="12700" cap="flat" cmpd="sng" algn="ctr">
+                      <a:solidFill>
+                        <a:schemeClr val="tx1"/>
+                      </a:solidFill>
+                      <a:prstDash val="solid"/>
+                      <a:round/>
+                      <a:headEnd type="none" w="med" len="med"/>
+                      <a:tailEnd type="none" w="med" len="med"/>
+                    </a:lnR>
+                    <a:lnT w="12700" cap="flat" cmpd="sng" algn="ctr">
+                      <a:solidFill>
+                        <a:schemeClr val="tx1"/>
+                      </a:solidFill>
+                      <a:prstDash val="solid"/>
+                      <a:round/>
+                      <a:headEnd type="none" w="med" len="med"/>
+                      <a:tailEnd type="none" w="med" len="med"/>
+                    </a:lnT>
+                    <a:lnB w="12700" cap="flat" cmpd="sng" algn="ctr">
+                      <a:solidFill>
+                        <a:schemeClr val="tx1"/>
+                      </a:solidFill>
+                      <a:prstDash val="solid"/>
+                      <a:round/>
+                      <a:headEnd type="none" w="med" len="med"/>
+                      <a:tailEnd type="none" w="med" len="med"/>
+                    </a:lnB>
+                    <a:lnTlToBr>
+                      <a:noFill/>
+                    </a:lnTlToBr>
+                    <a:lnBlToTr>
+                      <a:noFill/>
+                    </a:lnBlToTr>
+                    <a:noFill/>
+                  </a:tcPr>
+                </a:tc>
+                <a:tc>
+                  <a:txBody>
+                    <a:bodyPr/>
+                    <a:lstStyle/>
+                    <a:p>
+                      <a:pPr marL="0" marR="0" lvl="0" indent="0" algn="l" defTabSz="914400" rtl="0" eaLnBrk="1" fontAlgn="base" latinLnBrk="0" hangingPunct="1">
+                        <a:lnSpc>
+                          <a:spcPct val="100000"/>
+                        </a:lnSpc>
+                        <a:spcBef>
+                          <a:spcPct val="20000"/>
+                        </a:spcBef>
+                        <a:spcAft>
+                          <a:spcPct val="0"/>
+                        </a:spcAft>
+                        <a:buClrTx/>
+                        <a:buSzTx/>
+                        <a:buFontTx/>
+                        <a:buNone/>
+                        <a:tabLst/>
+                      </a:pPr>
+                      <a:r>
+                        <a:rPr kumimoji="0" lang="en-US" sz="2000" b="0" i="0" u="none" strike="noStrike" cap="none" normalizeH="0" baseline="0">
+                          <a:ln>
+                            <a:noFill/>
+                          </a:ln>
+                          <a:solidFill>
+                            <a:schemeClr val="tx1"/>
+                          </a:solidFill>
+                          <a:effectLst/>
+                          <a:latin typeface="Arial" charset="0"/>
+                        </a:rPr>
+                        <a:t>Move to end of special character delimited word, whitespace delimited word</a:t>
+                      </a:r>
+                    </a:p>
+                  </a:txBody>
+                  <a:tcPr horzOverflow="overflow">
+                    <a:lnL w="12700" cap="flat" cmpd="sng" algn="ctr">
+                      <a:solidFill>
+                        <a:schemeClr val="tx1"/>
+                      </a:solidFill>
+                      <a:prstDash val="solid"/>
+                      <a:round/>
+                      <a:headEnd type="none" w="med" len="med"/>
+                      <a:tailEnd type="none" w="med" len="med"/>
+                    </a:lnL>
+                    <a:lnR w="28575" cap="flat" cmpd="sng" algn="ctr">
+                      <a:solidFill>
+                        <a:schemeClr val="tx1"/>
+                      </a:solidFill>
+                      <a:prstDash val="solid"/>
+                      <a:round/>
+                      <a:headEnd type="none" w="med" len="med"/>
+                      <a:tailEnd type="none" w="med" len="med"/>
+                    </a:lnR>
+                    <a:lnT w="12700" cap="flat" cmpd="sng" algn="ctr">
+                      <a:solidFill>
+                        <a:schemeClr val="tx1"/>
+                      </a:solidFill>
+                      <a:prstDash val="solid"/>
+                      <a:round/>
+                      <a:headEnd type="none" w="med" len="med"/>
+                      <a:tailEnd type="none" w="med" len="med"/>
+                    </a:lnT>
+                    <a:lnB w="12700" cap="flat" cmpd="sng" algn="ctr">
+                      <a:solidFill>
+                        <a:schemeClr val="tx1"/>
+                      </a:solidFill>
+                      <a:prstDash val="solid"/>
+                      <a:round/>
+                      <a:headEnd type="none" w="med" len="med"/>
+                      <a:tailEnd type="none" w="med" len="med"/>
+                    </a:lnB>
+                    <a:lnTlToBr>
+                      <a:noFill/>
+                    </a:lnTlToBr>
+                    <a:lnBlToTr>
+                      <a:noFill/>
+                    </a:lnBlToTr>
+                    <a:noFill/>
+                  </a:tcPr>
+                </a:tc>
+                <a:extLst>
+                  <a:ext uri="{0D108BD9-81ED-4DB2-BD59-A6C34878D82A}">
+                    <a16:rowId xmlns:a16="http://schemas.microsoft.com/office/drawing/2014/main" val="10002"/>
+                  </a:ext>
+                </a:extLst>
+              </a:tr>
+              <a:tr h="431482">
+                <a:tc>
+                  <a:txBody>
+                    <a:bodyPr/>
+                    <a:lstStyle/>
+                    <a:p>
+                      <a:pPr marL="0" marR="0" lvl="0" indent="0" algn="l" defTabSz="914400" rtl="0" eaLnBrk="1" fontAlgn="base" latinLnBrk="0" hangingPunct="1">
+                        <a:lnSpc>
+                          <a:spcPct val="100000"/>
+                        </a:lnSpc>
+                        <a:spcBef>
+                          <a:spcPct val="20000"/>
+                        </a:spcBef>
+                        <a:spcAft>
+                          <a:spcPct val="0"/>
+                        </a:spcAft>
+                        <a:buClrTx/>
+                        <a:buSzTx/>
+                        <a:buFontTx/>
+                        <a:buNone/>
+                        <a:tabLst/>
+                      </a:pPr>
+                      <a:r>
+                        <a:rPr kumimoji="0" lang="en-US" sz="2000" b="1" i="0" u="none" strike="noStrike" kern="1200" cap="none" normalizeH="0" baseline="0" dirty="0" err="1">
+                          <a:ln>
+                            <a:noFill/>
+                          </a:ln>
+                          <a:solidFill>
+                            <a:schemeClr val="tx1"/>
+                          </a:solidFill>
+                          <a:effectLst/>
+                          <a:latin typeface="Arial" charset="0"/>
+                          <a:ea typeface="+mn-ea"/>
+                          <a:cs typeface="+mn-cs"/>
+                        </a:rPr>
+                        <a:t>b</a:t>
+                      </a:r>
+                      <a:r>
+                        <a:rPr kumimoji="0" lang="en-US" sz="2000" b="0" i="0" u="none" strike="noStrike" kern="1200" cap="none" normalizeH="0" baseline="0" dirty="0" err="1">
+                          <a:ln>
+                            <a:noFill/>
+                          </a:ln>
+                          <a:solidFill>
+                            <a:schemeClr val="tx1"/>
+                          </a:solidFill>
+                          <a:effectLst/>
+                          <a:latin typeface="Arial" charset="0"/>
+                          <a:ea typeface="+mn-ea"/>
+                          <a:cs typeface="+mn-cs"/>
+                        </a:rPr>
+                        <a:t>,</a:t>
+                      </a:r>
+                      <a:r>
+                        <a:rPr kumimoji="0" lang="en-US" sz="2000" b="1" i="0" u="none" strike="noStrike" kern="1200" cap="none" normalizeH="0" baseline="0" dirty="0" err="1">
+                          <a:ln>
+                            <a:noFill/>
+                          </a:ln>
+                          <a:solidFill>
+                            <a:schemeClr val="tx1"/>
+                          </a:solidFill>
+                          <a:effectLst/>
+                          <a:latin typeface="Arial" charset="0"/>
+                          <a:ea typeface="+mn-ea"/>
+                          <a:cs typeface="+mn-cs"/>
+                        </a:rPr>
+                        <a:t>B</a:t>
+                      </a:r>
+                      <a:endParaRPr kumimoji="0" lang="en-US" sz="2000" b="1" i="0" u="none" strike="noStrike" kern="1200" cap="none" normalizeH="0" baseline="0" dirty="0">
+                        <a:ln>
+                          <a:noFill/>
+                        </a:ln>
+                        <a:solidFill>
+                          <a:schemeClr val="tx1"/>
+                        </a:solidFill>
+                        <a:effectLst/>
+                        <a:latin typeface="Arial" charset="0"/>
+                        <a:ea typeface="+mn-ea"/>
+                        <a:cs typeface="+mn-cs"/>
+                      </a:endParaRPr>
+                    </a:p>
+                  </a:txBody>
+                  <a:tcPr horzOverflow="overflow">
+                    <a:lnL w="28575" cap="flat" cmpd="sng" algn="ctr">
+                      <a:solidFill>
+                        <a:schemeClr val="tx1"/>
+                      </a:solidFill>
+                      <a:prstDash val="solid"/>
+                      <a:round/>
+                      <a:headEnd type="none" w="med" len="med"/>
+                      <a:tailEnd type="none" w="med" len="med"/>
+                    </a:lnL>
+                    <a:lnR w="12700" cap="flat" cmpd="sng" algn="ctr">
+                      <a:solidFill>
+                        <a:schemeClr val="tx1"/>
+                      </a:solidFill>
+                      <a:prstDash val="solid"/>
+                      <a:round/>
+                      <a:headEnd type="none" w="med" len="med"/>
+                      <a:tailEnd type="none" w="med" len="med"/>
+                    </a:lnR>
+                    <a:lnT w="12700" cap="flat" cmpd="sng" algn="ctr">
+                      <a:solidFill>
+                        <a:schemeClr val="tx1"/>
+                      </a:solidFill>
+                      <a:prstDash val="solid"/>
+                      <a:round/>
+                      <a:headEnd type="none" w="med" len="med"/>
+                      <a:tailEnd type="none" w="med" len="med"/>
+                    </a:lnT>
+                    <a:lnB w="12700" cap="flat" cmpd="sng" algn="ctr">
+                      <a:solidFill>
+                        <a:schemeClr val="tx1"/>
+                      </a:solidFill>
+                      <a:prstDash val="solid"/>
+                      <a:round/>
+                      <a:headEnd type="none" w="med" len="med"/>
+                      <a:tailEnd type="none" w="med" len="med"/>
+                    </a:lnB>
+                    <a:lnTlToBr>
+                      <a:noFill/>
+                    </a:lnTlToBr>
+                    <a:lnBlToTr>
+                      <a:noFill/>
+                    </a:lnBlToTr>
+                    <a:noFill/>
+                  </a:tcPr>
+                </a:tc>
+                <a:tc>
+                  <a:txBody>
+                    <a:bodyPr/>
+                    <a:lstStyle/>
+                    <a:p>
+                      <a:pPr marL="0" marR="0" lvl="0" indent="0" algn="l" defTabSz="914400" rtl="0" eaLnBrk="1" fontAlgn="base" latinLnBrk="0" hangingPunct="1">
+                        <a:lnSpc>
+                          <a:spcPct val="100000"/>
+                        </a:lnSpc>
+                        <a:spcBef>
+                          <a:spcPct val="20000"/>
+                        </a:spcBef>
+                        <a:spcAft>
+                          <a:spcPct val="0"/>
+                        </a:spcAft>
+                        <a:buClrTx/>
+                        <a:buSzTx/>
+                        <a:buFontTx/>
+                        <a:buNone/>
+                        <a:tabLst/>
+                      </a:pPr>
+                      <a:r>
+                        <a:rPr kumimoji="0" lang="en-US" sz="2000" b="0" i="0" u="none" strike="noStrike" cap="none" normalizeH="0" baseline="0">
+                          <a:ln>
+                            <a:noFill/>
+                          </a:ln>
+                          <a:solidFill>
+                            <a:schemeClr val="tx1"/>
+                          </a:solidFill>
+                          <a:effectLst/>
+                          <a:latin typeface="Arial" charset="0"/>
+                        </a:rPr>
+                        <a:t>Move back to beginning of special character delimited word, whitespace delimited word.</a:t>
+                      </a:r>
+                    </a:p>
+                  </a:txBody>
+                  <a:tcPr horzOverflow="overflow">
+                    <a:lnL w="12700" cap="flat" cmpd="sng" algn="ctr">
+                      <a:solidFill>
+                        <a:schemeClr val="tx1"/>
+                      </a:solidFill>
+                      <a:prstDash val="solid"/>
+                      <a:round/>
+                      <a:headEnd type="none" w="med" len="med"/>
+                      <a:tailEnd type="none" w="med" len="med"/>
+                    </a:lnL>
+                    <a:lnR w="28575" cap="flat" cmpd="sng" algn="ctr">
+                      <a:solidFill>
+                        <a:schemeClr val="tx1"/>
+                      </a:solidFill>
+                      <a:prstDash val="solid"/>
+                      <a:round/>
+                      <a:headEnd type="none" w="med" len="med"/>
+                      <a:tailEnd type="none" w="med" len="med"/>
+                    </a:lnR>
+                    <a:lnT w="12700" cap="flat" cmpd="sng" algn="ctr">
+                      <a:solidFill>
+                        <a:schemeClr val="tx1"/>
+                      </a:solidFill>
+                      <a:prstDash val="solid"/>
+                      <a:round/>
+                      <a:headEnd type="none" w="med" len="med"/>
+                      <a:tailEnd type="none" w="med" len="med"/>
+                    </a:lnT>
+                    <a:lnB w="12700" cap="flat" cmpd="sng" algn="ctr">
+                      <a:solidFill>
+                        <a:schemeClr val="tx1"/>
+                      </a:solidFill>
+                      <a:prstDash val="solid"/>
+                      <a:round/>
+                      <a:headEnd type="none" w="med" len="med"/>
+                      <a:tailEnd type="none" w="med" len="med"/>
+                    </a:lnB>
+                    <a:lnTlToBr>
+                      <a:noFill/>
+                    </a:lnTlToBr>
+                    <a:lnBlToTr>
+                      <a:noFill/>
+                    </a:lnBlToTr>
+                    <a:noFill/>
+                  </a:tcPr>
+                </a:tc>
+                <a:extLst>
+                  <a:ext uri="{0D108BD9-81ED-4DB2-BD59-A6C34878D82A}">
+                    <a16:rowId xmlns:a16="http://schemas.microsoft.com/office/drawing/2014/main" val="10003"/>
+                  </a:ext>
+                </a:extLst>
+              </a:tr>
+              <a:tr h="340042">
+                <a:tc>
+                  <a:txBody>
+                    <a:bodyPr/>
+                    <a:lstStyle/>
+                    <a:p>
+                      <a:pPr marL="0" marR="0" lvl="0" indent="0" algn="l" defTabSz="914400" rtl="0" eaLnBrk="1" fontAlgn="base" latinLnBrk="0" hangingPunct="1">
+                        <a:lnSpc>
+                          <a:spcPct val="100000"/>
+                        </a:lnSpc>
+                        <a:spcBef>
+                          <a:spcPct val="20000"/>
+                        </a:spcBef>
+                        <a:spcAft>
+                          <a:spcPct val="0"/>
+                        </a:spcAft>
+                        <a:buClrTx/>
+                        <a:buSzTx/>
+                        <a:buFontTx/>
+                        <a:buNone/>
+                        <a:tabLst/>
+                      </a:pPr>
+                      <a:r>
+                        <a:rPr kumimoji="0" lang="en-US" sz="2000" b="1" i="0" u="none" strike="noStrike" kern="1200" cap="none" normalizeH="0" baseline="0" dirty="0">
+                          <a:ln>
+                            <a:noFill/>
+                          </a:ln>
+                          <a:solidFill>
+                            <a:schemeClr val="tx1"/>
+                          </a:solidFill>
+                          <a:effectLst/>
+                          <a:latin typeface="Arial" charset="0"/>
+                          <a:ea typeface="+mn-ea"/>
+                          <a:cs typeface="+mn-cs"/>
+                        </a:rPr>
+                        <a:t>(</a:t>
+                      </a:r>
+                      <a:r>
+                        <a:rPr kumimoji="0" lang="en-US" sz="2000" b="0" i="0" u="none" strike="noStrike" kern="1200" cap="none" normalizeH="0" baseline="0" dirty="0">
+                          <a:ln>
+                            <a:noFill/>
+                          </a:ln>
+                          <a:solidFill>
+                            <a:schemeClr val="tx1"/>
+                          </a:solidFill>
+                          <a:effectLst/>
+                          <a:latin typeface="Arial" charset="0"/>
+                          <a:ea typeface="+mn-ea"/>
+                          <a:cs typeface="+mn-cs"/>
+                        </a:rPr>
+                        <a:t>,</a:t>
+                      </a:r>
+                      <a:r>
+                        <a:rPr kumimoji="0" lang="en-US" sz="2000" b="1" i="0" u="none" strike="noStrike" kern="1200" cap="none" normalizeH="0" baseline="0" dirty="0">
+                          <a:ln>
+                            <a:noFill/>
+                          </a:ln>
+                          <a:solidFill>
+                            <a:schemeClr val="tx1"/>
+                          </a:solidFill>
+                          <a:effectLst/>
+                          <a:latin typeface="Arial" charset="0"/>
+                          <a:ea typeface="+mn-ea"/>
+                          <a:cs typeface="+mn-cs"/>
+                        </a:rPr>
+                        <a:t>)</a:t>
+                      </a:r>
+                    </a:p>
+                  </a:txBody>
+                  <a:tcPr horzOverflow="overflow">
+                    <a:lnL w="28575" cap="flat" cmpd="sng" algn="ctr">
+                      <a:solidFill>
+                        <a:schemeClr val="tx1"/>
+                      </a:solidFill>
+                      <a:prstDash val="solid"/>
+                      <a:round/>
+                      <a:headEnd type="none" w="med" len="med"/>
+                      <a:tailEnd type="none" w="med" len="med"/>
+                    </a:lnL>
+                    <a:lnR w="12700" cap="flat" cmpd="sng" algn="ctr">
+                      <a:solidFill>
+                        <a:schemeClr val="tx1"/>
+                      </a:solidFill>
+                      <a:prstDash val="solid"/>
+                      <a:round/>
+                      <a:headEnd type="none" w="med" len="med"/>
+                      <a:tailEnd type="none" w="med" len="med"/>
+                    </a:lnR>
+                    <a:lnT w="12700" cap="flat" cmpd="sng" algn="ctr">
+                      <a:solidFill>
+                        <a:schemeClr val="tx1"/>
+                      </a:solidFill>
+                      <a:prstDash val="solid"/>
+                      <a:round/>
+                      <a:headEnd type="none" w="med" len="med"/>
+                      <a:tailEnd type="none" w="med" len="med"/>
+                    </a:lnT>
+                    <a:lnB w="12700" cap="flat" cmpd="sng" algn="ctr">
+                      <a:solidFill>
+                        <a:schemeClr val="tx1"/>
+                      </a:solidFill>
+                      <a:prstDash val="solid"/>
+                      <a:round/>
+                      <a:headEnd type="none" w="med" len="med"/>
+                      <a:tailEnd type="none" w="med" len="med"/>
+                    </a:lnB>
+                    <a:lnTlToBr>
+                      <a:noFill/>
+                    </a:lnTlToBr>
+                    <a:lnBlToTr>
+                      <a:noFill/>
+                    </a:lnBlToTr>
+                    <a:noFill/>
+                  </a:tcPr>
+                </a:tc>
+                <a:tc>
+                  <a:txBody>
+                    <a:bodyPr/>
+                    <a:lstStyle/>
+                    <a:p>
+                      <a:pPr marL="0" marR="0" lvl="0" indent="0" algn="l" defTabSz="914400" rtl="0" eaLnBrk="1" fontAlgn="base" latinLnBrk="0" hangingPunct="1">
+                        <a:lnSpc>
+                          <a:spcPct val="100000"/>
+                        </a:lnSpc>
+                        <a:spcBef>
+                          <a:spcPct val="20000"/>
+                        </a:spcBef>
+                        <a:spcAft>
+                          <a:spcPct val="0"/>
+                        </a:spcAft>
+                        <a:buClrTx/>
+                        <a:buSzTx/>
+                        <a:buFontTx/>
+                        <a:buNone/>
+                        <a:tabLst/>
+                      </a:pPr>
+                      <a:r>
+                        <a:rPr kumimoji="0" lang="en-US" sz="2000" b="0" i="0" u="none" strike="noStrike" cap="none" normalizeH="0" baseline="0" dirty="0">
+                          <a:ln>
+                            <a:noFill/>
+                          </a:ln>
+                          <a:solidFill>
+                            <a:schemeClr val="tx1"/>
+                          </a:solidFill>
+                          <a:effectLst/>
+                          <a:latin typeface="Arial" charset="0"/>
+                        </a:rPr>
+                        <a:t>Open or closed parenthesis, move to beginning, end of current sentence. </a:t>
+                      </a:r>
+                      <a:r>
+                        <a:rPr kumimoji="0" lang="en-US" sz="2000" b="0" i="0" u="none" strike="noStrike" cap="none" normalizeH="0" baseline="0" dirty="0" err="1">
+                          <a:ln>
+                            <a:noFill/>
+                          </a:ln>
+                          <a:solidFill>
+                            <a:schemeClr val="tx1"/>
+                          </a:solidFill>
+                          <a:effectLst/>
+                          <a:latin typeface="Arial" charset="0"/>
+                        </a:rPr>
+                        <a:t>Hľadá</a:t>
+                      </a:r>
+                      <a:r>
+                        <a:rPr kumimoji="0" lang="en-US" sz="2000" b="0" i="0" u="none" strike="noStrike" cap="none" normalizeH="0" baseline="0" dirty="0">
+                          <a:ln>
+                            <a:noFill/>
+                          </a:ln>
+                          <a:solidFill>
+                            <a:schemeClr val="tx1"/>
+                          </a:solidFill>
+                          <a:effectLst/>
+                          <a:latin typeface="Arial" charset="0"/>
+                        </a:rPr>
+                        <a:t> </a:t>
+                      </a:r>
+                      <a:r>
+                        <a:rPr kumimoji="0" lang="en-US" sz="2000" b="0" i="0" u="none" strike="noStrike" cap="none" normalizeH="0" baseline="0" dirty="0" err="1">
+                          <a:ln>
+                            <a:noFill/>
+                          </a:ln>
+                          <a:solidFill>
+                            <a:schemeClr val="tx1"/>
+                          </a:solidFill>
+                          <a:effectLst/>
+                          <a:latin typeface="Arial" charset="0"/>
+                        </a:rPr>
+                        <a:t>bodku</a:t>
+                      </a:r>
+                      <a:r>
+                        <a:rPr kumimoji="0" lang="en-US" sz="2000" b="0" i="0" u="none" strike="noStrike" cap="none" normalizeH="0" baseline="0" dirty="0">
+                          <a:ln>
+                            <a:noFill/>
+                          </a:ln>
+                          <a:solidFill>
+                            <a:schemeClr val="tx1"/>
+                          </a:solidFill>
+                          <a:effectLst/>
+                          <a:latin typeface="Arial" charset="0"/>
+                        </a:rPr>
+                        <a:t>…</a:t>
+                      </a:r>
+                    </a:p>
+                  </a:txBody>
+                  <a:tcPr horzOverflow="overflow">
+                    <a:lnL w="12700" cap="flat" cmpd="sng" algn="ctr">
+                      <a:solidFill>
+                        <a:schemeClr val="tx1"/>
+                      </a:solidFill>
+                      <a:prstDash val="solid"/>
+                      <a:round/>
+                      <a:headEnd type="none" w="med" len="med"/>
+                      <a:tailEnd type="none" w="med" len="med"/>
+                    </a:lnL>
+                    <a:lnR w="28575" cap="flat" cmpd="sng" algn="ctr">
+                      <a:solidFill>
+                        <a:schemeClr val="tx1"/>
+                      </a:solidFill>
+                      <a:prstDash val="solid"/>
+                      <a:round/>
+                      <a:headEnd type="none" w="med" len="med"/>
+                      <a:tailEnd type="none" w="med" len="med"/>
+                    </a:lnR>
+                    <a:lnT w="12700" cap="flat" cmpd="sng" algn="ctr">
+                      <a:solidFill>
+                        <a:schemeClr val="tx1"/>
+                      </a:solidFill>
+                      <a:prstDash val="solid"/>
+                      <a:round/>
+                      <a:headEnd type="none" w="med" len="med"/>
+                      <a:tailEnd type="none" w="med" len="med"/>
+                    </a:lnT>
+                    <a:lnB w="12700" cap="flat" cmpd="sng" algn="ctr">
+                      <a:solidFill>
+                        <a:schemeClr val="tx1"/>
+                      </a:solidFill>
+                      <a:prstDash val="solid"/>
+                      <a:round/>
+                      <a:headEnd type="none" w="med" len="med"/>
+                      <a:tailEnd type="none" w="med" len="med"/>
+                    </a:lnB>
+                    <a:lnTlToBr>
+                      <a:noFill/>
+                    </a:lnTlToBr>
+                    <a:lnBlToTr>
+                      <a:noFill/>
+                    </a:lnBlToTr>
+                    <a:noFill/>
+                  </a:tcPr>
+                </a:tc>
+                <a:extLst>
+                  <a:ext uri="{0D108BD9-81ED-4DB2-BD59-A6C34878D82A}">
+                    <a16:rowId xmlns:a16="http://schemas.microsoft.com/office/drawing/2014/main" val="10004"/>
+                  </a:ext>
+                </a:extLst>
+              </a:tr>
+              <a:tr h="452438">
+                <a:tc>
+                  <a:txBody>
+                    <a:bodyPr/>
+                    <a:lstStyle/>
+                    <a:p>
+                      <a:pPr marL="0" marR="0" lvl="0" indent="0" algn="l" defTabSz="914400" rtl="0" eaLnBrk="1" fontAlgn="base" latinLnBrk="0" hangingPunct="1">
+                        <a:lnSpc>
+                          <a:spcPct val="100000"/>
+                        </a:lnSpc>
+                        <a:spcBef>
+                          <a:spcPct val="20000"/>
+                        </a:spcBef>
+                        <a:spcAft>
+                          <a:spcPct val="0"/>
+                        </a:spcAft>
+                        <a:buClrTx/>
+                        <a:buSzTx/>
+                        <a:buFontTx/>
+                        <a:buNone/>
+                        <a:tabLst/>
+                      </a:pPr>
+                      <a:r>
+                        <a:rPr kumimoji="0" lang="en-US" sz="2000" b="1" i="0" u="none" strike="noStrike" kern="1200" cap="none" normalizeH="0" baseline="0" dirty="0">
+                          <a:ln>
+                            <a:noFill/>
+                          </a:ln>
+                          <a:solidFill>
+                            <a:schemeClr val="tx1"/>
+                          </a:solidFill>
+                          <a:effectLst/>
+                          <a:latin typeface="Arial" charset="0"/>
+                          <a:ea typeface="+mn-ea"/>
+                          <a:cs typeface="+mn-cs"/>
+                        </a:rPr>
+                        <a:t>{</a:t>
+                      </a:r>
+                      <a:r>
+                        <a:rPr kumimoji="0" lang="en-US" sz="2000" b="0" i="0" u="none" strike="noStrike" kern="1200" cap="none" normalizeH="0" baseline="0" dirty="0">
+                          <a:ln>
+                            <a:noFill/>
+                          </a:ln>
+                          <a:solidFill>
+                            <a:schemeClr val="tx1"/>
+                          </a:solidFill>
+                          <a:effectLst/>
+                          <a:latin typeface="Arial" charset="0"/>
+                          <a:ea typeface="+mn-ea"/>
+                          <a:cs typeface="+mn-cs"/>
+                        </a:rPr>
+                        <a:t>,</a:t>
+                      </a:r>
+                      <a:r>
+                        <a:rPr kumimoji="0" lang="en-US" sz="2000" b="1" i="0" u="none" strike="noStrike" kern="1200" cap="none" normalizeH="0" baseline="0" dirty="0">
+                          <a:ln>
+                            <a:noFill/>
+                          </a:ln>
+                          <a:solidFill>
+                            <a:schemeClr val="tx1"/>
+                          </a:solidFill>
+                          <a:effectLst/>
+                          <a:latin typeface="Arial" charset="0"/>
+                          <a:ea typeface="+mn-ea"/>
+                          <a:cs typeface="+mn-cs"/>
+                        </a:rPr>
+                        <a:t>}</a:t>
+                      </a:r>
+                    </a:p>
+                  </a:txBody>
+                  <a:tcPr horzOverflow="overflow">
+                    <a:lnL w="28575" cap="flat" cmpd="sng" algn="ctr">
+                      <a:solidFill>
+                        <a:schemeClr val="tx1"/>
+                      </a:solidFill>
+                      <a:prstDash val="solid"/>
+                      <a:round/>
+                      <a:headEnd type="none" w="med" len="med"/>
+                      <a:tailEnd type="none" w="med" len="med"/>
+                    </a:lnL>
+                    <a:lnR w="12700" cap="flat" cmpd="sng" algn="ctr">
+                      <a:solidFill>
+                        <a:schemeClr val="tx1"/>
+                      </a:solidFill>
+                      <a:prstDash val="solid"/>
+                      <a:round/>
+                      <a:headEnd type="none" w="med" len="med"/>
+                      <a:tailEnd type="none" w="med" len="med"/>
+                    </a:lnR>
+                    <a:lnT w="12700" cap="flat" cmpd="sng" algn="ctr">
+                      <a:solidFill>
+                        <a:schemeClr val="tx1"/>
+                      </a:solidFill>
+                      <a:prstDash val="solid"/>
+                      <a:round/>
+                      <a:headEnd type="none" w="med" len="med"/>
+                      <a:tailEnd type="none" w="med" len="med"/>
+                    </a:lnT>
+                    <a:lnB w="28575" cap="flat" cmpd="sng" algn="ctr">
+                      <a:solidFill>
+                        <a:schemeClr val="tx1"/>
+                      </a:solidFill>
+                      <a:prstDash val="solid"/>
+                      <a:round/>
+                      <a:headEnd type="none" w="med" len="med"/>
+                      <a:tailEnd type="none" w="med" len="med"/>
+                    </a:lnB>
+                    <a:lnTlToBr>
+                      <a:noFill/>
+                    </a:lnTlToBr>
+                    <a:lnBlToTr>
+                      <a:noFill/>
+                    </a:lnBlToTr>
+                    <a:noFill/>
+                  </a:tcPr>
+                </a:tc>
+                <a:tc>
+                  <a:txBody>
+                    <a:bodyPr/>
+                    <a:lstStyle/>
+                    <a:p>
+                      <a:pPr marL="0" marR="0" lvl="0" indent="0" algn="l" defTabSz="914400" rtl="0" eaLnBrk="1" fontAlgn="base" latinLnBrk="0" hangingPunct="1">
+                        <a:lnSpc>
+                          <a:spcPct val="100000"/>
+                        </a:lnSpc>
+                        <a:spcBef>
+                          <a:spcPct val="20000"/>
+                        </a:spcBef>
+                        <a:spcAft>
+                          <a:spcPct val="0"/>
+                        </a:spcAft>
+                        <a:buClrTx/>
+                        <a:buSzTx/>
+                        <a:buFontTx/>
+                        <a:buNone/>
+                        <a:tabLst/>
+                      </a:pPr>
+                      <a:r>
+                        <a:rPr kumimoji="0" lang="en-US" sz="2000" b="0" i="0" u="none" strike="noStrike" cap="none" normalizeH="0" baseline="0" dirty="0">
+                          <a:ln>
+                            <a:noFill/>
+                          </a:ln>
+                          <a:solidFill>
+                            <a:schemeClr val="tx1"/>
+                          </a:solidFill>
+                          <a:effectLst/>
+                          <a:latin typeface="Arial" charset="0"/>
+                        </a:rPr>
+                        <a:t>Open or closed curly braces, move to beginning, end of current paragraph.</a:t>
+                      </a:r>
+                    </a:p>
+                  </a:txBody>
+                  <a:tcPr horzOverflow="overflow">
+                    <a:lnL w="12700" cap="flat" cmpd="sng" algn="ctr">
+                      <a:solidFill>
+                        <a:schemeClr val="tx1"/>
+                      </a:solidFill>
+                      <a:prstDash val="solid"/>
+                      <a:round/>
+                      <a:headEnd type="none" w="med" len="med"/>
+                      <a:tailEnd type="none" w="med" len="med"/>
+                    </a:lnL>
+                    <a:lnR w="28575" cap="flat" cmpd="sng" algn="ctr">
+                      <a:solidFill>
+                        <a:schemeClr val="tx1"/>
+                      </a:solidFill>
+                      <a:prstDash val="solid"/>
+                      <a:round/>
+                      <a:headEnd type="none" w="med" len="med"/>
+                      <a:tailEnd type="none" w="med" len="med"/>
+                    </a:lnR>
+                    <a:lnT w="12700" cap="flat" cmpd="sng" algn="ctr">
+                      <a:solidFill>
+                        <a:schemeClr val="tx1"/>
+                      </a:solidFill>
+                      <a:prstDash val="solid"/>
+                      <a:round/>
+                      <a:headEnd type="none" w="med" len="med"/>
+                      <a:tailEnd type="none" w="med" len="med"/>
+                    </a:lnT>
+                    <a:lnB w="28575" cap="flat" cmpd="sng" algn="ctr">
+                      <a:solidFill>
+                        <a:schemeClr val="tx1"/>
+                      </a:solidFill>
+                      <a:prstDash val="solid"/>
+                      <a:round/>
+                      <a:headEnd type="none" w="med" len="med"/>
+                      <a:tailEnd type="none" w="med" len="med"/>
+                    </a:lnB>
+                    <a:lnTlToBr>
+                      <a:noFill/>
+                    </a:lnTlToBr>
+                    <a:lnBlToTr>
+                      <a:noFill/>
+                    </a:lnBlToTr>
+                    <a:noFill/>
+                  </a:tcPr>
+                </a:tc>
+                <a:extLst>
+                  <a:ext uri="{0D108BD9-81ED-4DB2-BD59-A6C34878D82A}">
+                    <a16:rowId xmlns:a16="http://schemas.microsoft.com/office/drawing/2014/main" val="10005"/>
+                  </a:ext>
+                </a:extLst>
+              </a:tr>
+            </a:tbl>
+          </a:graphicData>
+        </a:graphic>
+      </p:graphicFrame>
+      <p:sp>
+        <p:nvSpPr>
+          <p:cNvPr id="28698" name="Text Box 43">
+            <a:extLst>
+              <a:ext uri="{FF2B5EF4-FFF2-40B4-BE49-F238E27FC236}">
+                <a16:creationId xmlns:a16="http://schemas.microsoft.com/office/drawing/2014/main" id="{D4261A68-F1D0-433F-9951-D53D32711EBD}"/>
+              </a:ext>
+            </a:extLst>
+          </p:cNvPr>
+          <p:cNvSpPr txBox="1">
+            <a:spLocks noChangeArrowheads="1"/>
           </p:cNvSpPr>
-          <p:nvPr>
-            <p:ph idx="1"/>
-          </p:nvPr>
+          <p:nvPr/>
         </p:nvSpPr>
-        <p:spPr>
+        <p:spPr bwMode="auto">
           <a:xfrm>
-            <a:off x="457200" y="1600200"/>
-            <a:ext cx="8229600" cy="4525963"/>
+            <a:off x="381000" y="1295400"/>
+            <a:ext cx="2101850" cy="461963"/>
           </a:xfrm>
+          <a:prstGeom prst="rect">
+            <a:avLst/>
+          </a:prstGeom>
+          <a:noFill/>
+          <a:ln>
+            <a:noFill/>
+          </a:ln>
+          <a:extLst>
+            <a:ext uri="{909E8E84-426E-40DD-AFC4-6F175D3DCCD1}">
+              <a14:hiddenFill xmlns:a14="http://schemas.microsoft.com/office/drawing/2010/main">
+                <a:solidFill>
+                  <a:srgbClr val="FFFFFF"/>
+                </a:solidFill>
+              </a14:hiddenFill>
+            </a:ext>
+            <a:ext uri="{91240B29-F687-4F45-9708-019B960494DF}">
+              <a14:hiddenLine xmlns:a14="http://schemas.microsoft.com/office/drawing/2010/main" w="9525">
+                <a:solidFill>
+                  <a:srgbClr val="000000"/>
+                </a:solidFill>
+                <a:miter lim="800000"/>
+                <a:headEnd/>
+                <a:tailEnd/>
+              </a14:hiddenLine>
+            </a:ext>
+          </a:extLst>
         </p:spPr>
         <p:txBody>
-          <a:bodyPr/>
-          <a:lstStyle/>
-          <a:p>
-            <a:r>
-              <a:rPr lang="en-US" altLang="sk-SK" dirty="0"/>
-              <a:t>Contains two modes:</a:t>
-            </a:r>
-          </a:p>
-          <a:p>
-            <a:pPr lvl="1"/>
-            <a:r>
-              <a:rPr lang="en-US" altLang="sk-SK" b="1" dirty="0"/>
-              <a:t>insert</a:t>
-            </a:r>
-            <a:r>
-              <a:rPr lang="en-US" altLang="sk-SK" dirty="0"/>
-              <a:t> </a:t>
-            </a:r>
-          </a:p>
-          <a:p>
-            <a:pPr lvl="2"/>
-            <a:r>
-              <a:rPr lang="en-US" altLang="sk-SK" dirty="0"/>
-              <a:t>Used to </a:t>
-            </a:r>
-            <a:r>
-              <a:rPr lang="en-US" altLang="sk-SK" u="sng" dirty="0"/>
-              <a:t>enter text </a:t>
-            </a:r>
-            <a:r>
-              <a:rPr lang="en-US" altLang="sk-SK" dirty="0"/>
-              <a:t>into a file (exited via Esc key)</a:t>
-            </a:r>
-          </a:p>
-          <a:p>
-            <a:pPr lvl="2"/>
-            <a:r>
-              <a:rPr lang="en-US" altLang="sk-SK" dirty="0"/>
-              <a:t>Multiple ways to enter this mode</a:t>
-            </a:r>
-          </a:p>
-          <a:p>
-            <a:pPr lvl="2"/>
-            <a:r>
-              <a:rPr lang="en-US" altLang="sk-SK" dirty="0"/>
-              <a:t>Not efficient for navigation or editing!</a:t>
-            </a:r>
-          </a:p>
-          <a:p>
-            <a:pPr lvl="1"/>
-            <a:r>
-              <a:rPr lang="en-US" altLang="sk-SK" b="1" dirty="0"/>
-              <a:t>edit</a:t>
-            </a:r>
-            <a:r>
-              <a:rPr lang="en-US" altLang="sk-SK" dirty="0"/>
-              <a:t> – command line mode </a:t>
-            </a:r>
-          </a:p>
-          <a:p>
-            <a:pPr lvl="2"/>
-            <a:r>
-              <a:rPr lang="en-US" altLang="sk-SK" dirty="0"/>
-              <a:t>Default mode - Most powerful feature of the vi editor</a:t>
-            </a:r>
-          </a:p>
-          <a:p>
-            <a:pPr lvl="2"/>
-            <a:r>
-              <a:rPr lang="en-US" altLang="sk-SK" dirty="0"/>
-              <a:t>Allows for </a:t>
-            </a:r>
-            <a:r>
-              <a:rPr lang="en-US" altLang="sk-SK" u="sng" dirty="0"/>
-              <a:t>efficient navigation and editing of existing text</a:t>
-            </a:r>
-            <a:r>
-              <a:rPr lang="en-US" altLang="sk-SK" dirty="0"/>
-              <a:t>.</a:t>
-            </a:r>
-          </a:p>
-          <a:p>
-            <a:endParaRPr lang="en-US" altLang="sk-SK" dirty="0"/>
+          <a:bodyPr wrap="none">
+            <a:spAutoFit/>
+          </a:bodyPr>
+          <a:lstStyle>
+            <a:lvl1pPr>
+              <a:spcBef>
+                <a:spcPct val="20000"/>
+              </a:spcBef>
+              <a:buChar char="•"/>
+              <a:defRPr sz="3200">
+                <a:solidFill>
+                  <a:schemeClr val="tx1"/>
+                </a:solidFill>
+                <a:latin typeface="Arial" panose="020B0604020202020204" pitchFamily="34" charset="0"/>
+              </a:defRPr>
+            </a:lvl1pPr>
+            <a:lvl2pPr marL="742950" indent="-285750">
+              <a:spcBef>
+                <a:spcPct val="20000"/>
+              </a:spcBef>
+              <a:buChar char="–"/>
+              <a:defRPr sz="2800">
+                <a:solidFill>
+                  <a:schemeClr val="tx1"/>
+                </a:solidFill>
+                <a:latin typeface="Arial" panose="020B0604020202020204" pitchFamily="34" charset="0"/>
+              </a:defRPr>
+            </a:lvl2pPr>
+            <a:lvl3pPr marL="1143000" indent="-228600">
+              <a:spcBef>
+                <a:spcPct val="20000"/>
+              </a:spcBef>
+              <a:buChar char="•"/>
+              <a:defRPr sz="2400">
+                <a:solidFill>
+                  <a:schemeClr val="tx1"/>
+                </a:solidFill>
+                <a:latin typeface="Arial" panose="020B0604020202020204" pitchFamily="34" charset="0"/>
+              </a:defRPr>
+            </a:lvl3pPr>
+            <a:lvl4pPr marL="1600200" indent="-228600">
+              <a:spcBef>
+                <a:spcPct val="20000"/>
+              </a:spcBef>
+              <a:buChar char="–"/>
+              <a:defRPr sz="2000">
+                <a:solidFill>
+                  <a:schemeClr val="tx1"/>
+                </a:solidFill>
+                <a:latin typeface="Arial" panose="020B0604020202020204" pitchFamily="34" charset="0"/>
+              </a:defRPr>
+            </a:lvl4pPr>
+            <a:lvl5pPr marL="2057400" indent="-228600">
+              <a:spcBef>
+                <a:spcPct val="20000"/>
+              </a:spcBef>
+              <a:buChar char="»"/>
+              <a:defRPr sz="2000">
+                <a:solidFill>
+                  <a:schemeClr val="tx1"/>
+                </a:solidFill>
+                <a:latin typeface="Arial" panose="020B0604020202020204" pitchFamily="34" charset="0"/>
+              </a:defRPr>
+            </a:lvl5pPr>
+            <a:lvl6pPr marL="2514600" indent="-228600" eaLnBrk="0" fontAlgn="base" hangingPunct="0">
+              <a:spcBef>
+                <a:spcPct val="20000"/>
+              </a:spcBef>
+              <a:spcAft>
+                <a:spcPct val="0"/>
+              </a:spcAft>
+              <a:buChar char="»"/>
+              <a:defRPr sz="2000">
+                <a:solidFill>
+                  <a:schemeClr val="tx1"/>
+                </a:solidFill>
+                <a:latin typeface="Arial" panose="020B0604020202020204" pitchFamily="34" charset="0"/>
+              </a:defRPr>
+            </a:lvl6pPr>
+            <a:lvl7pPr marL="2971800" indent="-228600" eaLnBrk="0" fontAlgn="base" hangingPunct="0">
+              <a:spcBef>
+                <a:spcPct val="20000"/>
+              </a:spcBef>
+              <a:spcAft>
+                <a:spcPct val="0"/>
+              </a:spcAft>
+              <a:buChar char="»"/>
+              <a:defRPr sz="2000">
+                <a:solidFill>
+                  <a:schemeClr val="tx1"/>
+                </a:solidFill>
+                <a:latin typeface="Arial" panose="020B0604020202020204" pitchFamily="34" charset="0"/>
+              </a:defRPr>
+            </a:lvl7pPr>
+            <a:lvl8pPr marL="3429000" indent="-228600" eaLnBrk="0" fontAlgn="base" hangingPunct="0">
+              <a:spcBef>
+                <a:spcPct val="20000"/>
+              </a:spcBef>
+              <a:spcAft>
+                <a:spcPct val="0"/>
+              </a:spcAft>
+              <a:buChar char="»"/>
+              <a:defRPr sz="2000">
+                <a:solidFill>
+                  <a:schemeClr val="tx1"/>
+                </a:solidFill>
+                <a:latin typeface="Arial" panose="020B0604020202020204" pitchFamily="34" charset="0"/>
+              </a:defRPr>
+            </a:lvl8pPr>
+            <a:lvl9pPr marL="3886200" indent="-228600" eaLnBrk="0" fontAlgn="base" hangingPunct="0">
+              <a:spcBef>
+                <a:spcPct val="20000"/>
+              </a:spcBef>
+              <a:spcAft>
+                <a:spcPct val="0"/>
+              </a:spcAft>
+              <a:buChar char="»"/>
+              <a:defRPr sz="2000">
+                <a:solidFill>
+                  <a:schemeClr val="tx1"/>
+                </a:solidFill>
+                <a:latin typeface="Arial" panose="020B0604020202020204" pitchFamily="34" charset="0"/>
+              </a:defRPr>
+            </a:lvl9pPr>
+          </a:lstStyle>
+          <a:p>
+            <a:pPr eaLnBrk="1" hangingPunct="1">
+              <a:spcBef>
+                <a:spcPct val="0"/>
+              </a:spcBef>
+              <a:buFontTx/>
+              <a:buNone/>
+            </a:pPr>
+            <a:r>
+              <a:rPr lang="en-US" altLang="sk-SK" sz="2400" i="1"/>
+              <a:t>n</a:t>
+            </a:r>
+            <a:r>
+              <a:rPr lang="en-US" altLang="sk-SK" sz="2400" b="1" i="1"/>
+              <a:t>c</a:t>
+            </a:r>
+            <a:r>
+              <a:rPr lang="en-US" altLang="sk-SK" sz="2400"/>
+              <a:t> where </a:t>
+            </a:r>
+            <a:r>
+              <a:rPr lang="en-US" altLang="sk-SK" sz="2400" b="1" i="1"/>
+              <a:t>c</a:t>
+            </a:r>
+            <a:r>
+              <a:rPr lang="en-US" altLang="sk-SK" sz="2400"/>
+              <a:t> is:</a:t>
+            </a:r>
           </a:p>
         </p:txBody>
       </p:sp>
@@ -6058,7 +7797,7 @@
           <a:p>
             <a:r>
               <a:rPr lang="en-US" altLang="sk-SK"/>
-              <a:t>edit mode</a:t>
+              <a:t>command mode</a:t>
             </a:r>
           </a:p>
         </p:txBody>
@@ -6085,8 +7824,12 @@
           <a:lstStyle/>
           <a:p>
             <a:r>
+              <a:rPr lang="en-US" altLang="sk-SK"/>
+              <a:t>The default mode also has two sub </a:t>
+            </a:r>
+            <a:r>
               <a:rPr lang="en-US" altLang="sk-SK" dirty="0"/>
-              <a:t>The default edit mode also has two sub modes</a:t>
+              <a:t>modes</a:t>
             </a:r>
           </a:p>
           <a:p>
@@ -6170,10 +7913,10 @@
             <a:pPr eaLnBrk="1" hangingPunct="1"/>
             <a:r>
               <a:rPr lang="en-US" altLang="sk-SK"/>
-              <a:t>Edit mode</a:t>
+              <a:t>Command mode</a:t>
             </a:r>
             <a:br>
-              <a:rPr lang="en-US" altLang="sk-SK"/>
+              <a:rPr lang="en-US" altLang="sk-SK" dirty="0"/>
             </a:br>
             <a:r>
               <a:rPr lang="en-US" altLang="sk-SK"/>
@@ -10044,1825 +11787,6 @@
       </p:grpSpPr>
       <p:sp>
         <p:nvSpPr>
-          <p:cNvPr id="28674" name="Rectangle 2">
-            <a:extLst>
-              <a:ext uri="{FF2B5EF4-FFF2-40B4-BE49-F238E27FC236}">
-                <a16:creationId xmlns:a16="http://schemas.microsoft.com/office/drawing/2014/main" id="{E7C9BE1B-41F6-4414-BBB4-E96F2DD719C1}"/>
-              </a:ext>
-            </a:extLst>
-          </p:cNvPr>
-          <p:cNvSpPr>
-            <a:spLocks noGrp="1" noChangeArrowheads="1"/>
-          </p:cNvSpPr>
-          <p:nvPr>
-            <p:ph type="title"/>
-          </p:nvPr>
-        </p:nvSpPr>
-        <p:spPr/>
-        <p:txBody>
-          <a:bodyPr/>
-          <a:lstStyle/>
-          <a:p>
-            <a:pPr eaLnBrk="1" hangingPunct="1"/>
-            <a:r>
-              <a:rPr lang="en-US" altLang="sk-SK"/>
-              <a:t>Navigation Commands</a:t>
-            </a:r>
-          </a:p>
-        </p:txBody>
-      </p:sp>
-      <p:graphicFrame>
-        <p:nvGraphicFramePr>
-          <p:cNvPr id="10282" name="Group 42">
-            <a:extLst>
-              <a:ext uri="{FF2B5EF4-FFF2-40B4-BE49-F238E27FC236}">
-                <a16:creationId xmlns:a16="http://schemas.microsoft.com/office/drawing/2014/main" id="{7177DBCB-29AC-442A-8060-454ADC800A30}"/>
-              </a:ext>
-            </a:extLst>
-          </p:cNvPr>
-          <p:cNvGraphicFramePr>
-            <a:graphicFrameLocks noGrp="1"/>
-          </p:cNvGraphicFramePr>
-          <p:nvPr>
-            <p:ph type="tbl" idx="1"/>
-            <p:extLst>
-              <p:ext uri="{D42A27DB-BD31-4B8C-83A1-F6EECF244321}">
-                <p14:modId xmlns:p14="http://schemas.microsoft.com/office/powerpoint/2010/main" val="1605009762"/>
-              </p:ext>
-            </p:extLst>
-          </p:nvPr>
-        </p:nvGraphicFramePr>
-        <p:xfrm>
-          <a:off x="457200" y="1905000"/>
-          <a:ext cx="8229600" cy="3957638"/>
-        </p:xfrm>
-        <a:graphic>
-          <a:graphicData uri="http://schemas.openxmlformats.org/drawingml/2006/table">
-            <a:tbl>
-              <a:tblPr/>
-              <a:tblGrid>
-                <a:gridCol w="2057400">
-                  <a:extLst>
-                    <a:ext uri="{9D8B030D-6E8A-4147-A177-3AD203B41FA5}">
-                      <a16:colId xmlns:a16="http://schemas.microsoft.com/office/drawing/2014/main" val="20000"/>
-                    </a:ext>
-                  </a:extLst>
-                </a:gridCol>
-                <a:gridCol w="6172200">
-                  <a:extLst>
-                    <a:ext uri="{9D8B030D-6E8A-4147-A177-3AD203B41FA5}">
-                      <a16:colId xmlns:a16="http://schemas.microsoft.com/office/drawing/2014/main" val="20001"/>
-                    </a:ext>
-                  </a:extLst>
-                </a:gridCol>
-              </a:tblGrid>
-              <a:tr h="452438">
-                <a:tc>
-                  <a:txBody>
-                    <a:bodyPr/>
-                    <a:lstStyle/>
-                    <a:p>
-                      <a:pPr marL="0" marR="0" lvl="0" indent="0" algn="l" defTabSz="914400" rtl="0" eaLnBrk="1" fontAlgn="base" latinLnBrk="0" hangingPunct="1">
-                        <a:lnSpc>
-                          <a:spcPct val="100000"/>
-                        </a:lnSpc>
-                        <a:spcBef>
-                          <a:spcPct val="20000"/>
-                        </a:spcBef>
-                        <a:spcAft>
-                          <a:spcPct val="0"/>
-                        </a:spcAft>
-                        <a:buClrTx/>
-                        <a:buSzTx/>
-                        <a:buFontTx/>
-                        <a:buNone/>
-                        <a:tabLst/>
-                      </a:pPr>
-                      <a:r>
-                        <a:rPr kumimoji="0" lang="en-US" sz="2000" b="1" i="0" u="none" strike="noStrike" cap="none" normalizeH="0" baseline="0" dirty="0" err="1">
-                          <a:ln>
-                            <a:noFill/>
-                          </a:ln>
-                          <a:solidFill>
-                            <a:schemeClr val="tx1"/>
-                          </a:solidFill>
-                          <a:effectLst/>
-                          <a:latin typeface="Arial" charset="0"/>
-                        </a:rPr>
-                        <a:t>h</a:t>
-                      </a:r>
-                      <a:r>
-                        <a:rPr kumimoji="0" lang="en-US" sz="2000" b="0" i="0" u="none" strike="noStrike" cap="none" normalizeH="0" baseline="0" dirty="0" err="1">
-                          <a:ln>
-                            <a:noFill/>
-                          </a:ln>
-                          <a:solidFill>
-                            <a:schemeClr val="tx1"/>
-                          </a:solidFill>
-                          <a:effectLst/>
-                          <a:latin typeface="Arial" charset="0"/>
-                        </a:rPr>
-                        <a:t>,</a:t>
-                      </a:r>
-                      <a:r>
-                        <a:rPr kumimoji="0" lang="en-US" sz="2000" b="1" i="0" u="none" strike="noStrike" cap="none" normalizeH="0" baseline="0" dirty="0" err="1">
-                          <a:ln>
-                            <a:noFill/>
-                          </a:ln>
-                          <a:solidFill>
-                            <a:schemeClr val="tx1"/>
-                          </a:solidFill>
-                          <a:effectLst/>
-                          <a:latin typeface="Arial" charset="0"/>
-                        </a:rPr>
-                        <a:t>j</a:t>
-                      </a:r>
-                      <a:r>
-                        <a:rPr kumimoji="0" lang="en-US" sz="2000" b="0" i="0" u="none" strike="noStrike" kern="1200" cap="none" normalizeH="0" baseline="0" dirty="0" err="1">
-                          <a:ln>
-                            <a:noFill/>
-                          </a:ln>
-                          <a:solidFill>
-                            <a:schemeClr val="tx1"/>
-                          </a:solidFill>
-                          <a:effectLst/>
-                          <a:latin typeface="Arial" charset="0"/>
-                          <a:ea typeface="+mn-ea"/>
-                          <a:cs typeface="+mn-cs"/>
-                        </a:rPr>
-                        <a:t>,</a:t>
-                      </a:r>
-                      <a:r>
-                        <a:rPr kumimoji="0" lang="en-US" sz="2000" b="1" i="0" u="none" strike="noStrike" cap="none" normalizeH="0" baseline="0" dirty="0" err="1">
-                          <a:ln>
-                            <a:noFill/>
-                          </a:ln>
-                          <a:solidFill>
-                            <a:schemeClr val="tx1"/>
-                          </a:solidFill>
-                          <a:effectLst/>
-                          <a:latin typeface="Arial" charset="0"/>
-                        </a:rPr>
-                        <a:t>k</a:t>
-                      </a:r>
-                      <a:r>
-                        <a:rPr kumimoji="0" lang="en-US" sz="2000" b="0" i="0" u="none" strike="noStrike" kern="1200" cap="none" normalizeH="0" baseline="0" dirty="0" err="1">
-                          <a:ln>
-                            <a:noFill/>
-                          </a:ln>
-                          <a:solidFill>
-                            <a:schemeClr val="tx1"/>
-                          </a:solidFill>
-                          <a:effectLst/>
-                          <a:latin typeface="Arial" charset="0"/>
-                          <a:ea typeface="+mn-ea"/>
-                          <a:cs typeface="+mn-cs"/>
-                        </a:rPr>
-                        <a:t>,</a:t>
-                      </a:r>
-                      <a:r>
-                        <a:rPr kumimoji="0" lang="en-US" sz="2000" b="1" i="0" u="none" strike="noStrike" cap="none" normalizeH="0" baseline="0" dirty="0" err="1">
-                          <a:ln>
-                            <a:noFill/>
-                          </a:ln>
-                          <a:solidFill>
-                            <a:schemeClr val="tx1"/>
-                          </a:solidFill>
-                          <a:effectLst/>
-                          <a:latin typeface="Arial" charset="0"/>
-                        </a:rPr>
-                        <a:t>l</a:t>
-                      </a:r>
-                      <a:endParaRPr kumimoji="0" lang="en-US" sz="2000" b="1" i="0" u="none" strike="noStrike" cap="none" normalizeH="0" baseline="0" dirty="0">
-                        <a:ln>
-                          <a:noFill/>
-                        </a:ln>
-                        <a:solidFill>
-                          <a:schemeClr val="tx1"/>
-                        </a:solidFill>
-                        <a:effectLst/>
-                        <a:latin typeface="Arial" charset="0"/>
-                      </a:endParaRPr>
-                    </a:p>
-                  </a:txBody>
-                  <a:tcPr horzOverflow="overflow">
-                    <a:lnL w="28575" cap="flat" cmpd="sng" algn="ctr">
-                      <a:solidFill>
-                        <a:schemeClr val="tx1"/>
-                      </a:solidFill>
-                      <a:prstDash val="solid"/>
-                      <a:round/>
-                      <a:headEnd type="none" w="med" len="med"/>
-                      <a:tailEnd type="none" w="med" len="med"/>
-                    </a:lnL>
-                    <a:lnR w="12700" cap="flat" cmpd="sng" algn="ctr">
-                      <a:solidFill>
-                        <a:schemeClr val="tx1"/>
-                      </a:solidFill>
-                      <a:prstDash val="solid"/>
-                      <a:round/>
-                      <a:headEnd type="none" w="med" len="med"/>
-                      <a:tailEnd type="none" w="med" len="med"/>
-                    </a:lnR>
-                    <a:lnT w="28575" cap="flat" cmpd="sng" algn="ctr">
-                      <a:solidFill>
-                        <a:schemeClr val="tx1"/>
-                      </a:solidFill>
-                      <a:prstDash val="solid"/>
-                      <a:round/>
-                      <a:headEnd type="none" w="med" len="med"/>
-                      <a:tailEnd type="none" w="med" len="med"/>
-                    </a:lnT>
-                    <a:lnB w="12700" cap="flat" cmpd="sng" algn="ctr">
-                      <a:solidFill>
-                        <a:schemeClr val="tx1"/>
-                      </a:solidFill>
-                      <a:prstDash val="solid"/>
-                      <a:round/>
-                      <a:headEnd type="none" w="med" len="med"/>
-                      <a:tailEnd type="none" w="med" len="med"/>
-                    </a:lnB>
-                    <a:lnTlToBr>
-                      <a:noFill/>
-                    </a:lnTlToBr>
-                    <a:lnBlToTr>
-                      <a:noFill/>
-                    </a:lnBlToTr>
-                    <a:noFill/>
-                  </a:tcPr>
-                </a:tc>
-                <a:tc>
-                  <a:txBody>
-                    <a:bodyPr/>
-                    <a:lstStyle/>
-                    <a:p>
-                      <a:pPr marL="0" marR="0" lvl="0" indent="0" algn="l" defTabSz="914400" rtl="0" eaLnBrk="1" fontAlgn="base" latinLnBrk="0" hangingPunct="1">
-                        <a:lnSpc>
-                          <a:spcPct val="100000"/>
-                        </a:lnSpc>
-                        <a:spcBef>
-                          <a:spcPct val="20000"/>
-                        </a:spcBef>
-                        <a:spcAft>
-                          <a:spcPct val="0"/>
-                        </a:spcAft>
-                        <a:buClrTx/>
-                        <a:buSzTx/>
-                        <a:buFontTx/>
-                        <a:buNone/>
-                        <a:tabLst/>
-                      </a:pPr>
-                      <a:r>
-                        <a:rPr kumimoji="0" lang="en-US" sz="2000" b="0" i="0" u="none" strike="noStrike" cap="none" normalizeH="0" baseline="0">
-                          <a:ln>
-                            <a:noFill/>
-                          </a:ln>
-                          <a:solidFill>
-                            <a:schemeClr val="tx1"/>
-                          </a:solidFill>
-                          <a:effectLst/>
-                          <a:latin typeface="Arial" charset="0"/>
-                        </a:rPr>
-                        <a:t>Move cursor left, down, up, or right characters</a:t>
-                      </a:r>
-                    </a:p>
-                  </a:txBody>
-                  <a:tcPr horzOverflow="overflow">
-                    <a:lnL w="12700" cap="flat" cmpd="sng" algn="ctr">
-                      <a:solidFill>
-                        <a:schemeClr val="tx1"/>
-                      </a:solidFill>
-                      <a:prstDash val="solid"/>
-                      <a:round/>
-                      <a:headEnd type="none" w="med" len="med"/>
-                      <a:tailEnd type="none" w="med" len="med"/>
-                    </a:lnL>
-                    <a:lnR w="28575" cap="flat" cmpd="sng" algn="ctr">
-                      <a:solidFill>
-                        <a:schemeClr val="tx1"/>
-                      </a:solidFill>
-                      <a:prstDash val="solid"/>
-                      <a:round/>
-                      <a:headEnd type="none" w="med" len="med"/>
-                      <a:tailEnd type="none" w="med" len="med"/>
-                    </a:lnR>
-                    <a:lnT w="28575" cap="flat" cmpd="sng" algn="ctr">
-                      <a:solidFill>
-                        <a:schemeClr val="tx1"/>
-                      </a:solidFill>
-                      <a:prstDash val="solid"/>
-                      <a:round/>
-                      <a:headEnd type="none" w="med" len="med"/>
-                      <a:tailEnd type="none" w="med" len="med"/>
-                    </a:lnT>
-                    <a:lnB w="12700" cap="flat" cmpd="sng" algn="ctr">
-                      <a:solidFill>
-                        <a:schemeClr val="tx1"/>
-                      </a:solidFill>
-                      <a:prstDash val="solid"/>
-                      <a:round/>
-                      <a:headEnd type="none" w="med" len="med"/>
-                      <a:tailEnd type="none" w="med" len="med"/>
-                    </a:lnB>
-                    <a:lnTlToBr>
-                      <a:noFill/>
-                    </a:lnTlToBr>
-                    <a:lnBlToTr>
-                      <a:noFill/>
-                    </a:lnBlToTr>
-                    <a:noFill/>
-                  </a:tcPr>
-                </a:tc>
-                <a:extLst>
-                  <a:ext uri="{0D108BD9-81ED-4DB2-BD59-A6C34878D82A}">
-                    <a16:rowId xmlns:a16="http://schemas.microsoft.com/office/drawing/2014/main" val="10000"/>
-                  </a:ext>
-                </a:extLst>
-              </a:tr>
-              <a:tr h="452438">
-                <a:tc>
-                  <a:txBody>
-                    <a:bodyPr/>
-                    <a:lstStyle/>
-                    <a:p>
-                      <a:pPr marL="0" marR="0" lvl="0" indent="0" algn="l" defTabSz="914400" rtl="0" eaLnBrk="1" fontAlgn="base" latinLnBrk="0" hangingPunct="1">
-                        <a:lnSpc>
-                          <a:spcPct val="100000"/>
-                        </a:lnSpc>
-                        <a:spcBef>
-                          <a:spcPct val="20000"/>
-                        </a:spcBef>
-                        <a:spcAft>
-                          <a:spcPct val="0"/>
-                        </a:spcAft>
-                        <a:buClrTx/>
-                        <a:buSzTx/>
-                        <a:buFontTx/>
-                        <a:buNone/>
-                        <a:tabLst/>
-                      </a:pPr>
-                      <a:r>
-                        <a:rPr kumimoji="0" lang="en-US" sz="2000" b="1" i="0" u="none" strike="noStrike" cap="none" normalizeH="0" baseline="0" dirty="0" err="1">
-                          <a:ln>
-                            <a:noFill/>
-                          </a:ln>
-                          <a:solidFill>
-                            <a:schemeClr val="tx1"/>
-                          </a:solidFill>
-                          <a:effectLst/>
-                          <a:latin typeface="Arial" charset="0"/>
-                        </a:rPr>
-                        <a:t>w</a:t>
-                      </a:r>
-                      <a:r>
-                        <a:rPr kumimoji="0" lang="en-US" sz="2000" b="0" i="0" u="none" strike="noStrike" kern="1200" cap="none" normalizeH="0" baseline="0" dirty="0" err="1">
-                          <a:ln>
-                            <a:noFill/>
-                          </a:ln>
-                          <a:solidFill>
-                            <a:schemeClr val="tx1"/>
-                          </a:solidFill>
-                          <a:effectLst/>
-                          <a:latin typeface="Arial" charset="0"/>
-                          <a:ea typeface="+mn-ea"/>
-                          <a:cs typeface="+mn-cs"/>
-                        </a:rPr>
-                        <a:t>,</a:t>
-                      </a:r>
-                      <a:r>
-                        <a:rPr kumimoji="0" lang="en-US" sz="2000" b="1" i="0" u="none" strike="noStrike" cap="none" normalizeH="0" baseline="0" dirty="0" err="1">
-                          <a:ln>
-                            <a:noFill/>
-                          </a:ln>
-                          <a:solidFill>
-                            <a:schemeClr val="tx1"/>
-                          </a:solidFill>
-                          <a:effectLst/>
-                          <a:latin typeface="Arial" charset="0"/>
-                        </a:rPr>
-                        <a:t>W</a:t>
-                      </a:r>
-                      <a:endParaRPr kumimoji="0" lang="en-US" sz="2000" b="1" i="0" u="none" strike="noStrike" cap="none" normalizeH="0" baseline="0" dirty="0">
-                        <a:ln>
-                          <a:noFill/>
-                        </a:ln>
-                        <a:solidFill>
-                          <a:schemeClr val="tx1"/>
-                        </a:solidFill>
-                        <a:effectLst/>
-                        <a:latin typeface="Arial" charset="0"/>
-                      </a:endParaRPr>
-                    </a:p>
-                  </a:txBody>
-                  <a:tcPr horzOverflow="overflow">
-                    <a:lnL w="28575" cap="flat" cmpd="sng" algn="ctr">
-                      <a:solidFill>
-                        <a:schemeClr val="tx1"/>
-                      </a:solidFill>
-                      <a:prstDash val="solid"/>
-                      <a:round/>
-                      <a:headEnd type="none" w="med" len="med"/>
-                      <a:tailEnd type="none" w="med" len="med"/>
-                    </a:lnL>
-                    <a:lnR w="12700" cap="flat" cmpd="sng" algn="ctr">
-                      <a:solidFill>
-                        <a:schemeClr val="tx1"/>
-                      </a:solidFill>
-                      <a:prstDash val="solid"/>
-                      <a:round/>
-                      <a:headEnd type="none" w="med" len="med"/>
-                      <a:tailEnd type="none" w="med" len="med"/>
-                    </a:lnR>
-                    <a:lnT w="12700" cap="flat" cmpd="sng" algn="ctr">
-                      <a:solidFill>
-                        <a:schemeClr val="tx1"/>
-                      </a:solidFill>
-                      <a:prstDash val="solid"/>
-                      <a:round/>
-                      <a:headEnd type="none" w="med" len="med"/>
-                      <a:tailEnd type="none" w="med" len="med"/>
-                    </a:lnT>
-                    <a:lnB w="12700" cap="flat" cmpd="sng" algn="ctr">
-                      <a:solidFill>
-                        <a:schemeClr val="tx1"/>
-                      </a:solidFill>
-                      <a:prstDash val="solid"/>
-                      <a:round/>
-                      <a:headEnd type="none" w="med" len="med"/>
-                      <a:tailEnd type="none" w="med" len="med"/>
-                    </a:lnB>
-                    <a:lnTlToBr>
-                      <a:noFill/>
-                    </a:lnTlToBr>
-                    <a:lnBlToTr>
-                      <a:noFill/>
-                    </a:lnBlToTr>
-                    <a:noFill/>
-                  </a:tcPr>
-                </a:tc>
-                <a:tc>
-                  <a:txBody>
-                    <a:bodyPr/>
-                    <a:lstStyle/>
-                    <a:p>
-                      <a:pPr marL="0" marR="0" lvl="0" indent="0" algn="l" defTabSz="914400" rtl="0" eaLnBrk="1" fontAlgn="base" latinLnBrk="0" hangingPunct="1">
-                        <a:lnSpc>
-                          <a:spcPct val="100000"/>
-                        </a:lnSpc>
-                        <a:spcBef>
-                          <a:spcPct val="20000"/>
-                        </a:spcBef>
-                        <a:spcAft>
-                          <a:spcPct val="0"/>
-                        </a:spcAft>
-                        <a:buClrTx/>
-                        <a:buSzTx/>
-                        <a:buFontTx/>
-                        <a:buNone/>
-                        <a:tabLst/>
-                      </a:pPr>
-                      <a:r>
-                        <a:rPr kumimoji="0" lang="en-US" sz="2000" b="0" i="0" u="none" strike="noStrike" cap="none" normalizeH="0" baseline="0">
-                          <a:ln>
-                            <a:noFill/>
-                          </a:ln>
-                          <a:solidFill>
-                            <a:schemeClr val="tx1"/>
-                          </a:solidFill>
-                          <a:effectLst/>
-                          <a:latin typeface="Arial" charset="0"/>
-                        </a:rPr>
-                        <a:t>Move to beginning of special character delimited word, whitespace delimited word.</a:t>
-                      </a:r>
-                    </a:p>
-                  </a:txBody>
-                  <a:tcPr horzOverflow="overflow">
-                    <a:lnL w="12700" cap="flat" cmpd="sng" algn="ctr">
-                      <a:solidFill>
-                        <a:schemeClr val="tx1"/>
-                      </a:solidFill>
-                      <a:prstDash val="solid"/>
-                      <a:round/>
-                      <a:headEnd type="none" w="med" len="med"/>
-                      <a:tailEnd type="none" w="med" len="med"/>
-                    </a:lnL>
-                    <a:lnR w="28575" cap="flat" cmpd="sng" algn="ctr">
-                      <a:solidFill>
-                        <a:schemeClr val="tx1"/>
-                      </a:solidFill>
-                      <a:prstDash val="solid"/>
-                      <a:round/>
-                      <a:headEnd type="none" w="med" len="med"/>
-                      <a:tailEnd type="none" w="med" len="med"/>
-                    </a:lnR>
-                    <a:lnT w="12700" cap="flat" cmpd="sng" algn="ctr">
-                      <a:solidFill>
-                        <a:schemeClr val="tx1"/>
-                      </a:solidFill>
-                      <a:prstDash val="solid"/>
-                      <a:round/>
-                      <a:headEnd type="none" w="med" len="med"/>
-                      <a:tailEnd type="none" w="med" len="med"/>
-                    </a:lnT>
-                    <a:lnB w="12700" cap="flat" cmpd="sng" algn="ctr">
-                      <a:solidFill>
-                        <a:schemeClr val="tx1"/>
-                      </a:solidFill>
-                      <a:prstDash val="solid"/>
-                      <a:round/>
-                      <a:headEnd type="none" w="med" len="med"/>
-                      <a:tailEnd type="none" w="med" len="med"/>
-                    </a:lnB>
-                    <a:lnTlToBr>
-                      <a:noFill/>
-                    </a:lnTlToBr>
-                    <a:lnBlToTr>
-                      <a:noFill/>
-                    </a:lnBlToTr>
-                    <a:noFill/>
-                  </a:tcPr>
-                </a:tc>
-                <a:extLst>
-                  <a:ext uri="{0D108BD9-81ED-4DB2-BD59-A6C34878D82A}">
-                    <a16:rowId xmlns:a16="http://schemas.microsoft.com/office/drawing/2014/main" val="10001"/>
-                  </a:ext>
-                </a:extLst>
-              </a:tr>
-              <a:tr h="452438">
-                <a:tc>
-                  <a:txBody>
-                    <a:bodyPr/>
-                    <a:lstStyle/>
-                    <a:p>
-                      <a:pPr marL="0" marR="0" lvl="0" indent="0" algn="l" defTabSz="914400" rtl="0" eaLnBrk="1" fontAlgn="base" latinLnBrk="0" hangingPunct="1">
-                        <a:lnSpc>
-                          <a:spcPct val="100000"/>
-                        </a:lnSpc>
-                        <a:spcBef>
-                          <a:spcPct val="20000"/>
-                        </a:spcBef>
-                        <a:spcAft>
-                          <a:spcPct val="0"/>
-                        </a:spcAft>
-                        <a:buClrTx/>
-                        <a:buSzTx/>
-                        <a:buFontTx/>
-                        <a:buNone/>
-                        <a:tabLst/>
-                      </a:pPr>
-                      <a:r>
-                        <a:rPr kumimoji="0" lang="en-US" sz="2000" b="1" i="0" u="none" strike="noStrike" kern="1200" cap="none" normalizeH="0" baseline="0" dirty="0" err="1">
-                          <a:ln>
-                            <a:noFill/>
-                          </a:ln>
-                          <a:solidFill>
-                            <a:schemeClr val="tx1"/>
-                          </a:solidFill>
-                          <a:effectLst/>
-                          <a:latin typeface="Arial" charset="0"/>
-                          <a:ea typeface="+mn-ea"/>
-                          <a:cs typeface="+mn-cs"/>
-                        </a:rPr>
-                        <a:t>e</a:t>
-                      </a:r>
-                      <a:r>
-                        <a:rPr kumimoji="0" lang="en-US" sz="2000" b="0" i="0" u="none" strike="noStrike" kern="1200" cap="none" normalizeH="0" baseline="0" dirty="0" err="1">
-                          <a:ln>
-                            <a:noFill/>
-                          </a:ln>
-                          <a:solidFill>
-                            <a:schemeClr val="tx1"/>
-                          </a:solidFill>
-                          <a:effectLst/>
-                          <a:latin typeface="Arial" charset="0"/>
-                          <a:ea typeface="+mn-ea"/>
-                          <a:cs typeface="+mn-cs"/>
-                        </a:rPr>
-                        <a:t>,</a:t>
-                      </a:r>
-                      <a:r>
-                        <a:rPr kumimoji="0" lang="en-US" sz="2000" b="1" i="0" u="none" strike="noStrike" kern="1200" cap="none" normalizeH="0" baseline="0" dirty="0" err="1">
-                          <a:ln>
-                            <a:noFill/>
-                          </a:ln>
-                          <a:solidFill>
-                            <a:schemeClr val="tx1"/>
-                          </a:solidFill>
-                          <a:effectLst/>
-                          <a:latin typeface="Arial" charset="0"/>
-                          <a:ea typeface="+mn-ea"/>
-                          <a:cs typeface="+mn-cs"/>
-                        </a:rPr>
-                        <a:t>E</a:t>
-                      </a:r>
-                      <a:endParaRPr kumimoji="0" lang="en-US" sz="2000" b="1" i="0" u="none" strike="noStrike" kern="1200" cap="none" normalizeH="0" baseline="0" dirty="0">
-                        <a:ln>
-                          <a:noFill/>
-                        </a:ln>
-                        <a:solidFill>
-                          <a:schemeClr val="tx1"/>
-                        </a:solidFill>
-                        <a:effectLst/>
-                        <a:latin typeface="Arial" charset="0"/>
-                        <a:ea typeface="+mn-ea"/>
-                        <a:cs typeface="+mn-cs"/>
-                      </a:endParaRPr>
-                    </a:p>
-                  </a:txBody>
-                  <a:tcPr horzOverflow="overflow">
-                    <a:lnL w="28575" cap="flat" cmpd="sng" algn="ctr">
-                      <a:solidFill>
-                        <a:schemeClr val="tx1"/>
-                      </a:solidFill>
-                      <a:prstDash val="solid"/>
-                      <a:round/>
-                      <a:headEnd type="none" w="med" len="med"/>
-                      <a:tailEnd type="none" w="med" len="med"/>
-                    </a:lnL>
-                    <a:lnR w="12700" cap="flat" cmpd="sng" algn="ctr">
-                      <a:solidFill>
-                        <a:schemeClr val="tx1"/>
-                      </a:solidFill>
-                      <a:prstDash val="solid"/>
-                      <a:round/>
-                      <a:headEnd type="none" w="med" len="med"/>
-                      <a:tailEnd type="none" w="med" len="med"/>
-                    </a:lnR>
-                    <a:lnT w="12700" cap="flat" cmpd="sng" algn="ctr">
-                      <a:solidFill>
-                        <a:schemeClr val="tx1"/>
-                      </a:solidFill>
-                      <a:prstDash val="solid"/>
-                      <a:round/>
-                      <a:headEnd type="none" w="med" len="med"/>
-                      <a:tailEnd type="none" w="med" len="med"/>
-                    </a:lnT>
-                    <a:lnB w="12700" cap="flat" cmpd="sng" algn="ctr">
-                      <a:solidFill>
-                        <a:schemeClr val="tx1"/>
-                      </a:solidFill>
-                      <a:prstDash val="solid"/>
-                      <a:round/>
-                      <a:headEnd type="none" w="med" len="med"/>
-                      <a:tailEnd type="none" w="med" len="med"/>
-                    </a:lnB>
-                    <a:lnTlToBr>
-                      <a:noFill/>
-                    </a:lnTlToBr>
-                    <a:lnBlToTr>
-                      <a:noFill/>
-                    </a:lnBlToTr>
-                    <a:noFill/>
-                  </a:tcPr>
-                </a:tc>
-                <a:tc>
-                  <a:txBody>
-                    <a:bodyPr/>
-                    <a:lstStyle/>
-                    <a:p>
-                      <a:pPr marL="0" marR="0" lvl="0" indent="0" algn="l" defTabSz="914400" rtl="0" eaLnBrk="1" fontAlgn="base" latinLnBrk="0" hangingPunct="1">
-                        <a:lnSpc>
-                          <a:spcPct val="100000"/>
-                        </a:lnSpc>
-                        <a:spcBef>
-                          <a:spcPct val="20000"/>
-                        </a:spcBef>
-                        <a:spcAft>
-                          <a:spcPct val="0"/>
-                        </a:spcAft>
-                        <a:buClrTx/>
-                        <a:buSzTx/>
-                        <a:buFontTx/>
-                        <a:buNone/>
-                        <a:tabLst/>
-                      </a:pPr>
-                      <a:r>
-                        <a:rPr kumimoji="0" lang="en-US" sz="2000" b="0" i="0" u="none" strike="noStrike" cap="none" normalizeH="0" baseline="0">
-                          <a:ln>
-                            <a:noFill/>
-                          </a:ln>
-                          <a:solidFill>
-                            <a:schemeClr val="tx1"/>
-                          </a:solidFill>
-                          <a:effectLst/>
-                          <a:latin typeface="Arial" charset="0"/>
-                        </a:rPr>
-                        <a:t>Move to end of special character delimited word, whitespace delimited word</a:t>
-                      </a:r>
-                    </a:p>
-                  </a:txBody>
-                  <a:tcPr horzOverflow="overflow">
-                    <a:lnL w="12700" cap="flat" cmpd="sng" algn="ctr">
-                      <a:solidFill>
-                        <a:schemeClr val="tx1"/>
-                      </a:solidFill>
-                      <a:prstDash val="solid"/>
-                      <a:round/>
-                      <a:headEnd type="none" w="med" len="med"/>
-                      <a:tailEnd type="none" w="med" len="med"/>
-                    </a:lnL>
-                    <a:lnR w="28575" cap="flat" cmpd="sng" algn="ctr">
-                      <a:solidFill>
-                        <a:schemeClr val="tx1"/>
-                      </a:solidFill>
-                      <a:prstDash val="solid"/>
-                      <a:round/>
-                      <a:headEnd type="none" w="med" len="med"/>
-                      <a:tailEnd type="none" w="med" len="med"/>
-                    </a:lnR>
-                    <a:lnT w="12700" cap="flat" cmpd="sng" algn="ctr">
-                      <a:solidFill>
-                        <a:schemeClr val="tx1"/>
-                      </a:solidFill>
-                      <a:prstDash val="solid"/>
-                      <a:round/>
-                      <a:headEnd type="none" w="med" len="med"/>
-                      <a:tailEnd type="none" w="med" len="med"/>
-                    </a:lnT>
-                    <a:lnB w="12700" cap="flat" cmpd="sng" algn="ctr">
-                      <a:solidFill>
-                        <a:schemeClr val="tx1"/>
-                      </a:solidFill>
-                      <a:prstDash val="solid"/>
-                      <a:round/>
-                      <a:headEnd type="none" w="med" len="med"/>
-                      <a:tailEnd type="none" w="med" len="med"/>
-                    </a:lnB>
-                    <a:lnTlToBr>
-                      <a:noFill/>
-                    </a:lnTlToBr>
-                    <a:lnBlToTr>
-                      <a:noFill/>
-                    </a:lnBlToTr>
-                    <a:noFill/>
-                  </a:tcPr>
-                </a:tc>
-                <a:extLst>
-                  <a:ext uri="{0D108BD9-81ED-4DB2-BD59-A6C34878D82A}">
-                    <a16:rowId xmlns:a16="http://schemas.microsoft.com/office/drawing/2014/main" val="10002"/>
-                  </a:ext>
-                </a:extLst>
-              </a:tr>
-              <a:tr h="431482">
-                <a:tc>
-                  <a:txBody>
-                    <a:bodyPr/>
-                    <a:lstStyle/>
-                    <a:p>
-                      <a:pPr marL="0" marR="0" lvl="0" indent="0" algn="l" defTabSz="914400" rtl="0" eaLnBrk="1" fontAlgn="base" latinLnBrk="0" hangingPunct="1">
-                        <a:lnSpc>
-                          <a:spcPct val="100000"/>
-                        </a:lnSpc>
-                        <a:spcBef>
-                          <a:spcPct val="20000"/>
-                        </a:spcBef>
-                        <a:spcAft>
-                          <a:spcPct val="0"/>
-                        </a:spcAft>
-                        <a:buClrTx/>
-                        <a:buSzTx/>
-                        <a:buFontTx/>
-                        <a:buNone/>
-                        <a:tabLst/>
-                      </a:pPr>
-                      <a:r>
-                        <a:rPr kumimoji="0" lang="en-US" sz="2000" b="1" i="0" u="none" strike="noStrike" kern="1200" cap="none" normalizeH="0" baseline="0" dirty="0" err="1">
-                          <a:ln>
-                            <a:noFill/>
-                          </a:ln>
-                          <a:solidFill>
-                            <a:schemeClr val="tx1"/>
-                          </a:solidFill>
-                          <a:effectLst/>
-                          <a:latin typeface="Arial" charset="0"/>
-                          <a:ea typeface="+mn-ea"/>
-                          <a:cs typeface="+mn-cs"/>
-                        </a:rPr>
-                        <a:t>b</a:t>
-                      </a:r>
-                      <a:r>
-                        <a:rPr kumimoji="0" lang="en-US" sz="2000" b="0" i="0" u="none" strike="noStrike" kern="1200" cap="none" normalizeH="0" baseline="0" dirty="0" err="1">
-                          <a:ln>
-                            <a:noFill/>
-                          </a:ln>
-                          <a:solidFill>
-                            <a:schemeClr val="tx1"/>
-                          </a:solidFill>
-                          <a:effectLst/>
-                          <a:latin typeface="Arial" charset="0"/>
-                          <a:ea typeface="+mn-ea"/>
-                          <a:cs typeface="+mn-cs"/>
-                        </a:rPr>
-                        <a:t>,</a:t>
-                      </a:r>
-                      <a:r>
-                        <a:rPr kumimoji="0" lang="en-US" sz="2000" b="1" i="0" u="none" strike="noStrike" kern="1200" cap="none" normalizeH="0" baseline="0" dirty="0" err="1">
-                          <a:ln>
-                            <a:noFill/>
-                          </a:ln>
-                          <a:solidFill>
-                            <a:schemeClr val="tx1"/>
-                          </a:solidFill>
-                          <a:effectLst/>
-                          <a:latin typeface="Arial" charset="0"/>
-                          <a:ea typeface="+mn-ea"/>
-                          <a:cs typeface="+mn-cs"/>
-                        </a:rPr>
-                        <a:t>B</a:t>
-                      </a:r>
-                      <a:endParaRPr kumimoji="0" lang="en-US" sz="2000" b="1" i="0" u="none" strike="noStrike" kern="1200" cap="none" normalizeH="0" baseline="0" dirty="0">
-                        <a:ln>
-                          <a:noFill/>
-                        </a:ln>
-                        <a:solidFill>
-                          <a:schemeClr val="tx1"/>
-                        </a:solidFill>
-                        <a:effectLst/>
-                        <a:latin typeface="Arial" charset="0"/>
-                        <a:ea typeface="+mn-ea"/>
-                        <a:cs typeface="+mn-cs"/>
-                      </a:endParaRPr>
-                    </a:p>
-                  </a:txBody>
-                  <a:tcPr horzOverflow="overflow">
-                    <a:lnL w="28575" cap="flat" cmpd="sng" algn="ctr">
-                      <a:solidFill>
-                        <a:schemeClr val="tx1"/>
-                      </a:solidFill>
-                      <a:prstDash val="solid"/>
-                      <a:round/>
-                      <a:headEnd type="none" w="med" len="med"/>
-                      <a:tailEnd type="none" w="med" len="med"/>
-                    </a:lnL>
-                    <a:lnR w="12700" cap="flat" cmpd="sng" algn="ctr">
-                      <a:solidFill>
-                        <a:schemeClr val="tx1"/>
-                      </a:solidFill>
-                      <a:prstDash val="solid"/>
-                      <a:round/>
-                      <a:headEnd type="none" w="med" len="med"/>
-                      <a:tailEnd type="none" w="med" len="med"/>
-                    </a:lnR>
-                    <a:lnT w="12700" cap="flat" cmpd="sng" algn="ctr">
-                      <a:solidFill>
-                        <a:schemeClr val="tx1"/>
-                      </a:solidFill>
-                      <a:prstDash val="solid"/>
-                      <a:round/>
-                      <a:headEnd type="none" w="med" len="med"/>
-                      <a:tailEnd type="none" w="med" len="med"/>
-                    </a:lnT>
-                    <a:lnB w="12700" cap="flat" cmpd="sng" algn="ctr">
-                      <a:solidFill>
-                        <a:schemeClr val="tx1"/>
-                      </a:solidFill>
-                      <a:prstDash val="solid"/>
-                      <a:round/>
-                      <a:headEnd type="none" w="med" len="med"/>
-                      <a:tailEnd type="none" w="med" len="med"/>
-                    </a:lnB>
-                    <a:lnTlToBr>
-                      <a:noFill/>
-                    </a:lnTlToBr>
-                    <a:lnBlToTr>
-                      <a:noFill/>
-                    </a:lnBlToTr>
-                    <a:noFill/>
-                  </a:tcPr>
-                </a:tc>
-                <a:tc>
-                  <a:txBody>
-                    <a:bodyPr/>
-                    <a:lstStyle/>
-                    <a:p>
-                      <a:pPr marL="0" marR="0" lvl="0" indent="0" algn="l" defTabSz="914400" rtl="0" eaLnBrk="1" fontAlgn="base" latinLnBrk="0" hangingPunct="1">
-                        <a:lnSpc>
-                          <a:spcPct val="100000"/>
-                        </a:lnSpc>
-                        <a:spcBef>
-                          <a:spcPct val="20000"/>
-                        </a:spcBef>
-                        <a:spcAft>
-                          <a:spcPct val="0"/>
-                        </a:spcAft>
-                        <a:buClrTx/>
-                        <a:buSzTx/>
-                        <a:buFontTx/>
-                        <a:buNone/>
-                        <a:tabLst/>
-                      </a:pPr>
-                      <a:r>
-                        <a:rPr kumimoji="0" lang="en-US" sz="2000" b="0" i="0" u="none" strike="noStrike" cap="none" normalizeH="0" baseline="0">
-                          <a:ln>
-                            <a:noFill/>
-                          </a:ln>
-                          <a:solidFill>
-                            <a:schemeClr val="tx1"/>
-                          </a:solidFill>
-                          <a:effectLst/>
-                          <a:latin typeface="Arial" charset="0"/>
-                        </a:rPr>
-                        <a:t>Move back to beginning of special character delimited word, whitespace delimited word.</a:t>
-                      </a:r>
-                    </a:p>
-                  </a:txBody>
-                  <a:tcPr horzOverflow="overflow">
-                    <a:lnL w="12700" cap="flat" cmpd="sng" algn="ctr">
-                      <a:solidFill>
-                        <a:schemeClr val="tx1"/>
-                      </a:solidFill>
-                      <a:prstDash val="solid"/>
-                      <a:round/>
-                      <a:headEnd type="none" w="med" len="med"/>
-                      <a:tailEnd type="none" w="med" len="med"/>
-                    </a:lnL>
-                    <a:lnR w="28575" cap="flat" cmpd="sng" algn="ctr">
-                      <a:solidFill>
-                        <a:schemeClr val="tx1"/>
-                      </a:solidFill>
-                      <a:prstDash val="solid"/>
-                      <a:round/>
-                      <a:headEnd type="none" w="med" len="med"/>
-                      <a:tailEnd type="none" w="med" len="med"/>
-                    </a:lnR>
-                    <a:lnT w="12700" cap="flat" cmpd="sng" algn="ctr">
-                      <a:solidFill>
-                        <a:schemeClr val="tx1"/>
-                      </a:solidFill>
-                      <a:prstDash val="solid"/>
-                      <a:round/>
-                      <a:headEnd type="none" w="med" len="med"/>
-                      <a:tailEnd type="none" w="med" len="med"/>
-                    </a:lnT>
-                    <a:lnB w="12700" cap="flat" cmpd="sng" algn="ctr">
-                      <a:solidFill>
-                        <a:schemeClr val="tx1"/>
-                      </a:solidFill>
-                      <a:prstDash val="solid"/>
-                      <a:round/>
-                      <a:headEnd type="none" w="med" len="med"/>
-                      <a:tailEnd type="none" w="med" len="med"/>
-                    </a:lnB>
-                    <a:lnTlToBr>
-                      <a:noFill/>
-                    </a:lnTlToBr>
-                    <a:lnBlToTr>
-                      <a:noFill/>
-                    </a:lnBlToTr>
-                    <a:noFill/>
-                  </a:tcPr>
-                </a:tc>
-                <a:extLst>
-                  <a:ext uri="{0D108BD9-81ED-4DB2-BD59-A6C34878D82A}">
-                    <a16:rowId xmlns:a16="http://schemas.microsoft.com/office/drawing/2014/main" val="10003"/>
-                  </a:ext>
-                </a:extLst>
-              </a:tr>
-              <a:tr h="340042">
-                <a:tc>
-                  <a:txBody>
-                    <a:bodyPr/>
-                    <a:lstStyle/>
-                    <a:p>
-                      <a:pPr marL="0" marR="0" lvl="0" indent="0" algn="l" defTabSz="914400" rtl="0" eaLnBrk="1" fontAlgn="base" latinLnBrk="0" hangingPunct="1">
-                        <a:lnSpc>
-                          <a:spcPct val="100000"/>
-                        </a:lnSpc>
-                        <a:spcBef>
-                          <a:spcPct val="20000"/>
-                        </a:spcBef>
-                        <a:spcAft>
-                          <a:spcPct val="0"/>
-                        </a:spcAft>
-                        <a:buClrTx/>
-                        <a:buSzTx/>
-                        <a:buFontTx/>
-                        <a:buNone/>
-                        <a:tabLst/>
-                      </a:pPr>
-                      <a:r>
-                        <a:rPr kumimoji="0" lang="en-US" sz="2000" b="1" i="0" u="none" strike="noStrike" kern="1200" cap="none" normalizeH="0" baseline="0" dirty="0">
-                          <a:ln>
-                            <a:noFill/>
-                          </a:ln>
-                          <a:solidFill>
-                            <a:schemeClr val="tx1"/>
-                          </a:solidFill>
-                          <a:effectLst/>
-                          <a:latin typeface="Arial" charset="0"/>
-                          <a:ea typeface="+mn-ea"/>
-                          <a:cs typeface="+mn-cs"/>
-                        </a:rPr>
-                        <a:t>(</a:t>
-                      </a:r>
-                      <a:r>
-                        <a:rPr kumimoji="0" lang="en-US" sz="2000" b="0" i="0" u="none" strike="noStrike" kern="1200" cap="none" normalizeH="0" baseline="0" dirty="0">
-                          <a:ln>
-                            <a:noFill/>
-                          </a:ln>
-                          <a:solidFill>
-                            <a:schemeClr val="tx1"/>
-                          </a:solidFill>
-                          <a:effectLst/>
-                          <a:latin typeface="Arial" charset="0"/>
-                          <a:ea typeface="+mn-ea"/>
-                          <a:cs typeface="+mn-cs"/>
-                        </a:rPr>
-                        <a:t>,</a:t>
-                      </a:r>
-                      <a:r>
-                        <a:rPr kumimoji="0" lang="en-US" sz="2000" b="1" i="0" u="none" strike="noStrike" kern="1200" cap="none" normalizeH="0" baseline="0" dirty="0">
-                          <a:ln>
-                            <a:noFill/>
-                          </a:ln>
-                          <a:solidFill>
-                            <a:schemeClr val="tx1"/>
-                          </a:solidFill>
-                          <a:effectLst/>
-                          <a:latin typeface="Arial" charset="0"/>
-                          <a:ea typeface="+mn-ea"/>
-                          <a:cs typeface="+mn-cs"/>
-                        </a:rPr>
-                        <a:t>)</a:t>
-                      </a:r>
-                    </a:p>
-                  </a:txBody>
-                  <a:tcPr horzOverflow="overflow">
-                    <a:lnL w="28575" cap="flat" cmpd="sng" algn="ctr">
-                      <a:solidFill>
-                        <a:schemeClr val="tx1"/>
-                      </a:solidFill>
-                      <a:prstDash val="solid"/>
-                      <a:round/>
-                      <a:headEnd type="none" w="med" len="med"/>
-                      <a:tailEnd type="none" w="med" len="med"/>
-                    </a:lnL>
-                    <a:lnR w="12700" cap="flat" cmpd="sng" algn="ctr">
-                      <a:solidFill>
-                        <a:schemeClr val="tx1"/>
-                      </a:solidFill>
-                      <a:prstDash val="solid"/>
-                      <a:round/>
-                      <a:headEnd type="none" w="med" len="med"/>
-                      <a:tailEnd type="none" w="med" len="med"/>
-                    </a:lnR>
-                    <a:lnT w="12700" cap="flat" cmpd="sng" algn="ctr">
-                      <a:solidFill>
-                        <a:schemeClr val="tx1"/>
-                      </a:solidFill>
-                      <a:prstDash val="solid"/>
-                      <a:round/>
-                      <a:headEnd type="none" w="med" len="med"/>
-                      <a:tailEnd type="none" w="med" len="med"/>
-                    </a:lnT>
-                    <a:lnB w="12700" cap="flat" cmpd="sng" algn="ctr">
-                      <a:solidFill>
-                        <a:schemeClr val="tx1"/>
-                      </a:solidFill>
-                      <a:prstDash val="solid"/>
-                      <a:round/>
-                      <a:headEnd type="none" w="med" len="med"/>
-                      <a:tailEnd type="none" w="med" len="med"/>
-                    </a:lnB>
-                    <a:lnTlToBr>
-                      <a:noFill/>
-                    </a:lnTlToBr>
-                    <a:lnBlToTr>
-                      <a:noFill/>
-                    </a:lnBlToTr>
-                    <a:noFill/>
-                  </a:tcPr>
-                </a:tc>
-                <a:tc>
-                  <a:txBody>
-                    <a:bodyPr/>
-                    <a:lstStyle/>
-                    <a:p>
-                      <a:pPr marL="0" marR="0" lvl="0" indent="0" algn="l" defTabSz="914400" rtl="0" eaLnBrk="1" fontAlgn="base" latinLnBrk="0" hangingPunct="1">
-                        <a:lnSpc>
-                          <a:spcPct val="100000"/>
-                        </a:lnSpc>
-                        <a:spcBef>
-                          <a:spcPct val="20000"/>
-                        </a:spcBef>
-                        <a:spcAft>
-                          <a:spcPct val="0"/>
-                        </a:spcAft>
-                        <a:buClrTx/>
-                        <a:buSzTx/>
-                        <a:buFontTx/>
-                        <a:buNone/>
-                        <a:tabLst/>
-                      </a:pPr>
-                      <a:r>
-                        <a:rPr kumimoji="0" lang="en-US" sz="2000" b="0" i="0" u="none" strike="noStrike" cap="none" normalizeH="0" baseline="0" dirty="0">
-                          <a:ln>
-                            <a:noFill/>
-                          </a:ln>
-                          <a:solidFill>
-                            <a:schemeClr val="tx1"/>
-                          </a:solidFill>
-                          <a:effectLst/>
-                          <a:latin typeface="Arial" charset="0"/>
-                        </a:rPr>
-                        <a:t>Open or closed parenthesis, move to beginning, end of current sentence. </a:t>
-                      </a:r>
-                      <a:r>
-                        <a:rPr kumimoji="0" lang="en-US" sz="2000" b="0" i="0" u="none" strike="noStrike" cap="none" normalizeH="0" baseline="0" dirty="0" err="1">
-                          <a:ln>
-                            <a:noFill/>
-                          </a:ln>
-                          <a:solidFill>
-                            <a:schemeClr val="tx1"/>
-                          </a:solidFill>
-                          <a:effectLst/>
-                          <a:latin typeface="Arial" charset="0"/>
-                        </a:rPr>
-                        <a:t>Hľadá</a:t>
-                      </a:r>
-                      <a:r>
-                        <a:rPr kumimoji="0" lang="en-US" sz="2000" b="0" i="0" u="none" strike="noStrike" cap="none" normalizeH="0" baseline="0" dirty="0">
-                          <a:ln>
-                            <a:noFill/>
-                          </a:ln>
-                          <a:solidFill>
-                            <a:schemeClr val="tx1"/>
-                          </a:solidFill>
-                          <a:effectLst/>
-                          <a:latin typeface="Arial" charset="0"/>
-                        </a:rPr>
-                        <a:t> </a:t>
-                      </a:r>
-                      <a:r>
-                        <a:rPr kumimoji="0" lang="en-US" sz="2000" b="0" i="0" u="none" strike="noStrike" cap="none" normalizeH="0" baseline="0" dirty="0" err="1">
-                          <a:ln>
-                            <a:noFill/>
-                          </a:ln>
-                          <a:solidFill>
-                            <a:schemeClr val="tx1"/>
-                          </a:solidFill>
-                          <a:effectLst/>
-                          <a:latin typeface="Arial" charset="0"/>
-                        </a:rPr>
-                        <a:t>bodku</a:t>
-                      </a:r>
-                      <a:r>
-                        <a:rPr kumimoji="0" lang="en-US" sz="2000" b="0" i="0" u="none" strike="noStrike" cap="none" normalizeH="0" baseline="0" dirty="0">
-                          <a:ln>
-                            <a:noFill/>
-                          </a:ln>
-                          <a:solidFill>
-                            <a:schemeClr val="tx1"/>
-                          </a:solidFill>
-                          <a:effectLst/>
-                          <a:latin typeface="Arial" charset="0"/>
-                        </a:rPr>
-                        <a:t>…</a:t>
-                      </a:r>
-                    </a:p>
-                  </a:txBody>
-                  <a:tcPr horzOverflow="overflow">
-                    <a:lnL w="12700" cap="flat" cmpd="sng" algn="ctr">
-                      <a:solidFill>
-                        <a:schemeClr val="tx1"/>
-                      </a:solidFill>
-                      <a:prstDash val="solid"/>
-                      <a:round/>
-                      <a:headEnd type="none" w="med" len="med"/>
-                      <a:tailEnd type="none" w="med" len="med"/>
-                    </a:lnL>
-                    <a:lnR w="28575" cap="flat" cmpd="sng" algn="ctr">
-                      <a:solidFill>
-                        <a:schemeClr val="tx1"/>
-                      </a:solidFill>
-                      <a:prstDash val="solid"/>
-                      <a:round/>
-                      <a:headEnd type="none" w="med" len="med"/>
-                      <a:tailEnd type="none" w="med" len="med"/>
-                    </a:lnR>
-                    <a:lnT w="12700" cap="flat" cmpd="sng" algn="ctr">
-                      <a:solidFill>
-                        <a:schemeClr val="tx1"/>
-                      </a:solidFill>
-                      <a:prstDash val="solid"/>
-                      <a:round/>
-                      <a:headEnd type="none" w="med" len="med"/>
-                      <a:tailEnd type="none" w="med" len="med"/>
-                    </a:lnT>
-                    <a:lnB w="12700" cap="flat" cmpd="sng" algn="ctr">
-                      <a:solidFill>
-                        <a:schemeClr val="tx1"/>
-                      </a:solidFill>
-                      <a:prstDash val="solid"/>
-                      <a:round/>
-                      <a:headEnd type="none" w="med" len="med"/>
-                      <a:tailEnd type="none" w="med" len="med"/>
-                    </a:lnB>
-                    <a:lnTlToBr>
-                      <a:noFill/>
-                    </a:lnTlToBr>
-                    <a:lnBlToTr>
-                      <a:noFill/>
-                    </a:lnBlToTr>
-                    <a:noFill/>
-                  </a:tcPr>
-                </a:tc>
-                <a:extLst>
-                  <a:ext uri="{0D108BD9-81ED-4DB2-BD59-A6C34878D82A}">
-                    <a16:rowId xmlns:a16="http://schemas.microsoft.com/office/drawing/2014/main" val="10004"/>
-                  </a:ext>
-                </a:extLst>
-              </a:tr>
-              <a:tr h="452438">
-                <a:tc>
-                  <a:txBody>
-                    <a:bodyPr/>
-                    <a:lstStyle/>
-                    <a:p>
-                      <a:pPr marL="0" marR="0" lvl="0" indent="0" algn="l" defTabSz="914400" rtl="0" eaLnBrk="1" fontAlgn="base" latinLnBrk="0" hangingPunct="1">
-                        <a:lnSpc>
-                          <a:spcPct val="100000"/>
-                        </a:lnSpc>
-                        <a:spcBef>
-                          <a:spcPct val="20000"/>
-                        </a:spcBef>
-                        <a:spcAft>
-                          <a:spcPct val="0"/>
-                        </a:spcAft>
-                        <a:buClrTx/>
-                        <a:buSzTx/>
-                        <a:buFontTx/>
-                        <a:buNone/>
-                        <a:tabLst/>
-                      </a:pPr>
-                      <a:r>
-                        <a:rPr kumimoji="0" lang="en-US" sz="2000" b="1" i="0" u="none" strike="noStrike" kern="1200" cap="none" normalizeH="0" baseline="0" dirty="0">
-                          <a:ln>
-                            <a:noFill/>
-                          </a:ln>
-                          <a:solidFill>
-                            <a:schemeClr val="tx1"/>
-                          </a:solidFill>
-                          <a:effectLst/>
-                          <a:latin typeface="Arial" charset="0"/>
-                          <a:ea typeface="+mn-ea"/>
-                          <a:cs typeface="+mn-cs"/>
-                        </a:rPr>
-                        <a:t>{</a:t>
-                      </a:r>
-                      <a:r>
-                        <a:rPr kumimoji="0" lang="en-US" sz="2000" b="0" i="0" u="none" strike="noStrike" kern="1200" cap="none" normalizeH="0" baseline="0" dirty="0">
-                          <a:ln>
-                            <a:noFill/>
-                          </a:ln>
-                          <a:solidFill>
-                            <a:schemeClr val="tx1"/>
-                          </a:solidFill>
-                          <a:effectLst/>
-                          <a:latin typeface="Arial" charset="0"/>
-                          <a:ea typeface="+mn-ea"/>
-                          <a:cs typeface="+mn-cs"/>
-                        </a:rPr>
-                        <a:t>,</a:t>
-                      </a:r>
-                      <a:r>
-                        <a:rPr kumimoji="0" lang="en-US" sz="2000" b="1" i="0" u="none" strike="noStrike" kern="1200" cap="none" normalizeH="0" baseline="0" dirty="0">
-                          <a:ln>
-                            <a:noFill/>
-                          </a:ln>
-                          <a:solidFill>
-                            <a:schemeClr val="tx1"/>
-                          </a:solidFill>
-                          <a:effectLst/>
-                          <a:latin typeface="Arial" charset="0"/>
-                          <a:ea typeface="+mn-ea"/>
-                          <a:cs typeface="+mn-cs"/>
-                        </a:rPr>
-                        <a:t>}</a:t>
-                      </a:r>
-                    </a:p>
-                  </a:txBody>
-                  <a:tcPr horzOverflow="overflow">
-                    <a:lnL w="28575" cap="flat" cmpd="sng" algn="ctr">
-                      <a:solidFill>
-                        <a:schemeClr val="tx1"/>
-                      </a:solidFill>
-                      <a:prstDash val="solid"/>
-                      <a:round/>
-                      <a:headEnd type="none" w="med" len="med"/>
-                      <a:tailEnd type="none" w="med" len="med"/>
-                    </a:lnL>
-                    <a:lnR w="12700" cap="flat" cmpd="sng" algn="ctr">
-                      <a:solidFill>
-                        <a:schemeClr val="tx1"/>
-                      </a:solidFill>
-                      <a:prstDash val="solid"/>
-                      <a:round/>
-                      <a:headEnd type="none" w="med" len="med"/>
-                      <a:tailEnd type="none" w="med" len="med"/>
-                    </a:lnR>
-                    <a:lnT w="12700" cap="flat" cmpd="sng" algn="ctr">
-                      <a:solidFill>
-                        <a:schemeClr val="tx1"/>
-                      </a:solidFill>
-                      <a:prstDash val="solid"/>
-                      <a:round/>
-                      <a:headEnd type="none" w="med" len="med"/>
-                      <a:tailEnd type="none" w="med" len="med"/>
-                    </a:lnT>
-                    <a:lnB w="28575" cap="flat" cmpd="sng" algn="ctr">
-                      <a:solidFill>
-                        <a:schemeClr val="tx1"/>
-                      </a:solidFill>
-                      <a:prstDash val="solid"/>
-                      <a:round/>
-                      <a:headEnd type="none" w="med" len="med"/>
-                      <a:tailEnd type="none" w="med" len="med"/>
-                    </a:lnB>
-                    <a:lnTlToBr>
-                      <a:noFill/>
-                    </a:lnTlToBr>
-                    <a:lnBlToTr>
-                      <a:noFill/>
-                    </a:lnBlToTr>
-                    <a:noFill/>
-                  </a:tcPr>
-                </a:tc>
-                <a:tc>
-                  <a:txBody>
-                    <a:bodyPr/>
-                    <a:lstStyle/>
-                    <a:p>
-                      <a:pPr marL="0" marR="0" lvl="0" indent="0" algn="l" defTabSz="914400" rtl="0" eaLnBrk="1" fontAlgn="base" latinLnBrk="0" hangingPunct="1">
-                        <a:lnSpc>
-                          <a:spcPct val="100000"/>
-                        </a:lnSpc>
-                        <a:spcBef>
-                          <a:spcPct val="20000"/>
-                        </a:spcBef>
-                        <a:spcAft>
-                          <a:spcPct val="0"/>
-                        </a:spcAft>
-                        <a:buClrTx/>
-                        <a:buSzTx/>
-                        <a:buFontTx/>
-                        <a:buNone/>
-                        <a:tabLst/>
-                      </a:pPr>
-                      <a:r>
-                        <a:rPr kumimoji="0" lang="en-US" sz="2000" b="0" i="0" u="none" strike="noStrike" cap="none" normalizeH="0" baseline="0" dirty="0">
-                          <a:ln>
-                            <a:noFill/>
-                          </a:ln>
-                          <a:solidFill>
-                            <a:schemeClr val="tx1"/>
-                          </a:solidFill>
-                          <a:effectLst/>
-                          <a:latin typeface="Arial" charset="0"/>
-                        </a:rPr>
-                        <a:t>Open or closed curly braces, move to beginning, end of current paragraph.</a:t>
-                      </a:r>
-                    </a:p>
-                  </a:txBody>
-                  <a:tcPr horzOverflow="overflow">
-                    <a:lnL w="12700" cap="flat" cmpd="sng" algn="ctr">
-                      <a:solidFill>
-                        <a:schemeClr val="tx1"/>
-                      </a:solidFill>
-                      <a:prstDash val="solid"/>
-                      <a:round/>
-                      <a:headEnd type="none" w="med" len="med"/>
-                      <a:tailEnd type="none" w="med" len="med"/>
-                    </a:lnL>
-                    <a:lnR w="28575" cap="flat" cmpd="sng" algn="ctr">
-                      <a:solidFill>
-                        <a:schemeClr val="tx1"/>
-                      </a:solidFill>
-                      <a:prstDash val="solid"/>
-                      <a:round/>
-                      <a:headEnd type="none" w="med" len="med"/>
-                      <a:tailEnd type="none" w="med" len="med"/>
-                    </a:lnR>
-                    <a:lnT w="12700" cap="flat" cmpd="sng" algn="ctr">
-                      <a:solidFill>
-                        <a:schemeClr val="tx1"/>
-                      </a:solidFill>
-                      <a:prstDash val="solid"/>
-                      <a:round/>
-                      <a:headEnd type="none" w="med" len="med"/>
-                      <a:tailEnd type="none" w="med" len="med"/>
-                    </a:lnT>
-                    <a:lnB w="28575" cap="flat" cmpd="sng" algn="ctr">
-                      <a:solidFill>
-                        <a:schemeClr val="tx1"/>
-                      </a:solidFill>
-                      <a:prstDash val="solid"/>
-                      <a:round/>
-                      <a:headEnd type="none" w="med" len="med"/>
-                      <a:tailEnd type="none" w="med" len="med"/>
-                    </a:lnB>
-                    <a:lnTlToBr>
-                      <a:noFill/>
-                    </a:lnTlToBr>
-                    <a:lnBlToTr>
-                      <a:noFill/>
-                    </a:lnBlToTr>
-                    <a:noFill/>
-                  </a:tcPr>
-                </a:tc>
-                <a:extLst>
-                  <a:ext uri="{0D108BD9-81ED-4DB2-BD59-A6C34878D82A}">
-                    <a16:rowId xmlns:a16="http://schemas.microsoft.com/office/drawing/2014/main" val="10005"/>
-                  </a:ext>
-                </a:extLst>
-              </a:tr>
-            </a:tbl>
-          </a:graphicData>
-        </a:graphic>
-      </p:graphicFrame>
-      <p:sp>
-        <p:nvSpPr>
-          <p:cNvPr id="28698" name="Text Box 43">
-            <a:extLst>
-              <a:ext uri="{FF2B5EF4-FFF2-40B4-BE49-F238E27FC236}">
-                <a16:creationId xmlns:a16="http://schemas.microsoft.com/office/drawing/2014/main" id="{D4261A68-F1D0-433F-9951-D53D32711EBD}"/>
-              </a:ext>
-            </a:extLst>
-          </p:cNvPr>
-          <p:cNvSpPr txBox="1">
-            <a:spLocks noChangeArrowheads="1"/>
-          </p:cNvSpPr>
-          <p:nvPr/>
-        </p:nvSpPr>
-        <p:spPr bwMode="auto">
-          <a:xfrm>
-            <a:off x="381000" y="1295400"/>
-            <a:ext cx="2101850" cy="461963"/>
-          </a:xfrm>
-          <a:prstGeom prst="rect">
-            <a:avLst/>
-          </a:prstGeom>
-          <a:noFill/>
-          <a:ln>
-            <a:noFill/>
-          </a:ln>
-          <a:extLst>
-            <a:ext uri="{909E8E84-426E-40DD-AFC4-6F175D3DCCD1}">
-              <a14:hiddenFill xmlns:a14="http://schemas.microsoft.com/office/drawing/2010/main">
-                <a:solidFill>
-                  <a:srgbClr val="FFFFFF"/>
-                </a:solidFill>
-              </a14:hiddenFill>
-            </a:ext>
-            <a:ext uri="{91240B29-F687-4F45-9708-019B960494DF}">
-              <a14:hiddenLine xmlns:a14="http://schemas.microsoft.com/office/drawing/2010/main" w="9525">
-                <a:solidFill>
-                  <a:srgbClr val="000000"/>
-                </a:solidFill>
-                <a:miter lim="800000"/>
-                <a:headEnd/>
-                <a:tailEnd/>
-              </a14:hiddenLine>
-            </a:ext>
-          </a:extLst>
-        </p:spPr>
-        <p:txBody>
-          <a:bodyPr wrap="none">
-            <a:spAutoFit/>
-          </a:bodyPr>
-          <a:lstStyle>
-            <a:lvl1pPr>
-              <a:spcBef>
-                <a:spcPct val="20000"/>
-              </a:spcBef>
-              <a:buChar char="•"/>
-              <a:defRPr sz="3200">
-                <a:solidFill>
-                  <a:schemeClr val="tx1"/>
-                </a:solidFill>
-                <a:latin typeface="Arial" panose="020B0604020202020204" pitchFamily="34" charset="0"/>
-              </a:defRPr>
-            </a:lvl1pPr>
-            <a:lvl2pPr marL="742950" indent="-285750">
-              <a:spcBef>
-                <a:spcPct val="20000"/>
-              </a:spcBef>
-              <a:buChar char="–"/>
-              <a:defRPr sz="2800">
-                <a:solidFill>
-                  <a:schemeClr val="tx1"/>
-                </a:solidFill>
-                <a:latin typeface="Arial" panose="020B0604020202020204" pitchFamily="34" charset="0"/>
-              </a:defRPr>
-            </a:lvl2pPr>
-            <a:lvl3pPr marL="1143000" indent="-228600">
-              <a:spcBef>
-                <a:spcPct val="20000"/>
-              </a:spcBef>
-              <a:buChar char="•"/>
-              <a:defRPr sz="2400">
-                <a:solidFill>
-                  <a:schemeClr val="tx1"/>
-                </a:solidFill>
-                <a:latin typeface="Arial" panose="020B0604020202020204" pitchFamily="34" charset="0"/>
-              </a:defRPr>
-            </a:lvl3pPr>
-            <a:lvl4pPr marL="1600200" indent="-228600">
-              <a:spcBef>
-                <a:spcPct val="20000"/>
-              </a:spcBef>
-              <a:buChar char="–"/>
-              <a:defRPr sz="2000">
-                <a:solidFill>
-                  <a:schemeClr val="tx1"/>
-                </a:solidFill>
-                <a:latin typeface="Arial" panose="020B0604020202020204" pitchFamily="34" charset="0"/>
-              </a:defRPr>
-            </a:lvl4pPr>
-            <a:lvl5pPr marL="2057400" indent="-228600">
-              <a:spcBef>
-                <a:spcPct val="20000"/>
-              </a:spcBef>
-              <a:buChar char="»"/>
-              <a:defRPr sz="2000">
-                <a:solidFill>
-                  <a:schemeClr val="tx1"/>
-                </a:solidFill>
-                <a:latin typeface="Arial" panose="020B0604020202020204" pitchFamily="34" charset="0"/>
-              </a:defRPr>
-            </a:lvl5pPr>
-            <a:lvl6pPr marL="2514600" indent="-228600" eaLnBrk="0" fontAlgn="base" hangingPunct="0">
-              <a:spcBef>
-                <a:spcPct val="20000"/>
-              </a:spcBef>
-              <a:spcAft>
-                <a:spcPct val="0"/>
-              </a:spcAft>
-              <a:buChar char="»"/>
-              <a:defRPr sz="2000">
-                <a:solidFill>
-                  <a:schemeClr val="tx1"/>
-                </a:solidFill>
-                <a:latin typeface="Arial" panose="020B0604020202020204" pitchFamily="34" charset="0"/>
-              </a:defRPr>
-            </a:lvl6pPr>
-            <a:lvl7pPr marL="2971800" indent="-228600" eaLnBrk="0" fontAlgn="base" hangingPunct="0">
-              <a:spcBef>
-                <a:spcPct val="20000"/>
-              </a:spcBef>
-              <a:spcAft>
-                <a:spcPct val="0"/>
-              </a:spcAft>
-              <a:buChar char="»"/>
-              <a:defRPr sz="2000">
-                <a:solidFill>
-                  <a:schemeClr val="tx1"/>
-                </a:solidFill>
-                <a:latin typeface="Arial" panose="020B0604020202020204" pitchFamily="34" charset="0"/>
-              </a:defRPr>
-            </a:lvl7pPr>
-            <a:lvl8pPr marL="3429000" indent="-228600" eaLnBrk="0" fontAlgn="base" hangingPunct="0">
-              <a:spcBef>
-                <a:spcPct val="20000"/>
-              </a:spcBef>
-              <a:spcAft>
-                <a:spcPct val="0"/>
-              </a:spcAft>
-              <a:buChar char="»"/>
-              <a:defRPr sz="2000">
-                <a:solidFill>
-                  <a:schemeClr val="tx1"/>
-                </a:solidFill>
-                <a:latin typeface="Arial" panose="020B0604020202020204" pitchFamily="34" charset="0"/>
-              </a:defRPr>
-            </a:lvl8pPr>
-            <a:lvl9pPr marL="3886200" indent="-228600" eaLnBrk="0" fontAlgn="base" hangingPunct="0">
-              <a:spcBef>
-                <a:spcPct val="20000"/>
-              </a:spcBef>
-              <a:spcAft>
-                <a:spcPct val="0"/>
-              </a:spcAft>
-              <a:buChar char="»"/>
-              <a:defRPr sz="2000">
-                <a:solidFill>
-                  <a:schemeClr val="tx1"/>
-                </a:solidFill>
-                <a:latin typeface="Arial" panose="020B0604020202020204" pitchFamily="34" charset="0"/>
-              </a:defRPr>
-            </a:lvl9pPr>
-          </a:lstStyle>
-          <a:p>
-            <a:pPr eaLnBrk="1" hangingPunct="1">
-              <a:spcBef>
-                <a:spcPct val="0"/>
-              </a:spcBef>
-              <a:buFontTx/>
-              <a:buNone/>
-            </a:pPr>
-            <a:r>
-              <a:rPr lang="en-US" altLang="sk-SK" sz="2400" i="1"/>
-              <a:t>n</a:t>
-            </a:r>
-            <a:r>
-              <a:rPr lang="en-US" altLang="sk-SK" sz="2400" b="1" i="1"/>
-              <a:t>c</a:t>
-            </a:r>
-            <a:r>
-              <a:rPr lang="en-US" altLang="sk-SK" sz="2400"/>
-              <a:t> where </a:t>
-            </a:r>
-            <a:r>
-              <a:rPr lang="en-US" altLang="sk-SK" sz="2400" b="1" i="1"/>
-              <a:t>c</a:t>
-            </a:r>
-            <a:r>
-              <a:rPr lang="en-US" altLang="sk-SK" sz="2400"/>
-              <a:t> is:</a:t>
-            </a:r>
-          </a:p>
-        </p:txBody>
-      </p:sp>
-    </p:spTree>
-  </p:cSld>
-  <p:clrMapOvr>
-    <a:masterClrMapping/>
-  </p:clrMapOvr>
-</p:sld>
-</file>
-
-<file path=ppt/slides/slide2.xml><?xml version="1.0" encoding="utf-8"?>
-<p:sld xmlns:a="http://schemas.openxmlformats.org/drawingml/2006/main" xmlns:r="http://schemas.openxmlformats.org/officeDocument/2006/relationships" xmlns:p="http://schemas.openxmlformats.org/presentationml/2006/main">
-  <p:cSld>
-    <p:spTree>
-      <p:nvGrpSpPr>
-        <p:cNvPr id="1" name=""/>
-        <p:cNvGrpSpPr/>
-        <p:nvPr/>
-      </p:nvGrpSpPr>
-      <p:grpSpPr>
-        <a:xfrm>
-          <a:off x="0" y="0"/>
-          <a:ext cx="0" cy="0"/>
-          <a:chOff x="0" y="0"/>
-          <a:chExt cx="0" cy="0"/>
-        </a:xfrm>
-      </p:grpSpPr>
-      <p:sp>
-        <p:nvSpPr>
-          <p:cNvPr id="5122" name="Title 1">
-            <a:extLst>
-              <a:ext uri="{FF2B5EF4-FFF2-40B4-BE49-F238E27FC236}">
-                <a16:creationId xmlns:a16="http://schemas.microsoft.com/office/drawing/2014/main" id="{53206338-FD39-4FC1-BED5-3377C7F3A2A5}"/>
-              </a:ext>
-            </a:extLst>
-          </p:cNvPr>
-          <p:cNvSpPr>
-            <a:spLocks noGrp="1" noChangeArrowheads="1"/>
-          </p:cNvSpPr>
-          <p:nvPr>
-            <p:ph type="title"/>
-          </p:nvPr>
-        </p:nvSpPr>
-        <p:spPr/>
-        <p:txBody>
-          <a:bodyPr/>
-          <a:lstStyle/>
-          <a:p>
-            <a:r>
-              <a:rPr lang="en-US" altLang="sk-SK"/>
-              <a:t>Objectives</a:t>
-            </a:r>
-          </a:p>
-        </p:txBody>
-      </p:sp>
-      <p:sp>
-        <p:nvSpPr>
-          <p:cNvPr id="5123" name="Content Placeholder 2">
-            <a:extLst>
-              <a:ext uri="{FF2B5EF4-FFF2-40B4-BE49-F238E27FC236}">
-                <a16:creationId xmlns:a16="http://schemas.microsoft.com/office/drawing/2014/main" id="{AE39EC4F-3F05-4306-91B0-6026076B1BE4}"/>
-              </a:ext>
-            </a:extLst>
-          </p:cNvPr>
-          <p:cNvSpPr>
-            <a:spLocks noGrp="1" noChangeArrowheads="1"/>
-          </p:cNvSpPr>
-          <p:nvPr>
-            <p:ph idx="1"/>
-          </p:nvPr>
-        </p:nvSpPr>
-        <p:spPr>
-          <a:xfrm>
-            <a:off x="457200" y="1295400"/>
-            <a:ext cx="8229600" cy="4525963"/>
-          </a:xfrm>
-        </p:spPr>
-        <p:txBody>
-          <a:bodyPr/>
-          <a:lstStyle/>
-          <a:p>
-            <a:pPr marL="0" indent="0">
-              <a:buFontTx/>
-              <a:buNone/>
-            </a:pPr>
-            <a:r>
-              <a:rPr lang="en-US" altLang="sk-SK" sz="2200"/>
-              <a:t>Upon successful completion of this lesson the student, using the vi editor, should: </a:t>
-            </a:r>
-          </a:p>
-          <a:p>
-            <a:pPr lvl="1"/>
-            <a:r>
-              <a:rPr lang="en-US" altLang="sk-SK" sz="2200"/>
-              <a:t>Be able to create a new text file.</a:t>
-            </a:r>
-          </a:p>
-          <a:p>
-            <a:pPr lvl="1"/>
-            <a:r>
-              <a:rPr lang="en-US" altLang="sk-SK" sz="2200"/>
-              <a:t>Be able to insert data from various locations in the file.</a:t>
-            </a:r>
-          </a:p>
-          <a:p>
-            <a:pPr lvl="1"/>
-            <a:r>
-              <a:rPr lang="en-US" altLang="sk-SK" sz="2200"/>
-              <a:t>Be able to navigate through a text file using:</a:t>
-            </a:r>
-          </a:p>
-          <a:p>
-            <a:pPr lvl="2"/>
-            <a:r>
-              <a:rPr lang="en-US" altLang="sk-SK" sz="2200"/>
-              <a:t>Cursor navigation (without using input mode).</a:t>
-            </a:r>
-          </a:p>
-          <a:p>
-            <a:pPr lvl="2"/>
-            <a:r>
-              <a:rPr lang="en-US" altLang="sk-SK" sz="2200"/>
-              <a:t>Searching forwards and backwards.</a:t>
-            </a:r>
-          </a:p>
-          <a:p>
-            <a:pPr lvl="1"/>
-            <a:r>
-              <a:rPr lang="en-US" altLang="sk-SK" sz="2200"/>
-              <a:t>Be able to modify existing text in an efficient manner (without using input mode).</a:t>
-            </a:r>
-          </a:p>
-          <a:p>
-            <a:pPr lvl="1"/>
-            <a:r>
-              <a:rPr lang="en-US" altLang="sk-SK" sz="2200"/>
-              <a:t>Be able to delete unwanted text (without using input mode).</a:t>
-            </a:r>
-          </a:p>
-          <a:p>
-            <a:pPr lvl="1"/>
-            <a:r>
-              <a:rPr lang="en-US" altLang="sk-SK" sz="2200"/>
-              <a:t>Be able to correctly switch between input and insert mode.</a:t>
-            </a:r>
-          </a:p>
-          <a:p>
-            <a:pPr lvl="1"/>
-            <a:r>
-              <a:rPr lang="en-US" altLang="sk-SK" sz="2200"/>
-              <a:t>Be able to save or ignore the modifications made to the text file</a:t>
-            </a:r>
-          </a:p>
-        </p:txBody>
-      </p:sp>
-    </p:spTree>
-  </p:cSld>
-  <p:clrMapOvr>
-    <a:masterClrMapping/>
-  </p:clrMapOvr>
-</p:sld>
-</file>
-
-<file path=ppt/slides/slide20.xml><?xml version="1.0" encoding="utf-8"?>
-<p:sld xmlns:a="http://schemas.openxmlformats.org/drawingml/2006/main" xmlns:r="http://schemas.openxmlformats.org/officeDocument/2006/relationships" xmlns:p="http://schemas.openxmlformats.org/presentationml/2006/main">
-  <p:cSld>
-    <p:spTree>
-      <p:nvGrpSpPr>
-        <p:cNvPr id="1" name=""/>
-        <p:cNvGrpSpPr/>
-        <p:nvPr/>
-      </p:nvGrpSpPr>
-      <p:grpSpPr>
-        <a:xfrm>
-          <a:off x="0" y="0"/>
-          <a:ext cx="0" cy="0"/>
-          <a:chOff x="0" y="0"/>
-          <a:chExt cx="0" cy="0"/>
-        </a:xfrm>
-      </p:grpSpPr>
-      <p:sp>
-        <p:nvSpPr>
           <p:cNvPr id="30722" name="Rectangle 2">
             <a:extLst>
               <a:ext uri="{FF2B5EF4-FFF2-40B4-BE49-F238E27FC236}">
@@ -11911,11 +11835,16 @@
           </p:cNvGraphicFramePr>
           <p:nvPr>
             <p:ph type="tbl" idx="1"/>
+            <p:extLst>
+              <p:ext uri="{D42A27DB-BD31-4B8C-83A1-F6EECF244321}">
+                <p14:modId xmlns:p14="http://schemas.microsoft.com/office/powerpoint/2010/main" val="3147109154"/>
+              </p:ext>
+            </p:extLst>
           </p:nvPr>
         </p:nvGraphicFramePr>
         <p:xfrm>
           <a:off x="457200" y="1905000"/>
-          <a:ext cx="8229600" cy="2262190"/>
+          <a:ext cx="8229600" cy="2714628"/>
         </p:xfrm>
         <a:graphic>
           <a:graphicData uri="http://schemas.openxmlformats.org/drawingml/2006/table">
@@ -12686,7 +12615,7 @@
                       <a:headEnd type="none" w="med" len="med"/>
                       <a:tailEnd type="none" w="med" len="med"/>
                     </a:lnT>
-                    <a:lnB w="28575" cap="flat" cmpd="sng" algn="ctr">
+                    <a:lnB w="12700" cap="flat" cmpd="sng" algn="ctr">
                       <a:solidFill>
                         <a:schemeClr val="tx1"/>
                       </a:solidFill>
@@ -12768,7 +12697,7 @@
                       <a:headEnd type="none" w="med" len="med"/>
                       <a:tailEnd type="none" w="med" len="med"/>
                     </a:lnT>
-                    <a:lnB w="28575" cap="flat" cmpd="sng" algn="ctr">
+                    <a:lnB w="12700" cap="flat" cmpd="sng" algn="ctr">
                       <a:solidFill>
                         <a:schemeClr val="tx1"/>
                       </a:solidFill>
@@ -12789,6 +12718,162 @@
                 <a:extLst>
                   <a:ext uri="{0D108BD9-81ED-4DB2-BD59-A6C34878D82A}">
                     <a16:rowId xmlns:a16="http://schemas.microsoft.com/office/drawing/2014/main" val="3066277195"/>
+                  </a:ext>
+                </a:extLst>
+              </a:tr>
+              <a:tr h="452438">
+                <a:tc>
+                  <a:txBody>
+                    <a:bodyPr/>
+                    <a:lstStyle/>
+                    <a:p>
+                      <a:pPr marL="0" lvl="0" indent="0" algn="l" defTabSz="914400">
+                        <a:lnSpc>
+                          <a:spcPct val="100000"/>
+                        </a:lnSpc>
+                        <a:spcBef>
+                          <a:spcPct val="20000"/>
+                        </a:spcBef>
+                        <a:spcAft>
+                          <a:spcPct val="0"/>
+                        </a:spcAft>
+                        <a:buNone/>
+                        <a:tabLst/>
+                      </a:pPr>
+                      <a:r>
+                        <a:rPr lang="en-US" sz="2000" b="1" i="0" u="none" strike="noStrike" cap="none" normalizeH="0" baseline="0">
+                          <a:ln>
+                            <a:noFill/>
+                          </a:ln>
+                          <a:solidFill>
+                            <a:schemeClr val="tx1"/>
+                          </a:solidFill>
+                          <a:effectLst/>
+                          <a:latin typeface="Arial"/>
+                        </a:rPr>
+                        <a:t>%</a:t>
+                      </a:r>
+                      <a:endParaRPr kumimoji="0" lang="en-US" sz="2000" b="1" i="0" u="none" strike="noStrike" cap="none" normalizeH="0" baseline="0" dirty="0">
+                        <a:ln>
+                          <a:noFill/>
+                        </a:ln>
+                        <a:solidFill>
+                          <a:schemeClr val="tx1"/>
+                        </a:solidFill>
+                        <a:effectLst/>
+                        <a:latin typeface="Arial"/>
+                      </a:endParaRPr>
+                    </a:p>
+                  </a:txBody>
+                  <a:tcPr>
+                    <a:lnL w="28575">
+                      <a:solidFill>
+                        <a:schemeClr val="tx1"/>
+                      </a:solidFill>
+                    </a:lnL>
+                    <a:lnR w="12700">
+                      <a:solidFill>
+                        <a:schemeClr val="tx1"/>
+                      </a:solidFill>
+                    </a:lnR>
+                    <a:lnT w="12700">
+                      <a:solidFill>
+                        <a:schemeClr val="tx1"/>
+                      </a:solidFill>
+                    </a:lnT>
+                    <a:lnB w="28575">
+                      <a:solidFill>
+                        <a:schemeClr val="tx1"/>
+                      </a:solidFill>
+                    </a:lnB>
+                    <a:lnTlToBr w="0">
+                      <a:noFill/>
+                    </a:lnTlToBr>
+                    <a:lnBlToTr w="0">
+                      <a:noFill/>
+                    </a:lnBlToTr>
+                    <a:noFill/>
+                  </a:tcPr>
+                </a:tc>
+                <a:tc>
+                  <a:txBody>
+                    <a:bodyPr/>
+                    <a:lstStyle/>
+                    <a:p>
+                      <a:pPr marL="0" lvl="0" indent="0" algn="l">
+                        <a:lnSpc>
+                          <a:spcPct val="100000"/>
+                        </a:lnSpc>
+                        <a:spcBef>
+                          <a:spcPct val="20000"/>
+                        </a:spcBef>
+                        <a:spcAft>
+                          <a:spcPct val="0"/>
+                        </a:spcAft>
+                        <a:buNone/>
+                      </a:pPr>
+                      <a:r>
+                        <a:rPr kumimoji="0" lang="en-US" sz="2000" b="0" i="0" u="none" strike="noStrike" kern="1200" cap="none" normalizeH="0" baseline="0" noProof="0">
+                          <a:ln>
+                            <a:noFill/>
+                          </a:ln>
+                          <a:solidFill>
+                            <a:schemeClr val="tx1"/>
+                          </a:solidFill>
+                          <a:effectLst/>
+                          <a:latin typeface="Arial"/>
+                          <a:ea typeface="+mn-ea"/>
+                          <a:cs typeface="+mn-cs"/>
+                        </a:rPr>
+                        <a:t>It jumps to the line at % of the total lines.</a:t>
+                      </a:r>
+                      <a:endParaRPr kumimoji="0" lang="en-US" sz="2000" b="0" i="0" u="none" strike="noStrike" kern="1200" cap="none" normalizeH="0" baseline="0" dirty="0">
+                        <a:ln>
+                          <a:noFill/>
+                        </a:ln>
+                        <a:solidFill>
+                          <a:schemeClr val="tx1"/>
+                        </a:solidFill>
+                        <a:effectLst/>
+                        <a:latin typeface="Arial"/>
+                        <a:ea typeface="+mn-ea"/>
+                        <a:cs typeface="+mn-cs"/>
+                      </a:endParaRPr>
+                    </a:p>
+                  </a:txBody>
+                  <a:tcPr>
+                    <a:lnL w="12700">
+                      <a:solidFill>
+                        <a:schemeClr val="tx1"/>
+                      </a:solidFill>
+                    </a:lnL>
+                    <a:lnR w="28575">
+                      <a:solidFill>
+                        <a:schemeClr val="tx1"/>
+                      </a:solidFill>
+                    </a:lnR>
+                    <a:lnT w="12700">
+                      <a:solidFill>
+                        <a:schemeClr val="tx1"/>
+                      </a:solidFill>
+                    </a:lnT>
+                    <a:lnB w="28575">
+                      <a:solidFill>
+                        <a:schemeClr val="tx1"/>
+                      </a:solidFill>
+                    </a:lnB>
+                    <a:lnTlToBr w="0">
+                      <a:noFill/>
+                    </a:lnTlToBr>
+                    <a:lnBlToTr w="0">
+                      <a:noFill/>
+                    </a:lnBlToTr>
+                    <a:noFill/>
+                  </a:tcPr>
+                </a:tc>
+                <a:extLst>
+                  <a:ext uri="{0D108BD9-81ED-4DB2-BD59-A6C34878D82A}">
+                    <a16:rowId xmlns:a16="http://schemas.microsoft.com/office/drawing/2014/main" val="3447718624"/>
                   </a:ext>
                 </a:extLst>
               </a:tr>
@@ -12811,7 +12896,7 @@
         <p:spPr>
           <a:xfrm>
             <a:off x="487680" y="4953000"/>
-            <a:ext cx="3583032" cy="369332"/>
+            <a:ext cx="5647700" cy="677108"/>
           </a:xfrm>
           <a:prstGeom prst="rect">
             <a:avLst/>
@@ -12819,7 +12904,7 @@
           <a:noFill/>
         </p:spPr>
         <p:txBody>
-          <a:bodyPr wrap="none" rtlCol="0">
+          <a:bodyPr wrap="none" lIns="91440" tIns="45720" rIns="91440" bIns="45720" rtlCol="0" anchor="t">
             <a:spAutoFit/>
           </a:bodyPr>
           <a:lstStyle/>
@@ -12828,6 +12913,15 @@
               <a:rPr lang="sk-SK" dirty="0"/>
               <a:t>5gg – prejde na začiatok 5 riadku</a:t>
             </a:r>
+          </a:p>
+          <a:p>
+            <a:r>
+              <a:rPr lang="en-US" sz="2000">
+                <a:cs typeface="Arial"/>
+              </a:rPr>
+              <a:t>50% It jumps to the line at 50% of the total lines.</a:t>
+            </a:r>
+            <a:endParaRPr lang="sk-SK"/>
           </a:p>
         </p:txBody>
       </p:sp>
@@ -12839,7 +12933,160 @@
 </p:sld>
 </file>
 
-<file path=ppt/slides/slide21.xml><?xml version="1.0" encoding="utf-8"?>
+<file path=ppt/slides/slide2.xml><?xml version="1.0" encoding="utf-8"?>
+<p:sld xmlns:a="http://schemas.openxmlformats.org/drawingml/2006/main" xmlns:r="http://schemas.openxmlformats.org/officeDocument/2006/relationships" xmlns:p="http://schemas.openxmlformats.org/presentationml/2006/main">
+  <p:cSld>
+    <p:spTree>
+      <p:nvGrpSpPr>
+        <p:cNvPr id="1" name=""/>
+        <p:cNvGrpSpPr/>
+        <p:nvPr/>
+      </p:nvGrpSpPr>
+      <p:grpSpPr>
+        <a:xfrm>
+          <a:off x="0" y="0"/>
+          <a:ext cx="0" cy="0"/>
+          <a:chOff x="0" y="0"/>
+          <a:chExt cx="0" cy="0"/>
+        </a:xfrm>
+      </p:grpSpPr>
+      <p:sp>
+        <p:nvSpPr>
+          <p:cNvPr id="5122" name="Title 1">
+            <a:extLst>
+              <a:ext uri="{FF2B5EF4-FFF2-40B4-BE49-F238E27FC236}">
+                <a16:creationId xmlns:a16="http://schemas.microsoft.com/office/drawing/2014/main" id="{53206338-FD39-4FC1-BED5-3377C7F3A2A5}"/>
+              </a:ext>
+            </a:extLst>
+          </p:cNvPr>
+          <p:cNvSpPr>
+            <a:spLocks noGrp="1" noChangeArrowheads="1"/>
+          </p:cNvSpPr>
+          <p:nvPr>
+            <p:ph type="title"/>
+          </p:nvPr>
+        </p:nvSpPr>
+        <p:spPr/>
+        <p:txBody>
+          <a:bodyPr/>
+          <a:lstStyle/>
+          <a:p>
+            <a:r>
+              <a:rPr lang="en-US" altLang="sk-SK"/>
+              <a:t>Objectives</a:t>
+            </a:r>
+          </a:p>
+        </p:txBody>
+      </p:sp>
+      <p:sp>
+        <p:nvSpPr>
+          <p:cNvPr id="5123" name="Content Placeholder 2">
+            <a:extLst>
+              <a:ext uri="{FF2B5EF4-FFF2-40B4-BE49-F238E27FC236}">
+                <a16:creationId xmlns:a16="http://schemas.microsoft.com/office/drawing/2014/main" id="{AE39EC4F-3F05-4306-91B0-6026076B1BE4}"/>
+              </a:ext>
+            </a:extLst>
+          </p:cNvPr>
+          <p:cNvSpPr>
+            <a:spLocks noGrp="1" noChangeArrowheads="1"/>
+          </p:cNvSpPr>
+          <p:nvPr>
+            <p:ph idx="1"/>
+          </p:nvPr>
+        </p:nvSpPr>
+        <p:spPr>
+          <a:xfrm>
+            <a:off x="457200" y="1295400"/>
+            <a:ext cx="8229600" cy="4525963"/>
+          </a:xfrm>
+        </p:spPr>
+        <p:txBody>
+          <a:bodyPr/>
+          <a:lstStyle/>
+          <a:p>
+            <a:pPr marL="0" indent="0">
+              <a:buFontTx/>
+              <a:buNone/>
+            </a:pPr>
+            <a:r>
+              <a:rPr lang="en-US" altLang="sk-SK" sz="2200"/>
+              <a:t>Upon successful completion of this lesson the student, using the vi editor, should: </a:t>
+            </a:r>
+          </a:p>
+          <a:p>
+            <a:pPr lvl="1"/>
+            <a:r>
+              <a:rPr lang="en-US" altLang="sk-SK" sz="2200"/>
+              <a:t>Be able to create a new text file.</a:t>
+            </a:r>
+          </a:p>
+          <a:p>
+            <a:pPr lvl="1"/>
+            <a:r>
+              <a:rPr lang="en-US" altLang="sk-SK" sz="2200"/>
+              <a:t>Be able to insert data from various locations in the file.</a:t>
+            </a:r>
+          </a:p>
+          <a:p>
+            <a:pPr lvl="1"/>
+            <a:r>
+              <a:rPr lang="en-US" altLang="sk-SK" sz="2200"/>
+              <a:t>Be able to navigate through a text file using:</a:t>
+            </a:r>
+          </a:p>
+          <a:p>
+            <a:pPr lvl="2"/>
+            <a:r>
+              <a:rPr lang="en-US" altLang="sk-SK" sz="2200"/>
+              <a:t>Cursor navigation (without using input mode).</a:t>
+            </a:r>
+          </a:p>
+          <a:p>
+            <a:pPr lvl="2"/>
+            <a:r>
+              <a:rPr lang="en-US" altLang="sk-SK" sz="2200"/>
+              <a:t>Searching forwards and backwards.</a:t>
+            </a:r>
+          </a:p>
+          <a:p>
+            <a:pPr lvl="1"/>
+            <a:r>
+              <a:rPr lang="en-US" altLang="sk-SK" sz="2200"/>
+              <a:t>Be able to modify existing text in an efficient manner (without using input mode).</a:t>
+            </a:r>
+          </a:p>
+          <a:p>
+            <a:pPr lvl="1"/>
+            <a:r>
+              <a:rPr lang="en-US" altLang="sk-SK" sz="2200"/>
+              <a:t>Be able to delete unwanted text (without using input mode).</a:t>
+            </a:r>
+          </a:p>
+          <a:p>
+            <a:pPr lvl="1"/>
+            <a:r>
+              <a:rPr lang="en-US" altLang="sk-SK" sz="2200"/>
+              <a:t>Be able to correctly switch between input and insert mode.</a:t>
+            </a:r>
+          </a:p>
+          <a:p>
+            <a:pPr lvl="1"/>
+            <a:r>
+              <a:rPr lang="en-US" altLang="sk-SK" sz="2200"/>
+              <a:t>Be able to save or ignore the modifications made to the text file</a:t>
+            </a:r>
+          </a:p>
+        </p:txBody>
+      </p:sp>
+    </p:spTree>
+  </p:cSld>
+  <p:clrMapOvr>
+    <a:masterClrMapping/>
+  </p:clrMapOvr>
+</p:sld>
+</file>
+
+<file path=ppt/slides/slide20.xml><?xml version="1.0" encoding="utf-8"?>
 <p:sld xmlns:a="http://schemas.openxmlformats.org/drawingml/2006/main" xmlns:r="http://schemas.openxmlformats.org/officeDocument/2006/relationships" xmlns:p="http://schemas.openxmlformats.org/presentationml/2006/main">
   <p:cSld>
     <p:spTree>
@@ -13639,6 +13886,234 @@
           </a:graphicData>
         </a:graphic>
       </p:graphicFrame>
+      <p:sp>
+        <p:nvSpPr>
+          <p:cNvPr id="2" name="TextBox 1">
+            <a:extLst>
+              <a:ext uri="{FF2B5EF4-FFF2-40B4-BE49-F238E27FC236}">
+                <a16:creationId xmlns:a16="http://schemas.microsoft.com/office/drawing/2014/main" id="{B1FCB07E-3F55-BB70-B41D-F4DBCA516523}"/>
+              </a:ext>
+            </a:extLst>
+          </p:cNvPr>
+          <p:cNvSpPr txBox="1"/>
+          <p:nvPr/>
+        </p:nvSpPr>
+        <p:spPr>
+          <a:xfrm>
+            <a:off x="680428" y="5479237"/>
+            <a:ext cx="5969166" cy="646331"/>
+          </a:xfrm>
+          <a:prstGeom prst="rect">
+            <a:avLst/>
+          </a:prstGeom>
+          <a:noFill/>
+        </p:spPr>
+        <p:txBody>
+          <a:bodyPr rot="0" spcFirstLastPara="0" vertOverflow="overflow" horzOverflow="overflow" vert="horz" wrap="square" lIns="91440" tIns="45720" rIns="91440" bIns="45720" numCol="1" spcCol="0" rtlCol="0" fromWordArt="0" anchor="t" anchorCtr="0" forceAA="0" compatLnSpc="1">
+            <a:prstTxWarp prst="textNoShape">
+              <a:avLst/>
+            </a:prstTxWarp>
+            <a:spAutoFit/>
+          </a:bodyPr>
+          <a:lstStyle/>
+          <a:p>
+            <a:r>
+              <a:rPr lang="en-US" dirty="0" err="1">
+                <a:latin typeface="Arial"/>
+                <a:cs typeface="Arial"/>
+              </a:rPr>
+              <a:t>Kurzor</a:t>
+            </a:r>
+            <a:r>
+              <a:rPr lang="en-US" dirty="0">
+                <a:latin typeface="Arial"/>
+                <a:cs typeface="Arial"/>
+              </a:rPr>
+              <a:t> </a:t>
+            </a:r>
+            <a:r>
+              <a:rPr lang="en-US" dirty="0" err="1">
+                <a:latin typeface="Arial"/>
+                <a:cs typeface="Arial"/>
+              </a:rPr>
+              <a:t>na</a:t>
+            </a:r>
+            <a:r>
+              <a:rPr lang="en-US" dirty="0">
+                <a:latin typeface="Arial"/>
+                <a:cs typeface="Arial"/>
+              </a:rPr>
+              <a:t> </a:t>
+            </a:r>
+            <a:r>
+              <a:rPr lang="en-US" dirty="0" err="1">
+                <a:latin typeface="Arial"/>
+                <a:cs typeface="Arial"/>
+              </a:rPr>
+              <a:t>slovo</a:t>
+            </a:r>
+            <a:r>
+              <a:rPr lang="en-US" dirty="0">
+                <a:latin typeface="Arial"/>
+                <a:cs typeface="Arial"/>
+              </a:rPr>
+              <a:t> a </a:t>
+            </a:r>
+            <a:r>
+              <a:rPr lang="en-US" b="1" dirty="0">
+                <a:latin typeface="Arial"/>
+                <a:cs typeface="Arial"/>
+              </a:rPr>
+              <a:t>*</a:t>
+            </a:r>
+            <a:r>
+              <a:rPr lang="en-US" dirty="0">
+                <a:latin typeface="Arial"/>
+                <a:cs typeface="Arial"/>
+              </a:rPr>
+              <a:t> </a:t>
+            </a:r>
+            <a:r>
+              <a:rPr lang="en-US" dirty="0" err="1">
+                <a:latin typeface="Arial"/>
+                <a:cs typeface="Arial"/>
+              </a:rPr>
+              <a:t>vyhľadá</a:t>
+            </a:r>
+            <a:r>
+              <a:rPr lang="en-US" dirty="0">
+                <a:latin typeface="Arial"/>
+                <a:cs typeface="Arial"/>
+              </a:rPr>
+              <a:t> </a:t>
+            </a:r>
+            <a:r>
+              <a:rPr lang="en-US" dirty="0" err="1">
+                <a:latin typeface="Arial"/>
+                <a:cs typeface="Arial"/>
+              </a:rPr>
+              <a:t>slovo</a:t>
+            </a:r>
+            <a:r>
+              <a:rPr lang="en-US" dirty="0">
+                <a:latin typeface="Arial"/>
+                <a:cs typeface="Arial"/>
+              </a:rPr>
+              <a:t> </a:t>
+            </a:r>
+            <a:r>
+              <a:rPr lang="en-US" dirty="0" err="1">
+                <a:latin typeface="Arial"/>
+                <a:cs typeface="Arial"/>
+              </a:rPr>
+              <a:t>smerom</a:t>
+            </a:r>
+            <a:r>
+              <a:rPr lang="en-US" dirty="0">
+                <a:latin typeface="Arial"/>
+                <a:cs typeface="Arial"/>
+              </a:rPr>
+              <a:t> dole</a:t>
+            </a:r>
+          </a:p>
+          <a:p>
+            <a:r>
+              <a:rPr lang="en-US" dirty="0" err="1">
+                <a:latin typeface="Arial"/>
+                <a:cs typeface="Arial"/>
+              </a:rPr>
+              <a:t>Kurzor</a:t>
+            </a:r>
+            <a:r>
+              <a:rPr lang="en-US" dirty="0">
+                <a:latin typeface="Arial"/>
+                <a:cs typeface="Arial"/>
+              </a:rPr>
+              <a:t> </a:t>
+            </a:r>
+            <a:r>
+              <a:rPr lang="en-US" dirty="0" err="1">
+                <a:latin typeface="Arial"/>
+                <a:cs typeface="Arial"/>
+              </a:rPr>
+              <a:t>na</a:t>
+            </a:r>
+            <a:r>
+              <a:rPr lang="en-US" dirty="0">
+                <a:latin typeface="Arial"/>
+                <a:cs typeface="Arial"/>
+              </a:rPr>
+              <a:t> </a:t>
+            </a:r>
+            <a:r>
+              <a:rPr lang="en-US" dirty="0" err="1">
+                <a:latin typeface="Arial"/>
+                <a:cs typeface="Arial"/>
+              </a:rPr>
+              <a:t>slovo</a:t>
+            </a:r>
+            <a:r>
+              <a:rPr lang="en-US" dirty="0">
+                <a:latin typeface="Arial"/>
+                <a:cs typeface="Arial"/>
+              </a:rPr>
+              <a:t> a # </a:t>
+            </a:r>
+            <a:r>
+              <a:rPr lang="en-US" dirty="0" err="1">
+                <a:latin typeface="Arial"/>
+                <a:cs typeface="Arial"/>
+              </a:rPr>
+              <a:t>vyhľadá</a:t>
+            </a:r>
+            <a:r>
+              <a:rPr lang="en-US" dirty="0">
+                <a:latin typeface="Arial"/>
+                <a:cs typeface="Arial"/>
+              </a:rPr>
+              <a:t> </a:t>
+            </a:r>
+            <a:r>
+              <a:rPr lang="en-US" dirty="0" err="1">
+                <a:latin typeface="Arial"/>
+                <a:cs typeface="Arial"/>
+              </a:rPr>
+              <a:t>slovo</a:t>
+            </a:r>
+            <a:r>
+              <a:rPr lang="en-US" dirty="0">
+                <a:latin typeface="Arial"/>
+                <a:cs typeface="Arial"/>
+              </a:rPr>
+              <a:t> </a:t>
+            </a:r>
+            <a:r>
+              <a:rPr lang="en-US" dirty="0" err="1">
+                <a:latin typeface="Arial"/>
+                <a:cs typeface="Arial"/>
+              </a:rPr>
+              <a:t>smerom</a:t>
+            </a:r>
+            <a:r>
+              <a:rPr lang="en-US" dirty="0">
+                <a:latin typeface="Arial"/>
+                <a:cs typeface="Arial"/>
+              </a:rPr>
+              <a:t> </a:t>
+            </a:r>
+            <a:r>
+              <a:rPr lang="en-US" dirty="0" err="1">
+                <a:latin typeface="Arial"/>
+                <a:cs typeface="Arial"/>
+              </a:rPr>
+              <a:t>hore</a:t>
+            </a:r>
+            <a:endParaRPr lang="en-US" dirty="0" err="1">
+              <a:latin typeface="Arial"/>
+            </a:endParaRPr>
+          </a:p>
+        </p:txBody>
+      </p:sp>
     </p:spTree>
   </p:cSld>
   <p:clrMapOvr>
@@ -13647,7 +14122,7 @@
 </p:sld>
 </file>
 
-<file path=ppt/slides/slide22.xml><?xml version="1.0" encoding="utf-8"?>
+<file path=ppt/slides/slide21.xml><?xml version="1.0" encoding="utf-8"?>
 <p:sld xmlns:a="http://schemas.openxmlformats.org/drawingml/2006/main" xmlns:r="http://schemas.openxmlformats.org/officeDocument/2006/relationships" xmlns:p="http://schemas.openxmlformats.org/presentationml/2006/main">
   <p:cSld>
     <p:spTree>
@@ -14680,7 +15155,7 @@
 </p:sld>
 </file>
 
-<file path=ppt/slides/slide23.xml><?xml version="1.0" encoding="utf-8"?>
+<file path=ppt/slides/slide22.xml><?xml version="1.0" encoding="utf-8"?>
 <p:sld xmlns:a="http://schemas.openxmlformats.org/drawingml/2006/main" xmlns:r="http://schemas.openxmlformats.org/officeDocument/2006/relationships" xmlns:p="http://schemas.openxmlformats.org/presentationml/2006/main">
   <p:cSld>
     <p:spTree>
@@ -14780,7 +15255,12 @@
             <p:ph sz="half" idx="1"/>
           </p:nvPr>
         </p:nvSpPr>
-        <p:spPr/>
+        <p:spPr>
+          <a:xfrm>
+            <a:off x="457200" y="1600200"/>
+            <a:ext cx="4076198" cy="2397878"/>
+          </a:xfrm>
+        </p:spPr>
         <p:txBody>
           <a:bodyPr/>
           <a:lstStyle/>
@@ -14886,14 +15366,6 @@
             <a:endParaRPr lang="en-US" dirty="0">
               <a:cs typeface="Arial"/>
             </a:endParaRPr>
-          </a:p>
-          <a:p>
-            <a:r>
-              <a:rPr lang="en-US" dirty="0">
-                <a:cs typeface="Arial"/>
-              </a:rPr>
-              <a:t>https://opensource.com/article/19/2/getting-started-vim-visual-mode</a:t>
-            </a:r>
           </a:p>
         </p:txBody>
       </p:sp>
@@ -14984,6 +15456,83 @@
           </a:p>
         </p:txBody>
       </p:sp>
+      <p:sp>
+        <p:nvSpPr>
+          <p:cNvPr id="5" name="TextBox 4">
+            <a:extLst>
+              <a:ext uri="{FF2B5EF4-FFF2-40B4-BE49-F238E27FC236}">
+                <a16:creationId xmlns:a16="http://schemas.microsoft.com/office/drawing/2014/main" id="{A756D8D8-A21D-56E5-9A94-10934E175B29}"/>
+              </a:ext>
+            </a:extLst>
+          </p:cNvPr>
+          <p:cNvSpPr txBox="1"/>
+          <p:nvPr/>
+        </p:nvSpPr>
+        <p:spPr>
+          <a:xfrm>
+            <a:off x="458704" y="4947987"/>
+            <a:ext cx="7625012" cy="830997"/>
+          </a:xfrm>
+          <a:prstGeom prst="rect">
+            <a:avLst/>
+          </a:prstGeom>
+          <a:noFill/>
+        </p:spPr>
+        <p:txBody>
+          <a:bodyPr rot="0" spcFirstLastPara="0" vertOverflow="overflow" horzOverflow="overflow" vert="horz" wrap="square" lIns="91440" tIns="45720" rIns="91440" bIns="45720" numCol="1" spcCol="0" rtlCol="0" fromWordArt="0" anchor="t" anchorCtr="0" forceAA="0" compatLnSpc="1">
+            <a:prstTxWarp prst="textNoShape">
+              <a:avLst/>
+            </a:prstTxWarp>
+            <a:spAutoFit/>
+          </a:bodyPr>
+          <a:lstStyle/>
+          <a:p>
+            <a:r>
+              <a:rPr lang="en-US" sz="2400" dirty="0" err="1">
+                <a:latin typeface="Arial"/>
+                <a:cs typeface="Arial"/>
+              </a:rPr>
+              <a:t>Vizuálny</a:t>
+            </a:r>
+            <a:r>
+              <a:rPr lang="en-US" sz="2400" dirty="0">
+                <a:latin typeface="Arial"/>
+                <a:cs typeface="Arial"/>
+              </a:rPr>
+              <a:t> </a:t>
+            </a:r>
+            <a:r>
+              <a:rPr lang="en-US" sz="2400" dirty="0" err="1">
+                <a:latin typeface="Arial"/>
+                <a:cs typeface="Arial"/>
+              </a:rPr>
+              <a:t>mód</a:t>
+            </a:r>
+            <a:r>
+              <a:rPr lang="en-US" sz="2400" dirty="0">
+                <a:latin typeface="Arial"/>
+                <a:cs typeface="Arial"/>
+              </a:rPr>
+              <a:t> tutorial </a:t>
+            </a:r>
+            <a:r>
+              <a:rPr lang="en-US" sz="2400" dirty="0">
+                <a:latin typeface="Arial"/>
+                <a:cs typeface="Arial"/>
+                <a:hlinkClick r:id="rId2"/>
+              </a:rPr>
+              <a:t>https://youtu.be/b6muaaqO-ns?si=5HiunB35JfJJy2P0</a:t>
+            </a:r>
+            <a:r>
+              <a:rPr lang="en-US" sz="2400" dirty="0">
+                <a:latin typeface="Arial"/>
+                <a:cs typeface="Arial"/>
+              </a:rPr>
+              <a:t> </a:t>
+            </a:r>
+          </a:p>
+        </p:txBody>
+      </p:sp>
     </p:spTree>
     <p:extLst>
       <p:ext uri="{BB962C8B-B14F-4D97-AF65-F5344CB8AC3E}">
@@ -14997,7 +15546,7 @@
 </p:sld>
 </file>
 
-<file path=ppt/slides/slide24.xml><?xml version="1.0" encoding="utf-8"?>
+<file path=ppt/slides/slide23.xml><?xml version="1.0" encoding="utf-8"?>
 <p:sld xmlns:a="http://schemas.openxmlformats.org/drawingml/2006/main" xmlns:r="http://schemas.openxmlformats.org/officeDocument/2006/relationships" xmlns:p="http://schemas.openxmlformats.org/presentationml/2006/main">
   <p:cSld>
     <p:spTree>
@@ -15059,28 +15608,30 @@
             <p:ph type="tbl" idx="1"/>
             <p:extLst>
               <p:ext uri="{D42A27DB-BD31-4B8C-83A1-F6EECF244321}">
-                <p14:modId xmlns:p14="http://schemas.microsoft.com/office/powerpoint/2010/main" val="1715985941"/>
+                <p14:modId xmlns:p14="http://schemas.microsoft.com/office/powerpoint/2010/main" val="2954340537"/>
               </p:ext>
             </p:extLst>
           </p:nvPr>
         </p:nvGraphicFramePr>
         <p:xfrm>
-          <a:off x="381000" y="1524000"/>
-          <a:ext cx="8153400" cy="5310190"/>
+          <a:off x="337624" y="1308295"/>
+          <a:ext cx="8139330" cy="5387864"/>
         </p:xfrm>
         <a:graphic>
           <a:graphicData uri="http://schemas.openxmlformats.org/drawingml/2006/table">
             <a:tbl>
-              <a:tblPr/>
+              <a:tblPr>
+                <a:tableStyleId>{616DA210-FB5B-4158-B5E0-FEB733F419BA}</a:tableStyleId>
+              </a:tblPr>
               <a:tblGrid>
-                <a:gridCol w="775018">
+                <a:gridCol w="773680">
                   <a:extLst>
                     <a:ext uri="{9D8B030D-6E8A-4147-A177-3AD203B41FA5}">
                       <a16:colId xmlns:a16="http://schemas.microsoft.com/office/drawing/2014/main" val="20000"/>
                     </a:ext>
                   </a:extLst>
                 </a:gridCol>
-                <a:gridCol w="7378382">
+                <a:gridCol w="7365650">
                   <a:extLst>
                     <a:ext uri="{9D8B030D-6E8A-4147-A177-3AD203B41FA5}">
                       <a16:colId xmlns:a16="http://schemas.microsoft.com/office/drawing/2014/main" val="20001"/>
@@ -15088,7 +15639,7 @@
                   </a:extLst>
                 </a:gridCol>
               </a:tblGrid>
-              <a:tr h="579120">
+              <a:tr h="565508">
                 <a:tc gridSpan="2">
                   <a:txBody>
                     <a:bodyPr/>
@@ -15113,101 +15664,54 @@
                       </a:pPr>
                       <a:r>
                         <a:rPr lang="en-US" sz="3200" dirty="0"/>
-                        <a:t>Format        </a:t>
+                        <a:t>Format        :[address] s /old/new/[g]</a:t>
                       </a:r>
                       <a:r>
-                        <a:rPr lang="en-US" sz="3200" b="1" dirty="0"/>
-                        <a:t>:</a:t>
+                        <a:rPr lang="en-US" sz="3200" b="0" i="0" u="none" strike="noStrike" noProof="0" dirty="0">
+                          <a:solidFill>
+                            <a:srgbClr val="000000"/>
+                          </a:solidFill>
+                          <a:latin typeface="Arial"/>
+                          <a:cs typeface="Arial"/>
+                        </a:rPr>
+                        <a:t>[</a:t>
                       </a:r>
                       <a:r>
-                        <a:rPr lang="en-US" sz="3200" dirty="0"/>
-                        <a:t>[address] </a:t>
+                        <a:rPr lang="en-US" sz="3200" b="0" i="0" u="none" strike="noStrike" noProof="0" dirty="0" err="1">
+                          <a:solidFill>
+                            <a:srgbClr val="000000"/>
+                          </a:solidFill>
+                          <a:latin typeface="Arial"/>
+                          <a:cs typeface="Arial"/>
+                        </a:rPr>
+                        <a:t>i</a:t>
                       </a:r>
                       <a:r>
-                        <a:rPr lang="en-US" sz="3200" b="1" dirty="0"/>
-                        <a:t>s</a:t>
+                        <a:rPr lang="en-US" sz="3200" b="0" i="0" u="none" strike="noStrike" noProof="0" dirty="0">
+                          <a:solidFill>
+                            <a:srgbClr val="000000"/>
+                          </a:solidFill>
+                          <a:latin typeface="Arial"/>
+                          <a:cs typeface="Arial"/>
+                        </a:rPr>
+                        <a:t>][c]</a:t>
                       </a:r>
                       <a:r>
-                        <a:rPr lang="en-US" sz="3200" dirty="0"/>
-                        <a:t> /</a:t>
-                      </a:r>
-                      <a:r>
-                        <a:rPr lang="en-US" sz="3200" i="1" dirty="0"/>
-                        <a:t>old</a:t>
-                      </a:r>
-                      <a:r>
-                        <a:rPr lang="en-US" sz="3200" dirty="0"/>
-                        <a:t>/</a:t>
-                      </a:r>
-                      <a:r>
-                        <a:rPr lang="en-US" sz="3200" i="1" dirty="0"/>
-                        <a:t>new</a:t>
-                      </a:r>
-                      <a:r>
-                        <a:rPr lang="en-US" sz="3200" dirty="0"/>
-                        <a:t>/[</a:t>
-                      </a:r>
-                      <a:r>
-                        <a:rPr lang="en-US" sz="3200" b="1" dirty="0"/>
-                        <a:t>g</a:t>
-                      </a:r>
-                      <a:r>
-                        <a:rPr lang="en-US" sz="3200" dirty="0"/>
-                        <a:t>]</a:t>
-                      </a:r>
-                      <a:r>
-                        <a:rPr lang="en-US" sz="3200" baseline="30000" dirty="0"/>
+                        <a:rPr lang="en-US" sz="3200" baseline="30000" dirty="0">
+                          <a:solidFill>
+                            <a:srgbClr val="FF0000"/>
+                          </a:solidFill>
+                        </a:rPr>
                         <a:t>1</a:t>
                       </a:r>
-                      <a:endParaRPr kumimoji="0" lang="en-US" sz="3200" b="0" i="0" u="none" strike="noStrike" cap="none" normalizeH="0" baseline="30000" dirty="0">
-                        <a:ln>
-                          <a:noFill/>
-                        </a:ln>
+                      <a:endParaRPr lang="en-US" sz="3200" kern="1200" dirty="0">
                         <a:solidFill>
-                          <a:schemeClr val="tx1"/>
+                          <a:srgbClr val="000000"/>
                         </a:solidFill>
-                        <a:effectLst/>
-                        <a:latin typeface="Arial" charset="0"/>
                       </a:endParaRPr>
                     </a:p>
                   </a:txBody>
-                  <a:tcPr horzOverflow="overflow">
-                    <a:lnL w="28575" cap="flat" cmpd="sng" algn="ctr">
-                      <a:noFill/>
-                      <a:prstDash val="solid"/>
-                      <a:round/>
-                      <a:headEnd type="none" w="med" len="med"/>
-                      <a:tailEnd type="none" w="med" len="med"/>
-                    </a:lnL>
-                    <a:lnR w="28575" cap="flat" cmpd="sng" algn="ctr">
-                      <a:noFill/>
-                      <a:prstDash val="solid"/>
-                      <a:round/>
-                      <a:headEnd type="none" w="med" len="med"/>
-                      <a:tailEnd type="none" w="med" len="med"/>
-                    </a:lnR>
-                    <a:lnT w="28575" cap="flat" cmpd="sng" algn="ctr">
-                      <a:noFill/>
-                      <a:prstDash val="solid"/>
-                      <a:round/>
-                      <a:headEnd type="none" w="med" len="med"/>
-                      <a:tailEnd type="none" w="med" len="med"/>
-                    </a:lnT>
-                    <a:lnB w="12700" cap="flat" cmpd="sng" algn="ctr">
-                      <a:noFill/>
-                      <a:prstDash val="solid"/>
-                      <a:round/>
-                      <a:headEnd type="none" w="med" len="med"/>
-                      <a:tailEnd type="none" w="med" len="med"/>
-                    </a:lnB>
-                    <a:lnTlToBr>
-                      <a:noFill/>
-                    </a:lnTlToBr>
-                    <a:lnBlToTr>
-                      <a:noFill/>
-                    </a:lnBlToTr>
-                    <a:noFill/>
-                  </a:tcPr>
+                  <a:tcPr horzOverflow="overflow"/>
                 </a:tc>
                 <a:tc hMerge="1">
                   <a:txBody>
@@ -15217,7 +15721,7 @@
                       <a:endParaRPr lang="en-US"/>
                     </a:p>
                   </a:txBody>
-                  <a:tcPr/>
+                  <a:tcPr marL="0" marR="0" marT="0" marB="0" horzOverflow="overflow"/>
                 </a:tc>
                 <a:extLst>
                   <a:ext uri="{0D108BD9-81ED-4DB2-BD59-A6C34878D82A}">
@@ -15225,7 +15729,7 @@
                   </a:ext>
                 </a:extLst>
               </a:tr>
-              <a:tr h="452438">
+              <a:tr h="385574">
                 <a:tc gridSpan="2">
                   <a:txBody>
                     <a:bodyPr/>
@@ -15252,55 +15756,18 @@
                         <a:rPr lang="en-US" sz="2000" dirty="0"/>
                         <a:t>Where address is:</a:t>
                       </a:r>
-                      <a:endParaRPr kumimoji="0" lang="en-US" sz="2000" b="0" i="0" u="none" strike="noStrike" cap="none" normalizeH="0" baseline="0" dirty="0">
+                      <a:endParaRPr kumimoji="0" lang="en-US" sz="2000" u="none" strike="noStrike" cap="none" normalizeH="0" baseline="0" dirty="0">
                         <a:ln>
                           <a:noFill/>
                         </a:ln>
                         <a:solidFill>
-                          <a:schemeClr val="tx1"/>
+                          <a:srgbClr val="000000"/>
                         </a:solidFill>
                         <a:effectLst/>
-                        <a:latin typeface="Arial" charset="0"/>
                       </a:endParaRPr>
                     </a:p>
                   </a:txBody>
-                  <a:tcPr horzOverflow="overflow">
-                    <a:lnL w="28575" cap="flat" cmpd="sng" algn="ctr">
-                      <a:noFill/>
-                      <a:prstDash val="solid"/>
-                      <a:round/>
-                      <a:headEnd type="none" w="med" len="med"/>
-                      <a:tailEnd type="none" w="med" len="med"/>
-                    </a:lnL>
-                    <a:lnR w="28575" cap="flat" cmpd="sng" algn="ctr">
-                      <a:noFill/>
-                      <a:prstDash val="solid"/>
-                      <a:round/>
-                      <a:headEnd type="none" w="med" len="med"/>
-                      <a:tailEnd type="none" w="med" len="med"/>
-                    </a:lnR>
-                    <a:lnT w="12700" cap="flat" cmpd="sng" algn="ctr">
-                      <a:noFill/>
-                      <a:prstDash val="solid"/>
-                      <a:round/>
-                      <a:headEnd type="none" w="med" len="med"/>
-                      <a:tailEnd type="none" w="med" len="med"/>
-                    </a:lnT>
-                    <a:lnB w="12700" cap="flat" cmpd="sng" algn="ctr">
-                      <a:noFill/>
-                      <a:prstDash val="solid"/>
-                      <a:round/>
-                      <a:headEnd type="none" w="med" len="med"/>
-                      <a:tailEnd type="none" w="med" len="med"/>
-                    </a:lnB>
-                    <a:lnTlToBr>
-                      <a:noFill/>
-                    </a:lnTlToBr>
-                    <a:lnBlToTr>
-                      <a:noFill/>
-                    </a:lnBlToTr>
-                    <a:noFill/>
-                  </a:tcPr>
+                  <a:tcPr horzOverflow="overflow"/>
                 </a:tc>
                 <a:tc hMerge="1">
                   <a:txBody>
@@ -15335,50 +15802,13 @@
                       </a:endParaRPr>
                     </a:p>
                   </a:txBody>
-                  <a:tcPr horzOverflow="overflow">
-                    <a:lnL w="12700" cap="flat" cmpd="sng" algn="ctr">
-                      <a:solidFill>
-                        <a:schemeClr val="tx1"/>
-                      </a:solidFill>
-                      <a:prstDash val="solid"/>
-                      <a:round/>
-                      <a:headEnd type="none" w="med" len="med"/>
-                      <a:tailEnd type="none" w="med" len="med"/>
-                    </a:lnL>
-                    <a:lnR w="28575" cap="flat" cmpd="sng" algn="ctr">
-                      <a:solidFill>
-                        <a:schemeClr val="tx1"/>
-                      </a:solidFill>
-                      <a:prstDash val="solid"/>
-                      <a:round/>
-                      <a:headEnd type="none" w="med" len="med"/>
-                      <a:tailEnd type="none" w="med" len="med"/>
-                    </a:lnR>
-                    <a:lnT w="28575" cap="flat" cmpd="sng" algn="ctr">
-                      <a:solidFill>
-                        <a:schemeClr val="tx1"/>
-                      </a:solidFill>
-                      <a:prstDash val="solid"/>
-                      <a:round/>
-                      <a:headEnd type="none" w="med" len="med"/>
-                      <a:tailEnd type="none" w="med" len="med"/>
-                    </a:lnT>
-                    <a:lnB w="12700" cap="flat" cmpd="sng" algn="ctr">
-                      <a:solidFill>
-                        <a:schemeClr val="tx1"/>
-                      </a:solidFill>
-                      <a:prstDash val="solid"/>
-                      <a:round/>
-                      <a:headEnd type="none" w="med" len="med"/>
-                      <a:tailEnd type="none" w="med" len="med"/>
-                    </a:lnB>
+                  <a:tcPr marL="0" marR="0" marT="0" marB="0" horzOverflow="overflow">
                     <a:lnTlToBr>
                       <a:noFill/>
                     </a:lnTlToBr>
                     <a:lnBlToTr>
                       <a:noFill/>
                     </a:lnBlToTr>
-                    <a:noFill/>
                   </a:tcPr>
                 </a:tc>
                 <a:extLst>
@@ -15387,7 +15817,7 @@
                   </a:ext>
                 </a:extLst>
               </a:tr>
-              <a:tr h="452438">
+              <a:tr h="385574">
                 <a:tc>
                   <a:txBody>
                     <a:bodyPr/>
@@ -15410,72 +15840,32 @@
                         <a:tabLst/>
                       </a:pPr>
                       <a:r>
-                        <a:rPr kumimoji="0" lang="en-US" sz="2000" b="0" i="1" u="none" strike="noStrike" cap="none" normalizeH="0" baseline="0" dirty="0">
+                        <a:rPr kumimoji="0" lang="en-US" sz="2000" u="none" strike="noStrike" cap="none" normalizeH="0" baseline="0" dirty="0">
                           <a:ln>
                             <a:noFill/>
                           </a:ln>
                           <a:solidFill>
-                            <a:schemeClr val="tx1"/>
+                            <a:srgbClr val="000000"/>
                           </a:solidFill>
                           <a:effectLst/>
-                          <a:latin typeface="Arial" charset="0"/>
                         </a:rPr>
                         <a:t>n</a:t>
                       </a:r>
                       <a:r>
-                        <a:rPr kumimoji="0" lang="en-US" sz="2000" b="0" i="1" u="none" strike="noStrike" kern="1200" cap="none" normalizeH="0" baseline="30000" dirty="0">
+                        <a:rPr kumimoji="0" lang="en-US" sz="2000" u="none" strike="noStrike" kern="1200" cap="none" normalizeH="0" baseline="30000" dirty="0">
                           <a:ln>
                             <a:noFill/>
                           </a:ln>
                           <a:solidFill>
-                            <a:schemeClr val="tx1"/>
+                            <a:srgbClr val="FF0000"/>
                           </a:solidFill>
                           <a:effectLst/>
-                          <a:latin typeface="Arial" charset="0"/>
-                          <a:ea typeface="+mn-ea"/>
-                          <a:cs typeface="+mn-cs"/>
                         </a:rPr>
                         <a:t>2</a:t>
                       </a:r>
                     </a:p>
                   </a:txBody>
-                  <a:tcPr horzOverflow="overflow">
-                    <a:lnL w="28575" cap="flat" cmpd="sng" algn="ctr">
-                      <a:noFill/>
-                      <a:prstDash val="solid"/>
-                      <a:round/>
-                      <a:headEnd type="none" w="med" len="med"/>
-                      <a:tailEnd type="none" w="med" len="med"/>
-                    </a:lnL>
-                    <a:lnR w="12700" cap="flat" cmpd="sng" algn="ctr">
-                      <a:noFill/>
-                      <a:prstDash val="solid"/>
-                      <a:round/>
-                      <a:headEnd type="none" w="med" len="med"/>
-                      <a:tailEnd type="none" w="med" len="med"/>
-                    </a:lnR>
-                    <a:lnT w="12700" cap="flat" cmpd="sng" algn="ctr">
-                      <a:noFill/>
-                      <a:prstDash val="solid"/>
-                      <a:round/>
-                      <a:headEnd type="none" w="med" len="med"/>
-                      <a:tailEnd type="none" w="med" len="med"/>
-                    </a:lnT>
-                    <a:lnB w="12700" cap="flat" cmpd="sng" algn="ctr">
-                      <a:noFill/>
-                      <a:prstDash val="solid"/>
-                      <a:round/>
-                      <a:headEnd type="none" w="med" len="med"/>
-                      <a:tailEnd type="none" w="med" len="med"/>
-                    </a:lnB>
-                    <a:lnTlToBr>
-                      <a:noFill/>
-                    </a:lnTlToBr>
-                    <a:lnBlToTr>
-                      <a:noFill/>
-                    </a:lnBlToTr>
-                    <a:noFill/>
-                  </a:tcPr>
+                  <a:tcPr horzOverflow="overflow"/>
                 </a:tc>
                 <a:tc>
                   <a:txBody>
@@ -15499,57 +15889,20 @@
                         <a:tabLst/>
                       </a:pPr>
                       <a:r>
-                        <a:rPr kumimoji="0" lang="en-US" sz="2000" b="0" i="0" u="none" strike="noStrike" cap="none" normalizeH="0" baseline="0" dirty="0">
+                        <a:rPr kumimoji="0" lang="en-US" sz="2000" u="none" strike="noStrike" cap="none" normalizeH="0" baseline="0" dirty="0">
                           <a:ln>
                             <a:noFill/>
                           </a:ln>
                           <a:solidFill>
-                            <a:schemeClr val="tx1"/>
+                            <a:srgbClr val="000000"/>
                           </a:solidFill>
                           <a:effectLst/>
-                          <a:latin typeface="Arial" charset="0"/>
                         </a:rPr>
                         <a:t>A given line number</a:t>
                       </a:r>
                     </a:p>
                   </a:txBody>
-                  <a:tcPr horzOverflow="overflow">
-                    <a:lnL w="12700" cap="flat" cmpd="sng" algn="ctr">
-                      <a:noFill/>
-                      <a:prstDash val="solid"/>
-                      <a:round/>
-                      <a:headEnd type="none" w="med" len="med"/>
-                      <a:tailEnd type="none" w="med" len="med"/>
-                    </a:lnL>
-                    <a:lnR w="28575" cap="flat" cmpd="sng" algn="ctr">
-                      <a:noFill/>
-                      <a:prstDash val="solid"/>
-                      <a:round/>
-                      <a:headEnd type="none" w="med" len="med"/>
-                      <a:tailEnd type="none" w="med" len="med"/>
-                    </a:lnR>
-                    <a:lnT w="12700" cap="flat" cmpd="sng" algn="ctr">
-                      <a:noFill/>
-                      <a:prstDash val="solid"/>
-                      <a:round/>
-                      <a:headEnd type="none" w="med" len="med"/>
-                      <a:tailEnd type="none" w="med" len="med"/>
-                    </a:lnT>
-                    <a:lnB w="12700" cap="flat" cmpd="sng" algn="ctr">
-                      <a:noFill/>
-                      <a:prstDash val="solid"/>
-                      <a:round/>
-                      <a:headEnd type="none" w="med" len="med"/>
-                      <a:tailEnd type="none" w="med" len="med"/>
-                    </a:lnB>
-                    <a:lnTlToBr>
-                      <a:noFill/>
-                    </a:lnTlToBr>
-                    <a:lnBlToTr>
-                      <a:noFill/>
-                    </a:lnBlToTr>
-                    <a:noFill/>
-                  </a:tcPr>
+                  <a:tcPr horzOverflow="overflow"/>
                 </a:tc>
                 <a:extLst>
                   <a:ext uri="{0D108BD9-81ED-4DB2-BD59-A6C34878D82A}">
@@ -15557,7 +15910,7 @@
                   </a:ext>
                 </a:extLst>
               </a:tr>
-              <a:tr h="452438">
+              <a:tr h="385574">
                 <a:tc>
                   <a:txBody>
                     <a:bodyPr/>
@@ -15580,70 +15933,32 @@
                         <a:tabLst/>
                       </a:pPr>
                       <a:r>
-                        <a:rPr kumimoji="0" lang="en-US" sz="2000" b="0" i="1" u="none" strike="noStrike" cap="none" normalizeH="0" baseline="0" dirty="0">
+                        <a:rPr kumimoji="0" lang="en-US" sz="2000" u="none" strike="noStrike" cap="none" normalizeH="0" baseline="0" dirty="0">
                           <a:ln>
                             <a:noFill/>
                           </a:ln>
                           <a:solidFill>
-                            <a:schemeClr val="tx1"/>
+                            <a:srgbClr val="000000"/>
                           </a:solidFill>
                           <a:effectLst/>
-                          <a:latin typeface="Arial" charset="0"/>
                         </a:rPr>
                         <a:t>n,m</a:t>
                       </a:r>
                       <a:r>
-                        <a:rPr kumimoji="0" lang="en-US" sz="2000" b="0" i="1" u="none" strike="noStrike" cap="none" normalizeH="0" baseline="30000" dirty="0">
+                        <a:rPr kumimoji="0" lang="en-US" sz="2000" u="none" strike="noStrike" cap="none" normalizeH="0" baseline="30000" dirty="0">
                           <a:ln>
                             <a:noFill/>
                           </a:ln>
                           <a:solidFill>
-                            <a:schemeClr val="tx1"/>
+                            <a:srgbClr val="FF0000"/>
                           </a:solidFill>
                           <a:effectLst/>
-                          <a:latin typeface="Arial" charset="0"/>
                         </a:rPr>
                         <a:t>2</a:t>
                       </a:r>
                     </a:p>
                   </a:txBody>
-                  <a:tcPr horzOverflow="overflow">
-                    <a:lnL w="28575" cap="flat" cmpd="sng" algn="ctr">
-                      <a:noFill/>
-                      <a:prstDash val="solid"/>
-                      <a:round/>
-                      <a:headEnd type="none" w="med" len="med"/>
-                      <a:tailEnd type="none" w="med" len="med"/>
-                    </a:lnL>
-                    <a:lnR w="12700" cap="flat" cmpd="sng" algn="ctr">
-                      <a:noFill/>
-                      <a:prstDash val="solid"/>
-                      <a:round/>
-                      <a:headEnd type="none" w="med" len="med"/>
-                      <a:tailEnd type="none" w="med" len="med"/>
-                    </a:lnR>
-                    <a:lnT w="12700" cap="flat" cmpd="sng" algn="ctr">
-                      <a:noFill/>
-                      <a:prstDash val="solid"/>
-                      <a:round/>
-                      <a:headEnd type="none" w="med" len="med"/>
-                      <a:tailEnd type="none" w="med" len="med"/>
-                    </a:lnT>
-                    <a:lnB w="12700" cap="flat" cmpd="sng" algn="ctr">
-                      <a:noFill/>
-                      <a:prstDash val="solid"/>
-                      <a:round/>
-                      <a:headEnd type="none" w="med" len="med"/>
-                      <a:tailEnd type="none" w="med" len="med"/>
-                    </a:lnB>
-                    <a:lnTlToBr>
-                      <a:noFill/>
-                    </a:lnTlToBr>
-                    <a:lnBlToTr>
-                      <a:noFill/>
-                    </a:lnBlToTr>
-                    <a:noFill/>
-                  </a:tcPr>
+                  <a:tcPr horzOverflow="overflow"/>
                 </a:tc>
                 <a:tc>
                   <a:txBody>
@@ -15667,57 +15982,20 @@
                         <a:tabLst/>
                       </a:pPr>
                       <a:r>
-                        <a:rPr kumimoji="0" lang="en-US" sz="2000" b="0" i="0" u="none" strike="noStrike" cap="none" normalizeH="0" baseline="0" dirty="0">
+                        <a:rPr kumimoji="0" lang="en-US" sz="2000" u="none" strike="noStrike" cap="none" normalizeH="0" baseline="0" dirty="0">
                           <a:ln>
                             <a:noFill/>
                           </a:ln>
                           <a:solidFill>
-                            <a:schemeClr val="tx1"/>
+                            <a:srgbClr val="000000"/>
                           </a:solidFill>
                           <a:effectLst/>
-                          <a:latin typeface="Arial" charset="0"/>
                         </a:rPr>
                         <a:t>For lines beginning with n ending with m</a:t>
                       </a:r>
                     </a:p>
                   </a:txBody>
-                  <a:tcPr horzOverflow="overflow">
-                    <a:lnL w="12700" cap="flat" cmpd="sng" algn="ctr">
-                      <a:noFill/>
-                      <a:prstDash val="solid"/>
-                      <a:round/>
-                      <a:headEnd type="none" w="med" len="med"/>
-                      <a:tailEnd type="none" w="med" len="med"/>
-                    </a:lnL>
-                    <a:lnR w="28575" cap="flat" cmpd="sng" algn="ctr">
-                      <a:noFill/>
-                      <a:prstDash val="solid"/>
-                      <a:round/>
-                      <a:headEnd type="none" w="med" len="med"/>
-                      <a:tailEnd type="none" w="med" len="med"/>
-                    </a:lnR>
-                    <a:lnT w="12700" cap="flat" cmpd="sng" algn="ctr">
-                      <a:noFill/>
-                      <a:prstDash val="solid"/>
-                      <a:round/>
-                      <a:headEnd type="none" w="med" len="med"/>
-                      <a:tailEnd type="none" w="med" len="med"/>
-                    </a:lnT>
-                    <a:lnB w="12700" cap="flat" cmpd="sng" algn="ctr">
-                      <a:noFill/>
-                      <a:prstDash val="solid"/>
-                      <a:round/>
-                      <a:headEnd type="none" w="med" len="med"/>
-                      <a:tailEnd type="none" w="med" len="med"/>
-                    </a:lnB>
-                    <a:lnTlToBr>
-                      <a:noFill/>
-                    </a:lnTlToBr>
-                    <a:lnBlToTr>
-                      <a:noFill/>
-                    </a:lnBlToTr>
-                    <a:noFill/>
-                  </a:tcPr>
+                  <a:tcPr horzOverflow="overflow"/>
                 </a:tc>
                 <a:extLst>
                   <a:ext uri="{0D108BD9-81ED-4DB2-BD59-A6C34878D82A}">
@@ -15725,7 +16003,7 @@
                   </a:ext>
                 </a:extLst>
               </a:tr>
-              <a:tr h="452438">
+              <a:tr h="385574">
                 <a:tc>
                   <a:txBody>
                     <a:bodyPr/>
@@ -15748,57 +16026,20 @@
                         <a:tabLst/>
                       </a:pPr>
                       <a:r>
-                        <a:rPr kumimoji="0" lang="en-US" sz="2000" b="1" i="0" u="none" strike="noStrike" cap="none" normalizeH="0" baseline="0" dirty="0">
+                        <a:rPr kumimoji="0" lang="en-US" sz="2000" u="none" strike="noStrike" cap="none" normalizeH="0" baseline="0" dirty="0">
                           <a:ln>
                             <a:noFill/>
                           </a:ln>
                           <a:solidFill>
-                            <a:schemeClr val="tx1"/>
+                            <a:srgbClr val="000000"/>
                           </a:solidFill>
                           <a:effectLst/>
-                          <a:latin typeface="Arial" charset="0"/>
                         </a:rPr>
                         <a:t>1,.</a:t>
                       </a:r>
                     </a:p>
                   </a:txBody>
-                  <a:tcPr horzOverflow="overflow">
-                    <a:lnL w="28575" cap="flat" cmpd="sng" algn="ctr">
-                      <a:noFill/>
-                      <a:prstDash val="solid"/>
-                      <a:round/>
-                      <a:headEnd type="none" w="med" len="med"/>
-                      <a:tailEnd type="none" w="med" len="med"/>
-                    </a:lnL>
-                    <a:lnR w="12700" cap="flat" cmpd="sng" algn="ctr">
-                      <a:noFill/>
-                      <a:prstDash val="solid"/>
-                      <a:round/>
-                      <a:headEnd type="none" w="med" len="med"/>
-                      <a:tailEnd type="none" w="med" len="med"/>
-                    </a:lnR>
-                    <a:lnT w="12700" cap="flat" cmpd="sng" algn="ctr">
-                      <a:noFill/>
-                      <a:prstDash val="solid"/>
-                      <a:round/>
-                      <a:headEnd type="none" w="med" len="med"/>
-                      <a:tailEnd type="none" w="med" len="med"/>
-                    </a:lnT>
-                    <a:lnB w="12700" cap="flat" cmpd="sng" algn="ctr">
-                      <a:noFill/>
-                      <a:prstDash val="solid"/>
-                      <a:round/>
-                      <a:headEnd type="none" w="med" len="med"/>
-                      <a:tailEnd type="none" w="med" len="med"/>
-                    </a:lnB>
-                    <a:lnTlToBr>
-                      <a:noFill/>
-                    </a:lnTlToBr>
-                    <a:lnBlToTr>
-                      <a:noFill/>
-                    </a:lnBlToTr>
-                    <a:noFill/>
-                  </a:tcPr>
+                  <a:tcPr horzOverflow="overflow"/>
                 </a:tc>
                 <a:tc>
                   <a:txBody>
@@ -15823,57 +16064,20 @@
                         <a:defRPr/>
                       </a:pPr>
                       <a:r>
-                        <a:rPr kumimoji="0" lang="en-US" sz="2000" b="0" i="0" u="none" strike="noStrike" cap="none" normalizeH="0" baseline="0" dirty="0">
+                        <a:rPr kumimoji="0" lang="en-US" sz="2000" u="none" strike="noStrike" cap="none" normalizeH="0" baseline="0" dirty="0">
                           <a:ln>
                             <a:noFill/>
                           </a:ln>
                           <a:solidFill>
-                            <a:schemeClr val="tx1"/>
+                            <a:srgbClr val="000000"/>
                           </a:solidFill>
                           <a:effectLst/>
-                          <a:latin typeface="Arial" charset="0"/>
                         </a:rPr>
                         <a:t>For lines beginning with 1 ending with current line</a:t>
                       </a:r>
                     </a:p>
                   </a:txBody>
-                  <a:tcPr horzOverflow="overflow">
-                    <a:lnL w="12700" cap="flat" cmpd="sng" algn="ctr">
-                      <a:noFill/>
-                      <a:prstDash val="solid"/>
-                      <a:round/>
-                      <a:headEnd type="none" w="med" len="med"/>
-                      <a:tailEnd type="none" w="med" len="med"/>
-                    </a:lnL>
-                    <a:lnR w="28575" cap="flat" cmpd="sng" algn="ctr">
-                      <a:noFill/>
-                      <a:prstDash val="solid"/>
-                      <a:round/>
-                      <a:headEnd type="none" w="med" len="med"/>
-                      <a:tailEnd type="none" w="med" len="med"/>
-                    </a:lnR>
-                    <a:lnT w="12700" cap="flat" cmpd="sng" algn="ctr">
-                      <a:noFill/>
-                      <a:prstDash val="solid"/>
-                      <a:round/>
-                      <a:headEnd type="none" w="med" len="med"/>
-                      <a:tailEnd type="none" w="med" len="med"/>
-                    </a:lnT>
-                    <a:lnB w="12700" cap="flat" cmpd="sng" algn="ctr">
-                      <a:noFill/>
-                      <a:prstDash val="solid"/>
-                      <a:round/>
-                      <a:headEnd type="none" w="med" len="med"/>
-                      <a:tailEnd type="none" w="med" len="med"/>
-                    </a:lnB>
-                    <a:lnTlToBr>
-                      <a:noFill/>
-                    </a:lnTlToBr>
-                    <a:lnBlToTr>
-                      <a:noFill/>
-                    </a:lnBlToTr>
-                    <a:noFill/>
-                  </a:tcPr>
+                  <a:tcPr horzOverflow="overflow"/>
                 </a:tc>
                 <a:extLst>
                   <a:ext uri="{0D108BD9-81ED-4DB2-BD59-A6C34878D82A}">
@@ -15881,7 +16085,7 @@
                   </a:ext>
                 </a:extLst>
               </a:tr>
-              <a:tr h="452438">
+              <a:tr h="385574">
                 <a:tc>
                   <a:txBody>
                     <a:bodyPr/>
@@ -15904,57 +16108,20 @@
                         <a:tabLst/>
                       </a:pPr>
                       <a:r>
-                        <a:rPr kumimoji="0" lang="en-US" sz="2000" b="1" i="0" u="none" strike="noStrike" cap="none" normalizeH="0" baseline="0" dirty="0">
+                        <a:rPr kumimoji="0" lang="en-US" sz="2000" u="none" strike="noStrike" cap="none" normalizeH="0" baseline="0" dirty="0">
                           <a:ln>
                             <a:noFill/>
                           </a:ln>
                           <a:solidFill>
-                            <a:schemeClr val="tx1"/>
+                            <a:srgbClr val="000000"/>
                           </a:solidFill>
                           <a:effectLst/>
-                          <a:latin typeface="Arial" charset="0"/>
                         </a:rPr>
                         <a:t>.,$</a:t>
                       </a:r>
                     </a:p>
                   </a:txBody>
-                  <a:tcPr horzOverflow="overflow">
-                    <a:lnL w="28575" cap="flat" cmpd="sng" algn="ctr">
-                      <a:noFill/>
-                      <a:prstDash val="solid"/>
-                      <a:round/>
-                      <a:headEnd type="none" w="med" len="med"/>
-                      <a:tailEnd type="none" w="med" len="med"/>
-                    </a:lnL>
-                    <a:lnR w="12700" cap="flat" cmpd="sng" algn="ctr">
-                      <a:noFill/>
-                      <a:prstDash val="solid"/>
-                      <a:round/>
-                      <a:headEnd type="none" w="med" len="med"/>
-                      <a:tailEnd type="none" w="med" len="med"/>
-                    </a:lnR>
-                    <a:lnT w="12700" cap="flat" cmpd="sng" algn="ctr">
-                      <a:noFill/>
-                      <a:prstDash val="solid"/>
-                      <a:round/>
-                      <a:headEnd type="none" w="med" len="med"/>
-                      <a:tailEnd type="none" w="med" len="med"/>
-                    </a:lnT>
-                    <a:lnB w="12700" cap="flat" cmpd="sng" algn="ctr">
-                      <a:noFill/>
-                      <a:prstDash val="solid"/>
-                      <a:round/>
-                      <a:headEnd type="none" w="med" len="med"/>
-                      <a:tailEnd type="none" w="med" len="med"/>
-                    </a:lnB>
-                    <a:lnTlToBr>
-                      <a:noFill/>
-                    </a:lnTlToBr>
-                    <a:lnBlToTr>
-                      <a:noFill/>
-                    </a:lnBlToTr>
-                    <a:noFill/>
-                  </a:tcPr>
+                  <a:tcPr horzOverflow="overflow"/>
                 </a:tc>
                 <a:tc>
                   <a:txBody>
@@ -15979,57 +16146,20 @@
                         <a:defRPr/>
                       </a:pPr>
                       <a:r>
-                        <a:rPr kumimoji="0" lang="en-US" sz="2000" b="0" i="0" u="none" strike="noStrike" cap="none" normalizeH="0" baseline="0" dirty="0">
+                        <a:rPr kumimoji="0" lang="en-US" sz="2000" u="none" strike="noStrike" cap="none" normalizeH="0" baseline="0" dirty="0">
                           <a:ln>
                             <a:noFill/>
                           </a:ln>
                           <a:solidFill>
-                            <a:schemeClr val="tx1"/>
+                            <a:srgbClr val="000000"/>
                           </a:solidFill>
                           <a:effectLst/>
-                          <a:latin typeface="Arial" charset="0"/>
                         </a:rPr>
                         <a:t>For lines beginning with the current line to the end of the file</a:t>
                       </a:r>
                     </a:p>
                   </a:txBody>
-                  <a:tcPr horzOverflow="overflow">
-                    <a:lnL w="12700" cap="flat" cmpd="sng" algn="ctr">
-                      <a:noFill/>
-                      <a:prstDash val="solid"/>
-                      <a:round/>
-                      <a:headEnd type="none" w="med" len="med"/>
-                      <a:tailEnd type="none" w="med" len="med"/>
-                    </a:lnL>
-                    <a:lnR w="28575" cap="flat" cmpd="sng" algn="ctr">
-                      <a:noFill/>
-                      <a:prstDash val="solid"/>
-                      <a:round/>
-                      <a:headEnd type="none" w="med" len="med"/>
-                      <a:tailEnd type="none" w="med" len="med"/>
-                    </a:lnR>
-                    <a:lnT w="12700" cap="flat" cmpd="sng" algn="ctr">
-                      <a:noFill/>
-                      <a:prstDash val="solid"/>
-                      <a:round/>
-                      <a:headEnd type="none" w="med" len="med"/>
-                      <a:tailEnd type="none" w="med" len="med"/>
-                    </a:lnT>
-                    <a:lnB w="12700" cap="flat" cmpd="sng" algn="ctr">
-                      <a:noFill/>
-                      <a:prstDash val="solid"/>
-                      <a:round/>
-                      <a:headEnd type="none" w="med" len="med"/>
-                      <a:tailEnd type="none" w="med" len="med"/>
-                    </a:lnB>
-                    <a:lnTlToBr>
-                      <a:noFill/>
-                    </a:lnTlToBr>
-                    <a:lnBlToTr>
-                      <a:noFill/>
-                    </a:lnBlToTr>
-                    <a:noFill/>
-                  </a:tcPr>
+                  <a:tcPr horzOverflow="overflow"/>
                 </a:tc>
                 <a:extLst>
                   <a:ext uri="{0D108BD9-81ED-4DB2-BD59-A6C34878D82A}">
@@ -16037,7 +16167,7 @@
                   </a:ext>
                 </a:extLst>
               </a:tr>
-              <a:tr h="701040">
+              <a:tr h="604066">
                 <a:tc>
                   <a:txBody>
                     <a:bodyPr/>
@@ -16060,57 +16190,20 @@
                         <a:tabLst/>
                       </a:pPr>
                       <a:r>
-                        <a:rPr kumimoji="0" lang="en-US" sz="2000" b="1" i="0" u="none" strike="noStrike" cap="none" normalizeH="0" baseline="0" dirty="0">
+                        <a:rPr kumimoji="0" lang="en-US" sz="2000" u="none" strike="noStrike" cap="none" normalizeH="0" baseline="0" dirty="0">
                           <a:ln>
                             <a:noFill/>
                           </a:ln>
                           <a:solidFill>
-                            <a:schemeClr val="tx1"/>
+                            <a:srgbClr val="000000"/>
                           </a:solidFill>
                           <a:effectLst/>
-                          <a:latin typeface="Arial" charset="0"/>
                         </a:rPr>
                         <a:t>1,$</a:t>
                       </a:r>
                     </a:p>
                   </a:txBody>
-                  <a:tcPr horzOverflow="overflow">
-                    <a:lnL w="28575" cap="flat" cmpd="sng" algn="ctr">
-                      <a:noFill/>
-                      <a:prstDash val="solid"/>
-                      <a:round/>
-                      <a:headEnd type="none" w="med" len="med"/>
-                      <a:tailEnd type="none" w="med" len="med"/>
-                    </a:lnL>
-                    <a:lnR w="12700" cap="flat" cmpd="sng" algn="ctr">
-                      <a:noFill/>
-                      <a:prstDash val="solid"/>
-                      <a:round/>
-                      <a:headEnd type="none" w="med" len="med"/>
-                      <a:tailEnd type="none" w="med" len="med"/>
-                    </a:lnR>
-                    <a:lnT w="12700" cap="flat" cmpd="sng" algn="ctr">
-                      <a:noFill/>
-                      <a:prstDash val="solid"/>
-                      <a:round/>
-                      <a:headEnd type="none" w="med" len="med"/>
-                      <a:tailEnd type="none" w="med" len="med"/>
-                    </a:lnT>
-                    <a:lnB w="12700" cap="flat" cmpd="sng" algn="ctr">
-                      <a:noFill/>
-                      <a:prstDash val="solid"/>
-                      <a:round/>
-                      <a:headEnd type="none" w="med" len="med"/>
-                      <a:tailEnd type="none" w="med" len="med"/>
-                    </a:lnB>
-                    <a:lnTlToBr>
-                      <a:noFill/>
-                    </a:lnTlToBr>
-                    <a:lnBlToTr>
-                      <a:noFill/>
-                    </a:lnBlToTr>
-                    <a:noFill/>
-                  </a:tcPr>
+                  <a:tcPr horzOverflow="overflow"/>
                 </a:tc>
                 <a:tc>
                   <a:txBody>
@@ -16134,80 +16227,20 @@
                         <a:tabLst/>
                       </a:pPr>
                       <a:r>
-                        <a:rPr kumimoji="0" lang="en-US" sz="2000" b="0" i="0" u="none" strike="noStrike" cap="none" normalizeH="0" baseline="0" dirty="0">
+                        <a:rPr kumimoji="0" lang="en-US" sz="2000" u="none" strike="noStrike" cap="none" normalizeH="0" baseline="0" dirty="0">
                           <a:ln>
                             <a:noFill/>
                           </a:ln>
                           <a:solidFill>
-                            <a:schemeClr val="tx1"/>
+                            <a:srgbClr val="000000"/>
                           </a:solidFill>
                           <a:effectLst/>
-                          <a:latin typeface="Arial" charset="0"/>
                         </a:rPr>
-                        <a:t>The whole file (or </a:t>
+                        <a:t>The whole file (or %)</a:t>
                       </a:r>
-                      <a:r>
-                        <a:rPr kumimoji="0" lang="en-US" sz="2000" b="1" i="0" u="none" strike="noStrike" cap="none" normalizeH="0" baseline="0" dirty="0">
-                          <a:ln>
-                            <a:noFill/>
-                          </a:ln>
-                          <a:solidFill>
-                            <a:schemeClr val="tx1"/>
-                          </a:solidFill>
-                          <a:effectLst/>
-                          <a:latin typeface="Arial" charset="0"/>
-                        </a:rPr>
-                        <a:t>%)</a:t>
-                      </a:r>
-                      <a:endParaRPr kumimoji="0" lang="en-US" sz="2000" b="0" i="0" u="none" strike="noStrike" cap="none" normalizeH="0" baseline="0" dirty="0">
-                        <a:ln>
-                          <a:noFill/>
-                        </a:ln>
-                        <a:solidFill>
-                          <a:schemeClr val="tx1"/>
-                        </a:solidFill>
-                        <a:effectLst/>
-                        <a:latin typeface="Arial" charset="0"/>
-                      </a:endParaRPr>
                     </a:p>
                   </a:txBody>
-                  <a:tcPr horzOverflow="overflow">
-                    <a:lnL w="12700" cap="flat" cmpd="sng" algn="ctr">
-                      <a:noFill/>
-                      <a:prstDash val="solid"/>
-                      <a:round/>
-                      <a:headEnd type="none" w="med" len="med"/>
-                      <a:tailEnd type="none" w="med" len="med"/>
-                    </a:lnL>
-                    <a:lnR w="28575" cap="flat" cmpd="sng" algn="ctr">
-                      <a:noFill/>
-                      <a:prstDash val="solid"/>
-                      <a:round/>
-                      <a:headEnd type="none" w="med" len="med"/>
-                      <a:tailEnd type="none" w="med" len="med"/>
-                    </a:lnR>
-                    <a:lnT w="12700" cap="flat" cmpd="sng" algn="ctr">
-                      <a:noFill/>
-                      <a:prstDash val="solid"/>
-                      <a:round/>
-                      <a:headEnd type="none" w="med" len="med"/>
-                      <a:tailEnd type="none" w="med" len="med"/>
-                    </a:lnT>
-                    <a:lnB w="12700" cap="flat" cmpd="sng" algn="ctr">
-                      <a:noFill/>
-                      <a:prstDash val="solid"/>
-                      <a:round/>
-                      <a:headEnd type="none" w="med" len="med"/>
-                      <a:tailEnd type="none" w="med" len="med"/>
-                    </a:lnB>
-                    <a:lnTlToBr>
-                      <a:noFill/>
-                    </a:lnTlToBr>
-                    <a:lnBlToTr>
-                      <a:noFill/>
-                    </a:lnBlToTr>
-                    <a:noFill/>
-                  </a:tcPr>
+                  <a:tcPr horzOverflow="overflow"/>
                 </a:tc>
                 <a:extLst>
                   <a:ext uri="{0D108BD9-81ED-4DB2-BD59-A6C34878D82A}">
@@ -16215,7 +16248,7 @@
                   </a:ext>
                 </a:extLst>
               </a:tr>
-              <a:tr h="701040">
+              <a:tr h="1156723">
                 <a:tc gridSpan="2">
                   <a:txBody>
                     <a:bodyPr/>
@@ -16238,57 +16271,188 @@
                         <a:tabLst/>
                       </a:pPr>
                       <a:r>
-                        <a:rPr kumimoji="0" lang="en-US" sz="2000" b="0" i="0" u="none" strike="noStrike" cap="none" normalizeH="0" baseline="0" dirty="0">
+                        <a:rPr lang="en-US" sz="3200" kern="1200" baseline="30000" dirty="0">
+                          <a:solidFill>
+                            <a:srgbClr val="FF0000"/>
+                          </a:solidFill>
+                        </a:rPr>
+                        <a:t>1</a:t>
+                      </a:r>
+                      <a:r>
+                        <a:rPr kumimoji="0" lang="en-US" sz="2000" u="none" strike="noStrike" cap="none" normalizeH="0" baseline="0" dirty="0">
                           <a:ln>
                             <a:noFill/>
                           </a:ln>
                           <a:solidFill>
-                            <a:schemeClr val="tx1"/>
+                            <a:srgbClr val="000000"/>
                           </a:solidFill>
                           <a:effectLst/>
-                          <a:latin typeface="Arial" charset="0"/>
                         </a:rPr>
-                        <a:t>1 - [g] the optional g stands for global (make multiple changes on each line, otherwise only the first occurrence on each line will be changed)</a:t>
+                        <a:t> - [g] </a:t>
+                      </a:r>
+                      <a:r>
+                        <a:rPr kumimoji="0" lang="en-US" sz="2000" u="none" strike="noStrike" cap="none" normalizeH="0" baseline="0">
+                          <a:ln>
+                            <a:noFill/>
+                          </a:ln>
+                          <a:solidFill>
+                            <a:srgbClr val="000000"/>
+                          </a:solidFill>
+                          <a:effectLst/>
+                        </a:rPr>
+                        <a:t>stands for global (make multiple changes on each line</a:t>
+                      </a:r>
+                      <a:r>
+                        <a:rPr lang="en-US" sz="2000" u="none" strike="noStrike" cap="none" normalizeH="0" baseline="0">
+                          <a:ln>
+                            <a:noFill/>
+                          </a:ln>
+                          <a:solidFill>
+                            <a:srgbClr val="000000"/>
+                          </a:solidFill>
+                          <a:effectLst/>
+                        </a:rPr>
+                        <a:t>)</a:t>
+                      </a:r>
+                      <a:endParaRPr kumimoji="0" lang="en-US" sz="2000" u="none" strike="noStrike" cap="none" normalizeH="0" baseline="0" dirty="0">
+                        <a:ln>
+                          <a:noFill/>
+                        </a:ln>
+                        <a:solidFill>
+                          <a:srgbClr val="000000"/>
+                        </a:solidFill>
+                        <a:effectLst/>
+                      </a:endParaRPr>
+                    </a:p>
+                    <a:p>
+                      <a:pPr marL="342900" marR="0" lvl="0" indent="-342900" algn="l">
+                        <a:lnSpc>
+                          <a:spcPct val="100000"/>
+                        </a:lnSpc>
+                        <a:spcBef>
+                          <a:spcPct val="20000"/>
+                        </a:spcBef>
+                        <a:spcAft>
+                          <a:spcPct val="0"/>
+                        </a:spcAft>
+                        <a:buClrTx/>
+                        <a:buSzTx/>
+                        <a:buFont typeface="Calibri"/>
+                        <a:buChar char="-"/>
+                      </a:pPr>
+                      <a:r>
+                        <a:rPr lang="en-US" sz="2000" u="none" strike="noStrike" cap="none" normalizeH="0" baseline="0" dirty="0">
+                          <a:ln>
+                            <a:noFill/>
+                          </a:ln>
+                          <a:solidFill>
+                            <a:srgbClr val="000000"/>
+                          </a:solidFill>
+                          <a:effectLst/>
+                        </a:rPr>
+                        <a:t>[</a:t>
+                      </a:r>
+                      <a:r>
+                        <a:rPr lang="en-US" sz="2000" u="none" strike="noStrike" cap="none" normalizeH="0" baseline="0" err="1">
+                          <a:ln>
+                            <a:noFill/>
+                          </a:ln>
+                          <a:solidFill>
+                            <a:srgbClr val="000000"/>
+                          </a:solidFill>
+                          <a:effectLst/>
+                        </a:rPr>
+                        <a:t>i</a:t>
+                      </a:r>
+                      <a:r>
+                        <a:rPr lang="en-US" sz="2000" u="none" strike="noStrike" cap="none" normalizeH="0" baseline="0" dirty="0">
+                          <a:ln>
+                            <a:noFill/>
+                          </a:ln>
+                          <a:solidFill>
+                            <a:srgbClr val="000000"/>
+                          </a:solidFill>
+                          <a:effectLst/>
+                        </a:rPr>
+                        <a:t>] case insensitive </a:t>
+                      </a:r>
+                      <a:r>
+                        <a:rPr lang="en-US" sz="2000" u="none" strike="noStrike" cap="none" normalizeH="0" baseline="0" noProof="0" dirty="0">
+                          <a:ln>
+                            <a:noFill/>
+                          </a:ln>
+                          <a:solidFill>
+                            <a:srgbClr val="000000"/>
+                          </a:solidFill>
+                          <a:effectLst/>
+                        </a:rPr>
+                        <a:t>[I]</a:t>
+                      </a:r>
+                      <a:r>
+                        <a:rPr lang="en-US" sz="2000" u="none" strike="noStrike" cap="none" normalizeH="0" baseline="0" noProof="0">
+                          <a:ln>
+                            <a:noFill/>
+                          </a:ln>
+                          <a:solidFill>
+                            <a:srgbClr val="000000"/>
+                          </a:solidFill>
+                          <a:effectLst/>
+                        </a:rPr>
+                        <a:t> case sensitive </a:t>
                       </a:r>
                     </a:p>
+                    <a:p>
+                      <a:pPr marL="342900" marR="0" lvl="0" indent="-342900" algn="l">
+                        <a:lnSpc>
+                          <a:spcPct val="100000"/>
+                        </a:lnSpc>
+                        <a:spcBef>
+                          <a:spcPct val="20000"/>
+                        </a:spcBef>
+                        <a:spcAft>
+                          <a:spcPct val="0"/>
+                        </a:spcAft>
+                        <a:buClrTx/>
+                        <a:buSzTx/>
+                        <a:buFont typeface="Calibri"/>
+                        <a:buChar char="-"/>
+                      </a:pPr>
+                      <a:r>
+                        <a:rPr lang="en-US" sz="2000" u="none" strike="noStrike" cap="none" normalizeH="0" baseline="0" noProof="0" dirty="0">
+                          <a:ln>
+                            <a:noFill/>
+                          </a:ln>
+                          <a:solidFill>
+                            <a:srgbClr val="000000"/>
+                          </a:solidFill>
+                          <a:effectLst/>
+                        </a:rPr>
+                        <a:t>[c] confirm chan</a:t>
+                      </a:r>
+                      <a:r>
+                        <a:rPr lang="en-US" sz="2000" u="none" strike="noStrike" cap="none" normalizeH="0" baseline="0" noProof="0">
+                          <a:ln>
+                            <a:noFill/>
+                          </a:ln>
+                          <a:solidFill>
+                            <a:srgbClr val="000000"/>
+                          </a:solidFill>
+                          <a:effectLst/>
+                        </a:rPr>
+                        <a:t>ges</a:t>
+                      </a:r>
+                      <a:endParaRPr lang="en-US" sz="2000" u="none" strike="noStrike" cap="none" normalizeH="0" baseline="0" noProof="0" dirty="0">
+                        <a:ln>
+                          <a:noFill/>
+                        </a:ln>
+                        <a:solidFill>
+                          <a:srgbClr val="000000"/>
+                        </a:solidFill>
+                        <a:effectLst/>
+                      </a:endParaRPr>
+                    </a:p>
                   </a:txBody>
-                  <a:tcPr horzOverflow="overflow">
-                    <a:lnL w="28575" cap="flat" cmpd="sng" algn="ctr">
-                      <a:noFill/>
-                      <a:prstDash val="solid"/>
-                      <a:round/>
-                      <a:headEnd type="none" w="med" len="med"/>
-                      <a:tailEnd type="none" w="med" len="med"/>
-                    </a:lnL>
-                    <a:lnR w="28575" cap="flat" cmpd="sng" algn="ctr">
-                      <a:noFill/>
-                      <a:prstDash val="solid"/>
-                      <a:round/>
-                      <a:headEnd type="none" w="med" len="med"/>
-                      <a:tailEnd type="none" w="med" len="med"/>
-                    </a:lnR>
-                    <a:lnT w="12700" cap="flat" cmpd="sng" algn="ctr">
-                      <a:noFill/>
-                      <a:prstDash val="solid"/>
-                      <a:round/>
-                      <a:headEnd type="none" w="med" len="med"/>
-                      <a:tailEnd type="none" w="med" len="med"/>
-                    </a:lnT>
-                    <a:lnB w="28575" cap="flat" cmpd="sng" algn="ctr">
-                      <a:noFill/>
-                      <a:prstDash val="solid"/>
-                      <a:round/>
-                      <a:headEnd type="none" w="med" len="med"/>
-                      <a:tailEnd type="none" w="med" len="med"/>
-                    </a:lnB>
-                    <a:lnTlToBr>
-                      <a:noFill/>
-                    </a:lnTlToBr>
-                    <a:lnBlToTr>
-                      <a:noFill/>
-                    </a:lnBlToTr>
-                    <a:noFill/>
-                  </a:tcPr>
+                  <a:tcPr horzOverflow="overflow"/>
                 </a:tc>
                 <a:tc hMerge="1">
                   <a:txBody>
@@ -16323,50 +16487,13 @@
                       </a:endParaRPr>
                     </a:p>
                   </a:txBody>
-                  <a:tcPr horzOverflow="overflow">
-                    <a:lnL w="12700" cap="flat" cmpd="sng" algn="ctr">
-                      <a:solidFill>
-                        <a:schemeClr val="tx1"/>
-                      </a:solidFill>
-                      <a:prstDash val="solid"/>
-                      <a:round/>
-                      <a:headEnd type="none" w="med" len="med"/>
-                      <a:tailEnd type="none" w="med" len="med"/>
-                    </a:lnL>
-                    <a:lnR w="28575" cap="flat" cmpd="sng" algn="ctr">
-                      <a:solidFill>
-                        <a:schemeClr val="tx1"/>
-                      </a:solidFill>
-                      <a:prstDash val="solid"/>
-                      <a:round/>
-                      <a:headEnd type="none" w="med" len="med"/>
-                      <a:tailEnd type="none" w="med" len="med"/>
-                    </a:lnR>
-                    <a:lnT w="12700" cap="flat" cmpd="sng" algn="ctr">
-                      <a:solidFill>
-                        <a:schemeClr val="tx1"/>
-                      </a:solidFill>
-                      <a:prstDash val="solid"/>
-                      <a:round/>
-                      <a:headEnd type="none" w="med" len="med"/>
-                      <a:tailEnd type="none" w="med" len="med"/>
-                    </a:lnT>
-                    <a:lnB w="28575" cap="flat" cmpd="sng" algn="ctr">
-                      <a:solidFill>
-                        <a:schemeClr val="tx1"/>
-                      </a:solidFill>
-                      <a:prstDash val="solid"/>
-                      <a:round/>
-                      <a:headEnd type="none" w="med" len="med"/>
-                      <a:tailEnd type="none" w="med" len="med"/>
-                    </a:lnB>
+                  <a:tcPr marL="0" marR="0" marT="0" marB="0" horzOverflow="overflow">
                     <a:lnTlToBr>
                       <a:noFill/>
                     </a:lnTlToBr>
                     <a:lnBlToTr>
                       <a:noFill/>
                     </a:lnBlToTr>
-                    <a:noFill/>
                   </a:tcPr>
                 </a:tc>
                 <a:extLst>
@@ -16375,26 +16502,31 @@
                   </a:ext>
                 </a:extLst>
               </a:tr>
-              <a:tr h="1066800">
+              <a:tr h="1066755">
                 <a:tc gridSpan="2">
                   <a:txBody>
                     <a:bodyPr/>
                     <a:lstStyle/>
                     <a:p>
                       <a:r>
-                        <a:rPr kumimoji="0" lang="en-US" sz="2000" b="0" i="0" u="none" strike="noStrike" kern="1200" cap="none" normalizeH="0" baseline="0" dirty="0">
+                        <a:rPr lang="en-US" sz="3200" kern="1200" baseline="30000" dirty="0">
+                          <a:solidFill>
+                            <a:srgbClr val="FF0000"/>
+                          </a:solidFill>
+                        </a:rPr>
+                        <a:t>2</a:t>
+                      </a:r>
+                      <a:r>
+                        <a:rPr kumimoji="0" lang="en-US" sz="2000" u="none" strike="noStrike" kern="1200" cap="none" normalizeH="0" baseline="0" dirty="0">
                           <a:ln>
                             <a:noFill/>
                           </a:ln>
                           <a:solidFill>
-                            <a:schemeClr val="tx1"/>
+                            <a:srgbClr val="000000"/>
                           </a:solidFill>
                           <a:effectLst/>
-                          <a:latin typeface="Arial" charset="0"/>
-                          <a:ea typeface="+mn-ea"/>
-                          <a:cs typeface="+mn-cs"/>
                         </a:rPr>
-                        <a:t>2 -To turn line numbers on and off use:</a:t>
+                        <a:t> -To turn line numbers on and off use:</a:t>
                       </a:r>
                     </a:p>
                     <a:p>
@@ -16404,72 +16536,8 @@
                         <a:t>:set nu  and :set nu!</a:t>
                       </a:r>
                     </a:p>
-                    <a:p>
-                      <a:pPr marL="0" marR="0" lvl="0" indent="0" algn="l" defTabSz="914400" rtl="0" eaLnBrk="1" fontAlgn="base" latinLnBrk="0" hangingPunct="1">
-                        <a:lnSpc>
-                          <a:spcPct val="100000"/>
-                        </a:lnSpc>
-                        <a:spcBef>
-                          <a:spcPct val="20000"/>
-                        </a:spcBef>
-                        <a:spcAft>
-                          <a:spcPct val="0"/>
-                        </a:spcAft>
-                        <a:buClrTx/>
-                        <a:buSzTx/>
-                        <a:buFontTx/>
-                        <a:buNone/>
-                        <a:tabLst/>
-                      </a:pPr>
-                      <a:endParaRPr kumimoji="0" lang="en-US" sz="2000" b="0" i="0" u="none" strike="noStrike" cap="none" normalizeH="0" baseline="0" dirty="0">
-                        <a:ln>
-                          <a:noFill/>
-                        </a:ln>
-                        <a:solidFill>
-                          <a:schemeClr val="tx1"/>
-                        </a:solidFill>
-                        <a:effectLst/>
-                        <a:latin typeface="Arial" charset="0"/>
-                      </a:endParaRPr>
-                    </a:p>
                   </a:txBody>
-                  <a:tcPr horzOverflow="overflow">
-                    <a:lnL w="28575" cap="flat" cmpd="sng" algn="ctr">
-                      <a:noFill/>
-                      <a:prstDash val="solid"/>
-                      <a:round/>
-                      <a:headEnd type="none" w="med" len="med"/>
-                      <a:tailEnd type="none" w="med" len="med"/>
-                    </a:lnL>
-                    <a:lnR w="28575" cap="flat" cmpd="sng" algn="ctr">
-                      <a:noFill/>
-                      <a:prstDash val="solid"/>
-                      <a:round/>
-                      <a:headEnd type="none" w="med" len="med"/>
-                      <a:tailEnd type="none" w="med" len="med"/>
-                    </a:lnR>
-                    <a:lnT w="12700" cap="flat" cmpd="sng" algn="ctr">
-                      <a:noFill/>
-                      <a:prstDash val="solid"/>
-                      <a:round/>
-                      <a:headEnd type="none" w="med" len="med"/>
-                      <a:tailEnd type="none" w="med" len="med"/>
-                    </a:lnT>
-                    <a:lnB w="28575" cap="flat" cmpd="sng" algn="ctr">
-                      <a:noFill/>
-                      <a:prstDash val="solid"/>
-                      <a:round/>
-                      <a:headEnd type="none" w="med" len="med"/>
-                      <a:tailEnd type="none" w="med" len="med"/>
-                    </a:lnB>
-                    <a:lnTlToBr>
-                      <a:noFill/>
-                    </a:lnTlToBr>
-                    <a:lnBlToTr>
-                      <a:noFill/>
-                    </a:lnBlToTr>
-                    <a:noFill/>
-                  </a:tcPr>
+                  <a:tcPr horzOverflow="overflow"/>
                 </a:tc>
                 <a:tc hMerge="1">
                   <a:txBody>
@@ -16479,7 +16547,7 @@
                       <a:endParaRPr lang="en-US"/>
                     </a:p>
                   </a:txBody>
-                  <a:tcPr/>
+                  <a:tcPr marL="0" marR="0" marT="0" marB="0" horzOverflow="overflow"/>
                 </a:tc>
                 <a:extLst>
                   <a:ext uri="{0D108BD9-81ED-4DB2-BD59-A6C34878D82A}">
@@ -16492,6 +16560,497 @@
         </a:graphic>
       </p:graphicFrame>
     </p:spTree>
+  </p:cSld>
+  <p:clrMapOvr>
+    <a:masterClrMapping/>
+  </p:clrMapOvr>
+</p:sld>
+</file>
+
+<file path=ppt/slides/slide24.xml><?xml version="1.0" encoding="utf-8"?>
+<p:sld xmlns:a="http://schemas.openxmlformats.org/drawingml/2006/main" xmlns:r="http://schemas.openxmlformats.org/officeDocument/2006/relationships" xmlns:p="http://schemas.openxmlformats.org/presentationml/2006/main">
+  <p:cSld>
+    <p:spTree>
+      <p:nvGrpSpPr>
+        <p:cNvPr id="1" name=""/>
+        <p:cNvGrpSpPr/>
+        <p:nvPr/>
+      </p:nvGrpSpPr>
+      <p:grpSpPr>
+        <a:xfrm>
+          <a:off x="0" y="0"/>
+          <a:ext cx="0" cy="0"/>
+          <a:chOff x="0" y="0"/>
+          <a:chExt cx="0" cy="0"/>
+        </a:xfrm>
+      </p:grpSpPr>
+      <p:sp>
+        <p:nvSpPr>
+          <p:cNvPr id="2" name="Title 1">
+            <a:extLst>
+              <a:ext uri="{FF2B5EF4-FFF2-40B4-BE49-F238E27FC236}">
+                <a16:creationId xmlns:a16="http://schemas.microsoft.com/office/drawing/2014/main" id="{43E2B02F-F6E1-DFED-11C4-6862294155AE}"/>
+              </a:ext>
+            </a:extLst>
+          </p:cNvPr>
+          <p:cNvSpPr>
+            <a:spLocks noGrp="1"/>
+          </p:cNvSpPr>
+          <p:nvPr>
+            <p:ph type="title"/>
+          </p:nvPr>
+        </p:nvSpPr>
+        <p:spPr/>
+        <p:txBody>
+          <a:bodyPr/>
+          <a:lstStyle/>
+          <a:p>
+            <a:r>
+              <a:rPr lang="en-US">
+                <a:latin typeface="Calibri"/>
+                <a:ea typeface="Calibri"/>
+                <a:cs typeface="Calibri"/>
+              </a:rPr>
+              <a:t>Substitute/Replace Command</a:t>
+            </a:r>
+          </a:p>
+        </p:txBody>
+      </p:sp>
+      <p:sp>
+        <p:nvSpPr>
+          <p:cNvPr id="3" name="Content Placeholder 2">
+            <a:extLst>
+              <a:ext uri="{FF2B5EF4-FFF2-40B4-BE49-F238E27FC236}">
+                <a16:creationId xmlns:a16="http://schemas.microsoft.com/office/drawing/2014/main" id="{DFD5F4D5-A3A2-9562-FAE7-1C98B612286B}"/>
+              </a:ext>
+            </a:extLst>
+          </p:cNvPr>
+          <p:cNvSpPr>
+            <a:spLocks noGrp="1"/>
+          </p:cNvSpPr>
+          <p:nvPr>
+            <p:ph idx="1"/>
+          </p:nvPr>
+        </p:nvSpPr>
+        <p:spPr>
+          <a:xfrm>
+            <a:off x="189914" y="1600200"/>
+            <a:ext cx="8750104" cy="4525963"/>
+          </a:xfrm>
+        </p:spPr>
+        <p:txBody>
+          <a:bodyPr/>
+          <a:lstStyle/>
+          <a:p>
+            <a:pPr marL="457200" indent="-457200">
+              <a:buFont typeface="Arial"/>
+              <a:buChar char="•"/>
+            </a:pPr>
+            <a:r>
+              <a:rPr lang="en-US" b="1" dirty="0">
+                <a:cs typeface="Arial"/>
+              </a:rPr>
+              <a:t>:1,$s/the/XXX </a:t>
+            </a:r>
+            <a:r>
+              <a:rPr lang="en-US" dirty="0" err="1">
+                <a:cs typeface="Arial"/>
+              </a:rPr>
+              <a:t>hľadá</a:t>
+            </a:r>
+            <a:r>
+              <a:rPr lang="en-US" dirty="0">
+                <a:cs typeface="Arial"/>
+              </a:rPr>
+              <a:t> v celom </a:t>
+            </a:r>
+            <a:r>
+              <a:rPr lang="en-US" dirty="0" err="1">
+                <a:cs typeface="Arial"/>
+              </a:rPr>
+              <a:t>texte</a:t>
+            </a:r>
+            <a:r>
+              <a:rPr lang="en-US" dirty="0">
+                <a:cs typeface="Arial"/>
+              </a:rPr>
+              <a:t> od </a:t>
+            </a:r>
+            <a:r>
+              <a:rPr lang="en-US" dirty="0" err="1">
+                <a:cs typeface="Arial"/>
+              </a:rPr>
+              <a:t>začiatku</a:t>
+            </a:r>
+            <a:r>
+              <a:rPr lang="en-US" dirty="0">
+                <a:cs typeface="Arial"/>
+              </a:rPr>
+              <a:t> </a:t>
+            </a:r>
+            <a:r>
+              <a:rPr lang="en-US" dirty="0" err="1">
+                <a:cs typeface="Arial"/>
+              </a:rPr>
+              <a:t>prvý</a:t>
+            </a:r>
+            <a:r>
+              <a:rPr lang="en-US" dirty="0">
+                <a:cs typeface="Arial"/>
+              </a:rPr>
+              <a:t> </a:t>
+            </a:r>
+            <a:r>
+              <a:rPr lang="en-US" dirty="0" err="1">
+                <a:cs typeface="Arial"/>
+              </a:rPr>
+              <a:t>výskyt</a:t>
+            </a:r>
+            <a:r>
+              <a:rPr lang="en-US" dirty="0">
+                <a:cs typeface="Arial"/>
+              </a:rPr>
+              <a:t> </a:t>
+            </a:r>
+            <a:r>
+              <a:rPr lang="en-US" b="1" dirty="0">
+                <a:cs typeface="Arial"/>
+              </a:rPr>
+              <a:t>the </a:t>
+            </a:r>
+            <a:r>
+              <a:rPr lang="en-US" dirty="0">
+                <a:cs typeface="Arial"/>
+              </a:rPr>
+              <a:t>a </a:t>
+            </a:r>
+            <a:r>
+              <a:rPr lang="en-US" dirty="0" err="1">
+                <a:cs typeface="Arial"/>
+              </a:rPr>
+              <a:t>nahradí</a:t>
+            </a:r>
+            <a:r>
+              <a:rPr lang="en-US" dirty="0">
+                <a:cs typeface="Arial"/>
+              </a:rPr>
+              <a:t> za </a:t>
+            </a:r>
+            <a:r>
+              <a:rPr lang="en-US" b="1" dirty="0">
+                <a:cs typeface="Arial"/>
+              </a:rPr>
+              <a:t>XXX</a:t>
+            </a:r>
+            <a:endParaRPr lang="en-US" dirty="0">
+              <a:cs typeface="Arial"/>
+            </a:endParaRPr>
+          </a:p>
+          <a:p>
+            <a:pPr>
+              <a:buFont typeface="Arial"/>
+            </a:pPr>
+            <a:r>
+              <a:rPr lang="en-US" b="1" dirty="0">
+                <a:cs typeface="Arial"/>
+              </a:rPr>
+              <a:t>:s/the/XXX/</a:t>
+            </a:r>
+            <a:r>
+              <a:rPr lang="en-US" b="1" dirty="0" err="1">
+                <a:cs typeface="Arial"/>
+              </a:rPr>
+              <a:t>i</a:t>
+            </a:r>
+            <a:r>
+              <a:rPr lang="en-US" b="1" dirty="0">
+                <a:cs typeface="Arial"/>
+              </a:rPr>
+              <a:t> </a:t>
+            </a:r>
+            <a:r>
+              <a:rPr lang="en-US" dirty="0" err="1">
+                <a:cs typeface="Arial"/>
+              </a:rPr>
+              <a:t>hľadá</a:t>
+            </a:r>
+            <a:r>
+              <a:rPr lang="en-US" dirty="0">
+                <a:cs typeface="Arial"/>
+              </a:rPr>
+              <a:t> </a:t>
+            </a:r>
+            <a:r>
+              <a:rPr lang="en-US" dirty="0" err="1">
+                <a:cs typeface="Arial"/>
+              </a:rPr>
+              <a:t>na</a:t>
+            </a:r>
+            <a:r>
+              <a:rPr lang="en-US" dirty="0">
+                <a:cs typeface="Arial"/>
+              </a:rPr>
+              <a:t> </a:t>
+            </a:r>
+            <a:r>
+              <a:rPr lang="en-US" dirty="0" err="1">
+                <a:cs typeface="Arial"/>
+              </a:rPr>
+              <a:t>aktuálnom</a:t>
+            </a:r>
+            <a:r>
+              <a:rPr lang="en-US" dirty="0">
+                <a:cs typeface="Arial"/>
+              </a:rPr>
+              <a:t> </a:t>
+            </a:r>
+            <a:r>
+              <a:rPr lang="en-US" dirty="0" err="1">
+                <a:cs typeface="Arial"/>
+              </a:rPr>
+              <a:t>riadku</a:t>
+            </a:r>
+            <a:r>
+              <a:rPr lang="en-US" dirty="0">
+                <a:cs typeface="Arial"/>
+              </a:rPr>
+              <a:t> </a:t>
+            </a:r>
+            <a:r>
+              <a:rPr lang="en-US" dirty="0" err="1">
+                <a:cs typeface="Arial"/>
+              </a:rPr>
+              <a:t>prvý</a:t>
+            </a:r>
+            <a:r>
+              <a:rPr lang="en-US" dirty="0">
+                <a:cs typeface="Arial"/>
+              </a:rPr>
+              <a:t> </a:t>
+            </a:r>
+            <a:r>
+              <a:rPr lang="en-US" dirty="0" err="1">
+                <a:cs typeface="Arial"/>
+              </a:rPr>
+              <a:t>výskyt</a:t>
+            </a:r>
+            <a:r>
+              <a:rPr lang="en-US" dirty="0">
+                <a:cs typeface="Arial"/>
+              </a:rPr>
+              <a:t> </a:t>
+            </a:r>
+            <a:r>
+              <a:rPr lang="en-US" b="1" dirty="0">
+                <a:cs typeface="Arial"/>
+              </a:rPr>
+              <a:t>the </a:t>
+            </a:r>
+            <a:r>
+              <a:rPr lang="en-US" u="sng" dirty="0">
+                <a:cs typeface="Arial"/>
+              </a:rPr>
+              <a:t>bez </a:t>
+            </a:r>
+            <a:r>
+              <a:rPr lang="en-US" u="sng" dirty="0" err="1">
+                <a:cs typeface="Arial"/>
+              </a:rPr>
+              <a:t>rozlišovania</a:t>
+            </a:r>
+            <a:r>
+              <a:rPr lang="en-US" u="sng" dirty="0">
+                <a:cs typeface="Arial"/>
+              </a:rPr>
+              <a:t> </a:t>
+            </a:r>
+            <a:r>
+              <a:rPr lang="en-US" u="sng" dirty="0" err="1">
+                <a:cs typeface="Arial"/>
+              </a:rPr>
+              <a:t>veľkých</a:t>
+            </a:r>
+            <a:r>
+              <a:rPr lang="en-US" u="sng" dirty="0">
+                <a:cs typeface="Arial"/>
+              </a:rPr>
+              <a:t> a </a:t>
+            </a:r>
+            <a:r>
+              <a:rPr lang="en-US" u="sng" dirty="0" err="1">
+                <a:cs typeface="Arial"/>
+              </a:rPr>
+              <a:t>malých</a:t>
+            </a:r>
+            <a:r>
+              <a:rPr lang="en-US" u="sng" dirty="0">
+                <a:cs typeface="Arial"/>
+              </a:rPr>
+              <a:t> </a:t>
+            </a:r>
+            <a:r>
+              <a:rPr lang="en-US" u="sng" dirty="0" err="1">
+                <a:cs typeface="Arial"/>
+              </a:rPr>
+              <a:t>písmen</a:t>
+            </a:r>
+            <a:r>
+              <a:rPr lang="en-US" dirty="0">
+                <a:cs typeface="Arial"/>
+              </a:rPr>
+              <a:t> a </a:t>
+            </a:r>
+            <a:r>
+              <a:rPr lang="en-US" dirty="0" err="1">
+                <a:cs typeface="Arial"/>
+              </a:rPr>
+              <a:t>nahradí</a:t>
+            </a:r>
+            <a:r>
+              <a:rPr lang="en-US" dirty="0">
+                <a:cs typeface="Arial"/>
+              </a:rPr>
+              <a:t> za </a:t>
+            </a:r>
+            <a:r>
+              <a:rPr lang="en-US" b="1" dirty="0">
+                <a:cs typeface="Arial"/>
+              </a:rPr>
+              <a:t>XXX</a:t>
+            </a:r>
+          </a:p>
+          <a:p>
+            <a:pPr>
+              <a:buFont typeface="Arial"/>
+            </a:pPr>
+            <a:r>
+              <a:rPr lang="en-US" b="1" dirty="0">
+                <a:cs typeface="Arial"/>
+              </a:rPr>
+              <a:t>:1,$s/the/XXX/g </a:t>
+            </a:r>
+            <a:r>
+              <a:rPr lang="en-US" dirty="0" err="1">
+                <a:cs typeface="Arial"/>
+              </a:rPr>
+              <a:t>hľadá</a:t>
+            </a:r>
+            <a:r>
+              <a:rPr lang="en-US" dirty="0">
+                <a:cs typeface="Arial"/>
+              </a:rPr>
+              <a:t> v celom </a:t>
+            </a:r>
+            <a:r>
+              <a:rPr lang="en-US" dirty="0" err="1">
+                <a:cs typeface="Arial"/>
+              </a:rPr>
+              <a:t>texte</a:t>
+            </a:r>
+            <a:r>
+              <a:rPr lang="en-US" dirty="0">
+                <a:cs typeface="Arial"/>
+              </a:rPr>
+              <a:t> od </a:t>
+            </a:r>
+            <a:r>
+              <a:rPr lang="en-US" dirty="0" err="1">
+                <a:cs typeface="Arial"/>
+              </a:rPr>
+              <a:t>začiatku</a:t>
+            </a:r>
+            <a:r>
+              <a:rPr lang="en-US" dirty="0">
+                <a:cs typeface="Arial"/>
+              </a:rPr>
+              <a:t> </a:t>
+            </a:r>
+            <a:r>
+              <a:rPr lang="en-US" dirty="0" err="1">
+                <a:cs typeface="Arial"/>
+              </a:rPr>
+              <a:t>všetky</a:t>
+            </a:r>
+            <a:r>
+              <a:rPr lang="en-US" dirty="0">
+                <a:cs typeface="Arial"/>
+              </a:rPr>
+              <a:t> </a:t>
+            </a:r>
+            <a:r>
+              <a:rPr lang="en-US" dirty="0" err="1">
+                <a:cs typeface="Arial"/>
+              </a:rPr>
+              <a:t>výskyty</a:t>
+            </a:r>
+            <a:r>
+              <a:rPr lang="en-US" dirty="0">
+                <a:cs typeface="Arial"/>
+              </a:rPr>
+              <a:t> </a:t>
+            </a:r>
+            <a:r>
+              <a:rPr lang="en-US" b="1" dirty="0">
+                <a:cs typeface="Arial"/>
+              </a:rPr>
+              <a:t>the </a:t>
+            </a:r>
+            <a:r>
+              <a:rPr lang="en-US" dirty="0">
+                <a:cs typeface="Arial"/>
+              </a:rPr>
+              <a:t>a </a:t>
+            </a:r>
+            <a:r>
+              <a:rPr lang="en-US" dirty="0" err="1">
+                <a:cs typeface="Arial"/>
+              </a:rPr>
+              <a:t>nahradí</a:t>
+            </a:r>
+            <a:r>
+              <a:rPr lang="en-US" dirty="0">
+                <a:cs typeface="Arial"/>
+              </a:rPr>
+              <a:t> za </a:t>
+            </a:r>
+            <a:r>
+              <a:rPr lang="en-US" b="1" dirty="0">
+                <a:cs typeface="Arial"/>
+              </a:rPr>
+              <a:t>XXX</a:t>
+            </a:r>
+          </a:p>
+          <a:p>
+            <a:pPr>
+              <a:buFont typeface="Arial"/>
+            </a:pPr>
+            <a:r>
+              <a:rPr lang="en-US" sz="2400" dirty="0">
+                <a:ea typeface="+mn-lt"/>
+                <a:cs typeface="+mn-lt"/>
+                <a:hlinkClick r:id="rId2"/>
+              </a:rPr>
+              <a:t>https://youtu.be/9Sodnanx_yI?si=SfCggqLGhb7W4BXu</a:t>
+            </a:r>
+            <a:r>
+              <a:rPr lang="en-US" sz="2400" dirty="0">
+                <a:ea typeface="+mn-lt"/>
+                <a:cs typeface="+mn-lt"/>
+              </a:rPr>
+              <a:t> </a:t>
+            </a:r>
+            <a:endParaRPr lang="en-US" sz="2800" b="1" dirty="0">
+              <a:cs typeface="Arial"/>
+            </a:endParaRPr>
+          </a:p>
+        </p:txBody>
+      </p:sp>
+    </p:spTree>
+    <p:extLst>
+      <p:ext uri="{BB962C8B-B14F-4D97-AF65-F5344CB8AC3E}">
+        <p14:creationId xmlns:p14="http://schemas.microsoft.com/office/powerpoint/2010/main" val="2266220088"/>
+      </p:ext>
+    </p:extLst>
   </p:cSld>
   <p:clrMapOvr>
     <a:masterClrMapping/>
@@ -16561,7 +17120,12 @@
             <p:ph idx="1"/>
           </p:nvPr>
         </p:nvSpPr>
-        <p:spPr/>
+        <p:spPr>
+          <a:xfrm>
+            <a:off x="457200" y="1563683"/>
+            <a:ext cx="8229600" cy="3744487"/>
+          </a:xfrm>
+        </p:spPr>
         <p:txBody>
           <a:bodyPr/>
           <a:lstStyle/>
@@ -16645,66 +17209,6 @@
           </a:p>
         </p:txBody>
       </p:sp>
-      <p:pic>
-        <p:nvPicPr>
-          <p:cNvPr id="34820" name="Picture 2" descr="C:\Documents and Settings\zucker\Local Settings\Temporary Internet Files\Content.IE5\QYTWFZO1\MCj02932160000[1].wmf">
-            <a:extLst>
-              <a:ext uri="{FF2B5EF4-FFF2-40B4-BE49-F238E27FC236}">
-                <a16:creationId xmlns:a16="http://schemas.microsoft.com/office/drawing/2014/main" id="{29914A81-2D67-4F57-A266-D107CCB17331}"/>
-              </a:ext>
-            </a:extLst>
-          </p:cNvPr>
-          <p:cNvPicPr>
-            <a:picLocks noChangeAspect="1" noChangeArrowheads="1"/>
-          </p:cNvPicPr>
-          <p:nvPr/>
-        </p:nvPicPr>
-        <p:blipFill>
-          <a:blip r:embed="rId2">
-            <a:extLst>
-              <a:ext uri="{28A0092B-C50C-407E-A947-70E740481C1C}">
-                <a14:useLocalDpi xmlns:a14="http://schemas.microsoft.com/office/drawing/2010/main" val="0"/>
-              </a:ext>
-            </a:extLst>
-          </a:blip>
-          <a:srcRect/>
-          <a:stretch>
-            <a:fillRect/>
-          </a:stretch>
-        </p:blipFill>
-        <p:spPr bwMode="auto">
-          <a:xfrm>
-            <a:off x="228600" y="1524000"/>
-            <a:ext cx="673100" cy="665163"/>
-          </a:xfrm>
-          <a:prstGeom prst="rect">
-            <a:avLst/>
-          </a:prstGeom>
-          <a:noFill/>
-          <a:ln>
-            <a:noFill/>
-          </a:ln>
-          <a:extLst>
-            <a:ext uri="{909E8E84-426E-40DD-AFC4-6F175D3DCCD1}">
-              <a14:hiddenFill xmlns:a14="http://schemas.microsoft.com/office/drawing/2010/main">
-                <a:solidFill>
-                  <a:srgbClr val="FFFFFF"/>
-                </a:solidFill>
-              </a14:hiddenFill>
-            </a:ext>
-            <a:ext uri="{91240B29-F687-4F45-9708-019B960494DF}">
-              <a14:hiddenLine xmlns:a14="http://schemas.microsoft.com/office/drawing/2010/main" w="9525">
-                <a:solidFill>
-                  <a:srgbClr val="000000"/>
-                </a:solidFill>
-                <a:miter lim="800000"/>
-                <a:headEnd/>
-                <a:tailEnd/>
-              </a14:hiddenLine>
-            </a:ext>
-          </a:extLst>
-        </p:spPr>
-      </p:pic>
     </p:spTree>
   </p:cSld>
   <p:clrMapOvr>
@@ -16746,7 +17250,12 @@
             <p:ph type="title"/>
           </p:nvPr>
         </p:nvSpPr>
-        <p:spPr/>
+        <p:spPr>
+          <a:xfrm>
+            <a:off x="457200" y="318"/>
+            <a:ext cx="8229600" cy="1143000"/>
+          </a:xfrm>
+        </p:spPr>
         <p:txBody>
           <a:bodyPr/>
           <a:lstStyle/>
@@ -16774,7 +17283,12 @@
             <p:ph idx="1"/>
           </p:nvPr>
         </p:nvSpPr>
-        <p:spPr/>
+        <p:spPr>
+          <a:xfrm>
+            <a:off x="457200" y="1135967"/>
+            <a:ext cx="8229600" cy="4990196"/>
+          </a:xfrm>
+        </p:spPr>
         <p:txBody>
           <a:bodyPr/>
           <a:lstStyle/>
@@ -16787,8 +17301,49 @@
           <a:p>
             <a:pPr lvl="1"/>
             <a:r>
-              <a:rPr lang="en-US" altLang="sk-SK" sz="2000"/>
+              <a:rPr lang="en-US" altLang="sk-SK" sz="2000" dirty="0"/>
               <a:t>:set nu  and :set nu!</a:t>
+            </a:r>
+            <a:endParaRPr lang="en-US" altLang="sk-SK" sz="2000" dirty="0">
+              <a:cs typeface="Arial"/>
+            </a:endParaRPr>
+          </a:p>
+          <a:p>
+            <a:r>
+              <a:rPr lang="en-US" altLang="sk-SK" sz="2400">
+                <a:cs typeface="Arial"/>
+              </a:rPr>
+              <a:t>Highlight search results</a:t>
+            </a:r>
+            <a:endParaRPr lang="en-US" altLang="sk-SK" sz="2400" dirty="0">
+              <a:cs typeface="Arial"/>
+            </a:endParaRPr>
+          </a:p>
+          <a:p>
+            <a:pPr lvl="1"/>
+            <a:r>
+              <a:rPr lang="en-US" altLang="sk-SK" sz="2000" dirty="0">
+                <a:cs typeface="Arial"/>
+              </a:rPr>
+              <a:t>:set </a:t>
+            </a:r>
+            <a:r>
+              <a:rPr lang="en-US" altLang="sk-SK" sz="2000" dirty="0" err="1">
+                <a:cs typeface="Arial"/>
+              </a:rPr>
+              <a:t>hlsearch</a:t>
+            </a:r>
+            <a:r>
+              <a:rPr lang="en-US" altLang="sk-SK" sz="2000" dirty="0">
+                <a:cs typeface="Arial"/>
+              </a:rPr>
+              <a:t> :set </a:t>
+            </a:r>
+            <a:r>
+              <a:rPr lang="en-US" altLang="sk-SK" sz="2000" dirty="0" err="1">
+                <a:cs typeface="Arial"/>
+              </a:rPr>
+              <a:t>nohlsearch</a:t>
             </a:r>
           </a:p>
           <a:p>
@@ -16800,9 +17355,16 @@
           <a:p>
             <a:pPr lvl="1"/>
             <a:r>
-              <a:rPr lang="en-US" altLang="sk-SK" sz="2400"/>
-              <a:t>:!cmd</a:t>
-            </a:r>
+              <a:rPr lang="en-US" altLang="sk-SK" sz="2400" dirty="0"/>
+              <a:t>:!</a:t>
+            </a:r>
+            <a:r>
+              <a:rPr lang="en-US" altLang="sk-SK" sz="2400" dirty="0" err="1"/>
+              <a:t>cmd</a:t>
+            </a:r>
+            <a:endParaRPr lang="en-US" altLang="sk-SK" sz="2400" dirty="0" err="1">
+              <a:cs typeface="Arial"/>
+            </a:endParaRPr>
           </a:p>
           <a:p>
             <a:r>
@@ -16813,9 +17375,20 @@
           <a:p>
             <a:pPr lvl="1"/>
             <a:r>
-              <a:rPr lang="en-US" altLang="sk-SK" sz="2400"/>
-              <a:t>:sh  (type “exit” to return to editor) </a:t>
-            </a:r>
+              <a:rPr lang="en-US" altLang="sk-SK" sz="2400" dirty="0"/>
+              <a:t>:</a:t>
+            </a:r>
+            <a:r>
+              <a:rPr lang="en-US" altLang="sk-SK" sz="2400" dirty="0" err="1"/>
+              <a:t>sh</a:t>
+            </a:r>
+            <a:r>
+              <a:rPr lang="en-US" altLang="sk-SK" sz="2400" dirty="0"/>
+              <a:t>  (type “exit” to return to editor) </a:t>
+            </a:r>
+            <a:endParaRPr lang="en-US" altLang="sk-SK" sz="2400" dirty="0">
+              <a:cs typeface="Arial"/>
+            </a:endParaRPr>
           </a:p>
           <a:p>
             <a:r>
@@ -17325,11 +17898,11 @@
               <a:t>Why Do We Need to Know</a:t>
             </a:r>
             <a:br>
+              <a:rPr lang="en-US" altLang="sk-SK" dirty="0"/>
+            </a:br>
+            <a:r>
               <a:rPr lang="en-US" altLang="sk-SK"/>
-            </a:br>
-            <a:r>
-              <a:rPr lang="en-US" altLang="sk-SK"/>
-              <a:t>the vi Editor</a:t>
+              <a:t>the vim Editor</a:t>
             </a:r>
           </a:p>
         </p:txBody>
@@ -17363,14 +17936,105 @@
           <a:p>
             <a:r>
               <a:rPr lang="en-US" altLang="sk-SK" dirty="0"/>
-              <a:t>Good to know, as many commands use vi syntax</a:t>
-            </a:r>
-          </a:p>
-          <a:p>
-            <a:r>
-              <a:rPr lang="en-US" altLang="sk-SK" dirty="0"/>
-              <a:t>Part of final exam</a:t>
-            </a:r>
+              <a:t>Good to know, as many commands use </a:t>
+            </a:r>
+            <a:r>
+              <a:rPr lang="en-US" altLang="sk-SK"/>
+              <a:t>vim syntax</a:t>
+            </a:r>
+            <a:endParaRPr lang="en-US" altLang="sk-SK">
+              <a:cs typeface="Arial"/>
+            </a:endParaRPr>
+          </a:p>
+          <a:p>
+            <a:endParaRPr lang="en-US" altLang="sk-SK" dirty="0">
+              <a:cs typeface="Arial"/>
+            </a:endParaRPr>
+          </a:p>
+          <a:p>
+            <a:pPr>
+              <a:spcBef>
+                <a:spcPct val="0"/>
+              </a:spcBef>
+            </a:pPr>
+            <a:r>
+              <a:rPr lang="sk-SK" sz="1800" b="1">
+                <a:cs typeface="Arial"/>
+              </a:rPr>
+              <a:t>vim</a:t>
+            </a:r>
+            <a:r>
+              <a:rPr lang="sk-SK" sz="1800">
+                <a:cs typeface="Arial"/>
+              </a:rPr>
+              <a:t> is a </a:t>
+            </a:r>
+            <a:r>
+              <a:rPr lang="sk-SK" sz="1800"/>
+              <a:t>text editor that is upwards compatible to vi. There are a lot of enhancements above Vi: multi level undo, multi windows and buffers, syntax highlighting, command line editing, filename completion, on-line help, visual selection, etc.</a:t>
+            </a:r>
+            <a:endParaRPr lang="en-US" sz="1800">
+              <a:cs typeface="Arial"/>
+            </a:endParaRPr>
+          </a:p>
+          <a:p>
+            <a:r>
+              <a:rPr lang="en-US" altLang="sk-SK" sz="2000" b="1" dirty="0" err="1"/>
+              <a:t>vimtutor</a:t>
+            </a:r>
+            <a:r>
+              <a:rPr lang="en-US" altLang="sk-SK" sz="2000" b="1" dirty="0"/>
+              <a:t> – </a:t>
+            </a:r>
+            <a:r>
+              <a:rPr lang="en-US" altLang="sk-SK" sz="2000" dirty="0"/>
+              <a:t>part of </a:t>
+            </a:r>
+            <a:r>
+              <a:rPr lang="en-US" altLang="sk-SK" sz="2000" dirty="0" err="1"/>
+              <a:t>unix</a:t>
+            </a:r>
+            <a:r>
+              <a:rPr lang="en-US" altLang="sk-SK" sz="2000" dirty="0"/>
+              <a:t> distribution</a:t>
+            </a:r>
+            <a:endParaRPr lang="en-US" altLang="sk-SK" sz="2000" dirty="0">
+              <a:cs typeface="Arial"/>
+            </a:endParaRPr>
+          </a:p>
+          <a:p>
+            <a:r>
+              <a:rPr lang="en-US" sz="2400" dirty="0">
+                <a:ea typeface="+mn-lt"/>
+                <a:cs typeface="+mn-lt"/>
+              </a:rPr>
+              <a:t>vim compete </a:t>
+            </a:r>
+            <a:r>
+              <a:rPr lang="en-US" sz="2400">
+                <a:ea typeface="+mn-lt"/>
+                <a:cs typeface="+mn-lt"/>
+              </a:rPr>
+              <a:t>video</a:t>
+            </a:r>
+            <a:r>
+              <a:rPr lang="en-US" sz="2400" dirty="0">
+                <a:ea typeface="+mn-lt"/>
+                <a:cs typeface="+mn-lt"/>
+              </a:rPr>
+              <a:t> tutorial </a:t>
+            </a:r>
+            <a:r>
+              <a:rPr lang="en-US" sz="2400" dirty="0">
+                <a:ea typeface="+mn-lt"/>
+                <a:cs typeface="+mn-lt"/>
+                <a:hlinkClick r:id="rId2"/>
+              </a:rPr>
+              <a:t>https://youtube.com/playlist?list=PLy7Kah3WzqrEjsuvhT46fr28Q11oa5ZoI&amp;si=_7mVjhZs_IJJG8pX</a:t>
+            </a:r>
+            <a:endParaRPr lang="en-US" altLang="sk-SK" sz="2400" b="1" dirty="0">
+              <a:cs typeface="Arial"/>
+            </a:endParaRPr>
           </a:p>
           <a:p>
             <a:pPr lvl="1"/>
@@ -17489,7 +18153,7 @@
             <a:pPr lvl="1"/>
             <a:r>
               <a:rPr lang="en-US" altLang="sk-SK"/>
-              <a:t>vi edit mode (inline and ex commands)</a:t>
+              <a:t>vi command mode (inline and ex commands)</a:t>
             </a:r>
           </a:p>
           <a:p>
@@ -17509,16 +18173,22 @@
           <a:p>
             <a:pPr lvl="2"/>
             <a:r>
-              <a:rPr lang="en-US" altLang="sk-SK"/>
+              <a:rPr lang="en-US" altLang="sk-SK" dirty="0"/>
               <a:t>typical delete commands </a:t>
             </a:r>
+            <a:endParaRPr lang="en-US" altLang="sk-SK" dirty="0">
+              <a:cs typeface="Arial"/>
+            </a:endParaRPr>
           </a:p>
           <a:p>
             <a:pPr lvl="2"/>
             <a:r>
-              <a:rPr lang="en-US" altLang="sk-SK"/>
+              <a:rPr lang="en-US" altLang="sk-SK" dirty="0"/>
               <a:t>typical modify commands</a:t>
             </a:r>
+            <a:endParaRPr lang="en-US" altLang="sk-SK" dirty="0">
+              <a:cs typeface="Arial"/>
+            </a:endParaRPr>
           </a:p>
         </p:txBody>
       </p:sp>
@@ -19835,1484 +20505,6 @@
       </p:grpSpPr>
       <p:sp>
         <p:nvSpPr>
-          <p:cNvPr id="10242" name="Title 1">
-            <a:extLst>
-              <a:ext uri="{FF2B5EF4-FFF2-40B4-BE49-F238E27FC236}">
-                <a16:creationId xmlns:a16="http://schemas.microsoft.com/office/drawing/2014/main" id="{FA20B682-0E92-4824-B286-AE4FEABED2C4}"/>
-              </a:ext>
-            </a:extLst>
-          </p:cNvPr>
-          <p:cNvSpPr>
-            <a:spLocks noGrp="1" noChangeArrowheads="1"/>
-          </p:cNvSpPr>
-          <p:nvPr>
-            <p:ph type="title"/>
-          </p:nvPr>
-        </p:nvSpPr>
-        <p:spPr>
-          <a:xfrm>
-            <a:off x="495300" y="217488"/>
-            <a:ext cx="8229600" cy="1143000"/>
-          </a:xfrm>
-        </p:spPr>
-        <p:txBody>
-          <a:bodyPr/>
-          <a:lstStyle/>
-          <a:p>
-            <a:pPr eaLnBrk="1" hangingPunct="1"/>
-            <a:r>
-              <a:rPr lang="en-US" altLang="sk-SK"/>
-              <a:t>vi File Interaction (2)</a:t>
-            </a:r>
-            <a:br>
-              <a:rPr lang="en-US" altLang="sk-SK"/>
-            </a:br>
-            <a:r>
-              <a:rPr lang="en-US" altLang="sk-SK"/>
-              <a:t>Read-only mode</a:t>
-            </a:r>
-          </a:p>
-        </p:txBody>
-      </p:sp>
-      <p:sp>
-        <p:nvSpPr>
-          <p:cNvPr id="3" name="Flowchart: Magnetic Disk 2">
-            <a:extLst>
-              <a:ext uri="{FF2B5EF4-FFF2-40B4-BE49-F238E27FC236}">
-                <a16:creationId xmlns:a16="http://schemas.microsoft.com/office/drawing/2014/main" id="{0F091D60-779B-401B-B828-DC18DD40B00E}"/>
-              </a:ext>
-            </a:extLst>
-          </p:cNvPr>
-          <p:cNvSpPr/>
-          <p:nvPr/>
-        </p:nvSpPr>
-        <p:spPr>
-          <a:xfrm>
-            <a:off x="990600" y="4343400"/>
-            <a:ext cx="914400" cy="612775"/>
-          </a:xfrm>
-          <a:prstGeom prst="flowChartMagneticDisk">
-            <a:avLst/>
-          </a:prstGeom>
-          <a:solidFill>
-            <a:schemeClr val="bg1"/>
-          </a:solidFill>
-        </p:spPr>
-        <p:style>
-          <a:lnRef idx="2">
-            <a:schemeClr val="accent1">
-              <a:shade val="50000"/>
-            </a:schemeClr>
-          </a:lnRef>
-          <a:fillRef idx="1">
-            <a:schemeClr val="accent1"/>
-          </a:fillRef>
-          <a:effectRef idx="0">
-            <a:schemeClr val="accent1"/>
-          </a:effectRef>
-          <a:fontRef idx="minor">
-            <a:schemeClr val="lt1"/>
-          </a:fontRef>
-        </p:style>
-        <p:txBody>
-          <a:bodyPr anchor="ctr"/>
-          <a:lstStyle/>
-          <a:p>
-            <a:pPr algn="ctr" eaLnBrk="1" hangingPunct="1">
-              <a:defRPr/>
-            </a:pPr>
-            <a:r>
-              <a:rPr lang="en-US" dirty="0" err="1">
-                <a:solidFill>
-                  <a:schemeClr val="tx1"/>
-                </a:solidFill>
-              </a:rPr>
-              <a:t>FileA</a:t>
-            </a:r>
-            <a:endParaRPr lang="en-US" dirty="0">
-              <a:solidFill>
-                <a:schemeClr val="tx1"/>
-              </a:solidFill>
-            </a:endParaRPr>
-          </a:p>
-        </p:txBody>
-      </p:sp>
-      <p:sp>
-        <p:nvSpPr>
-          <p:cNvPr id="4" name="Flowchart: Process 3">
-            <a:extLst>
-              <a:ext uri="{FF2B5EF4-FFF2-40B4-BE49-F238E27FC236}">
-                <a16:creationId xmlns:a16="http://schemas.microsoft.com/office/drawing/2014/main" id="{FDC78B51-8E30-4AC5-9F09-CCB666F1ABE2}"/>
-              </a:ext>
-            </a:extLst>
-          </p:cNvPr>
-          <p:cNvSpPr/>
-          <p:nvPr/>
-        </p:nvSpPr>
-        <p:spPr>
-          <a:xfrm>
-            <a:off x="4038600" y="3276600"/>
-            <a:ext cx="1143000" cy="612775"/>
-          </a:xfrm>
-          <a:prstGeom prst="flowChartProcess">
-            <a:avLst/>
-          </a:prstGeom>
-          <a:solidFill>
-            <a:schemeClr val="bg1"/>
-          </a:solidFill>
-        </p:spPr>
-        <p:style>
-          <a:lnRef idx="2">
-            <a:schemeClr val="accent1">
-              <a:shade val="50000"/>
-            </a:schemeClr>
-          </a:lnRef>
-          <a:fillRef idx="1">
-            <a:schemeClr val="accent1"/>
-          </a:fillRef>
-          <a:effectRef idx="0">
-            <a:schemeClr val="accent1"/>
-          </a:effectRef>
-          <a:fontRef idx="minor">
-            <a:schemeClr val="lt1"/>
-          </a:fontRef>
-        </p:style>
-        <p:txBody>
-          <a:bodyPr anchor="ctr"/>
-          <a:lstStyle/>
-          <a:p>
-            <a:pPr algn="ctr" eaLnBrk="1" hangingPunct="1">
-              <a:defRPr/>
-            </a:pPr>
-            <a:r>
-              <a:rPr lang="en-US" dirty="0">
-                <a:solidFill>
-                  <a:schemeClr val="tx1"/>
-                </a:solidFill>
-              </a:rPr>
-              <a:t>Work</a:t>
-            </a:r>
-          </a:p>
-          <a:p>
-            <a:pPr algn="ctr" eaLnBrk="1" hangingPunct="1">
-              <a:defRPr/>
-            </a:pPr>
-            <a:r>
-              <a:rPr lang="en-US" dirty="0">
-                <a:solidFill>
-                  <a:schemeClr val="tx1"/>
-                </a:solidFill>
-              </a:rPr>
-              <a:t>space</a:t>
-            </a:r>
-          </a:p>
-        </p:txBody>
-      </p:sp>
-      <p:sp>
-        <p:nvSpPr>
-          <p:cNvPr id="5" name="Flowchart: Magnetic Disk 4">
-            <a:extLst>
-              <a:ext uri="{FF2B5EF4-FFF2-40B4-BE49-F238E27FC236}">
-                <a16:creationId xmlns:a16="http://schemas.microsoft.com/office/drawing/2014/main" id="{0876ABE8-7220-4894-85EE-D2525202639B}"/>
-              </a:ext>
-            </a:extLst>
-          </p:cNvPr>
-          <p:cNvSpPr/>
-          <p:nvPr/>
-        </p:nvSpPr>
-        <p:spPr>
-          <a:xfrm>
-            <a:off x="6019800" y="4800600"/>
-            <a:ext cx="914400" cy="612775"/>
-          </a:xfrm>
-          <a:prstGeom prst="flowChartMagneticDisk">
-            <a:avLst/>
-          </a:prstGeom>
-          <a:solidFill>
-            <a:schemeClr val="bg1"/>
-          </a:solidFill>
-        </p:spPr>
-        <p:style>
-          <a:lnRef idx="2">
-            <a:schemeClr val="accent1">
-              <a:shade val="50000"/>
-            </a:schemeClr>
-          </a:lnRef>
-          <a:fillRef idx="1">
-            <a:schemeClr val="accent1"/>
-          </a:fillRef>
-          <a:effectRef idx="0">
-            <a:schemeClr val="accent1"/>
-          </a:effectRef>
-          <a:fontRef idx="minor">
-            <a:schemeClr val="lt1"/>
-          </a:fontRef>
-        </p:style>
-        <p:txBody>
-          <a:bodyPr anchor="ctr"/>
-          <a:lstStyle/>
-          <a:p>
-            <a:pPr algn="ctr" eaLnBrk="1" hangingPunct="1">
-              <a:defRPr/>
-            </a:pPr>
-            <a:r>
-              <a:rPr lang="en-US" dirty="0" err="1">
-                <a:solidFill>
-                  <a:schemeClr val="tx1"/>
-                </a:solidFill>
-              </a:rPr>
-              <a:t>FileB</a:t>
-            </a:r>
-            <a:endParaRPr lang="en-US" dirty="0">
-              <a:solidFill>
-                <a:schemeClr val="tx1"/>
-              </a:solidFill>
-            </a:endParaRPr>
-          </a:p>
-        </p:txBody>
-      </p:sp>
-      <p:cxnSp>
-        <p:nvCxnSpPr>
-          <p:cNvPr id="7" name="Straight Arrow Connector 6">
-            <a:extLst>
-              <a:ext uri="{FF2B5EF4-FFF2-40B4-BE49-F238E27FC236}">
-                <a16:creationId xmlns:a16="http://schemas.microsoft.com/office/drawing/2014/main" id="{01F5B2B8-16BF-4CD9-8799-8E501013A86F}"/>
-              </a:ext>
-            </a:extLst>
-          </p:cNvPr>
-          <p:cNvCxnSpPr/>
-          <p:nvPr/>
-        </p:nvCxnSpPr>
-        <p:spPr>
-          <a:xfrm rot="16200000" flipH="1">
-            <a:off x="5181600" y="3886200"/>
-            <a:ext cx="914400" cy="914400"/>
-          </a:xfrm>
-          <a:prstGeom prst="straightConnector1">
-            <a:avLst/>
-          </a:prstGeom>
-          <a:ln>
-            <a:solidFill>
-              <a:schemeClr val="tx1"/>
-            </a:solidFill>
-            <a:tailEnd type="arrow"/>
-          </a:ln>
-        </p:spPr>
-        <p:style>
-          <a:lnRef idx="1">
-            <a:schemeClr val="accent1"/>
-          </a:lnRef>
-          <a:fillRef idx="0">
-            <a:schemeClr val="accent1"/>
-          </a:fillRef>
-          <a:effectRef idx="0">
-            <a:schemeClr val="accent1"/>
-          </a:effectRef>
-          <a:fontRef idx="minor">
-            <a:schemeClr val="tx1"/>
-          </a:fontRef>
-        </p:style>
-      </p:cxnSp>
-      <p:sp>
-        <p:nvSpPr>
-          <p:cNvPr id="10247" name="TextBox 9">
-            <a:extLst>
-              <a:ext uri="{FF2B5EF4-FFF2-40B4-BE49-F238E27FC236}">
-                <a16:creationId xmlns:a16="http://schemas.microsoft.com/office/drawing/2014/main" id="{7AD26707-3C66-40E5-9C56-18AABB2EAE32}"/>
-              </a:ext>
-            </a:extLst>
-          </p:cNvPr>
-          <p:cNvSpPr txBox="1">
-            <a:spLocks noChangeArrowheads="1"/>
-          </p:cNvSpPr>
-          <p:nvPr/>
-        </p:nvSpPr>
-        <p:spPr bwMode="auto">
-          <a:xfrm>
-            <a:off x="5562600" y="3886200"/>
-            <a:ext cx="3581400" cy="646331"/>
-          </a:xfrm>
-          <a:prstGeom prst="rect">
-            <a:avLst/>
-          </a:prstGeom>
-          <a:noFill/>
-          <a:ln>
-            <a:noFill/>
-          </a:ln>
-          <a:extLst>
-            <a:ext uri="{909E8E84-426E-40DD-AFC4-6F175D3DCCD1}">
-              <a14:hiddenFill xmlns:a14="http://schemas.microsoft.com/office/drawing/2010/main">
-                <a:solidFill>
-                  <a:srgbClr val="FFFFFF"/>
-                </a:solidFill>
-              </a14:hiddenFill>
-            </a:ext>
-            <a:ext uri="{91240B29-F687-4F45-9708-019B960494DF}">
-              <a14:hiddenLine xmlns:a14="http://schemas.microsoft.com/office/drawing/2010/main" w="9525">
-                <a:solidFill>
-                  <a:srgbClr val="000000"/>
-                </a:solidFill>
-                <a:miter lim="800000"/>
-                <a:headEnd/>
-                <a:tailEnd/>
-              </a14:hiddenLine>
-            </a:ext>
-          </a:extLst>
-        </p:spPr>
-        <p:txBody>
-          <a:bodyPr>
-            <a:spAutoFit/>
-          </a:bodyPr>
-          <a:lstStyle>
-            <a:lvl1pPr>
-              <a:spcBef>
-                <a:spcPct val="20000"/>
-              </a:spcBef>
-              <a:buChar char="•"/>
-              <a:defRPr sz="3200">
-                <a:solidFill>
-                  <a:schemeClr val="tx1"/>
-                </a:solidFill>
-                <a:latin typeface="Arial" panose="020B0604020202020204" pitchFamily="34" charset="0"/>
-              </a:defRPr>
-            </a:lvl1pPr>
-            <a:lvl2pPr marL="742950" indent="-285750">
-              <a:spcBef>
-                <a:spcPct val="20000"/>
-              </a:spcBef>
-              <a:buChar char="–"/>
-              <a:defRPr sz="2800">
-                <a:solidFill>
-                  <a:schemeClr val="tx1"/>
-                </a:solidFill>
-                <a:latin typeface="Arial" panose="020B0604020202020204" pitchFamily="34" charset="0"/>
-              </a:defRPr>
-            </a:lvl2pPr>
-            <a:lvl3pPr marL="1143000" indent="-228600">
-              <a:spcBef>
-                <a:spcPct val="20000"/>
-              </a:spcBef>
-              <a:buChar char="•"/>
-              <a:defRPr sz="2400">
-                <a:solidFill>
-                  <a:schemeClr val="tx1"/>
-                </a:solidFill>
-                <a:latin typeface="Arial" panose="020B0604020202020204" pitchFamily="34" charset="0"/>
-              </a:defRPr>
-            </a:lvl3pPr>
-            <a:lvl4pPr marL="1600200" indent="-228600">
-              <a:spcBef>
-                <a:spcPct val="20000"/>
-              </a:spcBef>
-              <a:buChar char="–"/>
-              <a:defRPr sz="2000">
-                <a:solidFill>
-                  <a:schemeClr val="tx1"/>
-                </a:solidFill>
-                <a:latin typeface="Arial" panose="020B0604020202020204" pitchFamily="34" charset="0"/>
-              </a:defRPr>
-            </a:lvl4pPr>
-            <a:lvl5pPr marL="2057400" indent="-228600">
-              <a:spcBef>
-                <a:spcPct val="20000"/>
-              </a:spcBef>
-              <a:buChar char="»"/>
-              <a:defRPr sz="2000">
-                <a:solidFill>
-                  <a:schemeClr val="tx1"/>
-                </a:solidFill>
-                <a:latin typeface="Arial" panose="020B0604020202020204" pitchFamily="34" charset="0"/>
-              </a:defRPr>
-            </a:lvl5pPr>
-            <a:lvl6pPr marL="2514600" indent="-228600" eaLnBrk="0" fontAlgn="base" hangingPunct="0">
-              <a:spcBef>
-                <a:spcPct val="20000"/>
-              </a:spcBef>
-              <a:spcAft>
-                <a:spcPct val="0"/>
-              </a:spcAft>
-              <a:buChar char="»"/>
-              <a:defRPr sz="2000">
-                <a:solidFill>
-                  <a:schemeClr val="tx1"/>
-                </a:solidFill>
-                <a:latin typeface="Arial" panose="020B0604020202020204" pitchFamily="34" charset="0"/>
-              </a:defRPr>
-            </a:lvl6pPr>
-            <a:lvl7pPr marL="2971800" indent="-228600" eaLnBrk="0" fontAlgn="base" hangingPunct="0">
-              <a:spcBef>
-                <a:spcPct val="20000"/>
-              </a:spcBef>
-              <a:spcAft>
-                <a:spcPct val="0"/>
-              </a:spcAft>
-              <a:buChar char="»"/>
-              <a:defRPr sz="2000">
-                <a:solidFill>
-                  <a:schemeClr val="tx1"/>
-                </a:solidFill>
-                <a:latin typeface="Arial" panose="020B0604020202020204" pitchFamily="34" charset="0"/>
-              </a:defRPr>
-            </a:lvl7pPr>
-            <a:lvl8pPr marL="3429000" indent="-228600" eaLnBrk="0" fontAlgn="base" hangingPunct="0">
-              <a:spcBef>
-                <a:spcPct val="20000"/>
-              </a:spcBef>
-              <a:spcAft>
-                <a:spcPct val="0"/>
-              </a:spcAft>
-              <a:buChar char="»"/>
-              <a:defRPr sz="2000">
-                <a:solidFill>
-                  <a:schemeClr val="tx1"/>
-                </a:solidFill>
-                <a:latin typeface="Arial" panose="020B0604020202020204" pitchFamily="34" charset="0"/>
-              </a:defRPr>
-            </a:lvl8pPr>
-            <a:lvl9pPr marL="3886200" indent="-228600" eaLnBrk="0" fontAlgn="base" hangingPunct="0">
-              <a:spcBef>
-                <a:spcPct val="20000"/>
-              </a:spcBef>
-              <a:spcAft>
-                <a:spcPct val="0"/>
-              </a:spcAft>
-              <a:buChar char="»"/>
-              <a:defRPr sz="2000">
-                <a:solidFill>
-                  <a:schemeClr val="tx1"/>
-                </a:solidFill>
-                <a:latin typeface="Arial" panose="020B0604020202020204" pitchFamily="34" charset="0"/>
-              </a:defRPr>
-            </a:lvl9pPr>
-          </a:lstStyle>
-          <a:p>
-            <a:pPr eaLnBrk="1" hangingPunct="1">
-              <a:spcBef>
-                <a:spcPct val="0"/>
-              </a:spcBef>
-              <a:buFontTx/>
-              <a:buNone/>
-            </a:pPr>
-            <a:r>
-              <a:rPr lang="en-US" altLang="sk-SK" sz="1800" dirty="0"/>
-              <a:t>:w </a:t>
-            </a:r>
-            <a:r>
-              <a:rPr lang="en-US" altLang="sk-SK" sz="1800" dirty="0" err="1"/>
-              <a:t>FileB</a:t>
-            </a:r>
-            <a:r>
-              <a:rPr lang="en-US" altLang="sk-SK" sz="1800" dirty="0"/>
-              <a:t> (if file does not exist)</a:t>
-            </a:r>
-            <a:r>
-              <a:rPr lang="en-US" altLang="sk-SK" sz="1800" baseline="30000" dirty="0"/>
-              <a:t> 1</a:t>
-            </a:r>
-            <a:endParaRPr lang="en-US" altLang="sk-SK" sz="1800" dirty="0"/>
-          </a:p>
-          <a:p>
-            <a:pPr eaLnBrk="1" hangingPunct="1">
-              <a:spcBef>
-                <a:spcPct val="0"/>
-              </a:spcBef>
-              <a:buFontTx/>
-              <a:buNone/>
-            </a:pPr>
-            <a:r>
-              <a:rPr lang="en-US" altLang="sk-SK" sz="1800" dirty="0"/>
-              <a:t>         :w! rewrites </a:t>
-            </a:r>
-            <a:r>
-              <a:rPr lang="en-US" altLang="sk-SK" sz="1800" dirty="0" err="1"/>
-              <a:t>FileA</a:t>
-            </a:r>
-            <a:endParaRPr lang="en-US" altLang="sk-SK" sz="1800" dirty="0"/>
-          </a:p>
-        </p:txBody>
-      </p:sp>
-      <p:sp>
-        <p:nvSpPr>
-          <p:cNvPr id="10248" name="TextBox 11">
-            <a:extLst>
-              <a:ext uri="{FF2B5EF4-FFF2-40B4-BE49-F238E27FC236}">
-                <a16:creationId xmlns:a16="http://schemas.microsoft.com/office/drawing/2014/main" id="{E6E2B57E-5E4F-40CB-9E9D-A3213C15F5B0}"/>
-              </a:ext>
-            </a:extLst>
-          </p:cNvPr>
-          <p:cNvSpPr txBox="1">
-            <a:spLocks noChangeArrowheads="1"/>
-          </p:cNvSpPr>
-          <p:nvPr/>
-        </p:nvSpPr>
-        <p:spPr bwMode="auto">
-          <a:xfrm>
-            <a:off x="4102100" y="5257800"/>
-            <a:ext cx="1441450" cy="923925"/>
-          </a:xfrm>
-          <a:prstGeom prst="rect">
-            <a:avLst/>
-          </a:prstGeom>
-          <a:noFill/>
-          <a:ln>
-            <a:noFill/>
-          </a:ln>
-          <a:extLst>
-            <a:ext uri="{909E8E84-426E-40DD-AFC4-6F175D3DCCD1}">
-              <a14:hiddenFill xmlns:a14="http://schemas.microsoft.com/office/drawing/2010/main">
-                <a:solidFill>
-                  <a:srgbClr val="FFFFFF"/>
-                </a:solidFill>
-              </a14:hiddenFill>
-            </a:ext>
-            <a:ext uri="{91240B29-F687-4F45-9708-019B960494DF}">
-              <a14:hiddenLine xmlns:a14="http://schemas.microsoft.com/office/drawing/2010/main" w="9525">
-                <a:solidFill>
-                  <a:srgbClr val="000000"/>
-                </a:solidFill>
-                <a:miter lim="800000"/>
-                <a:headEnd/>
-                <a:tailEnd/>
-              </a14:hiddenLine>
-            </a:ext>
-          </a:extLst>
-        </p:spPr>
-        <p:txBody>
-          <a:bodyPr wrap="none">
-            <a:spAutoFit/>
-          </a:bodyPr>
-          <a:lstStyle>
-            <a:lvl1pPr>
-              <a:spcBef>
-                <a:spcPct val="20000"/>
-              </a:spcBef>
-              <a:buChar char="•"/>
-              <a:defRPr sz="3200">
-                <a:solidFill>
-                  <a:schemeClr val="tx1"/>
-                </a:solidFill>
-                <a:latin typeface="Arial" panose="020B0604020202020204" pitchFamily="34" charset="0"/>
-              </a:defRPr>
-            </a:lvl1pPr>
-            <a:lvl2pPr marL="742950" indent="-285750">
-              <a:spcBef>
-                <a:spcPct val="20000"/>
-              </a:spcBef>
-              <a:buChar char="–"/>
-              <a:defRPr sz="2800">
-                <a:solidFill>
-                  <a:schemeClr val="tx1"/>
-                </a:solidFill>
-                <a:latin typeface="Arial" panose="020B0604020202020204" pitchFamily="34" charset="0"/>
-              </a:defRPr>
-            </a:lvl2pPr>
-            <a:lvl3pPr marL="1143000" indent="-228600">
-              <a:spcBef>
-                <a:spcPct val="20000"/>
-              </a:spcBef>
-              <a:buChar char="•"/>
-              <a:defRPr sz="2400">
-                <a:solidFill>
-                  <a:schemeClr val="tx1"/>
-                </a:solidFill>
-                <a:latin typeface="Arial" panose="020B0604020202020204" pitchFamily="34" charset="0"/>
-              </a:defRPr>
-            </a:lvl3pPr>
-            <a:lvl4pPr marL="1600200" indent="-228600">
-              <a:spcBef>
-                <a:spcPct val="20000"/>
-              </a:spcBef>
-              <a:buChar char="–"/>
-              <a:defRPr sz="2000">
-                <a:solidFill>
-                  <a:schemeClr val="tx1"/>
-                </a:solidFill>
-                <a:latin typeface="Arial" panose="020B0604020202020204" pitchFamily="34" charset="0"/>
-              </a:defRPr>
-            </a:lvl4pPr>
-            <a:lvl5pPr marL="2057400" indent="-228600">
-              <a:spcBef>
-                <a:spcPct val="20000"/>
-              </a:spcBef>
-              <a:buChar char="»"/>
-              <a:defRPr sz="2000">
-                <a:solidFill>
-                  <a:schemeClr val="tx1"/>
-                </a:solidFill>
-                <a:latin typeface="Arial" panose="020B0604020202020204" pitchFamily="34" charset="0"/>
-              </a:defRPr>
-            </a:lvl5pPr>
-            <a:lvl6pPr marL="2514600" indent="-228600" eaLnBrk="0" fontAlgn="base" hangingPunct="0">
-              <a:spcBef>
-                <a:spcPct val="20000"/>
-              </a:spcBef>
-              <a:spcAft>
-                <a:spcPct val="0"/>
-              </a:spcAft>
-              <a:buChar char="»"/>
-              <a:defRPr sz="2000">
-                <a:solidFill>
-                  <a:schemeClr val="tx1"/>
-                </a:solidFill>
-                <a:latin typeface="Arial" panose="020B0604020202020204" pitchFamily="34" charset="0"/>
-              </a:defRPr>
-            </a:lvl6pPr>
-            <a:lvl7pPr marL="2971800" indent="-228600" eaLnBrk="0" fontAlgn="base" hangingPunct="0">
-              <a:spcBef>
-                <a:spcPct val="20000"/>
-              </a:spcBef>
-              <a:spcAft>
-                <a:spcPct val="0"/>
-              </a:spcAft>
-              <a:buChar char="»"/>
-              <a:defRPr sz="2000">
-                <a:solidFill>
-                  <a:schemeClr val="tx1"/>
-                </a:solidFill>
-                <a:latin typeface="Arial" panose="020B0604020202020204" pitchFamily="34" charset="0"/>
-              </a:defRPr>
-            </a:lvl7pPr>
-            <a:lvl8pPr marL="3429000" indent="-228600" eaLnBrk="0" fontAlgn="base" hangingPunct="0">
-              <a:spcBef>
-                <a:spcPct val="20000"/>
-              </a:spcBef>
-              <a:spcAft>
-                <a:spcPct val="0"/>
-              </a:spcAft>
-              <a:buChar char="»"/>
-              <a:defRPr sz="2000">
-                <a:solidFill>
-                  <a:schemeClr val="tx1"/>
-                </a:solidFill>
-                <a:latin typeface="Arial" panose="020B0604020202020204" pitchFamily="34" charset="0"/>
-              </a:defRPr>
-            </a:lvl8pPr>
-            <a:lvl9pPr marL="3886200" indent="-228600" eaLnBrk="0" fontAlgn="base" hangingPunct="0">
-              <a:spcBef>
-                <a:spcPct val="20000"/>
-              </a:spcBef>
-              <a:spcAft>
-                <a:spcPct val="0"/>
-              </a:spcAft>
-              <a:buChar char="»"/>
-              <a:defRPr sz="2000">
-                <a:solidFill>
-                  <a:schemeClr val="tx1"/>
-                </a:solidFill>
-                <a:latin typeface="Arial" panose="020B0604020202020204" pitchFamily="34" charset="0"/>
-              </a:defRPr>
-            </a:lvl9pPr>
-          </a:lstStyle>
-          <a:p>
-            <a:pPr algn="ctr" eaLnBrk="1" hangingPunct="1">
-              <a:spcBef>
-                <a:spcPct val="0"/>
-              </a:spcBef>
-              <a:buFontTx/>
-              <a:buNone/>
-            </a:pPr>
-            <a:r>
-              <a:rPr lang="en-US" altLang="sk-SK" sz="1800"/>
-              <a:t>       ZZ or :q</a:t>
-            </a:r>
-          </a:p>
-          <a:p>
-            <a:pPr algn="ctr" eaLnBrk="1" hangingPunct="1">
-              <a:spcBef>
-                <a:spcPct val="0"/>
-              </a:spcBef>
-              <a:buFontTx/>
-              <a:buNone/>
-            </a:pPr>
-            <a:endParaRPr lang="en-US" altLang="sk-SK" sz="1800"/>
-          </a:p>
-          <a:p>
-            <a:pPr algn="ctr" eaLnBrk="1" hangingPunct="1">
-              <a:spcBef>
-                <a:spcPct val="0"/>
-              </a:spcBef>
-              <a:buFontTx/>
-              <a:buNone/>
-            </a:pPr>
-            <a:r>
-              <a:rPr lang="en-US" altLang="sk-SK" sz="1800"/>
-              <a:t>No changes</a:t>
-            </a:r>
-          </a:p>
-        </p:txBody>
-      </p:sp>
-      <p:cxnSp>
-        <p:nvCxnSpPr>
-          <p:cNvPr id="13" name="Straight Arrow Connector 12">
-            <a:extLst>
-              <a:ext uri="{FF2B5EF4-FFF2-40B4-BE49-F238E27FC236}">
-                <a16:creationId xmlns:a16="http://schemas.microsoft.com/office/drawing/2014/main" id="{E9BF09EA-A3C8-4727-9022-D41063C08664}"/>
-              </a:ext>
-            </a:extLst>
-          </p:cNvPr>
-          <p:cNvCxnSpPr/>
-          <p:nvPr/>
-        </p:nvCxnSpPr>
-        <p:spPr>
-          <a:xfrm rot="5400000">
-            <a:off x="3581401" y="4876800"/>
-            <a:ext cx="1981200" cy="3175"/>
-          </a:xfrm>
-          <a:prstGeom prst="straightConnector1">
-            <a:avLst/>
-          </a:prstGeom>
-          <a:ln>
-            <a:solidFill>
-              <a:schemeClr val="tx1"/>
-            </a:solidFill>
-            <a:tailEnd type="arrow"/>
-          </a:ln>
-        </p:spPr>
-        <p:style>
-          <a:lnRef idx="1">
-            <a:schemeClr val="accent1"/>
-          </a:lnRef>
-          <a:fillRef idx="0">
-            <a:schemeClr val="accent1"/>
-          </a:fillRef>
-          <a:effectRef idx="0">
-            <a:schemeClr val="accent1"/>
-          </a:effectRef>
-          <a:fontRef idx="minor">
-            <a:schemeClr val="tx1"/>
-          </a:fontRef>
-        </p:style>
-      </p:cxnSp>
-      <p:sp>
-        <p:nvSpPr>
-          <p:cNvPr id="10250" name="TextBox 14">
-            <a:extLst>
-              <a:ext uri="{FF2B5EF4-FFF2-40B4-BE49-F238E27FC236}">
-                <a16:creationId xmlns:a16="http://schemas.microsoft.com/office/drawing/2014/main" id="{20FC31C8-FD31-4973-A6E0-0663F9FF4DE5}"/>
-              </a:ext>
-            </a:extLst>
-          </p:cNvPr>
-          <p:cNvSpPr txBox="1">
-            <a:spLocks noChangeArrowheads="1"/>
-          </p:cNvSpPr>
-          <p:nvPr/>
-        </p:nvSpPr>
-        <p:spPr bwMode="auto">
-          <a:xfrm>
-            <a:off x="1524000" y="2438400"/>
-            <a:ext cx="1312863" cy="369888"/>
-          </a:xfrm>
-          <a:prstGeom prst="rect">
-            <a:avLst/>
-          </a:prstGeom>
-          <a:noFill/>
-          <a:ln>
-            <a:noFill/>
-          </a:ln>
-          <a:extLst>
-            <a:ext uri="{909E8E84-426E-40DD-AFC4-6F175D3DCCD1}">
-              <a14:hiddenFill xmlns:a14="http://schemas.microsoft.com/office/drawing/2010/main">
-                <a:solidFill>
-                  <a:srgbClr val="FFFFFF"/>
-                </a:solidFill>
-              </a14:hiddenFill>
-            </a:ext>
-            <a:ext uri="{91240B29-F687-4F45-9708-019B960494DF}">
-              <a14:hiddenLine xmlns:a14="http://schemas.microsoft.com/office/drawing/2010/main" w="9525">
-                <a:solidFill>
-                  <a:srgbClr val="000000"/>
-                </a:solidFill>
-                <a:miter lim="800000"/>
-                <a:headEnd/>
-                <a:tailEnd/>
-              </a14:hiddenLine>
-            </a:ext>
-          </a:extLst>
-        </p:spPr>
-        <p:txBody>
-          <a:bodyPr wrap="none">
-            <a:spAutoFit/>
-          </a:bodyPr>
-          <a:lstStyle>
-            <a:lvl1pPr>
-              <a:spcBef>
-                <a:spcPct val="20000"/>
-              </a:spcBef>
-              <a:buChar char="•"/>
-              <a:defRPr sz="3200">
-                <a:solidFill>
-                  <a:schemeClr val="tx1"/>
-                </a:solidFill>
-                <a:latin typeface="Arial" panose="020B0604020202020204" pitchFamily="34" charset="0"/>
-              </a:defRPr>
-            </a:lvl1pPr>
-            <a:lvl2pPr marL="742950" indent="-285750">
-              <a:spcBef>
-                <a:spcPct val="20000"/>
-              </a:spcBef>
-              <a:buChar char="–"/>
-              <a:defRPr sz="2800">
-                <a:solidFill>
-                  <a:schemeClr val="tx1"/>
-                </a:solidFill>
-                <a:latin typeface="Arial" panose="020B0604020202020204" pitchFamily="34" charset="0"/>
-              </a:defRPr>
-            </a:lvl2pPr>
-            <a:lvl3pPr marL="1143000" indent="-228600">
-              <a:spcBef>
-                <a:spcPct val="20000"/>
-              </a:spcBef>
-              <a:buChar char="•"/>
-              <a:defRPr sz="2400">
-                <a:solidFill>
-                  <a:schemeClr val="tx1"/>
-                </a:solidFill>
-                <a:latin typeface="Arial" panose="020B0604020202020204" pitchFamily="34" charset="0"/>
-              </a:defRPr>
-            </a:lvl3pPr>
-            <a:lvl4pPr marL="1600200" indent="-228600">
-              <a:spcBef>
-                <a:spcPct val="20000"/>
-              </a:spcBef>
-              <a:buChar char="–"/>
-              <a:defRPr sz="2000">
-                <a:solidFill>
-                  <a:schemeClr val="tx1"/>
-                </a:solidFill>
-                <a:latin typeface="Arial" panose="020B0604020202020204" pitchFamily="34" charset="0"/>
-              </a:defRPr>
-            </a:lvl4pPr>
-            <a:lvl5pPr marL="2057400" indent="-228600">
-              <a:spcBef>
-                <a:spcPct val="20000"/>
-              </a:spcBef>
-              <a:buChar char="»"/>
-              <a:defRPr sz="2000">
-                <a:solidFill>
-                  <a:schemeClr val="tx1"/>
-                </a:solidFill>
-                <a:latin typeface="Arial" panose="020B0604020202020204" pitchFamily="34" charset="0"/>
-              </a:defRPr>
-            </a:lvl5pPr>
-            <a:lvl6pPr marL="2514600" indent="-228600" eaLnBrk="0" fontAlgn="base" hangingPunct="0">
-              <a:spcBef>
-                <a:spcPct val="20000"/>
-              </a:spcBef>
-              <a:spcAft>
-                <a:spcPct val="0"/>
-              </a:spcAft>
-              <a:buChar char="»"/>
-              <a:defRPr sz="2000">
-                <a:solidFill>
-                  <a:schemeClr val="tx1"/>
-                </a:solidFill>
-                <a:latin typeface="Arial" panose="020B0604020202020204" pitchFamily="34" charset="0"/>
-              </a:defRPr>
-            </a:lvl6pPr>
-            <a:lvl7pPr marL="2971800" indent="-228600" eaLnBrk="0" fontAlgn="base" hangingPunct="0">
-              <a:spcBef>
-                <a:spcPct val="20000"/>
-              </a:spcBef>
-              <a:spcAft>
-                <a:spcPct val="0"/>
-              </a:spcAft>
-              <a:buChar char="»"/>
-              <a:defRPr sz="2000">
-                <a:solidFill>
-                  <a:schemeClr val="tx1"/>
-                </a:solidFill>
-                <a:latin typeface="Arial" panose="020B0604020202020204" pitchFamily="34" charset="0"/>
-              </a:defRPr>
-            </a:lvl7pPr>
-            <a:lvl8pPr marL="3429000" indent="-228600" eaLnBrk="0" fontAlgn="base" hangingPunct="0">
-              <a:spcBef>
-                <a:spcPct val="20000"/>
-              </a:spcBef>
-              <a:spcAft>
-                <a:spcPct val="0"/>
-              </a:spcAft>
-              <a:buChar char="»"/>
-              <a:defRPr sz="2000">
-                <a:solidFill>
-                  <a:schemeClr val="tx1"/>
-                </a:solidFill>
-                <a:latin typeface="Arial" panose="020B0604020202020204" pitchFamily="34" charset="0"/>
-              </a:defRPr>
-            </a:lvl8pPr>
-            <a:lvl9pPr marL="3886200" indent="-228600" eaLnBrk="0" fontAlgn="base" hangingPunct="0">
-              <a:spcBef>
-                <a:spcPct val="20000"/>
-              </a:spcBef>
-              <a:spcAft>
-                <a:spcPct val="0"/>
-              </a:spcAft>
-              <a:buChar char="»"/>
-              <a:defRPr sz="2000">
-                <a:solidFill>
-                  <a:schemeClr val="tx1"/>
-                </a:solidFill>
-                <a:latin typeface="Arial" panose="020B0604020202020204" pitchFamily="34" charset="0"/>
-              </a:defRPr>
-            </a:lvl9pPr>
-          </a:lstStyle>
-          <a:p>
-            <a:pPr eaLnBrk="1" hangingPunct="1">
-              <a:spcBef>
-                <a:spcPct val="0"/>
-              </a:spcBef>
-              <a:buFontTx/>
-              <a:buNone/>
-            </a:pPr>
-            <a:r>
-              <a:rPr lang="en-US" altLang="sk-SK" sz="1800"/>
-              <a:t>vi  -R FileA</a:t>
-            </a:r>
-          </a:p>
-        </p:txBody>
-      </p:sp>
-      <p:cxnSp>
-        <p:nvCxnSpPr>
-          <p:cNvPr id="16" name="Straight Arrow Connector 15">
-            <a:extLst>
-              <a:ext uri="{FF2B5EF4-FFF2-40B4-BE49-F238E27FC236}">
-                <a16:creationId xmlns:a16="http://schemas.microsoft.com/office/drawing/2014/main" id="{DD7EC2CA-0682-41B3-8F46-9FA625C37C7F}"/>
-              </a:ext>
-            </a:extLst>
-          </p:cNvPr>
-          <p:cNvCxnSpPr>
-            <a:stCxn id="10250" idx="3"/>
-          </p:cNvCxnSpPr>
-          <p:nvPr/>
-        </p:nvCxnSpPr>
-        <p:spPr>
-          <a:xfrm>
-            <a:off x="2836863" y="2622550"/>
-            <a:ext cx="1201737" cy="654050"/>
-          </a:xfrm>
-          <a:prstGeom prst="straightConnector1">
-            <a:avLst/>
-          </a:prstGeom>
-          <a:ln>
-            <a:solidFill>
-              <a:schemeClr val="tx1"/>
-            </a:solidFill>
-            <a:tailEnd type="arrow"/>
-          </a:ln>
-        </p:spPr>
-        <p:style>
-          <a:lnRef idx="1">
-            <a:schemeClr val="accent1"/>
-          </a:lnRef>
-          <a:fillRef idx="0">
-            <a:schemeClr val="accent1"/>
-          </a:fillRef>
-          <a:effectRef idx="0">
-            <a:schemeClr val="accent1"/>
-          </a:effectRef>
-          <a:fontRef idx="minor">
-            <a:schemeClr val="tx1"/>
-          </a:fontRef>
-        </p:style>
-      </p:cxnSp>
-      <p:cxnSp>
-        <p:nvCxnSpPr>
-          <p:cNvPr id="19" name="Straight Arrow Connector 18">
-            <a:extLst>
-              <a:ext uri="{FF2B5EF4-FFF2-40B4-BE49-F238E27FC236}">
-                <a16:creationId xmlns:a16="http://schemas.microsoft.com/office/drawing/2014/main" id="{92B460D3-BBCC-4898-840B-F4DA224586C5}"/>
-              </a:ext>
-            </a:extLst>
-          </p:cNvPr>
-          <p:cNvCxnSpPr>
-            <a:stCxn id="3" idx="1"/>
-          </p:cNvCxnSpPr>
-          <p:nvPr/>
-        </p:nvCxnSpPr>
-        <p:spPr>
-          <a:xfrm rot="5400000" flipH="1" flipV="1">
-            <a:off x="1028700" y="3162300"/>
-            <a:ext cx="1600200" cy="762000"/>
-          </a:xfrm>
-          <a:prstGeom prst="straightConnector1">
-            <a:avLst/>
-          </a:prstGeom>
-          <a:ln>
-            <a:solidFill>
-              <a:schemeClr val="tx1"/>
-            </a:solidFill>
-            <a:tailEnd type="arrow"/>
-          </a:ln>
-        </p:spPr>
-        <p:style>
-          <a:lnRef idx="1">
-            <a:schemeClr val="accent1"/>
-          </a:lnRef>
-          <a:fillRef idx="0">
-            <a:schemeClr val="accent1"/>
-          </a:fillRef>
-          <a:effectRef idx="0">
-            <a:schemeClr val="accent1"/>
-          </a:effectRef>
-          <a:fontRef idx="minor">
-            <a:schemeClr val="tx1"/>
-          </a:fontRef>
-        </p:style>
-      </p:cxnSp>
-      <p:sp>
-        <p:nvSpPr>
-          <p:cNvPr id="10253" name="TextBox 16">
-            <a:extLst>
-              <a:ext uri="{FF2B5EF4-FFF2-40B4-BE49-F238E27FC236}">
-                <a16:creationId xmlns:a16="http://schemas.microsoft.com/office/drawing/2014/main" id="{0A44595D-BE4A-4FE2-8901-E85362C7BD78}"/>
-              </a:ext>
-            </a:extLst>
-          </p:cNvPr>
-          <p:cNvSpPr txBox="1">
-            <a:spLocks noChangeArrowheads="1"/>
-          </p:cNvSpPr>
-          <p:nvPr/>
-        </p:nvSpPr>
-        <p:spPr bwMode="auto">
-          <a:xfrm>
-            <a:off x="2362200" y="1447800"/>
-            <a:ext cx="1774825" cy="369888"/>
-          </a:xfrm>
-          <a:prstGeom prst="rect">
-            <a:avLst/>
-          </a:prstGeom>
-          <a:noFill/>
-          <a:ln>
-            <a:noFill/>
-          </a:ln>
-          <a:extLst>
-            <a:ext uri="{909E8E84-426E-40DD-AFC4-6F175D3DCCD1}">
-              <a14:hiddenFill xmlns:a14="http://schemas.microsoft.com/office/drawing/2010/main">
-                <a:solidFill>
-                  <a:srgbClr val="FFFFFF"/>
-                </a:solidFill>
-              </a14:hiddenFill>
-            </a:ext>
-            <a:ext uri="{91240B29-F687-4F45-9708-019B960494DF}">
-              <a14:hiddenLine xmlns:a14="http://schemas.microsoft.com/office/drawing/2010/main" w="9525">
-                <a:solidFill>
-                  <a:srgbClr val="000000"/>
-                </a:solidFill>
-                <a:miter lim="800000"/>
-                <a:headEnd/>
-                <a:tailEnd/>
-              </a14:hiddenLine>
-            </a:ext>
-          </a:extLst>
-        </p:spPr>
-        <p:txBody>
-          <a:bodyPr wrap="none">
-            <a:spAutoFit/>
-          </a:bodyPr>
-          <a:lstStyle>
-            <a:lvl1pPr>
-              <a:spcBef>
-                <a:spcPct val="20000"/>
-              </a:spcBef>
-              <a:buChar char="•"/>
-              <a:defRPr sz="3200">
-                <a:solidFill>
-                  <a:schemeClr val="tx1"/>
-                </a:solidFill>
-                <a:latin typeface="Arial" panose="020B0604020202020204" pitchFamily="34" charset="0"/>
-              </a:defRPr>
-            </a:lvl1pPr>
-            <a:lvl2pPr marL="742950" indent="-285750">
-              <a:spcBef>
-                <a:spcPct val="20000"/>
-              </a:spcBef>
-              <a:buChar char="–"/>
-              <a:defRPr sz="2800">
-                <a:solidFill>
-                  <a:schemeClr val="tx1"/>
-                </a:solidFill>
-                <a:latin typeface="Arial" panose="020B0604020202020204" pitchFamily="34" charset="0"/>
-              </a:defRPr>
-            </a:lvl2pPr>
-            <a:lvl3pPr marL="1143000" indent="-228600">
-              <a:spcBef>
-                <a:spcPct val="20000"/>
-              </a:spcBef>
-              <a:buChar char="•"/>
-              <a:defRPr sz="2400">
-                <a:solidFill>
-                  <a:schemeClr val="tx1"/>
-                </a:solidFill>
-                <a:latin typeface="Arial" panose="020B0604020202020204" pitchFamily="34" charset="0"/>
-              </a:defRPr>
-            </a:lvl3pPr>
-            <a:lvl4pPr marL="1600200" indent="-228600">
-              <a:spcBef>
-                <a:spcPct val="20000"/>
-              </a:spcBef>
-              <a:buChar char="–"/>
-              <a:defRPr sz="2000">
-                <a:solidFill>
-                  <a:schemeClr val="tx1"/>
-                </a:solidFill>
-                <a:latin typeface="Arial" panose="020B0604020202020204" pitchFamily="34" charset="0"/>
-              </a:defRPr>
-            </a:lvl4pPr>
-            <a:lvl5pPr marL="2057400" indent="-228600">
-              <a:spcBef>
-                <a:spcPct val="20000"/>
-              </a:spcBef>
-              <a:buChar char="»"/>
-              <a:defRPr sz="2000">
-                <a:solidFill>
-                  <a:schemeClr val="tx1"/>
-                </a:solidFill>
-                <a:latin typeface="Arial" panose="020B0604020202020204" pitchFamily="34" charset="0"/>
-              </a:defRPr>
-            </a:lvl5pPr>
-            <a:lvl6pPr marL="2514600" indent="-228600" eaLnBrk="0" fontAlgn="base" hangingPunct="0">
-              <a:spcBef>
-                <a:spcPct val="20000"/>
-              </a:spcBef>
-              <a:spcAft>
-                <a:spcPct val="0"/>
-              </a:spcAft>
-              <a:buChar char="»"/>
-              <a:defRPr sz="2000">
-                <a:solidFill>
-                  <a:schemeClr val="tx1"/>
-                </a:solidFill>
-                <a:latin typeface="Arial" panose="020B0604020202020204" pitchFamily="34" charset="0"/>
-              </a:defRPr>
-            </a:lvl6pPr>
-            <a:lvl7pPr marL="2971800" indent="-228600" eaLnBrk="0" fontAlgn="base" hangingPunct="0">
-              <a:spcBef>
-                <a:spcPct val="20000"/>
-              </a:spcBef>
-              <a:spcAft>
-                <a:spcPct val="0"/>
-              </a:spcAft>
-              <a:buChar char="»"/>
-              <a:defRPr sz="2000">
-                <a:solidFill>
-                  <a:schemeClr val="tx1"/>
-                </a:solidFill>
-                <a:latin typeface="Arial" panose="020B0604020202020204" pitchFamily="34" charset="0"/>
-              </a:defRPr>
-            </a:lvl7pPr>
-            <a:lvl8pPr marL="3429000" indent="-228600" eaLnBrk="0" fontAlgn="base" hangingPunct="0">
-              <a:spcBef>
-                <a:spcPct val="20000"/>
-              </a:spcBef>
-              <a:spcAft>
-                <a:spcPct val="0"/>
-              </a:spcAft>
-              <a:buChar char="»"/>
-              <a:defRPr sz="2000">
-                <a:solidFill>
-                  <a:schemeClr val="tx1"/>
-                </a:solidFill>
-                <a:latin typeface="Arial" panose="020B0604020202020204" pitchFamily="34" charset="0"/>
-              </a:defRPr>
-            </a:lvl8pPr>
-            <a:lvl9pPr marL="3886200" indent="-228600" eaLnBrk="0" fontAlgn="base" hangingPunct="0">
-              <a:spcBef>
-                <a:spcPct val="20000"/>
-              </a:spcBef>
-              <a:spcAft>
-                <a:spcPct val="0"/>
-              </a:spcAft>
-              <a:buChar char="»"/>
-              <a:defRPr sz="2000">
-                <a:solidFill>
-                  <a:schemeClr val="tx1"/>
-                </a:solidFill>
-                <a:latin typeface="Arial" panose="020B0604020202020204" pitchFamily="34" charset="0"/>
-              </a:defRPr>
-            </a:lvl9pPr>
-          </a:lstStyle>
-          <a:p>
-            <a:pPr eaLnBrk="1" hangingPunct="1">
-              <a:spcBef>
-                <a:spcPct val="0"/>
-              </a:spcBef>
-              <a:buFontTx/>
-              <a:buNone/>
-            </a:pPr>
-            <a:r>
-              <a:rPr lang="en-US" altLang="sk-SK" sz="1800"/>
-              <a:t>read only mode</a:t>
-            </a:r>
-          </a:p>
-        </p:txBody>
-      </p:sp>
-      <p:cxnSp>
-        <p:nvCxnSpPr>
-          <p:cNvPr id="20" name="Straight Arrow Connector 19">
-            <a:extLst>
-              <a:ext uri="{FF2B5EF4-FFF2-40B4-BE49-F238E27FC236}">
-                <a16:creationId xmlns:a16="http://schemas.microsoft.com/office/drawing/2014/main" id="{51A99F3C-C060-4A68-A6F7-429AC9E743BC}"/>
-              </a:ext>
-            </a:extLst>
-          </p:cNvPr>
-          <p:cNvCxnSpPr>
-            <a:endCxn id="10250" idx="0"/>
-          </p:cNvCxnSpPr>
-          <p:nvPr/>
-        </p:nvCxnSpPr>
-        <p:spPr>
-          <a:xfrm rot="10800000" flipV="1">
-            <a:off x="2181225" y="1752600"/>
-            <a:ext cx="790575" cy="685800"/>
-          </a:xfrm>
-          <a:prstGeom prst="straightConnector1">
-            <a:avLst/>
-          </a:prstGeom>
-          <a:ln>
-            <a:solidFill>
-              <a:schemeClr val="tx1"/>
-            </a:solidFill>
-            <a:tailEnd type="arrow"/>
-          </a:ln>
-        </p:spPr>
-        <p:style>
-          <a:lnRef idx="1">
-            <a:schemeClr val="accent1"/>
-          </a:lnRef>
-          <a:fillRef idx="0">
-            <a:schemeClr val="accent1"/>
-          </a:fillRef>
-          <a:effectRef idx="0">
-            <a:schemeClr val="accent1"/>
-          </a:effectRef>
-          <a:fontRef idx="minor">
-            <a:schemeClr val="tx1"/>
-          </a:fontRef>
-        </p:style>
-      </p:cxnSp>
-      <p:sp>
-        <p:nvSpPr>
-          <p:cNvPr id="10255" name="TextBox 21">
-            <a:extLst>
-              <a:ext uri="{FF2B5EF4-FFF2-40B4-BE49-F238E27FC236}">
-                <a16:creationId xmlns:a16="http://schemas.microsoft.com/office/drawing/2014/main" id="{4F1B2D44-D0DF-4F8A-94D8-EF8485BA686C}"/>
-              </a:ext>
-            </a:extLst>
-          </p:cNvPr>
-          <p:cNvSpPr txBox="1">
-            <a:spLocks noChangeArrowheads="1"/>
-          </p:cNvSpPr>
-          <p:nvPr/>
-        </p:nvSpPr>
-        <p:spPr bwMode="auto">
-          <a:xfrm>
-            <a:off x="567410" y="6202362"/>
-            <a:ext cx="8097088" cy="646331"/>
-          </a:xfrm>
-          <a:prstGeom prst="rect">
-            <a:avLst/>
-          </a:prstGeom>
-          <a:noFill/>
-          <a:ln>
-            <a:noFill/>
-          </a:ln>
-          <a:extLst>
-            <a:ext uri="{909E8E84-426E-40DD-AFC4-6F175D3DCCD1}">
-              <a14:hiddenFill xmlns:a14="http://schemas.microsoft.com/office/drawing/2010/main">
-                <a:solidFill>
-                  <a:srgbClr val="FFFFFF"/>
-                </a:solidFill>
-              </a14:hiddenFill>
-            </a:ext>
-            <a:ext uri="{91240B29-F687-4F45-9708-019B960494DF}">
-              <a14:hiddenLine xmlns:a14="http://schemas.microsoft.com/office/drawing/2010/main" w="9525">
-                <a:solidFill>
-                  <a:srgbClr val="000000"/>
-                </a:solidFill>
-                <a:miter lim="800000"/>
-                <a:headEnd/>
-                <a:tailEnd/>
-              </a14:hiddenLine>
-            </a:ext>
-          </a:extLst>
-        </p:spPr>
-        <p:txBody>
-          <a:bodyPr wrap="none">
-            <a:spAutoFit/>
-          </a:bodyPr>
-          <a:lstStyle>
-            <a:lvl1pPr>
-              <a:spcBef>
-                <a:spcPct val="20000"/>
-              </a:spcBef>
-              <a:buChar char="•"/>
-              <a:defRPr sz="3200">
-                <a:solidFill>
-                  <a:schemeClr val="tx1"/>
-                </a:solidFill>
-                <a:latin typeface="Arial" panose="020B0604020202020204" pitchFamily="34" charset="0"/>
-              </a:defRPr>
-            </a:lvl1pPr>
-            <a:lvl2pPr marL="742950" indent="-285750">
-              <a:spcBef>
-                <a:spcPct val="20000"/>
-              </a:spcBef>
-              <a:buChar char="–"/>
-              <a:defRPr sz="2800">
-                <a:solidFill>
-                  <a:schemeClr val="tx1"/>
-                </a:solidFill>
-                <a:latin typeface="Arial" panose="020B0604020202020204" pitchFamily="34" charset="0"/>
-              </a:defRPr>
-            </a:lvl2pPr>
-            <a:lvl3pPr marL="1143000" indent="-228600">
-              <a:spcBef>
-                <a:spcPct val="20000"/>
-              </a:spcBef>
-              <a:buChar char="•"/>
-              <a:defRPr sz="2400">
-                <a:solidFill>
-                  <a:schemeClr val="tx1"/>
-                </a:solidFill>
-                <a:latin typeface="Arial" panose="020B0604020202020204" pitchFamily="34" charset="0"/>
-              </a:defRPr>
-            </a:lvl3pPr>
-            <a:lvl4pPr marL="1600200" indent="-228600">
-              <a:spcBef>
-                <a:spcPct val="20000"/>
-              </a:spcBef>
-              <a:buChar char="–"/>
-              <a:defRPr sz="2000">
-                <a:solidFill>
-                  <a:schemeClr val="tx1"/>
-                </a:solidFill>
-                <a:latin typeface="Arial" panose="020B0604020202020204" pitchFamily="34" charset="0"/>
-              </a:defRPr>
-            </a:lvl4pPr>
-            <a:lvl5pPr marL="2057400" indent="-228600">
-              <a:spcBef>
-                <a:spcPct val="20000"/>
-              </a:spcBef>
-              <a:buChar char="»"/>
-              <a:defRPr sz="2000">
-                <a:solidFill>
-                  <a:schemeClr val="tx1"/>
-                </a:solidFill>
-                <a:latin typeface="Arial" panose="020B0604020202020204" pitchFamily="34" charset="0"/>
-              </a:defRPr>
-            </a:lvl5pPr>
-            <a:lvl6pPr marL="2514600" indent="-228600" eaLnBrk="0" fontAlgn="base" hangingPunct="0">
-              <a:spcBef>
-                <a:spcPct val="20000"/>
-              </a:spcBef>
-              <a:spcAft>
-                <a:spcPct val="0"/>
-              </a:spcAft>
-              <a:buChar char="»"/>
-              <a:defRPr sz="2000">
-                <a:solidFill>
-                  <a:schemeClr val="tx1"/>
-                </a:solidFill>
-                <a:latin typeface="Arial" panose="020B0604020202020204" pitchFamily="34" charset="0"/>
-              </a:defRPr>
-            </a:lvl6pPr>
-            <a:lvl7pPr marL="2971800" indent="-228600" eaLnBrk="0" fontAlgn="base" hangingPunct="0">
-              <a:spcBef>
-                <a:spcPct val="20000"/>
-              </a:spcBef>
-              <a:spcAft>
-                <a:spcPct val="0"/>
-              </a:spcAft>
-              <a:buChar char="»"/>
-              <a:defRPr sz="2000">
-                <a:solidFill>
-                  <a:schemeClr val="tx1"/>
-                </a:solidFill>
-                <a:latin typeface="Arial" panose="020B0604020202020204" pitchFamily="34" charset="0"/>
-              </a:defRPr>
-            </a:lvl7pPr>
-            <a:lvl8pPr marL="3429000" indent="-228600" eaLnBrk="0" fontAlgn="base" hangingPunct="0">
-              <a:spcBef>
-                <a:spcPct val="20000"/>
-              </a:spcBef>
-              <a:spcAft>
-                <a:spcPct val="0"/>
-              </a:spcAft>
-              <a:buChar char="»"/>
-              <a:defRPr sz="2000">
-                <a:solidFill>
-                  <a:schemeClr val="tx1"/>
-                </a:solidFill>
-                <a:latin typeface="Arial" panose="020B0604020202020204" pitchFamily="34" charset="0"/>
-              </a:defRPr>
-            </a:lvl8pPr>
-            <a:lvl9pPr marL="3886200" indent="-228600" eaLnBrk="0" fontAlgn="base" hangingPunct="0">
-              <a:spcBef>
-                <a:spcPct val="20000"/>
-              </a:spcBef>
-              <a:spcAft>
-                <a:spcPct val="0"/>
-              </a:spcAft>
-              <a:buChar char="»"/>
-              <a:defRPr sz="2000">
-                <a:solidFill>
-                  <a:schemeClr val="tx1"/>
-                </a:solidFill>
-                <a:latin typeface="Arial" panose="020B0604020202020204" pitchFamily="34" charset="0"/>
-              </a:defRPr>
-            </a:lvl9pPr>
-          </a:lstStyle>
-          <a:p>
-            <a:pPr marL="342900" indent="-342900" eaLnBrk="1" hangingPunct="1">
-              <a:spcBef>
-                <a:spcPct val="0"/>
-              </a:spcBef>
-              <a:buFontTx/>
-              <a:buAutoNum type="arabicPeriod"/>
-            </a:pPr>
-            <a:r>
-              <a:rPr lang="en-US" altLang="sk-SK" sz="1800" dirty="0"/>
-              <a:t>Note- :w  simply writes copy to the file, the file being edited is still the same</a:t>
-            </a:r>
-          </a:p>
-          <a:p>
-            <a:pPr marL="342900" indent="-342900" eaLnBrk="1" hangingPunct="1">
-              <a:spcBef>
-                <a:spcPct val="0"/>
-              </a:spcBef>
-              <a:buFontTx/>
-              <a:buAutoNum type="arabicPeriod"/>
-            </a:pPr>
-            <a:endParaRPr lang="en-US" altLang="sk-SK" sz="1800" dirty="0"/>
-          </a:p>
-        </p:txBody>
-      </p:sp>
-    </p:spTree>
-  </p:cSld>
-  <p:clrMapOvr>
-    <a:masterClrMapping/>
-  </p:clrMapOvr>
-</p:sld>
-</file>
-
-<file path=ppt/slides/slide6.xml><?xml version="1.0" encoding="utf-8"?>
-<p:sld xmlns:a="http://schemas.openxmlformats.org/drawingml/2006/main" xmlns:r="http://schemas.openxmlformats.org/officeDocument/2006/relationships" xmlns:p="http://schemas.openxmlformats.org/presentationml/2006/main">
-  <p:cSld>
-    <p:spTree>
-      <p:nvGrpSpPr>
-        <p:cNvPr id="1" name=""/>
-        <p:cNvGrpSpPr/>
-        <p:nvPr/>
-      </p:nvGrpSpPr>
-      <p:grpSpPr>
-        <a:xfrm>
-          <a:off x="0" y="0"/>
-          <a:ext cx="0" cy="0"/>
-          <a:chOff x="0" y="0"/>
-          <a:chExt cx="0" cy="0"/>
-        </a:xfrm>
-      </p:grpSpPr>
-      <p:sp>
-        <p:nvSpPr>
           <p:cNvPr id="11266" name="Title 1">
             <a:extLst>
               <a:ext uri="{FF2B5EF4-FFF2-40B4-BE49-F238E27FC236}">
@@ -21335,10 +20527,10 @@
             <a:pPr eaLnBrk="1" hangingPunct="1"/>
             <a:r>
               <a:rPr lang="en-US" altLang="sk-SK"/>
-              <a:t>vi File Interaction (3)</a:t>
+              <a:t>vi File Interaction</a:t>
             </a:r>
             <a:br>
-              <a:rPr lang="en-US" altLang="sk-SK"/>
+              <a:rPr lang="en-US" altLang="sk-SK" dirty="0"/>
             </a:br>
             <a:r>
               <a:rPr lang="en-US" altLang="sk-SK"/>
@@ -23115,7 +22307,7 @@
 </p:sld>
 </file>
 
-<file path=ppt/slides/slide7.xml><?xml version="1.0" encoding="utf-8"?>
+<file path=ppt/slides/slide6.xml><?xml version="1.0" encoding="utf-8"?>
 <p:sld xmlns:a="http://schemas.openxmlformats.org/drawingml/2006/main" xmlns:r="http://schemas.openxmlformats.org/officeDocument/2006/relationships" xmlns:p="http://schemas.openxmlformats.org/presentationml/2006/main">
   <p:cSld>
     <p:spTree>
@@ -24195,279 +23387,6 @@
           </a:graphicData>
         </a:graphic>
       </p:graphicFrame>
-      <p:sp>
-        <p:nvSpPr>
-          <p:cNvPr id="2" name="BlokTextu 1">
-            <a:extLst>
-              <a:ext uri="{FF2B5EF4-FFF2-40B4-BE49-F238E27FC236}">
-                <a16:creationId xmlns:a16="http://schemas.microsoft.com/office/drawing/2014/main" id="{73F8E0F3-D8CE-9B98-82F8-D25AF7DB4599}"/>
-              </a:ext>
-            </a:extLst>
-          </p:cNvPr>
-          <p:cNvSpPr txBox="1"/>
-          <p:nvPr/>
-        </p:nvSpPr>
-        <p:spPr>
-          <a:xfrm>
-            <a:off x="609600" y="4648200"/>
-            <a:ext cx="8229600" cy="1477328"/>
-          </a:xfrm>
-          <a:prstGeom prst="rect">
-            <a:avLst/>
-          </a:prstGeom>
-          <a:noFill/>
-        </p:spPr>
-        <p:txBody>
-          <a:bodyPr wrap="square" rtlCol="0">
-            <a:spAutoFit/>
-          </a:bodyPr>
-          <a:lstStyle/>
-          <a:p>
-            <a:r>
-              <a:rPr lang="sk-SK" dirty="0"/>
-              <a:t> </a:t>
-            </a:r>
-            <a:r>
-              <a:rPr lang="sk-SK" b="1" dirty="0" err="1"/>
-              <a:t>vim</a:t>
-            </a:r>
-            <a:r>
-              <a:rPr lang="sk-SK" dirty="0"/>
-              <a:t> </a:t>
-            </a:r>
-            <a:r>
-              <a:rPr lang="sk-SK" dirty="0" err="1"/>
-              <a:t>is</a:t>
-            </a:r>
-            <a:r>
-              <a:rPr lang="sk-SK" dirty="0"/>
-              <a:t> a text editor </a:t>
-            </a:r>
-            <a:r>
-              <a:rPr lang="sk-SK" dirty="0" err="1"/>
-              <a:t>that</a:t>
-            </a:r>
-            <a:r>
-              <a:rPr lang="sk-SK" dirty="0"/>
-              <a:t> </a:t>
-            </a:r>
-            <a:r>
-              <a:rPr lang="sk-SK" dirty="0" err="1"/>
-              <a:t>is</a:t>
-            </a:r>
-            <a:r>
-              <a:rPr lang="sk-SK" dirty="0"/>
-              <a:t> </a:t>
-            </a:r>
-            <a:r>
-              <a:rPr lang="sk-SK" dirty="0" err="1"/>
-              <a:t>upwards</a:t>
-            </a:r>
-            <a:r>
-              <a:rPr lang="sk-SK" dirty="0"/>
-              <a:t> </a:t>
-            </a:r>
-            <a:r>
-              <a:rPr lang="sk-SK" dirty="0" err="1"/>
-              <a:t>compatible</a:t>
-            </a:r>
-            <a:r>
-              <a:rPr lang="sk-SK" dirty="0"/>
-              <a:t> to </a:t>
-            </a:r>
-            <a:r>
-              <a:rPr lang="sk-SK" dirty="0" err="1"/>
-              <a:t>Vi.</a:t>
-            </a:r>
-            <a:r>
-              <a:rPr lang="sk-SK" dirty="0"/>
-              <a:t> </a:t>
-            </a:r>
-          </a:p>
-          <a:p>
-            <a:r>
-              <a:rPr lang="sk-SK" dirty="0"/>
-              <a:t>       </a:t>
-            </a:r>
-            <a:r>
-              <a:rPr lang="sk-SK" dirty="0" err="1"/>
-              <a:t>There</a:t>
-            </a:r>
-            <a:r>
-              <a:rPr lang="sk-SK" dirty="0"/>
-              <a:t> are a </a:t>
-            </a:r>
-            <a:r>
-              <a:rPr lang="sk-SK" dirty="0" err="1"/>
-              <a:t>lot</a:t>
-            </a:r>
-            <a:r>
-              <a:rPr lang="sk-SK" dirty="0"/>
-              <a:t> of </a:t>
-            </a:r>
-            <a:r>
-              <a:rPr lang="sk-SK" dirty="0" err="1"/>
-              <a:t>enhancements</a:t>
-            </a:r>
-            <a:r>
-              <a:rPr lang="sk-SK" dirty="0"/>
-              <a:t> </a:t>
-            </a:r>
-            <a:r>
-              <a:rPr lang="sk-SK" dirty="0" err="1"/>
-              <a:t>above</a:t>
-            </a:r>
-            <a:r>
-              <a:rPr lang="sk-SK" dirty="0"/>
-              <a:t> Vi: </a:t>
-            </a:r>
-            <a:r>
-              <a:rPr lang="sk-SK" dirty="0" err="1"/>
-              <a:t>multi</a:t>
-            </a:r>
-            <a:r>
-              <a:rPr lang="sk-SK" dirty="0"/>
-              <a:t> level </a:t>
-            </a:r>
-            <a:r>
-              <a:rPr lang="sk-SK" dirty="0" err="1"/>
-              <a:t>undo</a:t>
-            </a:r>
-            <a:r>
-              <a:rPr lang="sk-SK" dirty="0"/>
-              <a:t>, </a:t>
-            </a:r>
-            <a:r>
-              <a:rPr lang="sk-SK" dirty="0" err="1"/>
-              <a:t>multi</a:t>
-            </a:r>
-            <a:endParaRPr lang="sk-SK" dirty="0"/>
-          </a:p>
-          <a:p>
-            <a:r>
-              <a:rPr lang="sk-SK" dirty="0"/>
-              <a:t>       </a:t>
-            </a:r>
-            <a:r>
-              <a:rPr lang="sk-SK" dirty="0" err="1"/>
-              <a:t>windows</a:t>
-            </a:r>
-            <a:r>
-              <a:rPr lang="sk-SK" dirty="0"/>
-              <a:t> and </a:t>
-            </a:r>
-            <a:r>
-              <a:rPr lang="sk-SK" dirty="0" err="1"/>
-              <a:t>buffers</a:t>
-            </a:r>
-            <a:r>
-              <a:rPr lang="sk-SK" dirty="0"/>
-              <a:t>, syntax </a:t>
-            </a:r>
-            <a:r>
-              <a:rPr lang="sk-SK" dirty="0" err="1"/>
-              <a:t>highlighting</a:t>
-            </a:r>
-            <a:r>
-              <a:rPr lang="sk-SK" dirty="0"/>
-              <a:t>, </a:t>
-            </a:r>
-            <a:r>
-              <a:rPr lang="sk-SK" dirty="0" err="1"/>
-              <a:t>command</a:t>
-            </a:r>
-            <a:r>
-              <a:rPr lang="sk-SK" dirty="0"/>
-              <a:t> </a:t>
-            </a:r>
-            <a:r>
-              <a:rPr lang="sk-SK" dirty="0" err="1"/>
-              <a:t>line</a:t>
-            </a:r>
-            <a:r>
-              <a:rPr lang="sk-SK" dirty="0"/>
-              <a:t> </a:t>
-            </a:r>
-            <a:r>
-              <a:rPr lang="sk-SK" dirty="0" err="1"/>
-              <a:t>editing</a:t>
-            </a:r>
-            <a:r>
-              <a:rPr lang="sk-SK" dirty="0"/>
-              <a:t>,</a:t>
-            </a:r>
-          </a:p>
-          <a:p>
-            <a:r>
-              <a:rPr lang="sk-SK" dirty="0"/>
-              <a:t>       </a:t>
-            </a:r>
-            <a:r>
-              <a:rPr lang="sk-SK" dirty="0" err="1"/>
-              <a:t>filename</a:t>
-            </a:r>
-            <a:r>
-              <a:rPr lang="sk-SK" dirty="0"/>
-              <a:t> </a:t>
-            </a:r>
-            <a:r>
-              <a:rPr lang="sk-SK" dirty="0" err="1"/>
-              <a:t>completion</a:t>
-            </a:r>
-            <a:r>
-              <a:rPr lang="sk-SK" dirty="0"/>
-              <a:t>, on-line </a:t>
-            </a:r>
-            <a:r>
-              <a:rPr lang="sk-SK" dirty="0" err="1"/>
-              <a:t>help</a:t>
-            </a:r>
-            <a:r>
-              <a:rPr lang="sk-SK" dirty="0"/>
-              <a:t>, </a:t>
-            </a:r>
-            <a:r>
-              <a:rPr lang="sk-SK" dirty="0" err="1"/>
-              <a:t>visual</a:t>
-            </a:r>
-            <a:r>
-              <a:rPr lang="sk-SK" dirty="0"/>
-              <a:t> </a:t>
-            </a:r>
-            <a:r>
-              <a:rPr lang="sk-SK" dirty="0" err="1"/>
-              <a:t>selection</a:t>
-            </a:r>
-            <a:r>
-              <a:rPr lang="sk-SK" dirty="0"/>
-              <a:t>, etc.</a:t>
-            </a:r>
-          </a:p>
-          <a:p>
-            <a:r>
-              <a:rPr lang="sk-SK" b="1" dirty="0" err="1"/>
-              <a:t>vimtutor</a:t>
-            </a:r>
-            <a:r>
-              <a:rPr lang="sk-SK" dirty="0"/>
-              <a:t> – </a:t>
-            </a:r>
-            <a:r>
-              <a:rPr lang="sk-SK" dirty="0" err="1"/>
-              <a:t>vim</a:t>
-            </a:r>
-            <a:r>
-              <a:rPr lang="sk-SK" dirty="0"/>
-              <a:t> </a:t>
-            </a:r>
-            <a:r>
-              <a:rPr lang="sk-SK" dirty="0" err="1"/>
-              <a:t>tutorial</a:t>
-            </a:r>
-            <a:endParaRPr lang="sk-SK" dirty="0"/>
-          </a:p>
-        </p:txBody>
-      </p:sp>
     </p:spTree>
   </p:cSld>
   <p:clrMapOvr>
@@ -24476,7 +23395,7 @@
 </p:sld>
 </file>
 
-<file path=ppt/slides/slide8.xml><?xml version="1.0" encoding="utf-8"?>
+<file path=ppt/slides/slide7.xml><?xml version="1.0" encoding="utf-8"?>
 <p:sld xmlns:a="http://schemas.openxmlformats.org/drawingml/2006/main" xmlns:r="http://schemas.openxmlformats.org/officeDocument/2006/relationships" xmlns:p="http://schemas.openxmlformats.org/presentationml/2006/main">
   <p:cSld>
     <p:spTree>
@@ -25269,7 +24188,7 @@
 </p:sld>
 </file>
 
-<file path=ppt/slides/slide9.xml><?xml version="1.0" encoding="utf-8"?>
+<file path=ppt/slides/slide8.xml><?xml version="1.0" encoding="utf-8"?>
 <p:sld xmlns:a="http://schemas.openxmlformats.org/drawingml/2006/main" xmlns:r="http://schemas.openxmlformats.org/officeDocument/2006/relationships" xmlns:p="http://schemas.openxmlformats.org/presentationml/2006/main">
   <p:cSld>
     <p:spTree>
@@ -26046,6 +24965,184 @@
           </a:graphicData>
         </a:graphic>
       </p:graphicFrame>
+    </p:spTree>
+  </p:cSld>
+  <p:clrMapOvr>
+    <a:masterClrMapping/>
+  </p:clrMapOvr>
+</p:sld>
+</file>
+
+<file path=ppt/slides/slide9.xml><?xml version="1.0" encoding="utf-8"?>
+<p:sld xmlns:a="http://schemas.openxmlformats.org/drawingml/2006/main" xmlns:r="http://schemas.openxmlformats.org/officeDocument/2006/relationships" xmlns:p="http://schemas.openxmlformats.org/presentationml/2006/main">
+  <p:cSld>
+    <p:spTree>
+      <p:nvGrpSpPr>
+        <p:cNvPr id="1" name=""/>
+        <p:cNvGrpSpPr/>
+        <p:nvPr/>
+      </p:nvGrpSpPr>
+      <p:grpSpPr>
+        <a:xfrm>
+          <a:off x="0" y="0"/>
+          <a:ext cx="0" cy="0"/>
+          <a:chOff x="0" y="0"/>
+          <a:chExt cx="0" cy="0"/>
+        </a:xfrm>
+      </p:grpSpPr>
+      <p:sp>
+        <p:nvSpPr>
+          <p:cNvPr id="18434" name="Title 1">
+            <a:extLst>
+              <a:ext uri="{FF2B5EF4-FFF2-40B4-BE49-F238E27FC236}">
+                <a16:creationId xmlns:a16="http://schemas.microsoft.com/office/drawing/2014/main" id="{2DA0F755-5088-4D7B-809A-959596252F72}"/>
+              </a:ext>
+            </a:extLst>
+          </p:cNvPr>
+          <p:cNvSpPr>
+            <a:spLocks noGrp="1" noChangeArrowheads="1"/>
+          </p:cNvSpPr>
+          <p:nvPr>
+            <p:ph type="title"/>
+          </p:nvPr>
+        </p:nvSpPr>
+        <p:spPr/>
+        <p:txBody>
+          <a:bodyPr/>
+          <a:lstStyle/>
+          <a:p>
+            <a:r>
+              <a:rPr lang="en-US" altLang="sk-SK"/>
+              <a:t>vi Modes</a:t>
+            </a:r>
+            <a:endParaRPr lang="en-US" altLang="sk-SK" dirty="0"/>
+          </a:p>
+        </p:txBody>
+      </p:sp>
+      <p:sp>
+        <p:nvSpPr>
+          <p:cNvPr id="18435" name="Content Placeholder 2">
+            <a:extLst>
+              <a:ext uri="{FF2B5EF4-FFF2-40B4-BE49-F238E27FC236}">
+                <a16:creationId xmlns:a16="http://schemas.microsoft.com/office/drawing/2014/main" id="{D26642D8-AE63-44B1-A0FE-18D1576C3CFE}"/>
+              </a:ext>
+            </a:extLst>
+          </p:cNvPr>
+          <p:cNvSpPr>
+            <a:spLocks noGrp="1" noChangeArrowheads="1"/>
+          </p:cNvSpPr>
+          <p:nvPr>
+            <p:ph idx="1"/>
+          </p:nvPr>
+        </p:nvSpPr>
+        <p:spPr>
+          <a:xfrm>
+            <a:off x="457200" y="1600200"/>
+            <a:ext cx="8229600" cy="4525963"/>
+          </a:xfrm>
+        </p:spPr>
+        <p:txBody>
+          <a:bodyPr/>
+          <a:lstStyle/>
+          <a:p>
+            <a:r>
+              <a:rPr lang="en-US" altLang="sk-SK" dirty="0"/>
+              <a:t>Contains two modes:</a:t>
+            </a:r>
+          </a:p>
+          <a:p>
+            <a:pPr lvl="1"/>
+            <a:r>
+              <a:rPr lang="en-US" altLang="sk-SK" b="1"/>
+              <a:t>command </a:t>
+            </a:r>
+            <a:r>
+              <a:rPr lang="en-US" altLang="sk-SK"/>
+              <a:t>mode </a:t>
+            </a:r>
+            <a:endParaRPr lang="en-US" altLang="sk-SK">
+              <a:cs typeface="Arial"/>
+            </a:endParaRPr>
+          </a:p>
+          <a:p>
+            <a:pPr lvl="2"/>
+            <a:r>
+              <a:rPr lang="en-US" altLang="sk-SK" dirty="0"/>
+              <a:t>Default mode - Most powerful feature of the vi editor</a:t>
+            </a:r>
+          </a:p>
+          <a:p>
+            <a:pPr lvl="2"/>
+            <a:r>
+              <a:rPr lang="en-US" altLang="sk-SK" dirty="0"/>
+              <a:t>Allows for </a:t>
+            </a:r>
+            <a:r>
+              <a:rPr lang="en-US" altLang="sk-SK" u="sng" dirty="0"/>
+              <a:t>efficient navigation and editing of existing text</a:t>
+            </a:r>
+            <a:r>
+              <a:rPr lang="en-US" altLang="sk-SK" dirty="0"/>
+              <a:t>.</a:t>
+            </a:r>
+          </a:p>
+          <a:p>
+            <a:pPr lvl="1"/>
+            <a:r>
+              <a:rPr lang="en-US" b="1">
+                <a:cs typeface="Arial"/>
+              </a:rPr>
+              <a:t>insert</a:t>
+            </a:r>
+            <a:r>
+              <a:rPr lang="en-US" dirty="0">
+                <a:cs typeface="Arial"/>
+              </a:rPr>
+              <a:t> </a:t>
+            </a:r>
+          </a:p>
+          <a:p>
+            <a:pPr lvl="2"/>
+            <a:r>
+              <a:rPr lang="en-US">
+                <a:cs typeface="Arial"/>
+              </a:rPr>
+              <a:t>Used to </a:t>
+            </a:r>
+            <a:r>
+              <a:rPr lang="en-US" u="sng">
+                <a:cs typeface="Arial"/>
+              </a:rPr>
+              <a:t>enter text </a:t>
+            </a:r>
+            <a:r>
+              <a:rPr lang="en-US">
+                <a:cs typeface="Arial"/>
+              </a:rPr>
+              <a:t>into a file (exited via Esc key)</a:t>
+            </a:r>
+          </a:p>
+          <a:p>
+            <a:pPr lvl="2"/>
+            <a:r>
+              <a:rPr lang="en-US">
+                <a:cs typeface="Arial"/>
+              </a:rPr>
+              <a:t>Multiple ways to enter this mode</a:t>
+            </a:r>
+          </a:p>
+          <a:p>
+            <a:pPr lvl="2"/>
+            <a:r>
+              <a:rPr lang="en-US">
+                <a:cs typeface="Arial"/>
+              </a:rPr>
+              <a:t>Not efficient for navigation or editing!</a:t>
+            </a:r>
+            <a:endParaRPr lang="en-US"/>
+          </a:p>
+        </p:txBody>
+      </p:sp>
     </p:spTree>
   </p:cSld>
   <p:clrMapOvr>

--- a/LC UNIX/vi editor 1.pptx
+++ b/LC UNIX/vi editor 1.pptx
@@ -5,10 +5,10 @@
     <p:sldMasterId id="2147483648" r:id="rId1"/>
   </p:sldMasterIdLst>
   <p:notesMasterIdLst>
-    <p:notesMasterId r:id="rId32"/>
+    <p:notesMasterId r:id="rId31"/>
   </p:notesMasterIdLst>
   <p:handoutMasterIdLst>
-    <p:handoutMasterId r:id="rId33"/>
+    <p:handoutMasterId r:id="rId32"/>
   </p:handoutMasterIdLst>
   <p:sldIdLst>
     <p:sldId id="256" r:id="rId2"/>
@@ -37,10 +37,9 @@
     <p:sldId id="297" r:id="rId25"/>
     <p:sldId id="280" r:id="rId26"/>
     <p:sldId id="290" r:id="rId27"/>
-    <p:sldId id="283" r:id="rId28"/>
-    <p:sldId id="285" r:id="rId29"/>
-    <p:sldId id="282" r:id="rId30"/>
-    <p:sldId id="295" r:id="rId31"/>
+    <p:sldId id="298" r:id="rId28"/>
+    <p:sldId id="283" r:id="rId29"/>
+    <p:sldId id="295" r:id="rId30"/>
   </p:sldIdLst>
   <p:sldSz cx="9144000" cy="6858000" type="screen4x3"/>
   <p:notesSz cx="7010400" cy="9296400"/>
@@ -191,14 +190,104 @@
 <file path=ppt/revisionInfo.xml><?xml version="1.0" encoding="utf-8"?>
 <p1510:revInfo xmlns:a="http://schemas.openxmlformats.org/drawingml/2006/main" xmlns:r="http://schemas.openxmlformats.org/officeDocument/2006/relationships" xmlns:p1510="http://schemas.microsoft.com/office/powerpoint/2015/10/main">
   <p1510:revLst>
-    <p1510:client id="{1E715230-2C55-6AF0-E29A-390918D4ABC6}" v="658" dt="2026-03-07T10:50:57.628"/>
-    <p1510:client id="{293AF15C-C131-0646-95E8-1DDF1B9B519C}" v="1" dt="2026-03-06T11:58:50.970"/>
+    <p1510:client id="{C190E470-2A0A-3FD4-8E3B-F87052233385}" v="103" dt="2026-03-09T20:34:33.753"/>
   </p1510:revLst>
 </p1510:revInfo>
 </file>
 
 <file path=ppt/changesInfos/changesInfo1.xml><?xml version="1.0" encoding="utf-8"?>
 <pc:chgInfo xmlns:a="http://schemas.openxmlformats.org/drawingml/2006/main" xmlns:r="http://schemas.openxmlformats.org/officeDocument/2006/relationships" xmlns:ac="http://schemas.microsoft.com/office/drawing/2013/main/command" xmlns:pc="http://schemas.microsoft.com/office/powerpoint/2013/main/command">
+  <pc:docChgLst>
+    <pc:chgData name="Baráth, Július" userId="S::julius.barath@aos.sk::aebde9b9-dccc-4475-a9ac-c05e78323d7a" providerId="AD" clId="Web-{C190E470-2A0A-3FD4-8E3B-F87052233385}"/>
+    <pc:docChg chg="addSld delSld modSld">
+      <pc:chgData name="Baráth, Július" userId="S::julius.barath@aos.sk::aebde9b9-dccc-4475-a9ac-c05e78323d7a" providerId="AD" clId="Web-{C190E470-2A0A-3FD4-8E3B-F87052233385}" dt="2026-03-09T20:34:33.753" v="101" actId="20577"/>
+      <pc:docMkLst>
+        <pc:docMk/>
+      </pc:docMkLst>
+      <pc:sldChg chg="modSp del">
+        <pc:chgData name="Baráth, Július" userId="S::julius.barath@aos.sk::aebde9b9-dccc-4475-a9ac-c05e78323d7a" providerId="AD" clId="Web-{C190E470-2A0A-3FD4-8E3B-F87052233385}" dt="2026-03-09T20:30:49.859" v="68"/>
+        <pc:sldMkLst>
+          <pc:docMk/>
+          <pc:sldMk cId="2729825022" sldId="282"/>
+        </pc:sldMkLst>
+        <pc:spChg chg="mod">
+          <ac:chgData name="Baráth, Július" userId="S::julius.barath@aos.sk::aebde9b9-dccc-4475-a9ac-c05e78323d7a" providerId="AD" clId="Web-{C190E470-2A0A-3FD4-8E3B-F87052233385}" dt="2026-03-09T20:28:44.871" v="49" actId="20577"/>
+          <ac:spMkLst>
+            <pc:docMk/>
+            <pc:sldMk cId="2729825022" sldId="282"/>
+            <ac:spMk id="3" creationId="{1ADE8C94-E53B-4163-8463-F81119DCD320}"/>
+          </ac:spMkLst>
+        </pc:spChg>
+      </pc:sldChg>
+      <pc:sldChg chg="modSp">
+        <pc:chgData name="Baráth, Július" userId="S::julius.barath@aos.sk::aebde9b9-dccc-4475-a9ac-c05e78323d7a" providerId="AD" clId="Web-{C190E470-2A0A-3FD4-8E3B-F87052233385}" dt="2026-03-09T20:30:40.843" v="67"/>
+        <pc:sldMkLst>
+          <pc:docMk/>
+          <pc:sldMk cId="3212361736" sldId="283"/>
+        </pc:sldMkLst>
+        <pc:spChg chg="mod">
+          <ac:chgData name="Baráth, Július" userId="S::julius.barath@aos.sk::aebde9b9-dccc-4475-a9ac-c05e78323d7a" providerId="AD" clId="Web-{C190E470-2A0A-3FD4-8E3B-F87052233385}" dt="2026-03-09T20:30:40.843" v="67"/>
+          <ac:spMkLst>
+            <pc:docMk/>
+            <pc:sldMk cId="3212361736" sldId="283"/>
+            <ac:spMk id="15363" creationId="{15FDB7C8-7887-4E4F-840A-F4EA7FB3E3F8}"/>
+          </ac:spMkLst>
+        </pc:spChg>
+      </pc:sldChg>
+      <pc:sldChg chg="del">
+        <pc:chgData name="Baráth, Július" userId="S::julius.barath@aos.sk::aebde9b9-dccc-4475-a9ac-c05e78323d7a" providerId="AD" clId="Web-{C190E470-2A0A-3FD4-8E3B-F87052233385}" dt="2026-03-09T20:28:32.512" v="48"/>
+        <pc:sldMkLst>
+          <pc:docMk/>
+          <pc:sldMk cId="1279346080" sldId="285"/>
+        </pc:sldMkLst>
+      </pc:sldChg>
+      <pc:sldChg chg="modSp">
+        <pc:chgData name="Baráth, Július" userId="S::julius.barath@aos.sk::aebde9b9-dccc-4475-a9ac-c05e78323d7a" providerId="AD" clId="Web-{C190E470-2A0A-3FD4-8E3B-F87052233385}" dt="2026-03-09T20:20:26.025" v="3" actId="20577"/>
+        <pc:sldMkLst>
+          <pc:docMk/>
+          <pc:sldMk cId="0" sldId="290"/>
+        </pc:sldMkLst>
+        <pc:spChg chg="mod">
+          <ac:chgData name="Baráth, Július" userId="S::julius.barath@aos.sk::aebde9b9-dccc-4475-a9ac-c05e78323d7a" providerId="AD" clId="Web-{C190E470-2A0A-3FD4-8E3B-F87052233385}" dt="2026-03-09T20:20:26.025" v="3" actId="20577"/>
+          <ac:spMkLst>
+            <pc:docMk/>
+            <pc:sldMk cId="0" sldId="290"/>
+            <ac:spMk id="35843" creationId="{B0854728-2C19-4EAB-BB97-4DB204DA8499}"/>
+          </ac:spMkLst>
+        </pc:spChg>
+      </pc:sldChg>
+      <pc:sldChg chg="modSp">
+        <pc:chgData name="Baráth, Július" userId="S::julius.barath@aos.sk::aebde9b9-dccc-4475-a9ac-c05e78323d7a" providerId="AD" clId="Web-{C190E470-2A0A-3FD4-8E3B-F87052233385}" dt="2026-03-09T20:34:33.753" v="101" actId="20577"/>
+        <pc:sldMkLst>
+          <pc:docMk/>
+          <pc:sldMk cId="0" sldId="295"/>
+        </pc:sldMkLst>
+        <pc:spChg chg="mod">
+          <ac:chgData name="Baráth, Július" userId="S::julius.barath@aos.sk::aebde9b9-dccc-4475-a9ac-c05e78323d7a" providerId="AD" clId="Web-{C190E470-2A0A-3FD4-8E3B-F87052233385}" dt="2026-03-09T20:34:33.753" v="101" actId="20577"/>
+          <ac:spMkLst>
+            <pc:docMk/>
+            <pc:sldMk cId="0" sldId="295"/>
+            <ac:spMk id="36867" creationId="{7CA9632D-1167-4A0C-9D27-299AB24DA8D9}"/>
+          </ac:spMkLst>
+        </pc:spChg>
+      </pc:sldChg>
+      <pc:sldChg chg="modSp add replId">
+        <pc:chgData name="Baráth, Július" userId="S::julius.barath@aos.sk::aebde9b9-dccc-4475-a9ac-c05e78323d7a" providerId="AD" clId="Web-{C190E470-2A0A-3FD4-8E3B-F87052233385}" dt="2026-03-09T20:26:11.180" v="42" actId="20577"/>
+        <pc:sldMkLst>
+          <pc:docMk/>
+          <pc:sldMk cId="1805215993" sldId="298"/>
+        </pc:sldMkLst>
+        <pc:spChg chg="mod">
+          <ac:chgData name="Baráth, Július" userId="S::julius.barath@aos.sk::aebde9b9-dccc-4475-a9ac-c05e78323d7a" providerId="AD" clId="Web-{C190E470-2A0A-3FD4-8E3B-F87052233385}" dt="2026-03-09T20:26:11.180" v="42" actId="20577"/>
+          <ac:spMkLst>
+            <pc:docMk/>
+            <pc:sldMk cId="1805215993" sldId="298"/>
+            <ac:spMk id="35843" creationId="{EB23DA19-3C31-A773-4D15-234A85EC674C}"/>
+          </ac:spMkLst>
+        </pc:spChg>
+      </pc:sldChg>
+    </pc:docChg>
+  </pc:docChgLst>
   <pc:docChgLst>
     <pc:chgData name="Baráth, Július" userId="aebde9b9-dccc-4475-a9ac-c05e78323d7a" providerId="ADAL" clId="{4A0811C8-ED2F-505E-B787-C8270CED5046}"/>
     <pc:docChg chg="modSld">
@@ -366,13 +455,6 @@
           </ac:spMkLst>
         </pc:spChg>
       </pc:sldChg>
-      <pc:sldChg chg="del">
-        <pc:chgData name="Baráth, Július" userId="S::julius.barath@aos.sk::aebde9b9-dccc-4475-a9ac-c05e78323d7a" providerId="AD" clId="Web-{1E715230-2C55-6AF0-E29A-390918D4ABC6}" dt="2026-03-07T10:46:25.200" v="576"/>
-        <pc:sldMkLst>
-          <pc:docMk/>
-          <pc:sldMk cId="0" sldId="273"/>
-        </pc:sldMkLst>
-      </pc:sldChg>
       <pc:sldChg chg="modSp">
         <pc:chgData name="Baráth, Július" userId="S::julius.barath@aos.sk::aebde9b9-dccc-4475-a9ac-c05e78323d7a" providerId="AD" clId="Web-{1E715230-2C55-6AF0-E29A-390918D4ABC6}" dt="2026-03-07T10:46:47.669" v="580" actId="20577"/>
         <pc:sldMkLst>
@@ -394,14 +476,6 @@
           <pc:docMk/>
           <pc:sldMk cId="0" sldId="276"/>
         </pc:sldMkLst>
-        <pc:spChg chg="del mod">
-          <ac:chgData name="Baráth, Július" userId="S::julius.barath@aos.sk::aebde9b9-dccc-4475-a9ac-c05e78323d7a" providerId="AD" clId="Web-{1E715230-2C55-6AF0-E29A-390918D4ABC6}" dt="2026-03-07T09:23:32.365" v="52"/>
-          <ac:spMkLst>
-            <pc:docMk/>
-            <pc:sldMk cId="0" sldId="276"/>
-            <ac:spMk id="2" creationId="{73F8E0F3-D8CE-9B98-82F8-D25AF7DB4599}"/>
-          </ac:spMkLst>
-        </pc:spChg>
       </pc:sldChg>
       <pc:sldChg chg="delSp modSp">
         <pc:chgData name="Baráth, Július" userId="S::julius.barath@aos.sk::aebde9b9-dccc-4475-a9ac-c05e78323d7a" providerId="AD" clId="Web-{1E715230-2C55-6AF0-E29A-390918D4ABC6}" dt="2026-03-07T10:03:34.954" v="188"/>
@@ -417,14 +491,6 @@
             <ac:spMk id="34819" creationId="{8234723D-B56A-4AD0-ADE9-EB9FA903878C}"/>
           </ac:spMkLst>
         </pc:spChg>
-        <pc:picChg chg="del">
-          <ac:chgData name="Baráth, Július" userId="S::julius.barath@aos.sk::aebde9b9-dccc-4475-a9ac-c05e78323d7a" providerId="AD" clId="Web-{1E715230-2C55-6AF0-E29A-390918D4ABC6}" dt="2026-03-07T10:03:34.954" v="188"/>
-          <ac:picMkLst>
-            <pc:docMk/>
-            <pc:sldMk cId="0" sldId="280"/>
-            <ac:picMk id="34820" creationId="{29914A81-2D67-4F57-A266-D107CCB17331}"/>
-          </ac:picMkLst>
-        </pc:picChg>
       </pc:sldChg>
       <pc:sldChg chg="modSp">
         <pc:chgData name="Baráth, Július" userId="S::julius.barath@aos.sk::aebde9b9-dccc-4475-a9ac-c05e78323d7a" providerId="AD" clId="Web-{1E715230-2C55-6AF0-E29A-390918D4ABC6}" dt="2026-03-07T10:24:26.432" v="372" actId="1076"/>
@@ -648,7 +714,7 @@
               <a:pPr>
                 <a:defRPr/>
               </a:pPr>
-              <a:t>3/7/2026</a:t>
+              <a:t>3/9/2026</a:t>
             </a:fld>
             <a:endParaRPr lang="en-US"/>
           </a:p>
@@ -863,7 +929,7 @@
               <a:pPr>
                 <a:defRPr/>
               </a:pPr>
-              <a:t>3/7/2026</a:t>
+              <a:t>3/9/2026</a:t>
             </a:fld>
             <a:endParaRPr lang="en-US"/>
           </a:p>
@@ -1469,7 +1535,7 @@
                   <a:spcPct val="0"/>
                 </a:spcBef>
               </a:pPr>
-              <a:t>19</a:t>
+              <a:t>10</a:t>
             </a:fld>
             <a:endParaRPr lang="en-US" altLang="sk-SK">
               <a:latin typeface="Arial" panose="020B0604020202020204" pitchFamily="34" charset="0"/>
@@ -17345,6 +17411,9 @@
               </a:rPr>
               <a:t>nohlsearch</a:t>
             </a:r>
+            <a:endParaRPr lang="en-US" altLang="sk-SK" sz="2000">
+              <a:cs typeface="Arial"/>
+            </a:endParaRPr>
           </a:p>
           <a:p>
             <a:r>
@@ -17404,20 +17473,9 @@
             </a:r>
           </a:p>
           <a:p>
-            <a:r>
-              <a:rPr lang="en-US" altLang="sk-SK" sz="2400"/>
-              <a:t>To show the name of the current file use:</a:t>
-            </a:r>
-          </a:p>
-          <a:p>
-            <a:pPr lvl="1"/>
-            <a:r>
-              <a:rPr lang="en-US" altLang="sk-SK" sz="2400"/>
-              <a:t>:f</a:t>
-            </a:r>
-          </a:p>
-          <a:p>
-            <a:endParaRPr lang="en-US" altLang="sk-SK"/>
+            <a:endParaRPr lang="en-US" altLang="sk-SK">
+              <a:cs typeface="Arial"/>
+            </a:endParaRPr>
           </a:p>
         </p:txBody>
       </p:sp>
@@ -17430,6 +17488,371 @@
 </file>
 
 <file path=ppt/slides/slide27.xml><?xml version="1.0" encoding="utf-8"?>
+<p:sld xmlns:a="http://schemas.openxmlformats.org/drawingml/2006/main" xmlns:r="http://schemas.openxmlformats.org/officeDocument/2006/relationships" xmlns:p="http://schemas.openxmlformats.org/presentationml/2006/main">
+  <p:cSld>
+    <p:spTree>
+      <p:nvGrpSpPr>
+        <p:cNvPr id="1" name="">
+          <a:extLst>
+            <a:ext uri="{FF2B5EF4-FFF2-40B4-BE49-F238E27FC236}">
+              <a16:creationId xmlns:a16="http://schemas.microsoft.com/office/drawing/2014/main" id="{DA8E2677-EBC7-C3A7-1763-91EFB58D65E5}"/>
+            </a:ext>
+          </a:extLst>
+        </p:cNvPr>
+        <p:cNvGrpSpPr/>
+        <p:nvPr/>
+      </p:nvGrpSpPr>
+      <p:grpSpPr>
+        <a:xfrm>
+          <a:off x="0" y="0"/>
+          <a:ext cx="0" cy="0"/>
+          <a:chOff x="0" y="0"/>
+          <a:chExt cx="0" cy="0"/>
+        </a:xfrm>
+      </p:grpSpPr>
+      <p:sp>
+        <p:nvSpPr>
+          <p:cNvPr id="35842" name="Title 1">
+            <a:extLst>
+              <a:ext uri="{FF2B5EF4-FFF2-40B4-BE49-F238E27FC236}">
+                <a16:creationId xmlns:a16="http://schemas.microsoft.com/office/drawing/2014/main" id="{AFFB74A5-AB9D-2D2C-05AE-1367C507AC01}"/>
+              </a:ext>
+            </a:extLst>
+          </p:cNvPr>
+          <p:cNvSpPr>
+            <a:spLocks noGrp="1" noChangeArrowheads="1"/>
+          </p:cNvSpPr>
+          <p:nvPr>
+            <p:ph type="title"/>
+          </p:nvPr>
+        </p:nvSpPr>
+        <p:spPr>
+          <a:xfrm>
+            <a:off x="457200" y="318"/>
+            <a:ext cx="8229600" cy="1143000"/>
+          </a:xfrm>
+        </p:spPr>
+        <p:txBody>
+          <a:bodyPr/>
+          <a:lstStyle/>
+          <a:p>
+            <a:r>
+              <a:rPr lang="en-US" altLang="sk-SK"/>
+              <a:t>Some “nice to know” features</a:t>
+            </a:r>
+          </a:p>
+        </p:txBody>
+      </p:sp>
+      <p:sp>
+        <p:nvSpPr>
+          <p:cNvPr id="35843" name="Content Placeholder 2">
+            <a:extLst>
+              <a:ext uri="{FF2B5EF4-FFF2-40B4-BE49-F238E27FC236}">
+                <a16:creationId xmlns:a16="http://schemas.microsoft.com/office/drawing/2014/main" id="{EB23DA19-3C31-A773-4D15-234A85EC674C}"/>
+              </a:ext>
+            </a:extLst>
+          </p:cNvPr>
+          <p:cNvSpPr>
+            <a:spLocks noGrp="1" noChangeArrowheads="1"/>
+          </p:cNvSpPr>
+          <p:nvPr>
+            <p:ph idx="1"/>
+          </p:nvPr>
+        </p:nvSpPr>
+        <p:spPr>
+          <a:xfrm>
+            <a:off x="457200" y="1135967"/>
+            <a:ext cx="8229600" cy="4990196"/>
+          </a:xfrm>
+        </p:spPr>
+        <p:txBody>
+          <a:bodyPr/>
+          <a:lstStyle/>
+          <a:p>
+            <a:endParaRPr lang="en-US" altLang="sk-SK" sz="2400" dirty="0">
+              <a:cs typeface="Arial"/>
+            </a:endParaRPr>
+          </a:p>
+          <a:p>
+            <a:r>
+              <a:rPr lang="en-US" altLang="sk-SK" sz="2400"/>
+              <a:t>To show the name of the current file use:</a:t>
+            </a:r>
+          </a:p>
+          <a:p>
+            <a:pPr lvl="1"/>
+            <a:r>
+              <a:rPr lang="en-US" altLang="sk-SK" sz="2400"/>
+              <a:t>:f</a:t>
+            </a:r>
+          </a:p>
+          <a:p>
+            <a:r>
+              <a:rPr lang="en-US" sz="2400"/>
+              <a:t>. (dot) command in command mode repeats the last change you made</a:t>
+            </a:r>
+            <a:endParaRPr lang="en-US" altLang="sk-SK" sz="2400"/>
+          </a:p>
+          <a:p>
+            <a:pPr marL="742950" indent="-285750">
+              <a:buChar char="–"/>
+            </a:pPr>
+            <a:r>
+              <a:rPr lang="en-US" sz="2400" dirty="0">
+                <a:latin typeface="Segoe UI"/>
+                <a:cs typeface="Segoe UI"/>
+              </a:rPr>
+              <a:t>A </a:t>
+            </a:r>
+            <a:r>
+              <a:rPr lang="en-US" sz="2400" i="1" dirty="0">
+                <a:latin typeface="Segoe UI"/>
+                <a:cs typeface="Segoe UI"/>
+              </a:rPr>
+              <a:t>change</a:t>
+            </a:r>
+            <a:r>
+              <a:rPr lang="en-US" sz="2400" dirty="0">
+                <a:latin typeface="Segoe UI"/>
+                <a:cs typeface="Segoe UI"/>
+              </a:rPr>
+              <a:t> is anything that modifies the buffer, such as:</a:t>
+            </a:r>
+            <a:endParaRPr lang="en-US" sz="2400">
+              <a:cs typeface="Arial"/>
+            </a:endParaRPr>
+          </a:p>
+          <a:p>
+            <a:pPr lvl="2">
+              <a:buFont typeface="Wingdings"/>
+              <a:buChar char="§"/>
+            </a:pPr>
+            <a:r>
+              <a:rPr lang="en-US" sz="2000" dirty="0">
+                <a:latin typeface="Segoe UI"/>
+                <a:cs typeface="Segoe UI"/>
+              </a:rPr>
+              <a:t>editing text (</a:t>
+            </a:r>
+            <a:r>
+              <a:rPr lang="en-US" sz="2000" dirty="0" err="1">
+                <a:latin typeface="Consolas"/>
+                <a:cs typeface="Arial"/>
+              </a:rPr>
+              <a:t>i</a:t>
+            </a:r>
+            <a:r>
+              <a:rPr lang="en-US" sz="2000" dirty="0">
+                <a:latin typeface="Segoe UI"/>
+                <a:cs typeface="Segoe UI"/>
+              </a:rPr>
+              <a:t>, </a:t>
+            </a:r>
+            <a:r>
+              <a:rPr lang="en-US" sz="2000" dirty="0">
+                <a:latin typeface="Consolas"/>
+                <a:cs typeface="Arial"/>
+              </a:rPr>
+              <a:t>a</a:t>
+            </a:r>
+            <a:r>
+              <a:rPr lang="en-US" sz="2000" dirty="0">
+                <a:latin typeface="Segoe UI"/>
+                <a:cs typeface="Segoe UI"/>
+              </a:rPr>
+              <a:t>, </a:t>
+            </a:r>
+            <a:r>
+              <a:rPr lang="en-US" sz="2000" dirty="0">
+                <a:latin typeface="Consolas"/>
+                <a:cs typeface="Arial"/>
+              </a:rPr>
+              <a:t>r</a:t>
+            </a:r>
+            <a:r>
+              <a:rPr lang="en-US" sz="2000" dirty="0">
+                <a:latin typeface="Segoe UI"/>
+                <a:cs typeface="Segoe UI"/>
+              </a:rPr>
+              <a:t>, </a:t>
+            </a:r>
+            <a:r>
+              <a:rPr lang="en-US" sz="2000" dirty="0">
+                <a:latin typeface="Consolas"/>
+                <a:cs typeface="Arial"/>
+              </a:rPr>
+              <a:t>s</a:t>
+            </a:r>
+            <a:r>
+              <a:rPr lang="en-US" sz="2000" dirty="0">
+                <a:latin typeface="Segoe UI"/>
+                <a:cs typeface="Segoe UI"/>
+              </a:rPr>
+              <a:t>, etc.)</a:t>
+            </a:r>
+            <a:endParaRPr lang="en-US" sz="2000">
+              <a:cs typeface="Arial"/>
+            </a:endParaRPr>
+          </a:p>
+          <a:p>
+            <a:pPr lvl="2">
+              <a:buFont typeface="Wingdings"/>
+              <a:buChar char="§"/>
+            </a:pPr>
+            <a:r>
+              <a:rPr lang="en-US" sz="2000" dirty="0">
+                <a:latin typeface="Segoe UI"/>
+                <a:cs typeface="Segoe UI"/>
+              </a:rPr>
+              <a:t>deleting (</a:t>
+            </a:r>
+            <a:r>
+              <a:rPr lang="en-US" sz="2000" dirty="0">
+                <a:latin typeface="Consolas"/>
+                <a:cs typeface="Arial"/>
+              </a:rPr>
+              <a:t>x</a:t>
+            </a:r>
+            <a:r>
+              <a:rPr lang="en-US" sz="2000" dirty="0">
+                <a:latin typeface="Segoe UI"/>
+                <a:cs typeface="Segoe UI"/>
+              </a:rPr>
+              <a:t>, </a:t>
+            </a:r>
+            <a:r>
+              <a:rPr lang="en-US" sz="2000" dirty="0">
+                <a:latin typeface="Consolas"/>
+                <a:cs typeface="Arial"/>
+              </a:rPr>
+              <a:t>dd</a:t>
+            </a:r>
+            <a:r>
+              <a:rPr lang="en-US" sz="2000" dirty="0">
+                <a:latin typeface="Segoe UI"/>
+                <a:cs typeface="Segoe UI"/>
+              </a:rPr>
+              <a:t>, </a:t>
+            </a:r>
+            <a:r>
+              <a:rPr lang="en-US" sz="2000" dirty="0" err="1">
+                <a:latin typeface="Consolas"/>
+                <a:cs typeface="Arial"/>
+              </a:rPr>
+              <a:t>dw</a:t>
+            </a:r>
+            <a:r>
+              <a:rPr lang="en-US" sz="2000" dirty="0">
+                <a:latin typeface="Segoe UI"/>
+                <a:cs typeface="Segoe UI"/>
+              </a:rPr>
+              <a:t>, etc.)</a:t>
+            </a:r>
+            <a:endParaRPr lang="en-US" sz="2000">
+              <a:cs typeface="Arial"/>
+            </a:endParaRPr>
+          </a:p>
+          <a:p>
+            <a:pPr lvl="2">
+              <a:buFont typeface="Wingdings"/>
+              <a:buChar char="§"/>
+            </a:pPr>
+            <a:r>
+              <a:rPr lang="en-US" sz="2000">
+                <a:latin typeface="Segoe UI"/>
+                <a:cs typeface="Segoe UI"/>
+              </a:rPr>
+              <a:t>pasting (</a:t>
+            </a:r>
+            <a:r>
+              <a:rPr lang="en-US" sz="2000">
+                <a:latin typeface="Consolas"/>
+                <a:cs typeface="Arial"/>
+              </a:rPr>
+              <a:t>p</a:t>
+            </a:r>
+            <a:r>
+              <a:rPr lang="en-US" sz="2000">
+                <a:latin typeface="Segoe UI"/>
+                <a:cs typeface="Segoe UI"/>
+              </a:rPr>
+              <a:t>)</a:t>
+            </a:r>
+            <a:endParaRPr lang="en-US" sz="2000">
+              <a:cs typeface="Arial"/>
+            </a:endParaRPr>
+          </a:p>
+          <a:p>
+            <a:pPr lvl="2">
+              <a:buFont typeface="Wingdings"/>
+              <a:buChar char="§"/>
+            </a:pPr>
+            <a:r>
+              <a:rPr lang="en-US" sz="2000" dirty="0">
+                <a:latin typeface="Segoe UI"/>
+                <a:cs typeface="Segoe UI"/>
+              </a:rPr>
+              <a:t>running a change command (</a:t>
+            </a:r>
+            <a:r>
+              <a:rPr lang="en-US" sz="2000" dirty="0" err="1">
+                <a:latin typeface="Consolas"/>
+                <a:cs typeface="Arial"/>
+              </a:rPr>
+              <a:t>cw</a:t>
+            </a:r>
+            <a:r>
+              <a:rPr lang="en-US" sz="2000" dirty="0">
+                <a:latin typeface="Segoe UI"/>
+                <a:cs typeface="Segoe UI"/>
+              </a:rPr>
+              <a:t>, </a:t>
+            </a:r>
+            <a:r>
+              <a:rPr lang="en-US" sz="2000" dirty="0">
+                <a:latin typeface="Consolas"/>
+                <a:cs typeface="Arial"/>
+              </a:rPr>
+              <a:t>c$</a:t>
+            </a:r>
+            <a:r>
+              <a:rPr lang="en-US" sz="2000" dirty="0">
+                <a:latin typeface="Segoe UI"/>
+                <a:cs typeface="Segoe UI"/>
+              </a:rPr>
+              <a:t>, etc.)</a:t>
+            </a:r>
+            <a:endParaRPr lang="en-US" sz="2000">
+              <a:cs typeface="Arial"/>
+            </a:endParaRPr>
+          </a:p>
+          <a:p>
+            <a:pPr lvl="1"/>
+            <a:endParaRPr lang="en-US" sz="2000" dirty="0">
+              <a:cs typeface="Arial"/>
+            </a:endParaRPr>
+          </a:p>
+          <a:p>
+            <a:endParaRPr lang="en-US" altLang="sk-SK" sz="2800" dirty="0">
+              <a:cs typeface="Arial"/>
+            </a:endParaRPr>
+          </a:p>
+        </p:txBody>
+      </p:sp>
+    </p:spTree>
+    <p:extLst>
+      <p:ext uri="{BB962C8B-B14F-4D97-AF65-F5344CB8AC3E}">
+        <p14:creationId xmlns:p14="http://schemas.microsoft.com/office/powerpoint/2010/main" val="1805215993"/>
+      </p:ext>
+    </p:extLst>
+  </p:cSld>
+  <p:clrMapOvr>
+    <a:masterClrMapping/>
+  </p:clrMapOvr>
+</p:sld>
+</file>
+
+<file path=ppt/slides/slide28.xml><?xml version="1.0" encoding="utf-8"?>
 <p:sld xmlns:a="http://schemas.openxmlformats.org/drawingml/2006/main" xmlns:r="http://schemas.openxmlformats.org/officeDocument/2006/relationships" xmlns:p="http://schemas.openxmlformats.org/presentationml/2006/main">
   <p:cSld>
     <p:spTree>
@@ -17499,17 +17922,17 @@
         </p:nvSpPr>
         <p:spPr>
           <a:xfrm>
-            <a:off x="457200" y="1600200"/>
-            <a:ext cx="8229600" cy="4876800"/>
+            <a:off x="211238" y="1600200"/>
+            <a:ext cx="8634713" cy="4876800"/>
           </a:xfrm>
         </p:spPr>
         <p:txBody>
           <a:bodyPr/>
           <a:lstStyle/>
           <a:p>
-            <a:pPr marL="0" indent="0">
-              <a:buFontTx/>
-              <a:buNone/>
+            <a:pPr>
+              <a:buFont typeface="Arial"/>
+              <a:buChar char="•"/>
             </a:pPr>
             <a:r>
               <a:rPr lang="en-US" altLang="sk-SK" sz="2400" dirty="0"/>
@@ -17521,20 +17944,18 @@
             </a:r>
             <a:r>
               <a:rPr lang="en-US" altLang="sk-SK" sz="2400" dirty="0"/>
-              <a:t>on when issuing commands.  The vi editor is case sensitive and will not  necessarily do what you want it to do if the caps lock is on.</a:t>
-            </a:r>
-          </a:p>
-          <a:p>
-            <a:pPr marL="0" indent="0">
-              <a:buFontTx/>
-              <a:buNone/>
-            </a:pPr>
-            <a:endParaRPr lang="en-US" altLang="sk-SK" sz="2400" dirty="0"/>
-          </a:p>
-          <a:p>
-            <a:pPr marL="0" indent="0">
-              <a:buFontTx/>
-              <a:buNone/>
+              <a:t>on </a:t>
+            </a:r>
+            <a:r>
+              <a:rPr lang="en-US" altLang="sk-SK" sz="2400"/>
+              <a:t>when issuing commands.  </a:t>
+            </a:r>
+            <a:endParaRPr lang="en-US"/>
+          </a:p>
+          <a:p>
+            <a:pPr>
+              <a:buFont typeface="Arial"/>
+              <a:buChar char="•"/>
             </a:pPr>
             <a:r>
               <a:rPr lang="en-US" altLang="sk-SK" sz="2400" dirty="0"/>
@@ -17545,41 +17966,127 @@
               <a:t>incorrect mode </a:t>
             </a:r>
             <a:r>
-              <a:rPr lang="en-US" altLang="sk-SK" sz="2400" dirty="0"/>
-              <a:t>when typing.  Sometimes we begin entering data when we are not in insert mode. Nothing will happen until we type in one of the insert mode characters (e.g. </a:t>
-            </a:r>
-            <a:r>
-              <a:rPr lang="en-US" altLang="sk-SK" sz="2400" dirty="0" err="1"/>
-              <a:t>i</a:t>
-            </a:r>
-            <a:r>
-              <a:rPr lang="en-US" altLang="sk-SK" sz="2400" dirty="0"/>
-              <a:t>, o, O, A, </a:t>
-            </a:r>
-            <a:r>
-              <a:rPr lang="en-US" altLang="sk-SK" sz="2400" dirty="0" err="1"/>
-              <a:t>etc</a:t>
-            </a:r>
-            <a:r>
-              <a:rPr lang="en-US" altLang="sk-SK" sz="2400" dirty="0"/>
-              <a:t>).  </a:t>
-            </a:r>
-          </a:p>
-          <a:p>
-            <a:pPr marL="0" indent="0">
-              <a:buFontTx/>
-              <a:buNone/>
+              <a:rPr lang="en-US" altLang="sk-SK" sz="2400"/>
+              <a:t>when typing.  </a:t>
+            </a:r>
+            <a:endParaRPr lang="en-US" altLang="sk-SK" sz="2400">
+              <a:cs typeface="Arial"/>
+            </a:endParaRPr>
+          </a:p>
+          <a:p>
+            <a:pPr lvl="1" indent="-342900">
+              <a:buFont typeface="Arial"/>
+              <a:buChar char="–"/>
             </a:pPr>
-            <a:endParaRPr lang="en-US" altLang="sk-SK" sz="2400" dirty="0"/>
-          </a:p>
-          <a:p>
-            <a:pPr marL="400050" lvl="1" indent="0">
-              <a:buNone/>
+            <a:r>
+              <a:rPr lang="en-US" altLang="sk-SK" sz="2000" dirty="0"/>
+              <a:t> </a:t>
+            </a:r>
+            <a:r>
+              <a:rPr lang="en-US" altLang="sk-SK" sz="2400" dirty="0">
+                <a:ea typeface="+mn-ea"/>
+                <a:cs typeface="Arial"/>
+              </a:rPr>
+              <a:t>Be sure to hit the Esc key prior to editing.</a:t>
+            </a:r>
+          </a:p>
+          <a:p>
+            <a:pPr>
+              <a:buFont typeface="Arial"/>
+              <a:buChar char="•"/>
             </a:pPr>
             <a:r>
-              <a:rPr lang="en-US" altLang="sk-SK" sz="2000" dirty="0"/>
-              <a:t>Related to this is when you forget to exit the insert mode and try the edit commands. Be sure to hit the Esc key prior to editing.</a:t>
-            </a:r>
+              <a:rPr lang="en-US" sz="2400" dirty="0">
+                <a:cs typeface="Arial"/>
+              </a:rPr>
+              <a:t>A common error is to accidentally type the </a:t>
+            </a:r>
+            <a:r>
+              <a:rPr lang="en-US" sz="2400" b="1" dirty="0">
+                <a:cs typeface="Arial"/>
+              </a:rPr>
+              <a:t>control-Z </a:t>
+            </a:r>
+            <a:r>
+              <a:rPr lang="en-US" sz="2400" dirty="0">
+                <a:cs typeface="Arial"/>
+              </a:rPr>
+              <a:t>instead of the </a:t>
+            </a:r>
+            <a:r>
+              <a:rPr lang="en-US" sz="2400" b="1" dirty="0">
+                <a:cs typeface="Arial"/>
+              </a:rPr>
+              <a:t>shift-ZZ</a:t>
+            </a:r>
+            <a:r>
+              <a:rPr lang="en-US" sz="2400">
+                <a:cs typeface="Arial"/>
+              </a:rPr>
+              <a:t>. </a:t>
+            </a:r>
+            <a:endParaRPr lang="en-US" altLang="sk-SK" sz="2000">
+              <a:cs typeface="Arial"/>
+            </a:endParaRPr>
+          </a:p>
+          <a:p>
+            <a:pPr lvl="1">
+              <a:buFont typeface="Arial"/>
+              <a:buChar char="–"/>
+            </a:pPr>
+            <a:r>
+              <a:rPr lang="en-US" sz="2400" dirty="0">
+                <a:ea typeface="+mn-ea"/>
+                <a:cs typeface="Arial"/>
+              </a:rPr>
+              <a:t>The control-Z stops and </a:t>
+            </a:r>
+            <a:r>
+              <a:rPr lang="en-US" sz="2400" dirty="0" err="1">
+                <a:ea typeface="+mn-ea"/>
+                <a:cs typeface="Arial"/>
+              </a:rPr>
+              <a:t>terminatesthe</a:t>
+            </a:r>
+            <a:r>
+              <a:rPr lang="en-US" sz="2400" dirty="0">
+                <a:ea typeface="+mn-ea"/>
+                <a:cs typeface="Arial"/>
+              </a:rPr>
+              <a:t> editor without saving the contents. If this occurs </a:t>
+            </a:r>
+            <a:r>
+              <a:rPr lang="en-US" sz="2400" dirty="0" err="1">
+                <a:ea typeface="+mn-ea"/>
+                <a:cs typeface="Arial"/>
+              </a:rPr>
+              <a:t>followtype</a:t>
+            </a:r>
+            <a:r>
+              <a:rPr lang="en-US" sz="2400" dirty="0">
+                <a:ea typeface="+mn-ea"/>
+                <a:cs typeface="Arial"/>
+              </a:rPr>
+              <a:t> </a:t>
+            </a:r>
+            <a:r>
+              <a:rPr lang="en-US" sz="2400" dirty="0" err="1">
+                <a:ea typeface="+mn-ea"/>
+                <a:cs typeface="Arial"/>
+              </a:rPr>
+              <a:t>fg</a:t>
+            </a:r>
+            <a:r>
+              <a:rPr lang="en-US" sz="2400" dirty="0">
+                <a:ea typeface="+mn-ea"/>
+                <a:cs typeface="Arial"/>
+              </a:rPr>
+              <a:t>.</a:t>
+            </a:r>
+            <a:endParaRPr lang="en-US" altLang="sk-SK" sz="2400">
+              <a:ea typeface="+mn-ea"/>
+              <a:cs typeface="Arial"/>
+            </a:endParaRPr>
           </a:p>
         </p:txBody>
       </p:sp>
@@ -17587,143 +18094,6 @@
     <p:extLst>
       <p:ext uri="{BB962C8B-B14F-4D97-AF65-F5344CB8AC3E}">
         <p14:creationId xmlns:p14="http://schemas.microsoft.com/office/powerpoint/2010/main" val="3212361736"/>
-      </p:ext>
-    </p:extLst>
-  </p:cSld>
-  <p:clrMapOvr>
-    <a:masterClrMapping/>
-  </p:clrMapOvr>
-</p:sld>
-</file>
-
-<file path=ppt/slides/slide28.xml><?xml version="1.0" encoding="utf-8"?>
-<p:sld xmlns:a="http://schemas.openxmlformats.org/drawingml/2006/main" xmlns:r="http://schemas.openxmlformats.org/officeDocument/2006/relationships" xmlns:p="http://schemas.openxmlformats.org/presentationml/2006/main">
-  <p:cSld>
-    <p:spTree>
-      <p:nvGrpSpPr>
-        <p:cNvPr id="1" name=""/>
-        <p:cNvGrpSpPr/>
-        <p:nvPr/>
-      </p:nvGrpSpPr>
-      <p:grpSpPr>
-        <a:xfrm>
-          <a:off x="0" y="0"/>
-          <a:ext cx="0" cy="0"/>
-          <a:chOff x="0" y="0"/>
-          <a:chExt cx="0" cy="0"/>
-        </a:xfrm>
-      </p:grpSpPr>
-      <p:sp>
-        <p:nvSpPr>
-          <p:cNvPr id="16386" name="Title 1">
-            <a:extLst>
-              <a:ext uri="{FF2B5EF4-FFF2-40B4-BE49-F238E27FC236}">
-                <a16:creationId xmlns:a16="http://schemas.microsoft.com/office/drawing/2014/main" id="{7500959F-BFAE-4ECA-AEC3-70B70898D193}"/>
-              </a:ext>
-            </a:extLst>
-          </p:cNvPr>
-          <p:cNvSpPr>
-            <a:spLocks noGrp="1" noChangeArrowheads="1"/>
-          </p:cNvSpPr>
-          <p:nvPr>
-            <p:ph type="title"/>
-          </p:nvPr>
-        </p:nvSpPr>
-        <p:spPr/>
-        <p:txBody>
-          <a:bodyPr/>
-          <a:lstStyle/>
-          <a:p>
-            <a:r>
-              <a:rPr lang="en-US" altLang="sk-SK"/>
-              <a:t>vi Editor </a:t>
-            </a:r>
-            <a:br>
-              <a:rPr lang="en-US" altLang="sk-SK"/>
-            </a:br>
-            <a:r>
-              <a:rPr lang="en-US" altLang="sk-SK"/>
-              <a:t>When Things Go Wrong</a:t>
-            </a:r>
-          </a:p>
-        </p:txBody>
-      </p:sp>
-      <p:sp>
-        <p:nvSpPr>
-          <p:cNvPr id="16387" name="Content Placeholder 2">
-            <a:extLst>
-              <a:ext uri="{FF2B5EF4-FFF2-40B4-BE49-F238E27FC236}">
-                <a16:creationId xmlns:a16="http://schemas.microsoft.com/office/drawing/2014/main" id="{5CF67CEF-1B77-4459-8531-F9BED73E6BC8}"/>
-              </a:ext>
-            </a:extLst>
-          </p:cNvPr>
-          <p:cNvSpPr>
-            <a:spLocks noGrp="1" noChangeArrowheads="1"/>
-          </p:cNvSpPr>
-          <p:nvPr>
-            <p:ph idx="1"/>
-          </p:nvPr>
-        </p:nvSpPr>
-        <p:spPr/>
-        <p:txBody>
-          <a:bodyPr/>
-          <a:lstStyle/>
-          <a:p>
-            <a:pPr marL="0" indent="0">
-              <a:buFontTx/>
-              <a:buNone/>
-            </a:pPr>
-            <a:r>
-              <a:rPr lang="en-US" altLang="sk-SK" sz="2600"/>
-              <a:t>Remember to create the directory, prior to creating a file using the vi editor.  For example, if you wish to create a new file called labin in the mydata directory (that does not currently exist), you must do this:</a:t>
-            </a:r>
-          </a:p>
-          <a:p>
-            <a:pPr marL="857250" lvl="1" indent="-457200">
-              <a:buFontTx/>
-              <a:buAutoNum type="arabicPeriod"/>
-            </a:pPr>
-            <a:r>
-              <a:rPr lang="en-US" altLang="sk-SK" sz="2600"/>
-              <a:t>mkdir mydata</a:t>
-            </a:r>
-          </a:p>
-          <a:p>
-            <a:pPr marL="857250" lvl="1" indent="-457200">
-              <a:buFontTx/>
-              <a:buAutoNum type="arabicPeriod"/>
-            </a:pPr>
-            <a:r>
-              <a:rPr lang="en-US" altLang="sk-SK" sz="2600"/>
-              <a:t>vi labin</a:t>
-            </a:r>
-          </a:p>
-          <a:p>
-            <a:pPr marL="0" indent="0">
-              <a:buFontTx/>
-              <a:buNone/>
-            </a:pPr>
-            <a:r>
-              <a:rPr lang="en-US" altLang="sk-SK" sz="2600"/>
-              <a:t>Attempting to do it all using the vi editor will result in errors. If the directory mydata does not exist, do NOT do this:</a:t>
-            </a:r>
-          </a:p>
-          <a:p>
-            <a:pPr marL="0" indent="0">
-              <a:buFontTx/>
-              <a:buNone/>
-            </a:pPr>
-            <a:r>
-              <a:rPr lang="en-US" altLang="sk-SK" sz="2600"/>
-              <a:t>	vi mydata/labin </a:t>
-            </a:r>
-          </a:p>
-        </p:txBody>
-      </p:sp>
-    </p:spTree>
-    <p:extLst>
-      <p:ext uri="{BB962C8B-B14F-4D97-AF65-F5344CB8AC3E}">
-        <p14:creationId xmlns:p14="http://schemas.microsoft.com/office/powerpoint/2010/main" val="1279346080"/>
       </p:ext>
     </p:extLst>
   </p:cSld>
@@ -17752,10 +18122,10 @@
       </p:grpSpPr>
       <p:sp>
         <p:nvSpPr>
-          <p:cNvPr id="17410" name="Title 1">
+          <p:cNvPr id="36866" name="Title 1">
             <a:extLst>
               <a:ext uri="{FF2B5EF4-FFF2-40B4-BE49-F238E27FC236}">
-                <a16:creationId xmlns:a16="http://schemas.microsoft.com/office/drawing/2014/main" id="{4154EC6C-224D-4D7C-BB77-712F2CF46352}"/>
+                <a16:creationId xmlns:a16="http://schemas.microsoft.com/office/drawing/2014/main" id="{E9495FCA-B7A8-46D6-A333-B194B9A8E2D6}"/>
               </a:ext>
             </a:extLst>
           </p:cNvPr>
@@ -17773,29 +18143,22 @@
           <a:p>
             <a:r>
               <a:rPr lang="en-US" altLang="sk-SK"/>
-              <a:t>vi Editor </a:t>
-            </a:r>
-            <a:br>
-              <a:rPr lang="en-US" altLang="sk-SK"/>
-            </a:br>
-            <a:r>
-              <a:rPr lang="en-US" altLang="sk-SK"/>
-              <a:t>When Things Go Wrong</a:t>
+              <a:t>Topics Covered</a:t>
             </a:r>
           </a:p>
         </p:txBody>
       </p:sp>
       <p:sp>
         <p:nvSpPr>
-          <p:cNvPr id="3" name="Content Placeholder 2">
+          <p:cNvPr id="36867" name="Content Placeholder 2">
             <a:extLst>
               <a:ext uri="{FF2B5EF4-FFF2-40B4-BE49-F238E27FC236}">
-                <a16:creationId xmlns:a16="http://schemas.microsoft.com/office/drawing/2014/main" id="{1ADE8C94-E53B-4163-8463-F81119DCD320}"/>
+                <a16:creationId xmlns:a16="http://schemas.microsoft.com/office/drawing/2014/main" id="{7CA9632D-1167-4A0C-9D27-299AB24DA8D9}"/>
               </a:ext>
             </a:extLst>
           </p:cNvPr>
           <p:cNvSpPr>
-            <a:spLocks noGrp="1"/>
+            <a:spLocks noGrp="1" noChangeArrowheads="1"/>
           </p:cNvSpPr>
           <p:nvPr>
             <p:ph idx="1"/>
@@ -17806,48 +18169,98 @@
           <a:bodyPr/>
           <a:lstStyle/>
           <a:p>
-            <a:pPr marL="0" indent="0">
-              <a:buFontTx/>
-              <a:buNone/>
-              <a:defRPr/>
-            </a:pPr>
-            <a:r>
-              <a:rPr lang="en-US" sz="2400" dirty="0"/>
-              <a:t>A common error is to accidentally type the </a:t>
-            </a:r>
-            <a:r>
-              <a:rPr lang="en-US" sz="2400" b="1" dirty="0"/>
-              <a:t>control-Z</a:t>
-            </a:r>
-            <a:r>
-              <a:rPr lang="en-US" sz="2400" dirty="0"/>
-              <a:t> instead of the </a:t>
-            </a:r>
-            <a:r>
-              <a:rPr lang="en-US" sz="2400" b="1" dirty="0"/>
-              <a:t>shift-ZZ</a:t>
-            </a:r>
-            <a:r>
-              <a:rPr lang="en-US" sz="2400" dirty="0"/>
-              <a:t>.  The control-Z stops and terminates the editor without saving the contents.  If this occurs follow type </a:t>
-            </a:r>
-            <a:r>
-              <a:rPr lang="en-US" sz="2400" b="1" dirty="0" err="1"/>
-              <a:t>fg</a:t>
-            </a:r>
-            <a:r>
-              <a:rPr lang="en-US" sz="2400" dirty="0"/>
-              <a:t>.</a:t>
-            </a:r>
+            <a:r>
+              <a:rPr lang="en-US" altLang="sk-SK"/>
+              <a:t>Introduced the vi editor:	</a:t>
+            </a:r>
+          </a:p>
+          <a:p>
+            <a:pPr lvl="1"/>
+            <a:r>
+              <a:rPr lang="en-US" altLang="sk-SK"/>
+              <a:t>How vi interacts with files</a:t>
+            </a:r>
+          </a:p>
+          <a:p>
+            <a:pPr lvl="1"/>
+            <a:r>
+              <a:rPr lang="en-US" altLang="sk-SK"/>
+              <a:t>vi insert mode</a:t>
+            </a:r>
+          </a:p>
+          <a:p>
+            <a:pPr lvl="2"/>
+            <a:r>
+              <a:rPr lang="en-US" altLang="sk-SK"/>
+              <a:t>entry text</a:t>
+            </a:r>
+            <a:r>
+              <a:rPr lang="en-US" altLang="sk-SK" dirty="0"/>
+              <a:t>, exit</a:t>
+            </a:r>
+            <a:endParaRPr lang="en-US" altLang="sk-SK" dirty="0">
+              <a:cs typeface="Arial"/>
+            </a:endParaRPr>
+          </a:p>
+          <a:p>
+            <a:pPr lvl="1"/>
+            <a:r>
+              <a:rPr lang="en-US" altLang="sk-SK"/>
+              <a:t>vi command mode (inline and ex commands)</a:t>
+            </a:r>
+          </a:p>
+          <a:p>
+            <a:pPr lvl="2"/>
+            <a:r>
+              <a:rPr lang="en-US" altLang="sk-SK"/>
+              <a:t>typical navigation commands</a:t>
+            </a:r>
+          </a:p>
+          <a:p>
+            <a:pPr lvl="2"/>
+            <a:r>
+              <a:rPr lang="en-US" altLang="sk-SK" dirty="0"/>
+              <a:t>typical delete, </a:t>
+            </a:r>
+            <a:r>
+              <a:rPr lang="en-US" dirty="0"/>
+              <a:t>modify</a:t>
+            </a:r>
+            <a:r>
+              <a:rPr lang="en-US" altLang="sk-SK" dirty="0"/>
+              <a:t> commands </a:t>
+            </a:r>
+            <a:endParaRPr lang="en-US" altLang="sk-SK" dirty="0">
+              <a:cs typeface="Arial"/>
+            </a:endParaRPr>
+          </a:p>
+          <a:p>
+            <a:pPr lvl="2"/>
+            <a:r>
+              <a:rPr lang="en-US"/>
+              <a:t>typical copy, paste commands </a:t>
+            </a:r>
+            <a:endParaRPr lang="en-US" altLang="sk-SK" dirty="0">
+              <a:cs typeface="Arial"/>
+            </a:endParaRPr>
+          </a:p>
+          <a:p>
+            <a:pPr lvl="2"/>
+            <a:r>
+              <a:rPr lang="en-US" altLang="sk-SK" dirty="0"/>
+              <a:t>typical </a:t>
+            </a:r>
+            <a:r>
+              <a:rPr lang="en-US" altLang="sk-SK"/>
+              <a:t>search, replace commands</a:t>
+            </a:r>
+            <a:endParaRPr lang="en-US" altLang="sk-SK">
+              <a:cs typeface="Arial"/>
+            </a:endParaRPr>
           </a:p>
         </p:txBody>
       </p:sp>
     </p:spTree>
-    <p:extLst>
-      <p:ext uri="{BB962C8B-B14F-4D97-AF65-F5344CB8AC3E}">
-        <p14:creationId xmlns:p14="http://schemas.microsoft.com/office/powerpoint/2010/main" val="2729825022"/>
-      </p:ext>
-    </p:extLst>
   </p:cSld>
   <p:clrMapOvr>
     <a:masterClrMapping/>
@@ -18039,156 +18452,6 @@
           <a:p>
             <a:pPr lvl="1"/>
             <a:endParaRPr lang="en-US" altLang="sk-SK" dirty="0"/>
-          </a:p>
-        </p:txBody>
-      </p:sp>
-    </p:spTree>
-  </p:cSld>
-  <p:clrMapOvr>
-    <a:masterClrMapping/>
-  </p:clrMapOvr>
-</p:sld>
-</file>
-
-<file path=ppt/slides/slide30.xml><?xml version="1.0" encoding="utf-8"?>
-<p:sld xmlns:a="http://schemas.openxmlformats.org/drawingml/2006/main" xmlns:r="http://schemas.openxmlformats.org/officeDocument/2006/relationships" xmlns:p="http://schemas.openxmlformats.org/presentationml/2006/main">
-  <p:cSld>
-    <p:spTree>
-      <p:nvGrpSpPr>
-        <p:cNvPr id="1" name=""/>
-        <p:cNvGrpSpPr/>
-        <p:nvPr/>
-      </p:nvGrpSpPr>
-      <p:grpSpPr>
-        <a:xfrm>
-          <a:off x="0" y="0"/>
-          <a:ext cx="0" cy="0"/>
-          <a:chOff x="0" y="0"/>
-          <a:chExt cx="0" cy="0"/>
-        </a:xfrm>
-      </p:grpSpPr>
-      <p:sp>
-        <p:nvSpPr>
-          <p:cNvPr id="36866" name="Title 1">
-            <a:extLst>
-              <a:ext uri="{FF2B5EF4-FFF2-40B4-BE49-F238E27FC236}">
-                <a16:creationId xmlns:a16="http://schemas.microsoft.com/office/drawing/2014/main" id="{E9495FCA-B7A8-46D6-A333-B194B9A8E2D6}"/>
-              </a:ext>
-            </a:extLst>
-          </p:cNvPr>
-          <p:cNvSpPr>
-            <a:spLocks noGrp="1" noChangeArrowheads="1"/>
-          </p:cNvSpPr>
-          <p:nvPr>
-            <p:ph type="title"/>
-          </p:nvPr>
-        </p:nvSpPr>
-        <p:spPr/>
-        <p:txBody>
-          <a:bodyPr/>
-          <a:lstStyle/>
-          <a:p>
-            <a:r>
-              <a:rPr lang="en-US" altLang="sk-SK"/>
-              <a:t>Topics Covered</a:t>
-            </a:r>
-          </a:p>
-        </p:txBody>
-      </p:sp>
-      <p:sp>
-        <p:nvSpPr>
-          <p:cNvPr id="36867" name="Content Placeholder 2">
-            <a:extLst>
-              <a:ext uri="{FF2B5EF4-FFF2-40B4-BE49-F238E27FC236}">
-                <a16:creationId xmlns:a16="http://schemas.microsoft.com/office/drawing/2014/main" id="{7CA9632D-1167-4A0C-9D27-299AB24DA8D9}"/>
-              </a:ext>
-            </a:extLst>
-          </p:cNvPr>
-          <p:cNvSpPr>
-            <a:spLocks noGrp="1" noChangeArrowheads="1"/>
-          </p:cNvSpPr>
-          <p:nvPr>
-            <p:ph idx="1"/>
-          </p:nvPr>
-        </p:nvSpPr>
-        <p:spPr/>
-        <p:txBody>
-          <a:bodyPr/>
-          <a:lstStyle/>
-          <a:p>
-            <a:r>
-              <a:rPr lang="en-US" altLang="sk-SK"/>
-              <a:t>Introduced the vi editor:	</a:t>
-            </a:r>
-          </a:p>
-          <a:p>
-            <a:pPr lvl="1"/>
-            <a:r>
-              <a:rPr lang="en-US" altLang="sk-SK"/>
-              <a:t>How vi interacts with files</a:t>
-            </a:r>
-          </a:p>
-          <a:p>
-            <a:pPr lvl="1"/>
-            <a:r>
-              <a:rPr lang="en-US" altLang="sk-SK"/>
-              <a:t>vi insert mode</a:t>
-            </a:r>
-          </a:p>
-          <a:p>
-            <a:pPr lvl="2"/>
-            <a:r>
-              <a:rPr lang="en-US" altLang="sk-SK"/>
-              <a:t>entry</a:t>
-            </a:r>
-          </a:p>
-          <a:p>
-            <a:pPr lvl="2"/>
-            <a:r>
-              <a:rPr lang="en-US" altLang="sk-SK"/>
-              <a:t>exit</a:t>
-            </a:r>
-          </a:p>
-          <a:p>
-            <a:pPr lvl="1"/>
-            <a:r>
-              <a:rPr lang="en-US" altLang="sk-SK"/>
-              <a:t>vi command mode (inline and ex commands)</a:t>
-            </a:r>
-          </a:p>
-          <a:p>
-            <a:pPr lvl="2"/>
-            <a:r>
-              <a:rPr lang="en-US" altLang="sk-SK"/>
-              <a:t>command syntax</a:t>
-            </a:r>
-          </a:p>
-          <a:p>
-            <a:pPr lvl="2"/>
-            <a:r>
-              <a:rPr lang="en-US" altLang="sk-SK"/>
-              <a:t>typical navigation commands</a:t>
-            </a:r>
-          </a:p>
-          <a:p>
-            <a:pPr lvl="2"/>
-            <a:r>
-              <a:rPr lang="en-US" altLang="sk-SK" dirty="0"/>
-              <a:t>typical delete commands </a:t>
-            </a:r>
-            <a:endParaRPr lang="en-US" altLang="sk-SK" dirty="0">
-              <a:cs typeface="Arial"/>
-            </a:endParaRPr>
-          </a:p>
-          <a:p>
-            <a:pPr lvl="2"/>
-            <a:r>
-              <a:rPr lang="en-US" altLang="sk-SK" dirty="0"/>
-              <a:t>typical modify commands</a:t>
-            </a:r>
-            <a:endParaRPr lang="en-US" altLang="sk-SK" dirty="0">
-              <a:cs typeface="Arial"/>
-            </a:endParaRPr>
           </a:p>
         </p:txBody>
       </p:sp>
